--- a/sunumlar/5-sinif-unite2-dijital-urun-tasarimi-DETAYLI.pptx
+++ b/sunumlar/5-sinif-unite2-dijital-urun-tasarimi-DETAYLI.pptx
@@ -525,6 +525,53 @@
               <a:t>Video: 'Dijital Ürün Tasarımına Giriş' - Öğrencilere günlük hayatta kullandıkları uygulamaların nasıl tasarlandığını anlatan video</a:t>
             </a:r>
           </a:p>
+          <a:p/>
+          <a:p>
+            <a:r>
+              <a:t>🎨 GÖRSELLEŞTİRME ÖNERİLERİ:</a:t>
+            </a:r>
+          </a:p>
+          <a:p/>
+          <a:p>
+            <a:r>
+              <a:t>📸 Görsel: CPU, RAM ve anakart fotoğrafları</a:t>
+            </a:r>
+          </a:p>
+          <a:p>
+            <a:r>
+              <a:t>🎬 Video: Bilgisayar donanımı tanıtım videosu (1-2 dk)</a:t>
+            </a:r>
+          </a:p>
+          <a:p>
+            <a:r>
+              <a:t>💡 İnfografik: Bilgisayar bileşenleri şeması</a:t>
+            </a:r>
+          </a:p>
+          <a:p>
+            <a:r>
+              <a:t>📸 Görsel: Temel tasarım prensipleri</a:t>
+            </a:r>
+          </a:p>
+          <a:p>
+            <a:r>
+              <a:t>🎬 Video: Dijital tasarıma giriş</a:t>
+            </a:r>
+          </a:p>
+          <a:p>
+            <a:r>
+              <a:t>💡 İnfografik: Renk teorisi ve uyumu</a:t>
+            </a:r>
+          </a:p>
+          <a:p>
+            <a:r>
+              <a:t>📸 Görsel: Dijital çağ görselleri ve teknoloji örnekleri</a:t>
+            </a:r>
+          </a:p>
+          <a:p>
+            <a:r>
+              <a:t>🎬 Video: Bilişim teknolojilerinin tarihçesi</a:t>
+            </a:r>
+          </a:p>
         </p:txBody>
       </p:sp>
       <p:sp>
@@ -595,6 +642,43 @@
               <a:t>Video: 'Kullanıcı Testi Nasıl Yapılır?' - Gerçek bir test seansı kaydı</a:t>
             </a:r>
           </a:p>
+          <a:p/>
+          <a:p>
+            <a:r>
+              <a:t>🎨 GÖRSELLEŞTİRME ÖNERİLERİ:</a:t>
+            </a:r>
+          </a:p>
+          <a:p/>
+          <a:p>
+            <a:r>
+              <a:t>📸 Görsel: LAN ve WAN ağ topolojileri şeması</a:t>
+            </a:r>
+          </a:p>
+          <a:p>
+            <a:r>
+              <a:t>🎬 Video: İnternet nasıl çalışır? Animasyonlu anlatım</a:t>
+            </a:r>
+          </a:p>
+          <a:p>
+            <a:r>
+              <a:t>💡 İnfografik: Ev ağı kurulumu diyagramı</a:t>
+            </a:r>
+          </a:p>
+          <a:p>
+            <a:r>
+              <a:t>📸 Görsel: Akış şeması örnekleri</a:t>
+            </a:r>
+          </a:p>
+          <a:p>
+            <a:r>
+              <a:t>🎬 Video: Algoritma nedir? Günlük hayattan örnekler</a:t>
+            </a:r>
+          </a:p>
+          <a:p>
+            <a:r>
+              <a:t>💡 İnfografik: Akış şeması sembolleri</a:t>
+            </a:r>
+          </a:p>
         </p:txBody>
       </p:sp>
       <p:sp>
@@ -665,6 +749,68 @@
               <a:t>Tartışma: Kullandığınız uygulamalar güncelleme alır. Bu güncellemeler neden yapılır? Geri bildirimlerinizin etkisi var mı?</a:t>
             </a:r>
           </a:p>
+          <a:p/>
+          <a:p>
+            <a:r>
+              <a:t>🎨 GÖRSELLEŞTİRME ÖNERİLERİ:</a:t>
+            </a:r>
+          </a:p>
+          <a:p/>
+          <a:p>
+            <a:r>
+              <a:t>📸 Görsel: LAN ve WAN ağ topolojileri şeması</a:t>
+            </a:r>
+          </a:p>
+          <a:p>
+            <a:r>
+              <a:t>🎬 Video: İnternet nasıl çalışır? Animasyonlu anlatım</a:t>
+            </a:r>
+          </a:p>
+          <a:p>
+            <a:r>
+              <a:t>💡 İnfografik: Ev ağı kurulumu diyagramı</a:t>
+            </a:r>
+          </a:p>
+          <a:p>
+            <a:r>
+              <a:t>📸 Görsel: Akış şeması örnekleri</a:t>
+            </a:r>
+          </a:p>
+          <a:p>
+            <a:r>
+              <a:t>🎬 Video: Algoritma nedir? Günlük hayattan örnekler</a:t>
+            </a:r>
+          </a:p>
+          <a:p>
+            <a:r>
+              <a:t>💡 İnfografik: Akış şeması sembolleri</a:t>
+            </a:r>
+          </a:p>
+          <a:p>
+            <a:r>
+              <a:t>📸 Görsel: Döngü mantığı şeması</a:t>
+            </a:r>
+          </a:p>
+          <a:p>
+            <a:r>
+              <a:t>🎬 Video: Döngüler Scratch'te nasıl kullanılır?</a:t>
+            </a:r>
+          </a:p>
+          <a:p>
+            <a:r>
+              <a:t>📸 Görsel: Temel tasarım prensipleri</a:t>
+            </a:r>
+          </a:p>
+          <a:p>
+            <a:r>
+              <a:t>🎬 Video: Dijital tasarıma giriş</a:t>
+            </a:r>
+          </a:p>
+          <a:p>
+            <a:r>
+              <a:t>💡 İnfografik: Renk teorisi ve uyumu</a:t>
+            </a:r>
+          </a:p>
         </p:txBody>
       </p:sp>
       <p:sp>
@@ -735,6 +881,88 @@
               <a:t>Görsel: App Store ve Google Play Store ekran görüntüleri</a:t>
             </a:r>
           </a:p>
+          <a:p/>
+          <a:p>
+            <a:r>
+              <a:t>🎨 GÖRSELLEŞTİRME ÖNERİLERİ:</a:t>
+            </a:r>
+          </a:p>
+          <a:p/>
+          <a:p>
+            <a:r>
+              <a:t>📸 Görsel: LAN ve WAN ağ topolojileri şeması</a:t>
+            </a:r>
+          </a:p>
+          <a:p>
+            <a:r>
+              <a:t>🎬 Video: İnternet nasıl çalışır? Animasyonlu anlatım</a:t>
+            </a:r>
+          </a:p>
+          <a:p>
+            <a:r>
+              <a:t>💡 İnfografik: Ev ağı kurulumu diyagramı</a:t>
+            </a:r>
+          </a:p>
+          <a:p>
+            <a:r>
+              <a:t>📸 Görsel: Güçlü şifre örnekleri vs zayıf şifre</a:t>
+            </a:r>
+          </a:p>
+          <a:p>
+            <a:r>
+              <a:t>🎬 Video: Şifre güvenliği önemi (1-2 dk)</a:t>
+            </a:r>
+          </a:p>
+          <a:p>
+            <a:r>
+              <a:t>💡 İnfografik: Güçlü şifre oluşturma kuralları</a:t>
+            </a:r>
+          </a:p>
+          <a:p>
+            <a:r>
+              <a:t>📸 Görsel: Yapay zeka uygulama örnekleri (Siri, Alexa, ChatGPT)</a:t>
+            </a:r>
+          </a:p>
+          <a:p>
+            <a:r>
+              <a:t>🎬 Video: Yapay zeka nedir? Çocuklar için anlatım</a:t>
+            </a:r>
+          </a:p>
+          <a:p>
+            <a:r>
+              <a:t>💡 İnfografik: AI kullanım alanları</a:t>
+            </a:r>
+          </a:p>
+          <a:p>
+            <a:r>
+              <a:t>📸 Görsel: Scratch arayüzü ekran görüntüsü</a:t>
+            </a:r>
+          </a:p>
+          <a:p>
+            <a:r>
+              <a:t>🎬 Video: Scratch ile basit oyun yapımı (3-5 dk)</a:t>
+            </a:r>
+          </a:p>
+          <a:p>
+            <a:r>
+              <a:t>💡 Ekran kaydı: Adım adım Scratch projesi</a:t>
+            </a:r>
+          </a:p>
+          <a:p>
+            <a:r>
+              <a:t>📸 Görsel: Akış şeması örnekleri</a:t>
+            </a:r>
+          </a:p>
+          <a:p>
+            <a:r>
+              <a:t>🎬 Video: Algoritma nedir? Günlük hayattan örnekler</a:t>
+            </a:r>
+          </a:p>
+          <a:p>
+            <a:r>
+              <a:t>💡 İnfografik: Akış şeması sembolleri</a:t>
+            </a:r>
+          </a:p>
         </p:txBody>
       </p:sp>
       <p:sp>
@@ -805,6 +1033,53 @@
               <a:t>Etkinlik: Öğrenciler kendi gruplarının projesini bu formatta özetlesin</a:t>
             </a:r>
           </a:p>
+          <a:p/>
+          <a:p>
+            <a:r>
+              <a:t>🎨 GÖRSELLEŞTİRME ÖNERİLERİ:</a:t>
+            </a:r>
+          </a:p>
+          <a:p/>
+          <a:p>
+            <a:r>
+              <a:t>📸 Görsel: Scratch arayüzü ekran görüntüsü</a:t>
+            </a:r>
+          </a:p>
+          <a:p>
+            <a:r>
+              <a:t>🎬 Video: Scratch ile basit oyun yapımı (3-5 dk)</a:t>
+            </a:r>
+          </a:p>
+          <a:p>
+            <a:r>
+              <a:t>💡 Ekran kaydı: Adım adım Scratch projesi</a:t>
+            </a:r>
+          </a:p>
+          <a:p>
+            <a:r>
+              <a:t>📸 Görsel: Temel tasarım prensipleri</a:t>
+            </a:r>
+          </a:p>
+          <a:p>
+            <a:r>
+              <a:t>🎬 Video: Dijital tasarıma giriş</a:t>
+            </a:r>
+          </a:p>
+          <a:p>
+            <a:r>
+              <a:t>💡 İnfografik: Renk teorisi ve uyumu</a:t>
+            </a:r>
+          </a:p>
+          <a:p>
+            <a:r>
+              <a:t>📸 Görsel: Dijital çağ görselleri ve teknoloji örnekleri</a:t>
+            </a:r>
+          </a:p>
+          <a:p>
+            <a:r>
+              <a:t>🎬 Video: Bilişim teknolojilerinin tarihçesi</a:t>
+            </a:r>
+          </a:p>
         </p:txBody>
       </p:sp>
       <p:sp>
@@ -875,6 +1150,28 @@
               <a:t>Görsel: Trello Kanban panosu örneği gösterin. Öğrencilere kağıtta Kanban tahtası çizdirebilirsiniz.</a:t>
             </a:r>
           </a:p>
+          <a:p/>
+          <a:p>
+            <a:r>
+              <a:t>🎨 GÖRSELLEŞTİRME ÖNERİLERİ:</a:t>
+            </a:r>
+          </a:p>
+          <a:p/>
+          <a:p>
+            <a:r>
+              <a:t>📸 Görsel: LAN ve WAN ağ topolojileri şeması</a:t>
+            </a:r>
+          </a:p>
+          <a:p>
+            <a:r>
+              <a:t>🎬 Video: İnternet nasıl çalışır? Animasyonlu anlatım</a:t>
+            </a:r>
+          </a:p>
+          <a:p>
+            <a:r>
+              <a:t>💡 İnfografik: Ev ağı kurulumu diyagramı</a:t>
+            </a:r>
+          </a:p>
         </p:txBody>
       </p:sp>
       <p:sp>
@@ -945,6 +1242,73 @@
               <a:t>Etkinlik: Sınıfı 4-5 kişilik gruplara ayırın. Her grupta roller dağıtın. Mini bir proje planı yapın.</a:t>
             </a:r>
           </a:p>
+          <a:p/>
+          <a:p>
+            <a:r>
+              <a:t>🎨 GÖRSELLEŞTİRME ÖNERİLERİ:</a:t>
+            </a:r>
+          </a:p>
+          <a:p/>
+          <a:p>
+            <a:r>
+              <a:t>📸 Görsel: CPU, RAM ve anakart fotoğrafları</a:t>
+            </a:r>
+          </a:p>
+          <a:p>
+            <a:r>
+              <a:t>🎬 Video: Bilgisayar donanımı tanıtım videosu (1-2 dk)</a:t>
+            </a:r>
+          </a:p>
+          <a:p>
+            <a:r>
+              <a:t>💡 İnfografik: Bilgisayar bileşenleri şeması</a:t>
+            </a:r>
+          </a:p>
+          <a:p>
+            <a:r>
+              <a:t>📸 Görsel: LAN ve WAN ağ topolojileri şeması</a:t>
+            </a:r>
+          </a:p>
+          <a:p>
+            <a:r>
+              <a:t>🎬 Video: İnternet nasıl çalışır? Animasyonlu anlatım</a:t>
+            </a:r>
+          </a:p>
+          <a:p>
+            <a:r>
+              <a:t>💡 İnfografik: Ev ağı kurulumu diyagramı</a:t>
+            </a:r>
+          </a:p>
+          <a:p>
+            <a:r>
+              <a:t>📸 Görsel: Scratch arayüzü ekran görüntüsü</a:t>
+            </a:r>
+          </a:p>
+          <a:p>
+            <a:r>
+              <a:t>🎬 Video: Scratch ile basit oyun yapımı (3-5 dk)</a:t>
+            </a:r>
+          </a:p>
+          <a:p>
+            <a:r>
+              <a:t>💡 Ekran kaydı: Adım adım Scratch projesi</a:t>
+            </a:r>
+          </a:p>
+          <a:p>
+            <a:r>
+              <a:t>📸 Görsel: Temel tasarım prensipleri</a:t>
+            </a:r>
+          </a:p>
+          <a:p>
+            <a:r>
+              <a:t>🎬 Video: Dijital tasarıma giriş</a:t>
+            </a:r>
+          </a:p>
+          <a:p>
+            <a:r>
+              <a:t>💡 İnfografik: Renk teorisi ve uyumu</a:t>
+            </a:r>
+          </a:p>
         </p:txBody>
       </p:sp>
       <p:sp>
@@ -1015,6 +1379,53 @@
               <a:t>Video: 'Instagram'ın Hikayesi' veya 'Minecraft'ı Markus Persson Nasıl Yarattı?' kısa belgesel</a:t>
             </a:r>
           </a:p>
+          <a:p/>
+          <a:p>
+            <a:r>
+              <a:t>🎨 GÖRSELLEŞTİRME ÖNERİLERİ:</a:t>
+            </a:r>
+          </a:p>
+          <a:p/>
+          <a:p>
+            <a:r>
+              <a:t>📸 Görsel: CPU, RAM ve anakart fotoğrafları</a:t>
+            </a:r>
+          </a:p>
+          <a:p>
+            <a:r>
+              <a:t>🎬 Video: Bilgisayar donanımı tanıtım videosu (1-2 dk)</a:t>
+            </a:r>
+          </a:p>
+          <a:p>
+            <a:r>
+              <a:t>💡 İnfografik: Bilgisayar bileşenleri şeması</a:t>
+            </a:r>
+          </a:p>
+          <a:p>
+            <a:r>
+              <a:t>📸 Görsel: LAN ve WAN ağ topolojileri şeması</a:t>
+            </a:r>
+          </a:p>
+          <a:p>
+            <a:r>
+              <a:t>🎬 Video: İnternet nasıl çalışır? Animasyonlu anlatım</a:t>
+            </a:r>
+          </a:p>
+          <a:p>
+            <a:r>
+              <a:t>💡 İnfografik: Ev ağı kurulumu diyagramı</a:t>
+            </a:r>
+          </a:p>
+          <a:p>
+            <a:r>
+              <a:t>📸 Görsel: Dijital çağ görselleri ve teknoloji örnekleri</a:t>
+            </a:r>
+          </a:p>
+          <a:p>
+            <a:r>
+              <a:t>🎬 Video: Bilişim teknolojilerinin tarihçesi</a:t>
+            </a:r>
+          </a:p>
         </p:txBody>
       </p:sp>
       <p:sp>
@@ -1085,6 +1496,53 @@
               <a:t>Materyal: Kağıtlar, renkli kalemler, makas dağıtın. Grupları oluşturun ve çalışmalarını başlatın.</a:t>
             </a:r>
           </a:p>
+          <a:p/>
+          <a:p>
+            <a:r>
+              <a:t>🎨 GÖRSELLEŞTİRME ÖNERİLERİ:</a:t>
+            </a:r>
+          </a:p>
+          <a:p/>
+          <a:p>
+            <a:r>
+              <a:t>📸 Görsel: LAN ve WAN ağ topolojileri şeması</a:t>
+            </a:r>
+          </a:p>
+          <a:p>
+            <a:r>
+              <a:t>🎬 Video: İnternet nasıl çalışır? Animasyonlu anlatım</a:t>
+            </a:r>
+          </a:p>
+          <a:p>
+            <a:r>
+              <a:t>💡 İnfografik: Ev ağı kurulumu diyagramı</a:t>
+            </a:r>
+          </a:p>
+          <a:p>
+            <a:r>
+              <a:t>📸 Görsel: Akış şeması örnekleri</a:t>
+            </a:r>
+          </a:p>
+          <a:p>
+            <a:r>
+              <a:t>🎬 Video: Algoritma nedir? Günlük hayattan örnekler</a:t>
+            </a:r>
+          </a:p>
+          <a:p>
+            <a:r>
+              <a:t>💡 İnfografik: Akış şeması sembolleri</a:t>
+            </a:r>
+          </a:p>
+          <a:p>
+            <a:r>
+              <a:t>📸 Görsel: Dijital çağ görselleri ve teknoloji örnekleri</a:t>
+            </a:r>
+          </a:p>
+          <a:p>
+            <a:r>
+              <a:t>🎬 Video: Bilişim teknolojilerinin tarihçesi</a:t>
+            </a:r>
+          </a:p>
         </p:txBody>
       </p:sp>
       <p:sp>
@@ -1155,6 +1613,68 @@
               <a:t>Quiz: Ünite sonu quiz yapın. Öğrencilerin öğrendiklerini pekiştirin.</a:t>
             </a:r>
           </a:p>
+          <a:p/>
+          <a:p>
+            <a:r>
+              <a:t>🎨 GÖRSELLEŞTİRME ÖNERİLERİ:</a:t>
+            </a:r>
+          </a:p>
+          <a:p/>
+          <a:p>
+            <a:r>
+              <a:t>📸 Görsel: CPU, RAM ve anakart fotoğrafları</a:t>
+            </a:r>
+          </a:p>
+          <a:p>
+            <a:r>
+              <a:t>🎬 Video: Bilgisayar donanımı tanıtım videosu (1-2 dk)</a:t>
+            </a:r>
+          </a:p>
+          <a:p>
+            <a:r>
+              <a:t>💡 İnfografik: Bilgisayar bileşenleri şeması</a:t>
+            </a:r>
+          </a:p>
+          <a:p>
+            <a:r>
+              <a:t>📸 Görsel: LAN ve WAN ağ topolojileri şeması</a:t>
+            </a:r>
+          </a:p>
+          <a:p>
+            <a:r>
+              <a:t>🎬 Video: İnternet nasıl çalışır? Animasyonlu anlatım</a:t>
+            </a:r>
+          </a:p>
+          <a:p>
+            <a:r>
+              <a:t>💡 İnfografik: Ev ağı kurulumu diyagramı</a:t>
+            </a:r>
+          </a:p>
+          <a:p>
+            <a:r>
+              <a:t>📸 Görsel: Temel tasarım prensipleri</a:t>
+            </a:r>
+          </a:p>
+          <a:p>
+            <a:r>
+              <a:t>🎬 Video: Dijital tasarıma giriş</a:t>
+            </a:r>
+          </a:p>
+          <a:p>
+            <a:r>
+              <a:t>💡 İnfografik: Renk teorisi ve uyumu</a:t>
+            </a:r>
+          </a:p>
+          <a:p>
+            <a:r>
+              <a:t>📸 Görsel: Dijital çağ görselleri ve teknoloji örnekleri</a:t>
+            </a:r>
+          </a:p>
+          <a:p>
+            <a:r>
+              <a:t>🎬 Video: Bilişim teknolojilerinin tarihçesi</a:t>
+            </a:r>
+          </a:p>
         </p:txBody>
       </p:sp>
       <p:sp>
@@ -1225,6 +1745,73 @@
               <a:t>Not: Belirtilen video linklerini önceden izleyin ve sınıfa uygun olanları seçin.</a:t>
             </a:r>
           </a:p>
+          <a:p/>
+          <a:p>
+            <a:r>
+              <a:t>🎨 GÖRSELLEŞTİRME ÖNERİLERİ:</a:t>
+            </a:r>
+          </a:p>
+          <a:p/>
+          <a:p>
+            <a:r>
+              <a:t>📸 Görsel: CPU, RAM ve anakart fotoğrafları</a:t>
+            </a:r>
+          </a:p>
+          <a:p>
+            <a:r>
+              <a:t>🎬 Video: Bilgisayar donanımı tanıtım videosu (1-2 dk)</a:t>
+            </a:r>
+          </a:p>
+          <a:p>
+            <a:r>
+              <a:t>💡 İnfografik: Bilgisayar bileşenleri şeması</a:t>
+            </a:r>
+          </a:p>
+          <a:p>
+            <a:r>
+              <a:t>📸 Görsel: LAN ve WAN ağ topolojileri şeması</a:t>
+            </a:r>
+          </a:p>
+          <a:p>
+            <a:r>
+              <a:t>🎬 Video: İnternet nasıl çalışır? Animasyonlu anlatım</a:t>
+            </a:r>
+          </a:p>
+          <a:p>
+            <a:r>
+              <a:t>💡 İnfografik: Ev ağı kurulumu diyagramı</a:t>
+            </a:r>
+          </a:p>
+          <a:p>
+            <a:r>
+              <a:t>📸 Görsel: Scratch arayüzü ekran görüntüsü</a:t>
+            </a:r>
+          </a:p>
+          <a:p>
+            <a:r>
+              <a:t>🎬 Video: Scratch ile basit oyun yapımı (3-5 dk)</a:t>
+            </a:r>
+          </a:p>
+          <a:p>
+            <a:r>
+              <a:t>💡 Ekran kaydı: Adım adım Scratch projesi</a:t>
+            </a:r>
+          </a:p>
+          <a:p>
+            <a:r>
+              <a:t>📸 Görsel: Temel tasarım prensipleri</a:t>
+            </a:r>
+          </a:p>
+          <a:p>
+            <a:r>
+              <a:t>🎬 Video: Dijital tasarıma giriş</a:t>
+            </a:r>
+          </a:p>
+          <a:p>
+            <a:r>
+              <a:t>💡 İnfografik: Renk teorisi ve uyumu</a:t>
+            </a:r>
+          </a:p>
         </p:txBody>
       </p:sp>
       <p:sp>
@@ -1295,6 +1882,220 @@
               <a:t>Etkinlik: Öğrencilere kendi hayatlarından proje örnekleri buldurtun. Sınıfta tartışın.</a:t>
             </a:r>
           </a:p>
+          <a:p/>
+          <a:p>
+            <a:r>
+              <a:t>🎨 GÖRSELLEŞTİRME ÖNERİLERİ:</a:t>
+            </a:r>
+          </a:p>
+          <a:p/>
+          <a:p>
+            <a:r>
+              <a:t>📸 Görsel: LAN ve WAN ağ topolojileri şeması</a:t>
+            </a:r>
+          </a:p>
+          <a:p>
+            <a:r>
+              <a:t>🎬 Video: İnternet nasıl çalışır? Animasyonlu anlatım</a:t>
+            </a:r>
+          </a:p>
+          <a:p>
+            <a:r>
+              <a:t>💡 İnfografik: Ev ağı kurulumu diyagramı</a:t>
+            </a:r>
+          </a:p>
+        </p:txBody>
+      </p:sp>
+      <p:sp>
+        <p:nvSpPr>
+          <p:cNvPr id="4" name="Slide Number Placeholder 3"/>
+          <p:cNvSpPr>
+            <a:spLocks noGrp="1"/>
+          </p:cNvSpPr>
+          <p:nvPr>
+            <p:ph type="sldNum" idx="5" sz="quarter"/>
+          </p:nvPr>
+        </p:nvSpPr>
+        <p:spPr/>
+      </p:sp>
+    </p:spTree>
+  </p:cSld>
+  <p:clrMapOvr>
+    <a:masterClrMapping/>
+  </p:clrMapOvr>
+</p:notes>
+</file>
+
+<file path=ppt/notesSlides/notesSlide20.xml><?xml version="1.0" encoding="utf-8"?>
+<p:notes xmlns:a="http://schemas.openxmlformats.org/drawingml/2006/main" xmlns:p="http://schemas.openxmlformats.org/presentationml/2006/main" xmlns:r="http://schemas.openxmlformats.org/officeDocument/2006/relationships">
+  <p:cSld>
+    <p:spTree>
+      <p:nvGrpSpPr>
+        <p:cNvPr id="1" name=""/>
+        <p:cNvGrpSpPr/>
+        <p:nvPr/>
+      </p:nvGrpSpPr>
+      <p:grpSpPr>
+        <a:xfrm>
+          <a:off x="0" y="0"/>
+          <a:ext cx="0" cy="0"/>
+          <a:chOff x="0" y="0"/>
+          <a:chExt cx="0" cy="0"/>
+        </a:xfrm>
+      </p:grpSpPr>
+      <p:sp>
+        <p:nvSpPr>
+          <p:cNvPr id="2" name="Slide Image Placeholder 1"/>
+          <p:cNvSpPr>
+            <a:spLocks noGrp="1"/>
+          </p:cNvSpPr>
+          <p:nvPr>
+            <p:ph type="sldImg" idx="2"/>
+          </p:nvPr>
+        </p:nvSpPr>
+        <p:spPr/>
+      </p:sp>
+      <p:sp>
+        <p:nvSpPr>
+          <p:cNvPr id="3" name="Notes Placeholder 2"/>
+          <p:cNvSpPr>
+            <a:spLocks noGrp="1"/>
+          </p:cNvSpPr>
+          <p:nvPr>
+            <p:ph type="body" idx="3" sz="quarter"/>
+          </p:nvPr>
+        </p:nvSpPr>
+        <p:spPr/>
+        <p:txBody>
+          <a:bodyPr/>
+          <a:lstStyle/>
+          <a:p>
+            <a:r>
+              <a:t>🎨 GÖRSELLEŞTİRME ÖNERİLERİ:</a:t>
+            </a:r>
+          </a:p>
+          <a:p/>
+          <a:p>
+            <a:r>
+              <a:t>📸 Görsel: Temel tasarım prensipleri</a:t>
+            </a:r>
+          </a:p>
+          <a:p>
+            <a:r>
+              <a:t>🎬 Video: Dijital tasarıma giriş</a:t>
+            </a:r>
+          </a:p>
+          <a:p>
+            <a:r>
+              <a:t>💡 İnfografik: Renk teorisi ve uyumu</a:t>
+            </a:r>
+          </a:p>
+          <a:p>
+            <a:r>
+              <a:t>📸 Görsel: Dijital çağ görselleri ve teknoloji örnekleri</a:t>
+            </a:r>
+          </a:p>
+          <a:p>
+            <a:r>
+              <a:t>🎬 Video: Bilişim teknolojilerinin tarihçesi</a:t>
+            </a:r>
+          </a:p>
+        </p:txBody>
+      </p:sp>
+      <p:sp>
+        <p:nvSpPr>
+          <p:cNvPr id="4" name="Slide Number Placeholder 3"/>
+          <p:cNvSpPr>
+            <a:spLocks noGrp="1"/>
+          </p:cNvSpPr>
+          <p:nvPr>
+            <p:ph type="sldNum" idx="5" sz="quarter"/>
+          </p:nvPr>
+        </p:nvSpPr>
+        <p:spPr/>
+      </p:sp>
+    </p:spTree>
+  </p:cSld>
+  <p:clrMapOvr>
+    <a:masterClrMapping/>
+  </p:clrMapOvr>
+</p:notes>
+</file>
+
+<file path=ppt/notesSlides/notesSlide21.xml><?xml version="1.0" encoding="utf-8"?>
+<p:notes xmlns:a="http://schemas.openxmlformats.org/drawingml/2006/main" xmlns:p="http://schemas.openxmlformats.org/presentationml/2006/main" xmlns:r="http://schemas.openxmlformats.org/officeDocument/2006/relationships">
+  <p:cSld>
+    <p:spTree>
+      <p:nvGrpSpPr>
+        <p:cNvPr id="1" name=""/>
+        <p:cNvGrpSpPr/>
+        <p:nvPr/>
+      </p:nvGrpSpPr>
+      <p:grpSpPr>
+        <a:xfrm>
+          <a:off x="0" y="0"/>
+          <a:ext cx="0" cy="0"/>
+          <a:chOff x="0" y="0"/>
+          <a:chExt cx="0" cy="0"/>
+        </a:xfrm>
+      </p:grpSpPr>
+      <p:sp>
+        <p:nvSpPr>
+          <p:cNvPr id="2" name="Slide Image Placeholder 1"/>
+          <p:cNvSpPr>
+            <a:spLocks noGrp="1"/>
+          </p:cNvSpPr>
+          <p:nvPr>
+            <p:ph type="sldImg" idx="2"/>
+          </p:nvPr>
+        </p:nvSpPr>
+        <p:spPr/>
+      </p:sp>
+      <p:sp>
+        <p:nvSpPr>
+          <p:cNvPr id="3" name="Notes Placeholder 2"/>
+          <p:cNvSpPr>
+            <a:spLocks noGrp="1"/>
+          </p:cNvSpPr>
+          <p:nvPr>
+            <p:ph type="body" idx="3" sz="quarter"/>
+          </p:nvPr>
+        </p:nvSpPr>
+        <p:spPr/>
+        <p:txBody>
+          <a:bodyPr/>
+          <a:lstStyle/>
+          <a:p>
+            <a:r>
+              <a:t>🎨 GÖRSELLEŞTİRME ÖNERİLERİ:</a:t>
+            </a:r>
+          </a:p>
+          <a:p/>
+          <a:p>
+            <a:r>
+              <a:t>📸 Görsel: Temel tasarım prensipleri</a:t>
+            </a:r>
+          </a:p>
+          <a:p>
+            <a:r>
+              <a:t>🎬 Video: Dijital tasarıma giriş</a:t>
+            </a:r>
+          </a:p>
+          <a:p>
+            <a:r>
+              <a:t>💡 İnfografik: Renk teorisi ve uyumu</a:t>
+            </a:r>
+          </a:p>
+          <a:p>
+            <a:r>
+              <a:t>📸 Görsel: Dijital çağ görselleri ve teknoloji örnekleri</a:t>
+            </a:r>
+          </a:p>
+          <a:p>
+            <a:r>
+              <a:t>🎬 Video: Bilişim teknolojilerinin tarihçesi</a:t>
+            </a:r>
+          </a:p>
         </p:txBody>
       </p:sp>
       <p:sp>
@@ -1365,6 +2166,28 @@
               <a:t>Video: 'Proje Yönetimi Nedir?' animasyonlu anlatım</a:t>
             </a:r>
           </a:p>
+          <a:p/>
+          <a:p>
+            <a:r>
+              <a:t>🎨 GÖRSELLEŞTİRME ÖNERİLERİ:</a:t>
+            </a:r>
+          </a:p>
+          <a:p/>
+          <a:p>
+            <a:r>
+              <a:t>📸 Görsel: LAN ve WAN ağ topolojileri şeması</a:t>
+            </a:r>
+          </a:p>
+          <a:p>
+            <a:r>
+              <a:t>🎬 Video: İnternet nasıl çalışır? Animasyonlu anlatım</a:t>
+            </a:r>
+          </a:p>
+          <a:p>
+            <a:r>
+              <a:t>💡 İnfografik: Ev ağı kurulumu diyagramı</a:t>
+            </a:r>
+          </a:p>
         </p:txBody>
       </p:sp>
       <p:sp>
@@ -1435,6 +2258,53 @@
               <a:t>Görsel: Popüler dijital ürün logoları gösterin (Instagram, YouTube, Minecraft vb.)</a:t>
             </a:r>
           </a:p>
+          <a:p/>
+          <a:p>
+            <a:r>
+              <a:t>🎨 GÖRSELLEŞTİRME ÖNERİLERİ:</a:t>
+            </a:r>
+          </a:p>
+          <a:p/>
+          <a:p>
+            <a:r>
+              <a:t>📸 Görsel: CPU, RAM ve anakart fotoğrafları</a:t>
+            </a:r>
+          </a:p>
+          <a:p>
+            <a:r>
+              <a:t>🎬 Video: Bilgisayar donanımı tanıtım videosu (1-2 dk)</a:t>
+            </a:r>
+          </a:p>
+          <a:p>
+            <a:r>
+              <a:t>💡 İnfografik: Bilgisayar bileşenleri şeması</a:t>
+            </a:r>
+          </a:p>
+          <a:p>
+            <a:r>
+              <a:t>📸 Görsel: LAN ve WAN ağ topolojileri şeması</a:t>
+            </a:r>
+          </a:p>
+          <a:p>
+            <a:r>
+              <a:t>🎬 Video: İnternet nasıl çalışır? Animasyonlu anlatım</a:t>
+            </a:r>
+          </a:p>
+          <a:p>
+            <a:r>
+              <a:t>💡 İnfografik: Ev ağı kurulumu diyagramı</a:t>
+            </a:r>
+          </a:p>
+          <a:p>
+            <a:r>
+              <a:t>📸 Görsel: Dijital çağ görselleri ve teknoloji örnekleri</a:t>
+            </a:r>
+          </a:p>
+          <a:p>
+            <a:r>
+              <a:t>🎬 Video: Bilişim teknolojilerinin tarihçesi</a:t>
+            </a:r>
+          </a:p>
         </p:txBody>
       </p:sp>
       <p:sp>
@@ -1505,6 +2375,68 @@
               <a:t>Video: 'Bir Mobil Uygulama Nasıl Tasarlanır?' - Tasarım sürecini adım adım gösteren video</a:t>
             </a:r>
           </a:p>
+          <a:p/>
+          <a:p>
+            <a:r>
+              <a:t>🎨 GÖRSELLEŞTİRME ÖNERİLERİ:</a:t>
+            </a:r>
+          </a:p>
+          <a:p/>
+          <a:p>
+            <a:r>
+              <a:t>📸 Görsel: LAN ve WAN ağ topolojileri şeması</a:t>
+            </a:r>
+          </a:p>
+          <a:p>
+            <a:r>
+              <a:t>🎬 Video: İnternet nasıl çalışır? Animasyonlu anlatım</a:t>
+            </a:r>
+          </a:p>
+          <a:p>
+            <a:r>
+              <a:t>💡 İnfografik: Ev ağı kurulumu diyagramı</a:t>
+            </a:r>
+          </a:p>
+          <a:p>
+            <a:r>
+              <a:t>📸 Görsel: Akış şeması örnekleri</a:t>
+            </a:r>
+          </a:p>
+          <a:p>
+            <a:r>
+              <a:t>🎬 Video: Algoritma nedir? Günlük hayattan örnekler</a:t>
+            </a:r>
+          </a:p>
+          <a:p>
+            <a:r>
+              <a:t>💡 İnfografik: Akış şeması sembolleri</a:t>
+            </a:r>
+          </a:p>
+          <a:p>
+            <a:r>
+              <a:t>📸 Görsel: Temel tasarım prensipleri</a:t>
+            </a:r>
+          </a:p>
+          <a:p>
+            <a:r>
+              <a:t>🎬 Video: Dijital tasarıma giriş</a:t>
+            </a:r>
+          </a:p>
+          <a:p>
+            <a:r>
+              <a:t>💡 İnfografik: Renk teorisi ve uyumu</a:t>
+            </a:r>
+          </a:p>
+          <a:p>
+            <a:r>
+              <a:t>📸 Görsel: Dijital çağ görselleri ve teknoloji örnekleri</a:t>
+            </a:r>
+          </a:p>
+          <a:p>
+            <a:r>
+              <a:t>🎬 Video: Bilişim teknolojilerinin tarihçesi</a:t>
+            </a:r>
+          </a:p>
         </p:txBody>
       </p:sp>
       <p:sp>
@@ -1575,6 +2507,53 @@
               <a:t>Etkinlik: Öğrencileri 4-5 kişilik gruplara ayırın. Her grup kendi yaşadığı bir problemi belirlesin ve tahtaya yazsın.</a:t>
             </a:r>
           </a:p>
+          <a:p/>
+          <a:p>
+            <a:r>
+              <a:t>🎨 GÖRSELLEŞTİRME ÖNERİLERİ:</a:t>
+            </a:r>
+          </a:p>
+          <a:p/>
+          <a:p>
+            <a:r>
+              <a:t>📸 Görsel: LAN ve WAN ağ topolojileri şeması</a:t>
+            </a:r>
+          </a:p>
+          <a:p>
+            <a:r>
+              <a:t>🎬 Video: İnternet nasıl çalışır? Animasyonlu anlatım</a:t>
+            </a:r>
+          </a:p>
+          <a:p>
+            <a:r>
+              <a:t>💡 İnfografik: Ev ağı kurulumu diyagramı</a:t>
+            </a:r>
+          </a:p>
+          <a:p>
+            <a:r>
+              <a:t>📸 Görsel: Akış şeması örnekleri</a:t>
+            </a:r>
+          </a:p>
+          <a:p>
+            <a:r>
+              <a:t>🎬 Video: Algoritma nedir? Günlük hayattan örnekler</a:t>
+            </a:r>
+          </a:p>
+          <a:p>
+            <a:r>
+              <a:t>💡 İnfografik: Akış şeması sembolleri</a:t>
+            </a:r>
+          </a:p>
+          <a:p>
+            <a:r>
+              <a:t>📸 Görsel: Koşullu yapılar akış diyagramı</a:t>
+            </a:r>
+          </a:p>
+          <a:p>
+            <a:r>
+              <a:t>🎬 Video: Koşullu ifadeler Scratch'te</a:t>
+            </a:r>
+          </a:p>
         </p:txBody>
       </p:sp>
       <p:sp>
@@ -1645,6 +2624,58 @@
               <a:t>Etkinlik: Her grup, belirlediği problem için 5 farklı çözüm fikri geliştirsin. En yaratıcı fikri seçin.</a:t>
             </a:r>
           </a:p>
+          <a:p/>
+          <a:p>
+            <a:r>
+              <a:t>🎨 GÖRSELLEŞTİRME ÖNERİLERİ:</a:t>
+            </a:r>
+          </a:p>
+          <a:p/>
+          <a:p>
+            <a:r>
+              <a:t>📸 Görsel: LAN ve WAN ağ topolojileri şeması</a:t>
+            </a:r>
+          </a:p>
+          <a:p>
+            <a:r>
+              <a:t>🎬 Video: İnternet nasıl çalışır? Animasyonlu anlatım</a:t>
+            </a:r>
+          </a:p>
+          <a:p>
+            <a:r>
+              <a:t>💡 İnfografik: Ev ağı kurulumu diyagramı</a:t>
+            </a:r>
+          </a:p>
+          <a:p>
+            <a:r>
+              <a:t>📸 Görsel: Yapay zeka uygulama örnekleri (Siri, Alexa, ChatGPT)</a:t>
+            </a:r>
+          </a:p>
+          <a:p>
+            <a:r>
+              <a:t>🎬 Video: Yapay zeka nedir? Çocuklar için anlatım</a:t>
+            </a:r>
+          </a:p>
+          <a:p>
+            <a:r>
+              <a:t>💡 İnfografik: AI kullanım alanları</a:t>
+            </a:r>
+          </a:p>
+          <a:p>
+            <a:r>
+              <a:t>📸 Görsel: Akış şeması örnekleri</a:t>
+            </a:r>
+          </a:p>
+          <a:p>
+            <a:r>
+              <a:t>🎬 Video: Algoritma nedir? Günlük hayattan örnekler</a:t>
+            </a:r>
+          </a:p>
+          <a:p>
+            <a:r>
+              <a:t>💡 İnfografik: Akış şeması sembolleri</a:t>
+            </a:r>
+          </a:p>
         </p:txBody>
       </p:sp>
       <p:sp>
@@ -1715,6 +2746,83 @@
               <a:t>Görsel: İyi ve kötü tasarım örnekleri gösterin (karmaşık vs. sade arayüz örnekleri)</a:t>
             </a:r>
           </a:p>
+          <a:p/>
+          <a:p>
+            <a:r>
+              <a:t>🎨 GÖRSELLEŞTİRME ÖNERİLERİ:</a:t>
+            </a:r>
+          </a:p>
+          <a:p/>
+          <a:p>
+            <a:r>
+              <a:t>📸 Görsel: LAN ve WAN ağ topolojileri şeması</a:t>
+            </a:r>
+          </a:p>
+          <a:p>
+            <a:r>
+              <a:t>🎬 Video: İnternet nasıl çalışır? Animasyonlu anlatım</a:t>
+            </a:r>
+          </a:p>
+          <a:p>
+            <a:r>
+              <a:t>💡 İnfografik: Ev ağı kurulumu diyagramı</a:t>
+            </a:r>
+          </a:p>
+          <a:p>
+            <a:r>
+              <a:t>📸 Görsel: Akış şeması örnekleri</a:t>
+            </a:r>
+          </a:p>
+          <a:p>
+            <a:r>
+              <a:t>🎬 Video: Algoritma nedir? Günlük hayattan örnekler</a:t>
+            </a:r>
+          </a:p>
+          <a:p>
+            <a:r>
+              <a:t>💡 İnfografik: Akış şeması sembolleri</a:t>
+            </a:r>
+          </a:p>
+          <a:p>
+            <a:r>
+              <a:t>📸 Görsel: Temel tasarım prensipleri</a:t>
+            </a:r>
+          </a:p>
+          <a:p>
+            <a:r>
+              <a:t>🎬 Video: Dijital tasarıma giriş</a:t>
+            </a:r>
+          </a:p>
+          <a:p>
+            <a:r>
+              <a:t>💡 İnfografik: Renk teorisi ve uyumu</a:t>
+            </a:r>
+          </a:p>
+          <a:p>
+            <a:r>
+              <a:t>📸 Görsel: PowerPoint arayüzü ve araçları</a:t>
+            </a:r>
+          </a:p>
+          <a:p>
+            <a:r>
+              <a:t>🎬 Video: Etkili sunum hazırlama ipuçları</a:t>
+            </a:r>
+          </a:p>
+          <a:p>
+            <a:r>
+              <a:t>💡 Ekran kaydı: PowerPoint temel özellikler</a:t>
+            </a:r>
+          </a:p>
+          <a:p>
+            <a:r>
+              <a:t>📸 Görsel: Dijital çağ görselleri ve teknoloji örnekleri</a:t>
+            </a:r>
+          </a:p>
+          <a:p>
+            <a:r>
+              <a:t>🎬 Video: Bilişim teknolojilerinin tarihçesi</a:t>
+            </a:r>
+          </a:p>
         </p:txBody>
       </p:sp>
       <p:sp>
@@ -1783,6 +2891,68 @@
           <a:p>
             <a:r>
               <a:t>Etkinlik: Her grup, fikirlerinden birini kağıt prototip olarak çizsin (ana ekran, oyun ekranı vb.)</a:t>
+            </a:r>
+          </a:p>
+          <a:p/>
+          <a:p>
+            <a:r>
+              <a:t>🎨 GÖRSELLEŞTİRME ÖNERİLERİ:</a:t>
+            </a:r>
+          </a:p>
+          <a:p/>
+          <a:p>
+            <a:r>
+              <a:t>📸 Görsel: LAN ve WAN ağ topolojileri şeması</a:t>
+            </a:r>
+          </a:p>
+          <a:p>
+            <a:r>
+              <a:t>🎬 Video: İnternet nasıl çalışır? Animasyonlu anlatım</a:t>
+            </a:r>
+          </a:p>
+          <a:p>
+            <a:r>
+              <a:t>💡 İnfografik: Ev ağı kurulumu diyagramı</a:t>
+            </a:r>
+          </a:p>
+          <a:p>
+            <a:r>
+              <a:t>📸 Görsel: Akış şeması örnekleri</a:t>
+            </a:r>
+          </a:p>
+          <a:p>
+            <a:r>
+              <a:t>🎬 Video: Algoritma nedir? Günlük hayattan örnekler</a:t>
+            </a:r>
+          </a:p>
+          <a:p>
+            <a:r>
+              <a:t>💡 İnfografik: Akış şeması sembolleri</a:t>
+            </a:r>
+          </a:p>
+          <a:p>
+            <a:r>
+              <a:t>📸 Görsel: PowerPoint arayüzü ve araçları</a:t>
+            </a:r>
+          </a:p>
+          <a:p>
+            <a:r>
+              <a:t>🎬 Video: Etkili sunum hazırlama ipuçları</a:t>
+            </a:r>
+          </a:p>
+          <a:p>
+            <a:r>
+              <a:t>💡 Ekran kaydı: PowerPoint temel özellikler</a:t>
+            </a:r>
+          </a:p>
+          <a:p>
+            <a:r>
+              <a:t>📸 Görsel: Dijital çağ görselleri ve teknoloji örnekleri</a:t>
+            </a:r>
+          </a:p>
+          <a:p>
+            <a:r>
+              <a:t>🎬 Video: Bilişim teknolojilerinin tarihçesi</a:t>
             </a:r>
           </a:p>
         </p:txBody>
@@ -4959,6 +6129,7 @@
               <a:defRPr sz="2000"/>
             </a:pPr>
             <a:r>
+              <a:rPr sz="1400"/>
               <a:t>Prototip = Ürünün ilk deneme versiyonu</a:t>
             </a:r>
           </a:p>
@@ -4978,6 +6149,7 @@
               <a:defRPr sz="2000" b="1"/>
             </a:pPr>
             <a:r>
+              <a:rPr sz="1400"/>
               <a:t>✅ Prototip Çeşitleri:</a:t>
             </a:r>
           </a:p>
@@ -4997,6 +6169,7 @@
               <a:defRPr sz="2000"/>
             </a:pPr>
             <a:r>
+              <a:rPr sz="1400"/>
               <a:t>📄 Kağıt Prototip (Düşük Kalite):</a:t>
             </a:r>
           </a:p>
@@ -5008,6 +6181,7 @@
               <a:defRPr sz="1800"/>
             </a:pPr>
             <a:r>
+              <a:rPr sz="1400"/>
               <a:t>    • Kağıda çizilmiş ekranlar</a:t>
             </a:r>
           </a:p>
@@ -5019,6 +6193,7 @@
               <a:defRPr sz="1800"/>
             </a:pPr>
             <a:r>
+              <a:rPr sz="1400"/>
               <a:t>    • Hızlı ve ucuz</a:t>
             </a:r>
           </a:p>
@@ -5030,6 +6205,7 @@
               <a:defRPr sz="1800"/>
             </a:pPr>
             <a:r>
+              <a:rPr sz="1400"/>
               <a:t>    • İlk fikirleri test etmek için</a:t>
             </a:r>
           </a:p>
@@ -5049,6 +6225,7 @@
               <a:defRPr sz="2000"/>
             </a:pPr>
             <a:r>
+              <a:rPr sz="1400"/>
               <a:t>💻 Dijital Prototip (Yüksek Kalite):</a:t>
             </a:r>
           </a:p>
@@ -5060,6 +6237,7 @@
               <a:defRPr sz="1800"/>
             </a:pPr>
             <a:r>
+              <a:rPr sz="1400"/>
               <a:t>    • Bilgisayarda tasarlanan mockup</a:t>
             </a:r>
           </a:p>
@@ -5071,6 +6249,7 @@
               <a:defRPr sz="1800"/>
             </a:pPr>
             <a:r>
+              <a:rPr sz="1400"/>
               <a:t>    • Daha gerçekçi</a:t>
             </a:r>
           </a:p>
@@ -5082,6 +6261,7 @@
               <a:defRPr sz="1800"/>
             </a:pPr>
             <a:r>
+              <a:rPr sz="1400"/>
               <a:t>    • PowerPoint, Canva, Figma ile yapılabilir</a:t>
             </a:r>
           </a:p>
@@ -5101,6 +6281,7 @@
               <a:defRPr sz="2000" b="1"/>
             </a:pPr>
             <a:r>
+              <a:rPr sz="1400"/>
               <a:t>📌 Prototipte Olması Gerekenler:</a:t>
             </a:r>
           </a:p>
@@ -5112,6 +6293,7 @@
               <a:defRPr sz="1800"/>
             </a:pPr>
             <a:r>
+              <a:rPr sz="1400"/>
               <a:t>    • Ana ekranlar</a:t>
             </a:r>
           </a:p>
@@ -5123,6 +6305,7 @@
               <a:defRPr sz="1800"/>
             </a:pPr>
             <a:r>
+              <a:rPr sz="1400"/>
               <a:t>    • Temel özellikler</a:t>
             </a:r>
           </a:p>
@@ -5134,6 +6317,7 @@
               <a:defRPr sz="1800"/>
             </a:pPr>
             <a:r>
+              <a:rPr sz="1400"/>
               <a:t>    • Navigasyon (geçiş) sistemi</a:t>
             </a:r>
           </a:p>
@@ -5153,6 +6337,7 @@
               <a:defRPr sz="2000" b="1"/>
             </a:pPr>
             <a:r>
+              <a:rPr sz="1400"/>
               <a:t>💡 Prototip mükemmel olmak zorunda değil!</a:t>
             </a:r>
           </a:p>
@@ -5164,6 +6349,7 @@
               <a:defRPr sz="2000"/>
             </a:pPr>
             <a:r>
+              <a:rPr sz="1400"/>
               <a:t>Amaç: Fikri görmek ve test etmek</a:t>
             </a:r>
           </a:p>
@@ -5183,6 +6369,7 @@
               <a:defRPr sz="2000" b="1"/>
             </a:pPr>
             <a:r>
+              <a:rPr sz="1400"/>
               <a:t>🎯 Etkinlik: Kağıda mobil uygulama ekranı çizin</a:t>
             </a:r>
           </a:p>
@@ -5281,6 +6468,7 @@
               <a:defRPr sz="2000"/>
             </a:pPr>
             <a:r>
+              <a:rPr sz="1400"/>
               <a:t>Prototip hazır! Şimdi test zamanı!</a:t>
             </a:r>
           </a:p>
@@ -5300,6 +6488,7 @@
               <a:defRPr sz="2000" b="1"/>
             </a:pPr>
             <a:r>
+              <a:rPr sz="1400"/>
               <a:t>✅ Test Etme Yöntemleri:</a:t>
             </a:r>
           </a:p>
@@ -5319,6 +6508,7 @@
               <a:defRPr sz="2000"/>
             </a:pPr>
             <a:r>
+              <a:rPr sz="1400"/>
               <a:t>👥 Kullanıcı Testleri:</a:t>
             </a:r>
           </a:p>
@@ -5330,6 +6520,7 @@
               <a:defRPr sz="1800"/>
             </a:pPr>
             <a:r>
+              <a:rPr sz="1400"/>
               <a:t>    • Hedef kitleye prototipi gösterin</a:t>
             </a:r>
           </a:p>
@@ -5341,6 +6532,7 @@
               <a:defRPr sz="1800"/>
             </a:pPr>
             <a:r>
+              <a:rPr sz="1400"/>
               <a:t>    • Onları kullanırken izleyin</a:t>
             </a:r>
           </a:p>
@@ -5352,6 +6544,7 @@
               <a:defRPr sz="1800"/>
             </a:pPr>
             <a:r>
+              <a:rPr sz="1400"/>
               <a:t>    • Nerede zorlanıyorlar?</a:t>
             </a:r>
           </a:p>
@@ -5371,6 +6564,7 @@
               <a:defRPr sz="2000"/>
             </a:pPr>
             <a:r>
+              <a:rPr sz="1400"/>
               <a:t>❓ Sorular Sorun:</a:t>
             </a:r>
           </a:p>
@@ -5382,6 +6576,7 @@
               <a:defRPr sz="1800"/>
             </a:pPr>
             <a:r>
+              <a:rPr sz="1400"/>
               <a:t>    • Ürün anlaşılıyor mu?</a:t>
             </a:r>
           </a:p>
@@ -5393,6 +6588,7 @@
               <a:defRPr sz="1800"/>
             </a:pPr>
             <a:r>
+              <a:rPr sz="1400"/>
               <a:t>    • Kullanmak kolay mı?</a:t>
             </a:r>
           </a:p>
@@ -5404,6 +6600,7 @@
               <a:defRPr sz="1800"/>
             </a:pPr>
             <a:r>
+              <a:rPr sz="1400"/>
               <a:t>    • Eksik ne var?</a:t>
             </a:r>
           </a:p>
@@ -5415,6 +6612,7 @@
               <a:defRPr sz="1800"/>
             </a:pPr>
             <a:r>
+              <a:rPr sz="1400"/>
               <a:t>    • Beğendikleri özellikler?</a:t>
             </a:r>
           </a:p>
@@ -5434,6 +6632,7 @@
               <a:defRPr sz="2000"/>
             </a:pPr>
             <a:r>
+              <a:rPr sz="1400"/>
               <a:t>📝 Gözlem Yapın:</a:t>
             </a:r>
           </a:p>
@@ -5445,6 +6644,7 @@
               <a:defRPr sz="1800"/>
             </a:pPr>
             <a:r>
+              <a:rPr sz="1400"/>
               <a:t>    • Hangi butona tıkladılar?</a:t>
             </a:r>
           </a:p>
@@ -5456,6 +6656,7 @@
               <a:defRPr sz="1800"/>
             </a:pPr>
             <a:r>
+              <a:rPr sz="1400"/>
               <a:t>    • Nerede kafa karıştı?</a:t>
             </a:r>
           </a:p>
@@ -5467,6 +6668,7 @@
               <a:defRPr sz="1800"/>
             </a:pPr>
             <a:r>
+              <a:rPr sz="1400"/>
               <a:t>    • Ne kadar sürede öğrendiler?</a:t>
             </a:r>
           </a:p>
@@ -5486,6 +6688,7 @@
               <a:defRPr sz="2000" b="1"/>
             </a:pPr>
             <a:r>
+              <a:rPr sz="1400"/>
               <a:t>📌 Test Sonuçları:</a:t>
             </a:r>
           </a:p>
@@ -5497,6 +6700,7 @@
               <a:defRPr sz="1800"/>
             </a:pPr>
             <a:r>
+              <a:rPr sz="1400"/>
               <a:t>    • Not alın</a:t>
             </a:r>
           </a:p>
@@ -5508,6 +6712,7 @@
               <a:defRPr sz="1800"/>
             </a:pPr>
             <a:r>
+              <a:rPr sz="1400"/>
               <a:t>    • Ortak sorunları belirleyin</a:t>
             </a:r>
           </a:p>
@@ -5519,6 +6724,7 @@
               <a:defRPr sz="1800"/>
             </a:pPr>
             <a:r>
+              <a:rPr sz="1400"/>
               <a:t>    • Önceliklendirin (en önemliler önce)</a:t>
             </a:r>
           </a:p>
@@ -5538,6 +6744,7 @@
               <a:defRPr sz="2000" b="1"/>
             </a:pPr>
             <a:r>
+              <a:rPr sz="1400"/>
               <a:t>💡 Test etmeden yayınlamayın!</a:t>
             </a:r>
           </a:p>
@@ -5636,6 +6843,7 @@
               <a:defRPr sz="2000"/>
             </a:pPr>
             <a:r>
+              <a:rPr sz="1400"/>
               <a:t>Test sonuçlarına göre ürünü iyileştirin!</a:t>
             </a:r>
           </a:p>
@@ -5655,6 +6863,7 @@
               <a:defRPr sz="2000" b="1"/>
             </a:pPr>
             <a:r>
+              <a:rPr sz="1400"/>
               <a:t>✅ İyileştirme Süreci:</a:t>
             </a:r>
           </a:p>
@@ -5674,6 +6883,7 @@
               <a:defRPr sz="2000"/>
             </a:pPr>
             <a:r>
+              <a:rPr sz="1400"/>
               <a:t>1️⃣ Geri Bildirimleri Topla:</a:t>
             </a:r>
           </a:p>
@@ -5685,6 +6895,7 @@
               <a:defRPr sz="1800"/>
             </a:pPr>
             <a:r>
+              <a:rPr sz="1400"/>
               <a:t>    • Kullanıcıların yorumları</a:t>
             </a:r>
           </a:p>
@@ -5696,6 +6907,7 @@
               <a:defRPr sz="1800"/>
             </a:pPr>
             <a:r>
+              <a:rPr sz="1400"/>
               <a:t>    • Test sırasındaki gözlemler</a:t>
             </a:r>
           </a:p>
@@ -5707,6 +6919,7 @@
               <a:defRPr sz="1800"/>
             </a:pPr>
             <a:r>
+              <a:rPr sz="1400"/>
               <a:t>    • Sorunlar ve öneriler</a:t>
             </a:r>
           </a:p>
@@ -5726,6 +6939,7 @@
               <a:defRPr sz="2000"/>
             </a:pPr>
             <a:r>
+              <a:rPr sz="1400"/>
               <a:t>2️⃣ Önceliklendirme:</a:t>
             </a:r>
           </a:p>
@@ -5737,6 +6951,7 @@
               <a:defRPr sz="1800"/>
             </a:pPr>
             <a:r>
+              <a:rPr sz="1400"/>
               <a:t>    • Hangileri acil?</a:t>
             </a:r>
           </a:p>
@@ -5748,6 +6963,7 @@
               <a:defRPr sz="1800"/>
             </a:pPr>
             <a:r>
+              <a:rPr sz="1400"/>
               <a:t>    • Hangileri önemli ama acil değil?</a:t>
             </a:r>
           </a:p>
@@ -5759,6 +6975,7 @@
               <a:defRPr sz="1800"/>
             </a:pPr>
             <a:r>
+              <a:rPr sz="1400"/>
               <a:t>    • Hangileri ileride yapılabilir?</a:t>
             </a:r>
           </a:p>
@@ -5778,6 +6995,7 @@
               <a:defRPr sz="2000"/>
             </a:pPr>
             <a:r>
+              <a:rPr sz="1400"/>
               <a:t>3️⃣ Değişiklikleri Uygula:</a:t>
             </a:r>
           </a:p>
@@ -5789,6 +7007,7 @@
               <a:defRPr sz="1800"/>
             </a:pPr>
             <a:r>
+              <a:rPr sz="1400"/>
               <a:t>    • Tasarımı düzelt</a:t>
             </a:r>
           </a:p>
@@ -5800,6 +7019,7 @@
               <a:defRPr sz="1800"/>
             </a:pPr>
             <a:r>
+              <a:rPr sz="1400"/>
               <a:t>    • Eksik özellikleri ekle</a:t>
             </a:r>
           </a:p>
@@ -5811,6 +7031,7 @@
               <a:defRPr sz="1800"/>
             </a:pPr>
             <a:r>
+              <a:rPr sz="1400"/>
               <a:t>    • Hataları düzelt</a:t>
             </a:r>
           </a:p>
@@ -5830,6 +7051,7 @@
               <a:defRPr sz="2000"/>
             </a:pPr>
             <a:r>
+              <a:rPr sz="1400"/>
               <a:t>4️⃣ Tekrar Test Et:</a:t>
             </a:r>
           </a:p>
@@ -5841,6 +7063,7 @@
               <a:defRPr sz="1800"/>
             </a:pPr>
             <a:r>
+              <a:rPr sz="1400"/>
               <a:t>    • İyileştirmeler işe yaradı mı?</a:t>
             </a:r>
           </a:p>
@@ -5860,6 +7083,7 @@
               <a:defRPr sz="2000" b="1"/>
             </a:pPr>
             <a:r>
+              <a:rPr sz="1400"/>
               <a:t>💡 Bu döngü defalarca tekrarlanabilir!</a:t>
             </a:r>
           </a:p>
@@ -5871,6 +7095,7 @@
               <a:defRPr sz="2000"/>
             </a:pPr>
             <a:r>
+              <a:rPr sz="1400"/>
               <a:t>Tasarım → Test → İyileştir → Tekrar Test</a:t>
             </a:r>
           </a:p>
@@ -5969,6 +7194,7 @@
               <a:defRPr sz="2000"/>
             </a:pPr>
             <a:r>
+              <a:rPr sz="1400"/>
               <a:t>Ürün hazır! Kullanıcılara nasıl ulaştırırız?</a:t>
             </a:r>
           </a:p>
@@ -5988,6 +7214,7 @@
               <a:defRPr sz="2000" b="1"/>
             </a:pPr>
             <a:r>
+              <a:rPr sz="1400"/>
               <a:t>✅ Yayınlama Platformları:</a:t>
             </a:r>
           </a:p>
@@ -6007,6 +7234,7 @@
               <a:defRPr sz="2000"/>
             </a:pPr>
             <a:r>
+              <a:rPr sz="1400"/>
               <a:t>📱 Mobil Uygulamalar:</a:t>
             </a:r>
           </a:p>
@@ -6018,6 +7246,7 @@
               <a:defRPr sz="1800"/>
             </a:pPr>
             <a:r>
+              <a:rPr sz="1400"/>
               <a:t>    • Google Play Store (Android)</a:t>
             </a:r>
           </a:p>
@@ -6029,6 +7258,7 @@
               <a:defRPr sz="1800"/>
             </a:pPr>
             <a:r>
+              <a:rPr sz="1400"/>
               <a:t>    • App Store (iOS - iPhone/iPad)</a:t>
             </a:r>
           </a:p>
@@ -6048,6 +7278,7 @@
               <a:defRPr sz="2000"/>
             </a:pPr>
             <a:r>
+              <a:rPr sz="1400"/>
               <a:t>🌐 Web Uygulamaları:</a:t>
             </a:r>
           </a:p>
@@ -6059,6 +7290,7 @@
               <a:defRPr sz="1800"/>
             </a:pPr>
             <a:r>
+              <a:rPr sz="1400"/>
               <a:t>    • Web sunucusuna yükleme</a:t>
             </a:r>
           </a:p>
@@ -6070,6 +7302,7 @@
               <a:defRPr sz="1800"/>
             </a:pPr>
             <a:r>
+              <a:rPr sz="1400"/>
               <a:t>    • Domain (alan adı) satın alma</a:t>
             </a:r>
           </a:p>
@@ -6089,6 +7322,7 @@
               <a:defRPr sz="2000"/>
             </a:pPr>
             <a:r>
+              <a:rPr sz="1400"/>
               <a:t>🎮 Oyunlar:</a:t>
             </a:r>
           </a:p>
@@ -6100,6 +7334,7 @@
               <a:defRPr sz="1800"/>
             </a:pPr>
             <a:r>
+              <a:rPr sz="1400"/>
               <a:t>    • Steam, Epic Games Store</a:t>
             </a:r>
           </a:p>
@@ -6111,6 +7346,7 @@
               <a:defRPr sz="1800"/>
             </a:pPr>
             <a:r>
+              <a:rPr sz="1400"/>
               <a:t>    • Scratch Community (basit oyunlar)</a:t>
             </a:r>
           </a:p>
@@ -6130,6 +7366,7 @@
               <a:defRPr sz="2000" b="1"/>
             </a:pPr>
             <a:r>
+              <a:rPr sz="1400"/>
               <a:t>📌 Yayınlama Öncesi Kontroller:</a:t>
             </a:r>
           </a:p>
@@ -6141,6 +7378,7 @@
               <a:defRPr sz="1800"/>
             </a:pPr>
             <a:r>
+              <a:rPr sz="1400"/>
               <a:t>    • Tüm özellikler çalışıyor mu?</a:t>
             </a:r>
           </a:p>
@@ -6152,6 +7390,7 @@
               <a:defRPr sz="1800"/>
             </a:pPr>
             <a:r>
+              <a:rPr sz="1400"/>
               <a:t>    • Hatalar düzeltildi mi?</a:t>
             </a:r>
           </a:p>
@@ -6163,6 +7402,7 @@
               <a:defRPr sz="1800"/>
             </a:pPr>
             <a:r>
+              <a:rPr sz="1400"/>
               <a:t>    • Güvenlik kontrolleri yapıldı mı?</a:t>
             </a:r>
           </a:p>
@@ -6174,6 +7414,7 @@
               <a:defRPr sz="1800"/>
             </a:pPr>
             <a:r>
+              <a:rPr sz="1400"/>
               <a:t>    • Kullanım kılavuzu hazır mı?</a:t>
             </a:r>
           </a:p>
@@ -6193,6 +7434,7 @@
               <a:defRPr sz="2000" b="1"/>
             </a:pPr>
             <a:r>
+              <a:rPr sz="1400"/>
               <a:t>💡 İlk kullanıcılara özel tanıtım yapın (lansман)!</a:t>
             </a:r>
           </a:p>
@@ -6291,6 +7533,7 @@
               <a:defRPr sz="2000"/>
             </a:pPr>
             <a:r>
+              <a:rPr sz="1400"/>
               <a:t>Dijital ürün tasarım sürecini örnek ile görelim:</a:t>
             </a:r>
           </a:p>
@@ -6310,6 +7553,7 @@
               <a:defRPr sz="2000"/>
             </a:pPr>
             <a:r>
+              <a:rPr sz="1400"/>
               <a:t>1️⃣ Problem: İngilizce kelime ezberleme sıkıcı</a:t>
             </a:r>
           </a:p>
@@ -6329,6 +7573,7 @@
               <a:defRPr sz="2000"/>
             </a:pPr>
             <a:r>
+              <a:rPr sz="1400"/>
               <a:t>2️⃣ Çözüm Fikri: Oyunlaştırılmış kelime öğrenme uygulaması</a:t>
             </a:r>
           </a:p>
@@ -6348,6 +7593,7 @@
               <a:defRPr sz="2000"/>
             </a:pPr>
             <a:r>
+              <a:rPr sz="1400"/>
               <a:t>3️⃣ Tasarım:</a:t>
             </a:r>
           </a:p>
@@ -6359,6 +7605,7 @@
               <a:defRPr sz="1800"/>
             </a:pPr>
             <a:r>
+              <a:rPr sz="1400"/>
               <a:t>    • Ana ekran: Seviye seçimi</a:t>
             </a:r>
           </a:p>
@@ -6370,6 +7617,7 @@
               <a:defRPr sz="1800"/>
             </a:pPr>
             <a:r>
+              <a:rPr sz="1400"/>
               <a:t>    • Oyun ekranı: Kelime kartları, zamanlayıcı</a:t>
             </a:r>
           </a:p>
@@ -6381,6 +7629,7 @@
               <a:defRPr sz="1800"/>
             </a:pPr>
             <a:r>
+              <a:rPr sz="1400"/>
               <a:t>    • Renkli ve çocuk dostu tasarım</a:t>
             </a:r>
           </a:p>
@@ -6400,6 +7649,7 @@
               <a:defRPr sz="2000"/>
             </a:pPr>
             <a:r>
+              <a:rPr sz="1400"/>
               <a:t>4️⃣ Özellikler:</a:t>
             </a:r>
           </a:p>
@@ -6411,6 +7661,7 @@
               <a:defRPr sz="1800"/>
             </a:pPr>
             <a:r>
+              <a:rPr sz="1400"/>
               <a:t>    • Günlük 10 yeni kelime</a:t>
             </a:r>
           </a:p>
@@ -6422,6 +7673,7 @@
               <a:defRPr sz="1800"/>
             </a:pPr>
             <a:r>
+              <a:rPr sz="1400"/>
               <a:t>    • Eşleştirme oyunu</a:t>
             </a:r>
           </a:p>
@@ -6433,6 +7685,7 @@
               <a:defRPr sz="1800"/>
             </a:pPr>
             <a:r>
+              <a:rPr sz="1400"/>
               <a:t>    • Puan sistemi ve rozetler</a:t>
             </a:r>
           </a:p>
@@ -6444,6 +7697,7 @@
               <a:defRPr sz="1800"/>
             </a:pPr>
             <a:r>
+              <a:rPr sz="1400"/>
               <a:t>    • Arkadaşlarla yarışma</a:t>
             </a:r>
           </a:p>
@@ -6463,6 +7717,7 @@
               <a:defRPr sz="2000"/>
             </a:pPr>
             <a:r>
+              <a:rPr sz="1400"/>
               <a:t>5️⃣ Test: 20 öğrenci ile deneme</a:t>
             </a:r>
           </a:p>
@@ -6482,6 +7737,7 @@
               <a:defRPr sz="2000"/>
             </a:pPr>
             <a:r>
+              <a:rPr sz="1400"/>
               <a:t>6️⃣ Geri Bildirim: 'Kelimeler çok zor' → Seviye sistemi eklendi</a:t>
             </a:r>
           </a:p>
@@ -6501,6 +7757,7 @@
               <a:defRPr sz="2000"/>
             </a:pPr>
             <a:r>
+              <a:rPr sz="1400"/>
               <a:t>7️⃣ Yayınlama: Scratch'te paylaşıldı</a:t>
             </a:r>
           </a:p>
@@ -6599,6 +7856,7 @@
               <a:defRPr sz="2000"/>
             </a:pPr>
             <a:r>
+              <a:rPr sz="1400"/>
               <a:t>Projenizi organize etmek için araçlar:</a:t>
             </a:r>
           </a:p>
@@ -6618,6 +7876,7 @@
               <a:defRPr sz="2000" b="1"/>
             </a:pPr>
             <a:r>
+              <a:rPr sz="1400"/>
               <a:t>✅ Görev Listesi (To-Do List):</a:t>
             </a:r>
           </a:p>
@@ -6629,6 +7888,7 @@
               <a:defRPr sz="1800"/>
             </a:pPr>
             <a:r>
+              <a:rPr sz="1400"/>
               <a:t>    • Yapılacaklar listesi</a:t>
             </a:r>
           </a:p>
@@ -6640,6 +7900,7 @@
               <a:defRPr sz="1800"/>
             </a:pPr>
             <a:r>
+              <a:rPr sz="1400"/>
               <a:t>    • Tamamlananları işaretleme</a:t>
             </a:r>
           </a:p>
@@ -6651,6 +7912,7 @@
               <a:defRPr sz="1800"/>
             </a:pPr>
             <a:r>
+              <a:rPr sz="1400"/>
               <a:t>    • Örnek: Google Keep, Microsoft To Do</a:t>
             </a:r>
           </a:p>
@@ -6670,6 +7932,7 @@
               <a:defRPr sz="2000"/>
             </a:pPr>
             <a:r>
+              <a:rPr sz="1400"/>
               <a:t>📅 Takvim ve Zaman Çizelgesi:</a:t>
             </a:r>
           </a:p>
@@ -6681,6 +7944,7 @@
               <a:defRPr sz="1800"/>
             </a:pPr>
             <a:r>
+              <a:rPr sz="1400"/>
               <a:t>    • Her görev ne zaman yapılacak?</a:t>
             </a:r>
           </a:p>
@@ -6692,6 +7956,7 @@
               <a:defRPr sz="1800"/>
             </a:pPr>
             <a:r>
+              <a:rPr sz="1400"/>
               <a:t>    • Tarih belirleme</a:t>
             </a:r>
           </a:p>
@@ -6703,6 +7968,7 @@
               <a:defRPr sz="1800"/>
             </a:pPr>
             <a:r>
+              <a:rPr sz="1400"/>
               <a:t>    • Örnek: Google Takvim</a:t>
             </a:r>
           </a:p>
@@ -6722,6 +7988,7 @@
               <a:defRPr sz="2000" b="1"/>
             </a:pPr>
             <a:r>
+              <a:rPr sz="1400"/>
               <a:t>🎯 Gantt Şeması:</a:t>
             </a:r>
           </a:p>
@@ -6733,6 +8000,7 @@
               <a:defRPr sz="1800"/>
             </a:pPr>
             <a:r>
+              <a:rPr sz="1400"/>
               <a:t>    • Görevlerin zaman çizelgesi</a:t>
             </a:r>
           </a:p>
@@ -6744,6 +8012,7 @@
               <a:defRPr sz="1800"/>
             </a:pPr>
             <a:r>
+              <a:rPr sz="1400"/>
               <a:t>    • Hangi görev ne zaman başlıyor/bitiyor?</a:t>
             </a:r>
           </a:p>
@@ -6763,6 +8032,7 @@
               <a:defRPr sz="2000"/>
             </a:pPr>
             <a:r>
+              <a:rPr sz="1400"/>
               <a:t>📊 Kanban Tahtası:</a:t>
             </a:r>
           </a:p>
@@ -6774,6 +8044,7 @@
               <a:defRPr sz="1800"/>
             </a:pPr>
             <a:r>
+              <a:rPr sz="1400"/>
               <a:t>    • Yapılacak / Yapılıyor / Tamamlandı sütunları</a:t>
             </a:r>
           </a:p>
@@ -6785,6 +8056,7 @@
               <a:defRPr sz="1800"/>
             </a:pPr>
             <a:r>
+              <a:rPr sz="1400"/>
               <a:t>    • Görevleri kartlar ile gösterme</a:t>
             </a:r>
           </a:p>
@@ -6796,6 +8068,7 @@
               <a:defRPr sz="1800"/>
             </a:pPr>
             <a:r>
+              <a:rPr sz="1400"/>
               <a:t>    • Örnek: Trello, Padlet</a:t>
             </a:r>
           </a:p>
@@ -6815,6 +8088,7 @@
               <a:defRPr sz="2000" b="1"/>
             </a:pPr>
             <a:r>
+              <a:rPr sz="1400"/>
               <a:t>💡 Basit bir kağıt kalem de yeterli olabilir!</a:t>
             </a:r>
           </a:p>
@@ -6834,6 +8108,7 @@
               <a:defRPr sz="2000" b="1"/>
             </a:pPr>
             <a:r>
+              <a:rPr sz="1400"/>
               <a:t>🎯 Önemli olan: Düzenli ve planlı çalışmak</a:t>
             </a:r>
           </a:p>
@@ -6932,6 +8207,7 @@
               <a:defRPr sz="2000"/>
             </a:pPr>
             <a:r>
+              <a:rPr sz="1600"/>
               <a:t>Büyük projeler tek başına yapılmaz!</a:t>
             </a:r>
           </a:p>
@@ -6951,6 +8227,7 @@
               <a:defRPr sz="2000" b="1"/>
             </a:pPr>
             <a:r>
+              <a:rPr sz="1600"/>
               <a:t>✅ Proje Takımındaki Roller:</a:t>
             </a:r>
           </a:p>
@@ -6970,6 +8247,7 @@
               <a:defRPr sz="2000" b="1"/>
             </a:pPr>
             <a:r>
+              <a:rPr sz="1600"/>
               <a:t>🎯 Proje Yöneticisi:</a:t>
             </a:r>
           </a:p>
@@ -6981,6 +8259,7 @@
               <a:defRPr sz="1800"/>
             </a:pPr>
             <a:r>
+              <a:rPr sz="1600"/>
               <a:t>    • Planlamayı yapar</a:t>
             </a:r>
           </a:p>
@@ -6992,6 +8271,7 @@
               <a:defRPr sz="1800"/>
             </a:pPr>
             <a:r>
+              <a:rPr sz="1600"/>
               <a:t>    • Görevleri dağıtır</a:t>
             </a:r>
           </a:p>
@@ -7003,6 +8283,7 @@
               <a:defRPr sz="1800"/>
             </a:pPr>
             <a:r>
+              <a:rPr sz="1600"/>
               <a:t>    • İlerlemeyi takip eder</a:t>
             </a:r>
           </a:p>
@@ -7022,6 +8303,7 @@
               <a:defRPr sz="2000"/>
             </a:pPr>
             <a:r>
+              <a:rPr sz="1600"/>
               <a:t>🎨 Tasarımcı:</a:t>
             </a:r>
           </a:p>
@@ -7033,6 +8315,7 @@
               <a:defRPr sz="1800"/>
             </a:pPr>
             <a:r>
+              <a:rPr sz="1600"/>
               <a:t>    • Görsel tasarımı yapar</a:t>
             </a:r>
           </a:p>
@@ -7044,6 +8327,7 @@
               <a:defRPr sz="1800"/>
             </a:pPr>
             <a:r>
+              <a:rPr sz="1600"/>
               <a:t>    • Kullanıcı arayüzünü çizer</a:t>
             </a:r>
           </a:p>
@@ -7063,6 +8347,7 @@
               <a:defRPr sz="2000"/>
             </a:pPr>
             <a:r>
+              <a:rPr sz="1600"/>
               <a:t>💻 Geliştirici (Programcı):</a:t>
             </a:r>
           </a:p>
@@ -7074,6 +8359,7 @@
               <a:defRPr sz="1800"/>
             </a:pPr>
             <a:r>
+              <a:rPr sz="1600"/>
               <a:t>    • Kodu yazar</a:t>
             </a:r>
           </a:p>
@@ -7085,6 +8371,7 @@
               <a:defRPr sz="1800"/>
             </a:pPr>
             <a:r>
+              <a:rPr sz="1600"/>
               <a:t>    • Uygulamayı geliştirir</a:t>
             </a:r>
           </a:p>
@@ -7104,6 +8391,7 @@
               <a:defRPr sz="2000"/>
             </a:pPr>
             <a:r>
+              <a:rPr sz="1600"/>
               <a:t>🧪 Test Uzmanı:</a:t>
             </a:r>
           </a:p>
@@ -7115,6 +8403,7 @@
               <a:defRPr sz="1800"/>
             </a:pPr>
             <a:r>
+              <a:rPr sz="1600"/>
               <a:t>    • Testleri yapar</a:t>
             </a:r>
           </a:p>
@@ -7126,6 +8415,7 @@
               <a:defRPr sz="1800"/>
             </a:pPr>
             <a:r>
+              <a:rPr sz="1600"/>
               <a:t>    • Hataları bulur</a:t>
             </a:r>
           </a:p>
@@ -7145,6 +8435,7 @@
               <a:defRPr sz="2000"/>
             </a:pPr>
             <a:r>
+              <a:rPr sz="1600"/>
               <a:t>📝 İçerik Üreticisi:</a:t>
             </a:r>
           </a:p>
@@ -7156,6 +8447,7 @@
               <a:defRPr sz="1800"/>
             </a:pPr>
             <a:r>
+              <a:rPr sz="1600"/>
               <a:t>    • Metinleri yazar</a:t>
             </a:r>
           </a:p>
@@ -7167,6 +8459,7 @@
               <a:defRPr sz="1800"/>
             </a:pPr>
             <a:r>
+              <a:rPr sz="1600"/>
               <a:t>    • Görselleri hazırlar</a:t>
             </a:r>
           </a:p>
@@ -7186,6 +8479,7 @@
               <a:defRPr sz="2000" b="1"/>
             </a:pPr>
             <a:r>
+              <a:rPr sz="1600"/>
               <a:t>💡 Küçük projelerde bir kişi birden fazla rol alabilir!</a:t>
             </a:r>
           </a:p>
@@ -7284,6 +8578,7 @@
               <a:defRPr sz="2000"/>
             </a:pPr>
             <a:r>
+              <a:rPr sz="1400"/>
               <a:t>Dünyaca ünlü dijital ürünler nasıl başladı?</a:t>
             </a:r>
           </a:p>
@@ -7303,6 +8598,7 @@
               <a:defRPr sz="2000"/>
             </a:pPr>
             <a:r>
+              <a:rPr sz="1400"/>
               <a:t>📱 Instagram:</a:t>
             </a:r>
           </a:p>
@@ -7314,6 +8610,7 @@
               <a:defRPr sz="1800"/>
             </a:pPr>
             <a:r>
+              <a:rPr sz="1400"/>
               <a:t>    • Başlangıç: Fotoğraf paylaşım uygulaması</a:t>
             </a:r>
           </a:p>
@@ -7325,6 +8622,7 @@
               <a:defRPr sz="1800"/>
             </a:pPr>
             <a:r>
+              <a:rPr sz="1400"/>
               <a:t>    • İhtiyaç: Fotoğrafları güzel göstermek</a:t>
             </a:r>
           </a:p>
@@ -7336,6 +8634,7 @@
               <a:defRPr sz="1800"/>
             </a:pPr>
             <a:r>
+              <a:rPr sz="1400"/>
               <a:t>    • 2010'da başladı, şimdi milyarlarca kullanıcı</a:t>
             </a:r>
           </a:p>
@@ -7355,6 +8654,7 @@
               <a:defRPr sz="2000"/>
             </a:pPr>
             <a:r>
+              <a:rPr sz="1400"/>
               <a:t>🎮 Minecraft:</a:t>
             </a:r>
           </a:p>
@@ -7366,6 +8666,7 @@
               <a:defRPr sz="1800"/>
             </a:pPr>
             <a:r>
+              <a:rPr sz="1400"/>
               <a:t>    • Başlangıç: Tek kişinin hobi projesi</a:t>
             </a:r>
           </a:p>
@@ -7377,6 +8678,7 @@
               <a:defRPr sz="1800"/>
             </a:pPr>
             <a:r>
+              <a:rPr sz="1400"/>
               <a:t>    • İhtiyaç: Yaratıcı bir oyun</a:t>
             </a:r>
           </a:p>
@@ -7388,6 +8690,7 @@
               <a:defRPr sz="1800"/>
             </a:pPr>
             <a:r>
+              <a:rPr sz="1400"/>
               <a:t>    • Dünyanın en çok satan oyunu oldu</a:t>
             </a:r>
           </a:p>
@@ -7407,6 +8710,7 @@
               <a:defRPr sz="2000"/>
             </a:pPr>
             <a:r>
+              <a:rPr sz="1400"/>
               <a:t>📚 Duolingo:</a:t>
             </a:r>
           </a:p>
@@ -7418,6 +8722,7 @@
               <a:defRPr sz="1800"/>
             </a:pPr>
             <a:r>
+              <a:rPr sz="1400"/>
               <a:t>    • Başlangıç: Ücretsiz dil öğrenme</a:t>
             </a:r>
           </a:p>
@@ -7429,6 +8734,7 @@
               <a:defRPr sz="1800"/>
             </a:pPr>
             <a:r>
+              <a:rPr sz="1400"/>
               <a:t>    • İhtiyaç: Eğlenceli dil eğitimi</a:t>
             </a:r>
           </a:p>
@@ -7440,6 +8746,7 @@
               <a:defRPr sz="1800"/>
             </a:pPr>
             <a:r>
+              <a:rPr sz="1400"/>
               <a:t>    • 500 milyondan fazla kullanıcı</a:t>
             </a:r>
           </a:p>
@@ -7459,6 +8766,7 @@
               <a:defRPr sz="2000"/>
             </a:pPr>
             <a:r>
+              <a:rPr sz="1400"/>
               <a:t>🐦 Twitter (X):</a:t>
             </a:r>
           </a:p>
@@ -7470,6 +8778,7 @@
               <a:defRPr sz="1800"/>
             </a:pPr>
             <a:r>
+              <a:rPr sz="1400"/>
               <a:t>    • Başlangıç: Kısa mesajlaşma platformu</a:t>
             </a:r>
           </a:p>
@@ -7481,6 +8790,7 @@
               <a:defRPr sz="1800"/>
             </a:pPr>
             <a:r>
+              <a:rPr sz="1400"/>
               <a:t>    • İhtiyaç: Hızlı fikir paylaşımı</a:t>
             </a:r>
           </a:p>
@@ -7500,6 +8810,7 @@
               <a:defRPr sz="2000" b="1"/>
             </a:pPr>
             <a:r>
+              <a:rPr sz="1400"/>
               <a:t>💡 Hepsi küçük fikirlerle başladı ve kullanıcı ihtiyacını çözdü!</a:t>
             </a:r>
           </a:p>
@@ -7598,6 +8909,7 @@
               <a:defRPr sz="2000"/>
             </a:pPr>
             <a:r>
+              <a:rPr sz="1600"/>
               <a:t>Şimdi öğrendiklerinizi uygulama zamanı!</a:t>
             </a:r>
           </a:p>
@@ -7617,6 +8929,7 @@
               <a:defRPr sz="2000" b="1"/>
             </a:pPr>
             <a:r>
+              <a:rPr sz="1600"/>
               <a:t>🎯 Proje Görevi:</a:t>
             </a:r>
           </a:p>
@@ -7628,6 +8941,7 @@
               <a:defRPr sz="2000"/>
             </a:pPr>
             <a:r>
+              <a:rPr sz="1600"/>
               <a:t>Grup olarak basit bir dijital ürün tasarlayın</a:t>
             </a:r>
           </a:p>
@@ -7647,6 +8961,7 @@
               <a:defRPr sz="2000" b="1"/>
             </a:pPr>
             <a:r>
+              <a:rPr sz="1600"/>
               <a:t>✅ Adımlar:</a:t>
             </a:r>
           </a:p>
@@ -7658,6 +8973,7 @@
               <a:defRPr sz="2000"/>
             </a:pPr>
             <a:r>
+              <a:rPr sz="1600"/>
               <a:t>1️⃣ Bir problem belirleyin (sınıfınızda, okulunuzda)</a:t>
             </a:r>
           </a:p>
@@ -7669,6 +8985,7 @@
               <a:defRPr sz="2000"/>
             </a:pPr>
             <a:r>
+              <a:rPr sz="1600"/>
               <a:t>2️⃣ Çözüm fikirleri geliştirin (beyin fırtınası)</a:t>
             </a:r>
           </a:p>
@@ -7680,6 +8997,7 @@
               <a:defRPr sz="2000"/>
             </a:pPr>
             <a:r>
+              <a:rPr sz="1600"/>
               <a:t>3️⃣ En iyi fikri seçin</a:t>
             </a:r>
           </a:p>
@@ -7691,6 +9009,7 @@
               <a:defRPr sz="2000"/>
             </a:pPr>
             <a:r>
+              <a:rPr sz="1600"/>
               <a:t>4️⃣ Kağıt prototip çizin (en az 3 ekran)</a:t>
             </a:r>
           </a:p>
@@ -7702,6 +9021,7 @@
               <a:defRPr sz="2000"/>
             </a:pPr>
             <a:r>
+              <a:rPr sz="1600"/>
               <a:t>5️⃣ Başka bir grupla test edin</a:t>
             </a:r>
           </a:p>
@@ -7713,6 +9033,7 @@
               <a:defRPr sz="2000"/>
             </a:pPr>
             <a:r>
+              <a:rPr sz="1600"/>
               <a:t>6️⃣ Geri bildirime göre iyileştirin</a:t>
             </a:r>
           </a:p>
@@ -7724,6 +9045,7 @@
               <a:defRPr sz="2000"/>
             </a:pPr>
             <a:r>
+              <a:rPr sz="1600"/>
               <a:t>7️⃣ Sınıfa sunun</a:t>
             </a:r>
           </a:p>
@@ -7743,6 +9065,7 @@
               <a:defRPr sz="2000" b="1"/>
             </a:pPr>
             <a:r>
+              <a:rPr sz="1600"/>
               <a:t>📌 Proje Önerileri:</a:t>
             </a:r>
           </a:p>
@@ -7754,6 +9077,7 @@
               <a:defRPr sz="1800"/>
             </a:pPr>
             <a:r>
+              <a:rPr sz="1600"/>
               <a:t>    • Eğitici oyun</a:t>
             </a:r>
           </a:p>
@@ -7765,6 +9089,7 @@
               <a:defRPr sz="1800"/>
             </a:pPr>
             <a:r>
+              <a:rPr sz="1600"/>
               <a:t>    • Ödev takip uygulaması</a:t>
             </a:r>
           </a:p>
@@ -7776,6 +9101,7 @@
               <a:defRPr sz="1800"/>
             </a:pPr>
             <a:r>
+              <a:rPr sz="1600"/>
               <a:t>    • Kitap öneri platformu</a:t>
             </a:r>
           </a:p>
@@ -7787,6 +9113,7 @@
               <a:defRPr sz="1800"/>
             </a:pPr>
             <a:r>
+              <a:rPr sz="1600"/>
               <a:t>    • Okul aktivite takvimi</a:t>
             </a:r>
           </a:p>
@@ -7806,6 +9133,7 @@
               <a:defRPr sz="2000"/>
             </a:pPr>
             <a:r>
+              <a:rPr sz="1600"/>
               <a:t>⏰ Süre: 2-3 hafta</a:t>
             </a:r>
           </a:p>
@@ -7904,6 +9232,7 @@
               <a:defRPr sz="2000"/>
             </a:pPr>
             <a:r>
+              <a:rPr sz="1600"/>
               <a:t>Bu ünitede neler öğrendik?</a:t>
             </a:r>
           </a:p>
@@ -7923,6 +9252,7 @@
               <a:defRPr sz="2000" b="1"/>
             </a:pPr>
             <a:r>
+              <a:rPr sz="1600"/>
               <a:t>✅ Proje ve Proje Yönetimi kavramları</a:t>
             </a:r>
           </a:p>
@@ -7934,6 +9264,7 @@
               <a:defRPr sz="2000" b="1"/>
             </a:pPr>
             <a:r>
+              <a:rPr sz="1600"/>
               <a:t>✅ Dijital ürün nedir, örnekleri</a:t>
             </a:r>
           </a:p>
@@ -7945,6 +9276,7 @@
               <a:defRPr sz="2000" b="1"/>
             </a:pPr>
             <a:r>
+              <a:rPr sz="1600"/>
               <a:t>✅ Dijital ürün tasarım süreci:</a:t>
             </a:r>
           </a:p>
@@ -7956,6 +9288,7 @@
               <a:defRPr sz="1800"/>
             </a:pPr>
             <a:r>
+              <a:rPr sz="1600"/>
               <a:t>    • İhtiyaç analizi</a:t>
             </a:r>
           </a:p>
@@ -7967,6 +9300,7 @@
               <a:defRPr sz="1800"/>
             </a:pPr>
             <a:r>
+              <a:rPr sz="1600"/>
               <a:t>    • Fikir geliştirme</a:t>
             </a:r>
           </a:p>
@@ -7978,6 +9312,7 @@
               <a:defRPr sz="1800"/>
             </a:pPr>
             <a:r>
+              <a:rPr sz="1600"/>
               <a:t>    • Tasarım</a:t>
             </a:r>
           </a:p>
@@ -7989,6 +9324,7 @@
               <a:defRPr sz="1800"/>
             </a:pPr>
             <a:r>
+              <a:rPr sz="1600"/>
               <a:t>    • Prototip</a:t>
             </a:r>
           </a:p>
@@ -8000,6 +9336,7 @@
               <a:defRPr sz="1800"/>
             </a:pPr>
             <a:r>
+              <a:rPr sz="1600"/>
               <a:t>    • Test</a:t>
             </a:r>
           </a:p>
@@ -8011,6 +9348,7 @@
               <a:defRPr sz="1800"/>
             </a:pPr>
             <a:r>
+              <a:rPr sz="1600"/>
               <a:t>    • Geri bildirim</a:t>
             </a:r>
           </a:p>
@@ -8022,6 +9360,7 @@
               <a:defRPr sz="1800"/>
             </a:pPr>
             <a:r>
+              <a:rPr sz="1600"/>
               <a:t>    • Yayınlama</a:t>
             </a:r>
           </a:p>
@@ -8033,6 +9372,7 @@
               <a:defRPr sz="2000" b="1"/>
             </a:pPr>
             <a:r>
+              <a:rPr sz="1600"/>
               <a:t>✅ Kullanıcı deneyimi ve kullanılabilirlik</a:t>
             </a:r>
           </a:p>
@@ -8044,6 +9384,7 @@
               <a:defRPr sz="2000" b="1"/>
             </a:pPr>
             <a:r>
+              <a:rPr sz="1600"/>
               <a:t>✅ Proje planlama araçları</a:t>
             </a:r>
           </a:p>
@@ -8055,6 +9396,7 @@
               <a:defRPr sz="2000" b="1"/>
             </a:pPr>
             <a:r>
+              <a:rPr sz="1600"/>
               <a:t>✅ Takım çalışması ve roller</a:t>
             </a:r>
           </a:p>
@@ -8074,6 +9416,7 @@
               <a:defRPr sz="2000" b="1"/>
             </a:pPr>
             <a:r>
+              <a:rPr sz="1600"/>
               <a:t>💡 Anahtar Mesaj:</a:t>
             </a:r>
           </a:p>
@@ -8085,6 +9428,7 @@
               <a:defRPr sz="2000"/>
             </a:pPr>
             <a:r>
+              <a:rPr sz="1600"/>
               <a:t>Her büyük dijital ürün küçük bir fikirle başlar.</a:t>
             </a:r>
           </a:p>
@@ -8096,6 +9440,7 @@
               <a:defRPr sz="2000"/>
             </a:pPr>
             <a:r>
+              <a:rPr sz="1600"/>
               <a:t>Siz de kendi dijital ürününüzü tasarlayabilirsiniz!</a:t>
             </a:r>
           </a:p>
@@ -8115,6 +9460,7 @@
               <a:defRPr sz="2000" b="1"/>
             </a:pPr>
             <a:r>
+              <a:rPr sz="1600"/>
               <a:t>🎯 Artık küçük bir dijital ürün tasarımcısısınız!</a:t>
             </a:r>
           </a:p>
@@ -8437,6 +9783,7 @@
               <a:defRPr sz="2000"/>
             </a:pPr>
             <a:r>
+              <a:rPr sz="1400"/>
               <a:t>Daha fazla öğrenmek için:</a:t>
             </a:r>
           </a:p>
@@ -8456,6 +9803,7 @@
               <a:defRPr sz="2000"/>
             </a:pPr>
             <a:r>
+              <a:rPr sz="1400"/>
               <a:t>🎥 İzlenecek Videolar:</a:t>
             </a:r>
           </a:p>
@@ -8467,6 +9815,7 @@
               <a:defRPr sz="1800"/>
             </a:pPr>
             <a:r>
+              <a:rPr sz="1400"/>
               <a:t>    • 'Proje Yönetimi Nedir?' - TRT Okul</a:t>
             </a:r>
           </a:p>
@@ -8478,6 +9827,7 @@
               <a:defRPr sz="1800"/>
             </a:pPr>
             <a:r>
+              <a:rPr sz="1400"/>
               <a:t>    • 'Bir Mobil Uygulama Nasıl Yapılır?' - Scratch Türkiye</a:t>
             </a:r>
           </a:p>
@@ -8489,6 +9839,7 @@
               <a:defRPr sz="1800"/>
             </a:pPr>
             <a:r>
+              <a:rPr sz="1400"/>
               <a:t>    • 'Kullanıcı Deneyimi (UX) Nedir?' - YouTube</a:t>
             </a:r>
           </a:p>
@@ -8500,6 +9851,7 @@
               <a:defRPr sz="1800"/>
             </a:pPr>
             <a:r>
+              <a:rPr sz="1400"/>
               <a:t>    • 'Instagram'ın Hikayesi' - Belgesel</a:t>
             </a:r>
           </a:p>
@@ -8519,6 +9871,7 @@
               <a:defRPr sz="2000"/>
             </a:pPr>
             <a:r>
+              <a:rPr sz="1400"/>
               <a:t>🌐 Keşfedilecek Siteler:</a:t>
             </a:r>
           </a:p>
@@ -8530,6 +9883,7 @@
               <a:defRPr sz="1800"/>
             </a:pPr>
             <a:r>
+              <a:rPr sz="1400"/>
               <a:t>    • Scratch.mit.edu - Basit oyunlar tasarlayın</a:t>
             </a:r>
           </a:p>
@@ -8541,6 +9895,7 @@
               <a:defRPr sz="1800"/>
             </a:pPr>
             <a:r>
+              <a:rPr sz="1400"/>
               <a:t>    • Canva.com - Tasarım yapın</a:t>
             </a:r>
           </a:p>
@@ -8552,6 +9907,7 @@
               <a:defRPr sz="1800"/>
             </a:pPr>
             <a:r>
+              <a:rPr sz="1400"/>
               <a:t>    • Trello.com - Proje yönetimi</a:t>
             </a:r>
           </a:p>
@@ -8571,6 +9927,7 @@
               <a:defRPr sz="2000"/>
             </a:pPr>
             <a:r>
+              <a:rPr sz="1400"/>
               <a:t>📖 Deneyebileceğiniz Aktiviteler:</a:t>
             </a:r>
           </a:p>
@@ -8582,6 +9939,7 @@
               <a:defRPr sz="1800"/>
             </a:pPr>
             <a:r>
+              <a:rPr sz="1400"/>
               <a:t>    • Kağıt prototip çizme yarışması</a:t>
             </a:r>
           </a:p>
@@ -8593,6 +9951,7 @@
               <a:defRPr sz="1800"/>
             </a:pPr>
             <a:r>
+              <a:rPr sz="1400"/>
               <a:t>    • Sevdiğiniz uygulamaları analiz edin</a:t>
             </a:r>
           </a:p>
@@ -8604,6 +9963,7 @@
               <a:defRPr sz="1800"/>
             </a:pPr>
             <a:r>
+              <a:rPr sz="1400"/>
               <a:t>    • Mini bir Scratch projesi yapın</a:t>
             </a:r>
           </a:p>
@@ -8623,6 +9983,7 @@
               <a:defRPr sz="2000" b="1"/>
             </a:pPr>
             <a:r>
+              <a:rPr sz="1400"/>
               <a:t>💡 Meraklı sorularınızı sorun!</a:t>
             </a:r>
           </a:p>
@@ -8634,6 +9995,7 @@
               <a:defRPr sz="2000"/>
             </a:pPr>
             <a:r>
+              <a:rPr sz="1400"/>
               <a:t>Her soru yeni bir öğrenme fırsatıdır.</a:t>
             </a:r>
           </a:p>
@@ -8828,6 +10190,7 @@
               <a:defRPr sz="2000" b="1"/>
             </a:pPr>
             <a:r>
+              <a:rPr sz="1600"/>
               <a:t>🎯 Tanım:</a:t>
             </a:r>
           </a:p>
@@ -8839,6 +10202,7 @@
               <a:defRPr sz="2000"/>
             </a:pPr>
             <a:r>
+              <a:rPr sz="1600"/>
               <a:t>Proje = Belirli bir hedefe ulaşmak için yapılan planlı çalışma</a:t>
             </a:r>
           </a:p>
@@ -8858,6 +10222,7 @@
               <a:defRPr sz="2000" b="1"/>
             </a:pPr>
             <a:r>
+              <a:rPr sz="1600"/>
               <a:t>✅ Projenin Özellikleri:</a:t>
             </a:r>
           </a:p>
@@ -8869,6 +10234,7 @@
               <a:defRPr sz="1800"/>
             </a:pPr>
             <a:r>
+              <a:rPr sz="1600"/>
               <a:t>    • Başlangıç ve bitiş tarihi vardır</a:t>
             </a:r>
           </a:p>
@@ -8880,6 +10246,7 @@
               <a:defRPr sz="1800"/>
             </a:pPr>
             <a:r>
+              <a:rPr sz="1600"/>
               <a:t>    • Belirli bir amacı vardır</a:t>
             </a:r>
           </a:p>
@@ -8891,6 +10258,7 @@
               <a:defRPr sz="1800"/>
             </a:pPr>
             <a:r>
+              <a:rPr sz="1600"/>
               <a:t>    • Kaynaklar kullanır (zaman, para, insan)</a:t>
             </a:r>
           </a:p>
@@ -8902,6 +10270,7 @@
               <a:defRPr sz="1800"/>
             </a:pPr>
             <a:r>
+              <a:rPr sz="1600"/>
               <a:t>    • Özgün bir ürün veya hizmet ortaya çıkarır</a:t>
             </a:r>
           </a:p>
@@ -8921,6 +10290,7 @@
               <a:defRPr sz="2000" b="1"/>
             </a:pPr>
             <a:r>
+              <a:rPr sz="1600"/>
               <a:t>📌 Günlük Hayattan Örnekler:</a:t>
             </a:r>
           </a:p>
@@ -8932,6 +10302,7 @@
               <a:defRPr sz="1800"/>
             </a:pPr>
             <a:r>
+              <a:rPr sz="1600"/>
               <a:t>    • Doğum günü partisi organizasyonu</a:t>
             </a:r>
           </a:p>
@@ -8943,6 +10314,7 @@
               <a:defRPr sz="1800"/>
             </a:pPr>
             <a:r>
+              <a:rPr sz="1600"/>
               <a:t>    • Okul sergisi hazırlığı</a:t>
             </a:r>
           </a:p>
@@ -8954,6 +10326,7 @@
               <a:defRPr sz="1800"/>
             </a:pPr>
             <a:r>
+              <a:rPr sz="1600"/>
               <a:t>    • Bahçeye çiçek dikme projesi</a:t>
             </a:r>
           </a:p>
@@ -8965,6 +10338,7 @@
               <a:defRPr sz="1800"/>
             </a:pPr>
             <a:r>
+              <a:rPr sz="1600"/>
               <a:t>    • Mobil uygulama geliştirme</a:t>
             </a:r>
           </a:p>
@@ -8984,6 +10358,7 @@
               <a:defRPr sz="2000" b="1"/>
             </a:pPr>
             <a:r>
+              <a:rPr sz="1600"/>
               <a:t>💡 Her proje benzersizdir ve bir kez yapılır!</a:t>
             </a:r>
           </a:p>
@@ -9374,6 +10749,7 @@
               <a:defRPr sz="2000" b="1"/>
             </a:pPr>
             <a:r>
+              <a:rPr sz="1600"/>
               <a:t>🎯 Tanım:</a:t>
             </a:r>
           </a:p>
@@ -9385,6 +10761,7 @@
               <a:defRPr sz="2000"/>
             </a:pPr>
             <a:r>
+              <a:rPr sz="1600"/>
               <a:t>Dijital ürün = Bilgisayar, telefon veya tablet gibi cihazlarda kullanılan ürünler</a:t>
             </a:r>
           </a:p>
@@ -9404,6 +10781,7 @@
               <a:defRPr sz="2000" b="1"/>
             </a:pPr>
             <a:r>
+              <a:rPr sz="1600"/>
               <a:t>✅ Dijital Ürün Örnekleri:</a:t>
             </a:r>
           </a:p>
@@ -9423,6 +10801,7 @@
               <a:defRPr sz="2000"/>
             </a:pPr>
             <a:r>
+              <a:rPr sz="1600"/>
               <a:t>📱 Mobil Uygulamalar:</a:t>
             </a:r>
           </a:p>
@@ -9434,6 +10813,7 @@
               <a:defRPr sz="1800"/>
             </a:pPr>
             <a:r>
+              <a:rPr sz="1600"/>
               <a:t>    • WhatsApp, Instagram, TikTok</a:t>
             </a:r>
           </a:p>
@@ -9445,6 +10825,7 @@
               <a:defRPr sz="1800"/>
             </a:pPr>
             <a:r>
+              <a:rPr sz="1600"/>
               <a:t>    • Oyun uygulamaları (Subway Surfers, Roblox)</a:t>
             </a:r>
           </a:p>
@@ -9456,6 +10837,7 @@
               <a:defRPr sz="1800"/>
             </a:pPr>
             <a:r>
+              <a:rPr sz="1600"/>
               <a:t>    • Eğitim uygulamaları (Morpa Kampüs, EBA)</a:t>
             </a:r>
           </a:p>
@@ -9475,6 +10857,7 @@
               <a:defRPr sz="2000"/>
             </a:pPr>
             <a:r>
+              <a:rPr sz="1600"/>
               <a:t>🌐 Web Siteleri:</a:t>
             </a:r>
           </a:p>
@@ -9486,6 +10869,7 @@
               <a:defRPr sz="1800"/>
             </a:pPr>
             <a:r>
+              <a:rPr sz="1600"/>
               <a:t>    • YouTube, Google, Wikipedia</a:t>
             </a:r>
           </a:p>
@@ -9497,6 +10881,7 @@
               <a:defRPr sz="1800"/>
             </a:pPr>
             <a:r>
+              <a:rPr sz="1600"/>
               <a:t>    • Online oyunlar</a:t>
             </a:r>
           </a:p>
@@ -9516,6 +10901,7 @@
               <a:defRPr sz="2000"/>
             </a:pPr>
             <a:r>
+              <a:rPr sz="1600"/>
               <a:t>🎮 Dijital Oyunlar:</a:t>
             </a:r>
           </a:p>
@@ -9527,6 +10913,7 @@
               <a:defRPr sz="1800"/>
             </a:pPr>
             <a:r>
+              <a:rPr sz="1600"/>
               <a:t>    • Minecraft, Fortnite</a:t>
             </a:r>
           </a:p>
@@ -9546,6 +10933,7 @@
               <a:defRPr sz="2000"/>
             </a:pPr>
             <a:r>
+              <a:rPr sz="1600"/>
               <a:t>📚 E-kitaplar, Podcast'ler, Dijital Sanat</a:t>
             </a:r>
           </a:p>
@@ -9565,6 +10953,7 @@
               <a:defRPr sz="2000" b="1"/>
             </a:pPr>
             <a:r>
+              <a:rPr sz="1600"/>
               <a:t>💡 Fiziksel olmayan, elektronik cihazlarda çalışan her şey!</a:t>
             </a:r>
           </a:p>
@@ -9990,6 +11379,7 @@
               <a:defRPr sz="2000"/>
             </a:pPr>
             <a:r>
+              <a:rPr sz="1400"/>
               <a:t>En önemli adım: Hangi problemi çözeceğiz?</a:t>
             </a:r>
           </a:p>
@@ -10009,6 +11399,7 @@
               <a:defRPr sz="2000" b="1"/>
             </a:pPr>
             <a:r>
+              <a:rPr sz="1400"/>
               <a:t>✅ İhtiyaç Analizi Soruları:</a:t>
             </a:r>
           </a:p>
@@ -10020,6 +11411,7 @@
               <a:defRPr sz="1800"/>
             </a:pPr>
             <a:r>
+              <a:rPr sz="1400"/>
               <a:t>    • İnsanların hangi sorunu var?</a:t>
             </a:r>
           </a:p>
@@ -10031,6 +11423,7 @@
               <a:defRPr sz="1800"/>
             </a:pPr>
             <a:r>
+              <a:rPr sz="1400"/>
               <a:t>    • Bu sorunu kim yaşıyor?</a:t>
             </a:r>
           </a:p>
@@ -10042,6 +11435,7 @@
               <a:defRPr sz="1800"/>
             </a:pPr>
             <a:r>
+              <a:rPr sz="1400"/>
               <a:t>    • Sorun ne kadar önemli?</a:t>
             </a:r>
           </a:p>
@@ -10053,6 +11447,7 @@
               <a:defRPr sz="1800"/>
             </a:pPr>
             <a:r>
+              <a:rPr sz="1400"/>
               <a:t>    • Mevcut çözümler var mı? Yeterli mi?</a:t>
             </a:r>
           </a:p>
@@ -10072,6 +11467,7 @@
               <a:defRPr sz="2000" b="1"/>
             </a:pPr>
             <a:r>
+              <a:rPr sz="1400"/>
               <a:t>📌 Örnek Problemler:</a:t>
             </a:r>
           </a:p>
@@ -10083,6 +11479,7 @@
               <a:defRPr sz="1800"/>
             </a:pPr>
             <a:r>
+              <a:rPr sz="1400"/>
               <a:t>    • Öğrenciler matematik çalışırken zorlanıyor</a:t>
             </a:r>
           </a:p>
@@ -10094,6 +11491,7 @@
               <a:defRPr sz="1800"/>
             </a:pPr>
             <a:r>
+              <a:rPr sz="1400"/>
               <a:t>    • Çocuklar İngilizce kelime ezberlemekte sıkılıyor</a:t>
             </a:r>
           </a:p>
@@ -10105,6 +11503,7 @@
               <a:defRPr sz="1800"/>
             </a:pPr>
             <a:r>
+              <a:rPr sz="1400"/>
               <a:t>    • Küçük kardeşim zamanını planlamayı bilmiyor</a:t>
             </a:r>
           </a:p>
@@ -10116,6 +11515,7 @@
               <a:defRPr sz="1800"/>
             </a:pPr>
             <a:r>
+              <a:rPr sz="1400"/>
               <a:t>    • Arkadaşlar hangi oyunu oynayacağına karar veremiyor</a:t>
             </a:r>
           </a:p>
@@ -10135,6 +11535,7 @@
               <a:defRPr sz="2000" b="1"/>
             </a:pPr>
             <a:r>
+              <a:rPr sz="1400"/>
               <a:t>💡 İyi bir problem tanımı = Başarılı ürünün yarısı!</a:t>
             </a:r>
           </a:p>
@@ -10154,6 +11555,7 @@
               <a:defRPr sz="2000" b="1"/>
             </a:pPr>
             <a:r>
+              <a:rPr sz="1400"/>
               <a:t>🎯 Etkinlik: Sınıfta karşılaştığınız 3 problemi listeleyin</a:t>
             </a:r>
           </a:p>
@@ -10252,6 +11654,7 @@
               <a:defRPr sz="2000"/>
             </a:pPr>
             <a:r>
+              <a:rPr sz="1400"/>
               <a:t>Problem belirlendi, şimdi çözüm zamanı!</a:t>
             </a:r>
           </a:p>
@@ -10271,6 +11674,7 @@
               <a:defRPr sz="2000" b="1"/>
             </a:pPr>
             <a:r>
+              <a:rPr sz="1400"/>
               <a:t>✅ Fikir Geliştirme Yöntemleri:</a:t>
             </a:r>
           </a:p>
@@ -10290,6 +11694,7 @@
               <a:defRPr sz="2000"/>
             </a:pPr>
             <a:r>
+              <a:rPr sz="1400"/>
               <a:t>🧠 Beyin Fırtınası (Brainstorming):</a:t>
             </a:r>
           </a:p>
@@ -10301,6 +11706,7 @@
               <a:defRPr sz="1800"/>
             </a:pPr>
             <a:r>
+              <a:rPr sz="1400"/>
               <a:t>    • Tüm fikirleri söyleyin</a:t>
             </a:r>
           </a:p>
@@ -10312,6 +11718,7 @@
               <a:defRPr sz="1800"/>
             </a:pPr>
             <a:r>
+              <a:rPr sz="1400"/>
               <a:t>    • Eleştirmeyin, not alın</a:t>
             </a:r>
           </a:p>
@@ -10323,6 +11730,7 @@
               <a:defRPr sz="1800"/>
             </a:pPr>
             <a:r>
+              <a:rPr sz="1400"/>
               <a:t>    • Çılgın fikirler de olabilir!</a:t>
             </a:r>
           </a:p>
@@ -10342,6 +11750,7 @@
               <a:defRPr sz="2000"/>
             </a:pPr>
             <a:r>
+              <a:rPr sz="1400"/>
               <a:t>🗣️ Kullanıcı Görüşleri:</a:t>
             </a:r>
           </a:p>
@@ -10353,6 +11762,7 @@
               <a:defRPr sz="1800"/>
             </a:pPr>
             <a:r>
+              <a:rPr sz="1400"/>
               <a:t>    • Problemi yaşayan kişilerle konuşun</a:t>
             </a:r>
           </a:p>
@@ -10364,6 +11774,7 @@
               <a:defRPr sz="1800"/>
             </a:pPr>
             <a:r>
+              <a:rPr sz="1400"/>
               <a:t>    • Ne isterler? Ne işe yarar?</a:t>
             </a:r>
           </a:p>
@@ -10383,6 +11794,7 @@
               <a:defRPr sz="2000"/>
             </a:pPr>
             <a:r>
+              <a:rPr sz="1400"/>
               <a:t>🔍 Mevcut Ürünleri İnceleme:</a:t>
             </a:r>
           </a:p>
@@ -10394,6 +11806,7 @@
               <a:defRPr sz="1800"/>
             </a:pPr>
             <a:r>
+              <a:rPr sz="1400"/>
               <a:t>    • Benzer ürünler var mı?</a:t>
             </a:r>
           </a:p>
@@ -10405,6 +11818,7 @@
               <a:defRPr sz="1800"/>
             </a:pPr>
             <a:r>
+              <a:rPr sz="1400"/>
               <a:t>    • Onların eksiği ne?</a:t>
             </a:r>
           </a:p>
@@ -10416,6 +11830,7 @@
               <a:defRPr sz="1800"/>
             </a:pPr>
             <a:r>
+              <a:rPr sz="1400"/>
               <a:t>    • Nasıl daha iyi yapabiliriz?</a:t>
             </a:r>
           </a:p>
@@ -10435,6 +11850,7 @@
               <a:defRPr sz="2000" b="1"/>
             </a:pPr>
             <a:r>
+              <a:rPr sz="1400"/>
               <a:t>📌 Örnek:</a:t>
             </a:r>
           </a:p>
@@ -10446,6 +11862,7 @@
               <a:defRPr sz="2000"/>
             </a:pPr>
             <a:r>
+              <a:rPr sz="1400"/>
               <a:t>Problem: İngilizce kelime ezberleme sıkıcı</a:t>
             </a:r>
           </a:p>
@@ -10457,6 +11874,7 @@
               <a:defRPr sz="2000"/>
             </a:pPr>
             <a:r>
+              <a:rPr sz="1400"/>
               <a:t>Çözüm Fikirleri:</a:t>
             </a:r>
           </a:p>
@@ -10468,6 +11886,7 @@
               <a:defRPr sz="1800"/>
             </a:pPr>
             <a:r>
+              <a:rPr sz="1400"/>
               <a:t>    • Oyunlaştırılmış kelime uygulaması</a:t>
             </a:r>
           </a:p>
@@ -10479,6 +11898,7 @@
               <a:defRPr sz="1800"/>
             </a:pPr>
             <a:r>
+              <a:rPr sz="1400"/>
               <a:t>    • Hikayelerle kelime öğrenme</a:t>
             </a:r>
           </a:p>
@@ -10490,6 +11910,7 @@
               <a:defRPr sz="1800"/>
             </a:pPr>
             <a:r>
+              <a:rPr sz="1400"/>
               <a:t>    • Günlük kelime yarışması</a:t>
             </a:r>
           </a:p>
@@ -10588,6 +12009,7 @@
               <a:defRPr sz="2000"/>
             </a:pPr>
             <a:r>
+              <a:rPr sz="1400"/>
               <a:t>Ürünümüz nasıl görünmeli? Nasıl kullanılmalı?</a:t>
             </a:r>
           </a:p>
@@ -10607,6 +12029,7 @@
               <a:defRPr sz="2000" b="1"/>
             </a:pPr>
             <a:r>
+              <a:rPr sz="1400"/>
               <a:t>✅ İyi Tasarımın Özellikleri:</a:t>
             </a:r>
           </a:p>
@@ -10626,6 +12049,7 @@
               <a:defRPr sz="2000"/>
             </a:pPr>
             <a:r>
+              <a:rPr sz="1400"/>
               <a:t>👁️ Görsel Tasarım:</a:t>
             </a:r>
           </a:p>
@@ -10637,6 +12061,7 @@
               <a:defRPr sz="1800"/>
             </a:pPr>
             <a:r>
+              <a:rPr sz="1400"/>
               <a:t>    • Renkler uyumlu olmalı</a:t>
             </a:r>
           </a:p>
@@ -10648,6 +12073,7 @@
               <a:defRPr sz="1800"/>
             </a:pPr>
             <a:r>
+              <a:rPr sz="1400"/>
               <a:t>    • Yazılar okunabilir olmalı</a:t>
             </a:r>
           </a:p>
@@ -10659,6 +12085,7 @@
               <a:defRPr sz="1800"/>
             </a:pPr>
             <a:r>
+              <a:rPr sz="1400"/>
               <a:t>    • Görseller çekici olmalı</a:t>
             </a:r>
           </a:p>
@@ -10678,6 +12105,7 @@
               <a:defRPr sz="2000"/>
             </a:pPr>
             <a:r>
+              <a:rPr sz="1400"/>
               <a:t>🖱️ Kullanılabilirlik:</a:t>
             </a:r>
           </a:p>
@@ -10689,6 +12117,7 @@
               <a:defRPr sz="1800"/>
             </a:pPr>
             <a:r>
+              <a:rPr sz="1400"/>
               <a:t>    • Kolay anlaşılır olmalı</a:t>
             </a:r>
           </a:p>
@@ -10700,6 +12129,7 @@
               <a:defRPr sz="1800"/>
             </a:pPr>
             <a:r>
+              <a:rPr sz="1400"/>
               <a:t>    • Hızlı öğrenilmeli</a:t>
             </a:r>
           </a:p>
@@ -10711,6 +12141,7 @@
               <a:defRPr sz="1800"/>
             </a:pPr>
             <a:r>
+              <a:rPr sz="1400"/>
               <a:t>    • Az tıklama ile işlem yapılmalı</a:t>
             </a:r>
           </a:p>
@@ -10730,6 +12161,7 @@
               <a:defRPr sz="2000"/>
             </a:pPr>
             <a:r>
+              <a:rPr sz="1400"/>
               <a:t>♿ Erişilebilirlik:</a:t>
             </a:r>
           </a:p>
@@ -10741,6 +12173,7 @@
               <a:defRPr sz="1800"/>
             </a:pPr>
             <a:r>
+              <a:rPr sz="1400"/>
               <a:t>    • Herkes kullanabilmeli (engelliler dahil)</a:t>
             </a:r>
           </a:p>
@@ -10752,6 +12185,7 @@
               <a:defRPr sz="1800"/>
             </a:pPr>
             <a:r>
+              <a:rPr sz="1400"/>
               <a:t>    • Farklı cihazlarda çalışmalı</a:t>
             </a:r>
           </a:p>
@@ -10771,6 +12205,7 @@
               <a:defRPr sz="2000" b="1"/>
             </a:pPr>
             <a:r>
+              <a:rPr sz="1400"/>
               <a:t>📌 Tasarım Araçları:</a:t>
             </a:r>
           </a:p>
@@ -10782,6 +12217,7 @@
               <a:defRPr sz="1800"/>
             </a:pPr>
             <a:r>
+              <a:rPr sz="1400"/>
               <a:t>    • Kağıt-kalem (eskiz)</a:t>
             </a:r>
           </a:p>
@@ -10793,6 +12229,7 @@
               <a:defRPr sz="1800"/>
             </a:pPr>
             <a:r>
+              <a:rPr sz="1400"/>
               <a:t>    • Canva, Figma (dijital tasarım)</a:t>
             </a:r>
           </a:p>
@@ -10804,6 +12241,7 @@
               <a:defRPr sz="1800"/>
             </a:pPr>
             <a:r>
+              <a:rPr sz="1400"/>
               <a:t>    • PowerPoint (prototip)</a:t>
             </a:r>
           </a:p>
@@ -10823,6 +12261,7 @@
               <a:defRPr sz="2000" b="1"/>
             </a:pPr>
             <a:r>
+              <a:rPr sz="1400"/>
               <a:t>💡 Kullanıcı deneyimi = Kullanıcının ürünü kullanırken hissettiği şey</a:t>
             </a:r>
           </a:p>

--- a/sunumlar/5-sinif-unite2-dijital-urun-tasarimi-DETAYLI.pptx
+++ b/sunumlar/5-sinif-unite2-dijital-urun-tasarimi-DETAYLI.pptx
@@ -5983,7 +5983,7 @@
           <a:noFill/>
         </p:spPr>
         <p:txBody>
-          <a:bodyPr wrap="none">
+          <a:bodyPr wrap="square">
             <a:spAutoFit/>
           </a:bodyPr>
           <a:lstStyle/>
@@ -6018,7 +6018,7 @@
           <a:noFill/>
         </p:spPr>
         <p:txBody>
-          <a:bodyPr wrap="none">
+          <a:bodyPr wrap="square">
             <a:spAutoFit/>
           </a:bodyPr>
           <a:lstStyle/>
@@ -6066,7 +6066,7 @@
         </p:nvSpPr>
         <p:spPr/>
         <p:txBody>
-          <a:bodyPr/>
+          <a:bodyPr wrap="square"/>
           <a:lstStyle/>
           <a:p>
             <a:pPr>
@@ -6120,256 +6120,334 @@
             <a:spAutoFit/>
           </a:bodyPr>
           <a:lstStyle/>
-          <a:p/>
-          <a:p>
-            <a:pPr>
-              <a:spcAft>
-                <a:spcPts val="1200"/>
-              </a:spcAft>
-              <a:defRPr sz="2000"/>
-            </a:pPr>
-            <a:r>
-              <a:rPr sz="1400"/>
+          <a:p>
+            <a:pPr>
+              <a:lnSpc>
+                <a:spcPct val="90000"/>
+              </a:lnSpc>
+              <a:spcAft>
+                <a:spcPts val="300"/>
+              </a:spcAft>
+            </a:pPr>
+          </a:p>
+          <a:p>
+            <a:pPr>
+              <a:lnSpc>
+                <a:spcPct val="90000"/>
+              </a:lnSpc>
+              <a:spcAft>
+                <a:spcPts val="300"/>
+              </a:spcAft>
+              <a:defRPr sz="2000"/>
+            </a:pPr>
+            <a:r>
+              <a:rPr sz="1300"/>
               <a:t>Prototip = Ürünün ilk deneme versiyonu</a:t>
             </a:r>
           </a:p>
           <a:p>
             <a:pPr>
-              <a:spcAft>
-                <a:spcPts val="1200"/>
-              </a:spcAft>
-              <a:defRPr sz="2000"/>
-            </a:pPr>
-          </a:p>
-          <a:p>
-            <a:pPr>
-              <a:spcAft>
-                <a:spcPts val="1200"/>
+              <a:lnSpc>
+                <a:spcPct val="90000"/>
+              </a:lnSpc>
+              <a:spcAft>
+                <a:spcPts val="300"/>
+              </a:spcAft>
+              <a:defRPr sz="2000"/>
+            </a:pPr>
+          </a:p>
+          <a:p>
+            <a:pPr>
+              <a:lnSpc>
+                <a:spcPct val="90000"/>
+              </a:lnSpc>
+              <a:spcAft>
+                <a:spcPts val="300"/>
               </a:spcAft>
               <a:defRPr sz="2000" b="1"/>
             </a:pPr>
             <a:r>
-              <a:rPr sz="1400"/>
+              <a:rPr sz="1300"/>
               <a:t>✅ Prototip Çeşitleri:</a:t>
             </a:r>
           </a:p>
           <a:p>
             <a:pPr>
-              <a:spcAft>
-                <a:spcPts val="1200"/>
-              </a:spcAft>
-              <a:defRPr sz="2000"/>
-            </a:pPr>
-          </a:p>
-          <a:p>
-            <a:pPr>
-              <a:spcAft>
-                <a:spcPts val="1200"/>
-              </a:spcAft>
-              <a:defRPr sz="2000"/>
-            </a:pPr>
-            <a:r>
-              <a:rPr sz="1400"/>
+              <a:lnSpc>
+                <a:spcPct val="90000"/>
+              </a:lnSpc>
+              <a:spcAft>
+                <a:spcPts val="300"/>
+              </a:spcAft>
+              <a:defRPr sz="2000"/>
+            </a:pPr>
+          </a:p>
+          <a:p>
+            <a:pPr>
+              <a:lnSpc>
+                <a:spcPct val="90000"/>
+              </a:lnSpc>
+              <a:spcAft>
+                <a:spcPts val="300"/>
+              </a:spcAft>
+              <a:defRPr sz="2000"/>
+            </a:pPr>
+            <a:r>
+              <a:rPr sz="1300"/>
               <a:t>📄 Kağıt Prototip (Düşük Kalite):</a:t>
             </a:r>
           </a:p>
           <a:p>
             <a:pPr lvl="1">
-              <a:spcAft>
-                <a:spcPts val="1200"/>
-              </a:spcAft>
-              <a:defRPr sz="1800"/>
-            </a:pPr>
-            <a:r>
-              <a:rPr sz="1400"/>
+              <a:lnSpc>
+                <a:spcPct val="90000"/>
+              </a:lnSpc>
+              <a:spcAft>
+                <a:spcPts val="300"/>
+              </a:spcAft>
+              <a:defRPr sz="1800"/>
+            </a:pPr>
+            <a:r>
+              <a:rPr sz="1300"/>
               <a:t>    • Kağıda çizilmiş ekranlar</a:t>
             </a:r>
           </a:p>
           <a:p>
             <a:pPr lvl="1">
-              <a:spcAft>
-                <a:spcPts val="1200"/>
-              </a:spcAft>
-              <a:defRPr sz="1800"/>
-            </a:pPr>
-            <a:r>
-              <a:rPr sz="1400"/>
+              <a:lnSpc>
+                <a:spcPct val="90000"/>
+              </a:lnSpc>
+              <a:spcAft>
+                <a:spcPts val="300"/>
+              </a:spcAft>
+              <a:defRPr sz="1800"/>
+            </a:pPr>
+            <a:r>
+              <a:rPr sz="1300"/>
               <a:t>    • Hızlı ve ucuz</a:t>
             </a:r>
           </a:p>
           <a:p>
             <a:pPr lvl="1">
-              <a:spcAft>
-                <a:spcPts val="1200"/>
-              </a:spcAft>
-              <a:defRPr sz="1800"/>
-            </a:pPr>
-            <a:r>
-              <a:rPr sz="1400"/>
+              <a:lnSpc>
+                <a:spcPct val="90000"/>
+              </a:lnSpc>
+              <a:spcAft>
+                <a:spcPts val="300"/>
+              </a:spcAft>
+              <a:defRPr sz="1800"/>
+            </a:pPr>
+            <a:r>
+              <a:rPr sz="1300"/>
               <a:t>    • İlk fikirleri test etmek için</a:t>
             </a:r>
           </a:p>
           <a:p>
             <a:pPr>
-              <a:spcAft>
-                <a:spcPts val="1200"/>
-              </a:spcAft>
-              <a:defRPr sz="2000"/>
-            </a:pPr>
-          </a:p>
-          <a:p>
-            <a:pPr>
-              <a:spcAft>
-                <a:spcPts val="1200"/>
-              </a:spcAft>
-              <a:defRPr sz="2000"/>
-            </a:pPr>
-            <a:r>
-              <a:rPr sz="1400"/>
+              <a:lnSpc>
+                <a:spcPct val="90000"/>
+              </a:lnSpc>
+              <a:spcAft>
+                <a:spcPts val="300"/>
+              </a:spcAft>
+              <a:defRPr sz="2000"/>
+            </a:pPr>
+          </a:p>
+          <a:p>
+            <a:pPr>
+              <a:lnSpc>
+                <a:spcPct val="90000"/>
+              </a:lnSpc>
+              <a:spcAft>
+                <a:spcPts val="300"/>
+              </a:spcAft>
+              <a:defRPr sz="2000"/>
+            </a:pPr>
+            <a:r>
+              <a:rPr sz="1300"/>
               <a:t>💻 Dijital Prototip (Yüksek Kalite):</a:t>
             </a:r>
           </a:p>
           <a:p>
             <a:pPr lvl="1">
-              <a:spcAft>
-                <a:spcPts val="1200"/>
-              </a:spcAft>
-              <a:defRPr sz="1800"/>
-            </a:pPr>
-            <a:r>
-              <a:rPr sz="1400"/>
+              <a:lnSpc>
+                <a:spcPct val="90000"/>
+              </a:lnSpc>
+              <a:spcAft>
+                <a:spcPts val="300"/>
+              </a:spcAft>
+              <a:defRPr sz="1800"/>
+            </a:pPr>
+            <a:r>
+              <a:rPr sz="1300"/>
               <a:t>    • Bilgisayarda tasarlanan mockup</a:t>
             </a:r>
           </a:p>
           <a:p>
             <a:pPr lvl="1">
-              <a:spcAft>
-                <a:spcPts val="1200"/>
-              </a:spcAft>
-              <a:defRPr sz="1800"/>
-            </a:pPr>
-            <a:r>
-              <a:rPr sz="1400"/>
+              <a:lnSpc>
+                <a:spcPct val="90000"/>
+              </a:lnSpc>
+              <a:spcAft>
+                <a:spcPts val="300"/>
+              </a:spcAft>
+              <a:defRPr sz="1800"/>
+            </a:pPr>
+            <a:r>
+              <a:rPr sz="1300"/>
               <a:t>    • Daha gerçekçi</a:t>
             </a:r>
           </a:p>
           <a:p>
             <a:pPr lvl="1">
-              <a:spcAft>
-                <a:spcPts val="1200"/>
-              </a:spcAft>
-              <a:defRPr sz="1800"/>
-            </a:pPr>
-            <a:r>
-              <a:rPr sz="1400"/>
+              <a:lnSpc>
+                <a:spcPct val="90000"/>
+              </a:lnSpc>
+              <a:spcAft>
+                <a:spcPts val="300"/>
+              </a:spcAft>
+              <a:defRPr sz="1800"/>
+            </a:pPr>
+            <a:r>
+              <a:rPr sz="1300"/>
               <a:t>    • PowerPoint, Canva, Figma ile yapılabilir</a:t>
             </a:r>
           </a:p>
           <a:p>
             <a:pPr>
-              <a:spcAft>
-                <a:spcPts val="1200"/>
-              </a:spcAft>
-              <a:defRPr sz="2000"/>
-            </a:pPr>
-          </a:p>
-          <a:p>
-            <a:pPr>
-              <a:spcAft>
-                <a:spcPts val="1200"/>
+              <a:lnSpc>
+                <a:spcPct val="90000"/>
+              </a:lnSpc>
+              <a:spcAft>
+                <a:spcPts val="300"/>
+              </a:spcAft>
+              <a:defRPr sz="2000"/>
+            </a:pPr>
+          </a:p>
+          <a:p>
+            <a:pPr>
+              <a:lnSpc>
+                <a:spcPct val="90000"/>
+              </a:lnSpc>
+              <a:spcAft>
+                <a:spcPts val="300"/>
               </a:spcAft>
               <a:defRPr sz="2000" b="1"/>
             </a:pPr>
             <a:r>
-              <a:rPr sz="1400"/>
+              <a:rPr sz="1300"/>
               <a:t>📌 Prototipte Olması Gerekenler:</a:t>
             </a:r>
           </a:p>
           <a:p>
             <a:pPr lvl="1">
-              <a:spcAft>
-                <a:spcPts val="1200"/>
-              </a:spcAft>
-              <a:defRPr sz="1800"/>
-            </a:pPr>
-            <a:r>
-              <a:rPr sz="1400"/>
+              <a:lnSpc>
+                <a:spcPct val="90000"/>
+              </a:lnSpc>
+              <a:spcAft>
+                <a:spcPts val="300"/>
+              </a:spcAft>
+              <a:defRPr sz="1800"/>
+            </a:pPr>
+            <a:r>
+              <a:rPr sz="1300"/>
               <a:t>    • Ana ekranlar</a:t>
             </a:r>
           </a:p>
           <a:p>
             <a:pPr lvl="1">
-              <a:spcAft>
-                <a:spcPts val="1200"/>
-              </a:spcAft>
-              <a:defRPr sz="1800"/>
-            </a:pPr>
-            <a:r>
-              <a:rPr sz="1400"/>
+              <a:lnSpc>
+                <a:spcPct val="90000"/>
+              </a:lnSpc>
+              <a:spcAft>
+                <a:spcPts val="300"/>
+              </a:spcAft>
+              <a:defRPr sz="1800"/>
+            </a:pPr>
+            <a:r>
+              <a:rPr sz="1300"/>
               <a:t>    • Temel özellikler</a:t>
             </a:r>
           </a:p>
           <a:p>
             <a:pPr lvl="1">
-              <a:spcAft>
-                <a:spcPts val="1200"/>
-              </a:spcAft>
-              <a:defRPr sz="1800"/>
-            </a:pPr>
-            <a:r>
-              <a:rPr sz="1400"/>
+              <a:lnSpc>
+                <a:spcPct val="90000"/>
+              </a:lnSpc>
+              <a:spcAft>
+                <a:spcPts val="300"/>
+              </a:spcAft>
+              <a:defRPr sz="1800"/>
+            </a:pPr>
+            <a:r>
+              <a:rPr sz="1300"/>
               <a:t>    • Navigasyon (geçiş) sistemi</a:t>
             </a:r>
           </a:p>
           <a:p>
             <a:pPr>
-              <a:spcAft>
-                <a:spcPts val="1200"/>
-              </a:spcAft>
-              <a:defRPr sz="2000"/>
-            </a:pPr>
-          </a:p>
-          <a:p>
-            <a:pPr>
-              <a:spcAft>
-                <a:spcPts val="1200"/>
+              <a:lnSpc>
+                <a:spcPct val="90000"/>
+              </a:lnSpc>
+              <a:spcAft>
+                <a:spcPts val="300"/>
+              </a:spcAft>
+              <a:defRPr sz="2000"/>
+            </a:pPr>
+          </a:p>
+          <a:p>
+            <a:pPr>
+              <a:lnSpc>
+                <a:spcPct val="90000"/>
+              </a:lnSpc>
+              <a:spcAft>
+                <a:spcPts val="300"/>
               </a:spcAft>
               <a:defRPr sz="2000" b="1"/>
             </a:pPr>
             <a:r>
-              <a:rPr sz="1400"/>
+              <a:rPr sz="1300"/>
               <a:t>💡 Prototip mükemmel olmak zorunda değil!</a:t>
             </a:r>
           </a:p>
           <a:p>
             <a:pPr>
-              <a:spcAft>
-                <a:spcPts val="1200"/>
-              </a:spcAft>
-              <a:defRPr sz="2000"/>
-            </a:pPr>
-            <a:r>
-              <a:rPr sz="1400"/>
+              <a:lnSpc>
+                <a:spcPct val="90000"/>
+              </a:lnSpc>
+              <a:spcAft>
+                <a:spcPts val="300"/>
+              </a:spcAft>
+              <a:defRPr sz="2000"/>
+            </a:pPr>
+            <a:r>
+              <a:rPr sz="1300"/>
               <a:t>Amaç: Fikri görmek ve test etmek</a:t>
             </a:r>
           </a:p>
           <a:p>
             <a:pPr>
-              <a:spcAft>
-                <a:spcPts val="1200"/>
-              </a:spcAft>
-              <a:defRPr sz="2000"/>
-            </a:pPr>
-          </a:p>
-          <a:p>
-            <a:pPr>
-              <a:spcAft>
-                <a:spcPts val="1200"/>
+              <a:lnSpc>
+                <a:spcPct val="90000"/>
+              </a:lnSpc>
+              <a:spcAft>
+                <a:spcPts val="300"/>
+              </a:spcAft>
+              <a:defRPr sz="2000"/>
+            </a:pPr>
+          </a:p>
+          <a:p>
+            <a:pPr>
+              <a:lnSpc>
+                <a:spcPct val="90000"/>
+              </a:lnSpc>
+              <a:spcAft>
+                <a:spcPts val="300"/>
               </a:spcAft>
               <a:defRPr sz="2000" b="1"/>
             </a:pPr>
             <a:r>
-              <a:rPr sz="1400"/>
+              <a:rPr sz="1300"/>
               <a:t>🎯 Etkinlik: Kağıda mobil uygulama ekranı çizin</a:t>
             </a:r>
           </a:p>
@@ -6405,7 +6483,7 @@
         </p:nvSpPr>
         <p:spPr/>
         <p:txBody>
-          <a:bodyPr/>
+          <a:bodyPr wrap="square"/>
           <a:lstStyle/>
           <a:p>
             <a:pPr>
@@ -6459,292 +6537,379 @@
             <a:spAutoFit/>
           </a:bodyPr>
           <a:lstStyle/>
-          <a:p/>
-          <a:p>
-            <a:pPr>
-              <a:spcAft>
-                <a:spcPts val="1200"/>
-              </a:spcAft>
-              <a:defRPr sz="2000"/>
-            </a:pPr>
-            <a:r>
-              <a:rPr sz="1400"/>
+          <a:p>
+            <a:pPr>
+              <a:lnSpc>
+                <a:spcPct val="90000"/>
+              </a:lnSpc>
+              <a:spcAft>
+                <a:spcPts val="300"/>
+              </a:spcAft>
+            </a:pPr>
+          </a:p>
+          <a:p>
+            <a:pPr>
+              <a:lnSpc>
+                <a:spcPct val="90000"/>
+              </a:lnSpc>
+              <a:spcAft>
+                <a:spcPts val="300"/>
+              </a:spcAft>
+              <a:defRPr sz="2000"/>
+            </a:pPr>
+            <a:r>
+              <a:rPr sz="1300"/>
               <a:t>Prototip hazır! Şimdi test zamanı!</a:t>
             </a:r>
           </a:p>
           <a:p>
             <a:pPr>
-              <a:spcAft>
-                <a:spcPts val="1200"/>
-              </a:spcAft>
-              <a:defRPr sz="2000"/>
-            </a:pPr>
-          </a:p>
-          <a:p>
-            <a:pPr>
-              <a:spcAft>
-                <a:spcPts val="1200"/>
+              <a:lnSpc>
+                <a:spcPct val="90000"/>
+              </a:lnSpc>
+              <a:spcAft>
+                <a:spcPts val="300"/>
+              </a:spcAft>
+              <a:defRPr sz="2000"/>
+            </a:pPr>
+          </a:p>
+          <a:p>
+            <a:pPr>
+              <a:lnSpc>
+                <a:spcPct val="90000"/>
+              </a:lnSpc>
+              <a:spcAft>
+                <a:spcPts val="300"/>
               </a:spcAft>
               <a:defRPr sz="2000" b="1"/>
             </a:pPr>
             <a:r>
-              <a:rPr sz="1400"/>
+              <a:rPr sz="1300"/>
               <a:t>✅ Test Etme Yöntemleri:</a:t>
             </a:r>
           </a:p>
           <a:p>
             <a:pPr>
-              <a:spcAft>
-                <a:spcPts val="1200"/>
-              </a:spcAft>
-              <a:defRPr sz="2000"/>
-            </a:pPr>
-          </a:p>
-          <a:p>
-            <a:pPr>
-              <a:spcAft>
-                <a:spcPts val="1200"/>
-              </a:spcAft>
-              <a:defRPr sz="2000"/>
-            </a:pPr>
-            <a:r>
-              <a:rPr sz="1400"/>
+              <a:lnSpc>
+                <a:spcPct val="90000"/>
+              </a:lnSpc>
+              <a:spcAft>
+                <a:spcPts val="300"/>
+              </a:spcAft>
+              <a:defRPr sz="2000"/>
+            </a:pPr>
+          </a:p>
+          <a:p>
+            <a:pPr>
+              <a:lnSpc>
+                <a:spcPct val="90000"/>
+              </a:lnSpc>
+              <a:spcAft>
+                <a:spcPts val="300"/>
+              </a:spcAft>
+              <a:defRPr sz="2000"/>
+            </a:pPr>
+            <a:r>
+              <a:rPr sz="1300"/>
               <a:t>👥 Kullanıcı Testleri:</a:t>
             </a:r>
           </a:p>
           <a:p>
             <a:pPr lvl="1">
-              <a:spcAft>
-                <a:spcPts val="1200"/>
-              </a:spcAft>
-              <a:defRPr sz="1800"/>
-            </a:pPr>
-            <a:r>
-              <a:rPr sz="1400"/>
+              <a:lnSpc>
+                <a:spcPct val="90000"/>
+              </a:lnSpc>
+              <a:spcAft>
+                <a:spcPts val="300"/>
+              </a:spcAft>
+              <a:defRPr sz="1800"/>
+            </a:pPr>
+            <a:r>
+              <a:rPr sz="1300"/>
               <a:t>    • Hedef kitleye prototipi gösterin</a:t>
             </a:r>
           </a:p>
           <a:p>
             <a:pPr lvl="1">
-              <a:spcAft>
-                <a:spcPts val="1200"/>
-              </a:spcAft>
-              <a:defRPr sz="1800"/>
-            </a:pPr>
-            <a:r>
-              <a:rPr sz="1400"/>
+              <a:lnSpc>
+                <a:spcPct val="90000"/>
+              </a:lnSpc>
+              <a:spcAft>
+                <a:spcPts val="300"/>
+              </a:spcAft>
+              <a:defRPr sz="1800"/>
+            </a:pPr>
+            <a:r>
+              <a:rPr sz="1300"/>
               <a:t>    • Onları kullanırken izleyin</a:t>
             </a:r>
           </a:p>
           <a:p>
             <a:pPr lvl="1">
-              <a:spcAft>
-                <a:spcPts val="1200"/>
-              </a:spcAft>
-              <a:defRPr sz="1800"/>
-            </a:pPr>
-            <a:r>
-              <a:rPr sz="1400"/>
+              <a:lnSpc>
+                <a:spcPct val="90000"/>
+              </a:lnSpc>
+              <a:spcAft>
+                <a:spcPts val="300"/>
+              </a:spcAft>
+              <a:defRPr sz="1800"/>
+            </a:pPr>
+            <a:r>
+              <a:rPr sz="1300"/>
               <a:t>    • Nerede zorlanıyorlar?</a:t>
             </a:r>
           </a:p>
           <a:p>
             <a:pPr>
-              <a:spcAft>
-                <a:spcPts val="1200"/>
-              </a:spcAft>
-              <a:defRPr sz="2000"/>
-            </a:pPr>
-          </a:p>
-          <a:p>
-            <a:pPr>
-              <a:spcAft>
-                <a:spcPts val="1200"/>
-              </a:spcAft>
-              <a:defRPr sz="2000"/>
-            </a:pPr>
-            <a:r>
-              <a:rPr sz="1400"/>
+              <a:lnSpc>
+                <a:spcPct val="90000"/>
+              </a:lnSpc>
+              <a:spcAft>
+                <a:spcPts val="300"/>
+              </a:spcAft>
+              <a:defRPr sz="2000"/>
+            </a:pPr>
+          </a:p>
+          <a:p>
+            <a:pPr>
+              <a:lnSpc>
+                <a:spcPct val="90000"/>
+              </a:lnSpc>
+              <a:spcAft>
+                <a:spcPts val="300"/>
+              </a:spcAft>
+              <a:defRPr sz="2000"/>
+            </a:pPr>
+            <a:r>
+              <a:rPr sz="1300"/>
               <a:t>❓ Sorular Sorun:</a:t>
             </a:r>
           </a:p>
           <a:p>
             <a:pPr lvl="1">
-              <a:spcAft>
-                <a:spcPts val="1200"/>
-              </a:spcAft>
-              <a:defRPr sz="1800"/>
-            </a:pPr>
-            <a:r>
-              <a:rPr sz="1400"/>
+              <a:lnSpc>
+                <a:spcPct val="90000"/>
+              </a:lnSpc>
+              <a:spcAft>
+                <a:spcPts val="300"/>
+              </a:spcAft>
+              <a:defRPr sz="1800"/>
+            </a:pPr>
+            <a:r>
+              <a:rPr sz="1300"/>
               <a:t>    • Ürün anlaşılıyor mu?</a:t>
             </a:r>
           </a:p>
           <a:p>
             <a:pPr lvl="1">
-              <a:spcAft>
-                <a:spcPts val="1200"/>
-              </a:spcAft>
-              <a:defRPr sz="1800"/>
-            </a:pPr>
-            <a:r>
-              <a:rPr sz="1400"/>
+              <a:lnSpc>
+                <a:spcPct val="90000"/>
+              </a:lnSpc>
+              <a:spcAft>
+                <a:spcPts val="300"/>
+              </a:spcAft>
+              <a:defRPr sz="1800"/>
+            </a:pPr>
+            <a:r>
+              <a:rPr sz="1300"/>
               <a:t>    • Kullanmak kolay mı?</a:t>
             </a:r>
           </a:p>
           <a:p>
             <a:pPr lvl="1">
-              <a:spcAft>
-                <a:spcPts val="1200"/>
-              </a:spcAft>
-              <a:defRPr sz="1800"/>
-            </a:pPr>
-            <a:r>
-              <a:rPr sz="1400"/>
+              <a:lnSpc>
+                <a:spcPct val="90000"/>
+              </a:lnSpc>
+              <a:spcAft>
+                <a:spcPts val="300"/>
+              </a:spcAft>
+              <a:defRPr sz="1800"/>
+            </a:pPr>
+            <a:r>
+              <a:rPr sz="1300"/>
               <a:t>    • Eksik ne var?</a:t>
             </a:r>
           </a:p>
           <a:p>
             <a:pPr lvl="1">
-              <a:spcAft>
-                <a:spcPts val="1200"/>
-              </a:spcAft>
-              <a:defRPr sz="1800"/>
-            </a:pPr>
-            <a:r>
-              <a:rPr sz="1400"/>
+              <a:lnSpc>
+                <a:spcPct val="90000"/>
+              </a:lnSpc>
+              <a:spcAft>
+                <a:spcPts val="300"/>
+              </a:spcAft>
+              <a:defRPr sz="1800"/>
+            </a:pPr>
+            <a:r>
+              <a:rPr sz="1300"/>
               <a:t>    • Beğendikleri özellikler?</a:t>
             </a:r>
           </a:p>
           <a:p>
             <a:pPr>
-              <a:spcAft>
-                <a:spcPts val="1200"/>
-              </a:spcAft>
-              <a:defRPr sz="2000"/>
-            </a:pPr>
-          </a:p>
-          <a:p>
-            <a:pPr>
-              <a:spcAft>
-                <a:spcPts val="1200"/>
-              </a:spcAft>
-              <a:defRPr sz="2000"/>
-            </a:pPr>
-            <a:r>
-              <a:rPr sz="1400"/>
+              <a:lnSpc>
+                <a:spcPct val="90000"/>
+              </a:lnSpc>
+              <a:spcAft>
+                <a:spcPts val="300"/>
+              </a:spcAft>
+              <a:defRPr sz="2000"/>
+            </a:pPr>
+          </a:p>
+          <a:p>
+            <a:pPr>
+              <a:lnSpc>
+                <a:spcPct val="90000"/>
+              </a:lnSpc>
+              <a:spcAft>
+                <a:spcPts val="300"/>
+              </a:spcAft>
+              <a:defRPr sz="2000"/>
+            </a:pPr>
+            <a:r>
+              <a:rPr sz="1300"/>
               <a:t>📝 Gözlem Yapın:</a:t>
             </a:r>
           </a:p>
           <a:p>
             <a:pPr lvl="1">
-              <a:spcAft>
-                <a:spcPts val="1200"/>
-              </a:spcAft>
-              <a:defRPr sz="1800"/>
-            </a:pPr>
-            <a:r>
-              <a:rPr sz="1400"/>
+              <a:lnSpc>
+                <a:spcPct val="90000"/>
+              </a:lnSpc>
+              <a:spcAft>
+                <a:spcPts val="300"/>
+              </a:spcAft>
+              <a:defRPr sz="1800"/>
+            </a:pPr>
+            <a:r>
+              <a:rPr sz="1300"/>
               <a:t>    • Hangi butona tıkladılar?</a:t>
             </a:r>
           </a:p>
           <a:p>
             <a:pPr lvl="1">
-              <a:spcAft>
-                <a:spcPts val="1200"/>
-              </a:spcAft>
-              <a:defRPr sz="1800"/>
-            </a:pPr>
-            <a:r>
-              <a:rPr sz="1400"/>
+              <a:lnSpc>
+                <a:spcPct val="90000"/>
+              </a:lnSpc>
+              <a:spcAft>
+                <a:spcPts val="300"/>
+              </a:spcAft>
+              <a:defRPr sz="1800"/>
+            </a:pPr>
+            <a:r>
+              <a:rPr sz="1300"/>
               <a:t>    • Nerede kafa karıştı?</a:t>
             </a:r>
           </a:p>
           <a:p>
             <a:pPr lvl="1">
-              <a:spcAft>
-                <a:spcPts val="1200"/>
-              </a:spcAft>
-              <a:defRPr sz="1800"/>
-            </a:pPr>
-            <a:r>
-              <a:rPr sz="1400"/>
+              <a:lnSpc>
+                <a:spcPct val="90000"/>
+              </a:lnSpc>
+              <a:spcAft>
+                <a:spcPts val="300"/>
+              </a:spcAft>
+              <a:defRPr sz="1800"/>
+            </a:pPr>
+            <a:r>
+              <a:rPr sz="1300"/>
               <a:t>    • Ne kadar sürede öğrendiler?</a:t>
             </a:r>
           </a:p>
           <a:p>
             <a:pPr>
-              <a:spcAft>
-                <a:spcPts val="1200"/>
-              </a:spcAft>
-              <a:defRPr sz="2000"/>
-            </a:pPr>
-          </a:p>
-          <a:p>
-            <a:pPr>
-              <a:spcAft>
-                <a:spcPts val="1200"/>
+              <a:lnSpc>
+                <a:spcPct val="90000"/>
+              </a:lnSpc>
+              <a:spcAft>
+                <a:spcPts val="300"/>
+              </a:spcAft>
+              <a:defRPr sz="2000"/>
+            </a:pPr>
+          </a:p>
+          <a:p>
+            <a:pPr>
+              <a:lnSpc>
+                <a:spcPct val="90000"/>
+              </a:lnSpc>
+              <a:spcAft>
+                <a:spcPts val="300"/>
               </a:spcAft>
               <a:defRPr sz="2000" b="1"/>
             </a:pPr>
             <a:r>
-              <a:rPr sz="1400"/>
+              <a:rPr sz="1300"/>
               <a:t>📌 Test Sonuçları:</a:t>
             </a:r>
           </a:p>
           <a:p>
             <a:pPr lvl="1">
-              <a:spcAft>
-                <a:spcPts val="1200"/>
-              </a:spcAft>
-              <a:defRPr sz="1800"/>
-            </a:pPr>
-            <a:r>
-              <a:rPr sz="1400"/>
+              <a:lnSpc>
+                <a:spcPct val="90000"/>
+              </a:lnSpc>
+              <a:spcAft>
+                <a:spcPts val="300"/>
+              </a:spcAft>
+              <a:defRPr sz="1800"/>
+            </a:pPr>
+            <a:r>
+              <a:rPr sz="1300"/>
               <a:t>    • Not alın</a:t>
             </a:r>
           </a:p>
           <a:p>
             <a:pPr lvl="1">
-              <a:spcAft>
-                <a:spcPts val="1200"/>
-              </a:spcAft>
-              <a:defRPr sz="1800"/>
-            </a:pPr>
-            <a:r>
-              <a:rPr sz="1400"/>
+              <a:lnSpc>
+                <a:spcPct val="90000"/>
+              </a:lnSpc>
+              <a:spcAft>
+                <a:spcPts val="300"/>
+              </a:spcAft>
+              <a:defRPr sz="1800"/>
+            </a:pPr>
+            <a:r>
+              <a:rPr sz="1300"/>
               <a:t>    • Ortak sorunları belirleyin</a:t>
             </a:r>
           </a:p>
           <a:p>
             <a:pPr lvl="1">
-              <a:spcAft>
-                <a:spcPts val="1200"/>
-              </a:spcAft>
-              <a:defRPr sz="1800"/>
-            </a:pPr>
-            <a:r>
-              <a:rPr sz="1400"/>
+              <a:lnSpc>
+                <a:spcPct val="90000"/>
+              </a:lnSpc>
+              <a:spcAft>
+                <a:spcPts val="300"/>
+              </a:spcAft>
+              <a:defRPr sz="1800"/>
+            </a:pPr>
+            <a:r>
+              <a:rPr sz="1300"/>
               <a:t>    • Önceliklendirin (en önemliler önce)</a:t>
             </a:r>
           </a:p>
           <a:p>
             <a:pPr>
-              <a:spcAft>
-                <a:spcPts val="1200"/>
-              </a:spcAft>
-              <a:defRPr sz="2000"/>
-            </a:pPr>
-          </a:p>
-          <a:p>
-            <a:pPr>
-              <a:spcAft>
-                <a:spcPts val="1200"/>
+              <a:lnSpc>
+                <a:spcPct val="90000"/>
+              </a:lnSpc>
+              <a:spcAft>
+                <a:spcPts val="300"/>
+              </a:spcAft>
+              <a:defRPr sz="2000"/>
+            </a:pPr>
+          </a:p>
+          <a:p>
+            <a:pPr>
+              <a:lnSpc>
+                <a:spcPct val="90000"/>
+              </a:lnSpc>
+              <a:spcAft>
+                <a:spcPts val="300"/>
               </a:spcAft>
               <a:defRPr sz="2000" b="1"/>
             </a:pPr>
             <a:r>
-              <a:rPr sz="1400"/>
+              <a:rPr sz="1300"/>
               <a:t>💡 Test etmeden yayınlamayın!</a:t>
             </a:r>
           </a:p>
@@ -6780,7 +6945,7 @@
         </p:nvSpPr>
         <p:spPr/>
         <p:txBody>
-          <a:bodyPr/>
+          <a:bodyPr wrap="square"/>
           <a:lstStyle/>
           <a:p>
             <a:pPr>
@@ -6834,268 +6999,349 @@
             <a:spAutoFit/>
           </a:bodyPr>
           <a:lstStyle/>
-          <a:p/>
-          <a:p>
-            <a:pPr>
-              <a:spcAft>
-                <a:spcPts val="1200"/>
-              </a:spcAft>
-              <a:defRPr sz="2000"/>
-            </a:pPr>
-            <a:r>
-              <a:rPr sz="1400"/>
+          <a:p>
+            <a:pPr>
+              <a:lnSpc>
+                <a:spcPct val="90000"/>
+              </a:lnSpc>
+              <a:spcAft>
+                <a:spcPts val="300"/>
+              </a:spcAft>
+            </a:pPr>
+          </a:p>
+          <a:p>
+            <a:pPr>
+              <a:lnSpc>
+                <a:spcPct val="90000"/>
+              </a:lnSpc>
+              <a:spcAft>
+                <a:spcPts val="300"/>
+              </a:spcAft>
+              <a:defRPr sz="2000"/>
+            </a:pPr>
+            <a:r>
+              <a:rPr sz="1300"/>
               <a:t>Test sonuçlarına göre ürünü iyileştirin!</a:t>
             </a:r>
           </a:p>
           <a:p>
             <a:pPr>
-              <a:spcAft>
-                <a:spcPts val="1200"/>
-              </a:spcAft>
-              <a:defRPr sz="2000"/>
-            </a:pPr>
-          </a:p>
-          <a:p>
-            <a:pPr>
-              <a:spcAft>
-                <a:spcPts val="1200"/>
+              <a:lnSpc>
+                <a:spcPct val="90000"/>
+              </a:lnSpc>
+              <a:spcAft>
+                <a:spcPts val="300"/>
+              </a:spcAft>
+              <a:defRPr sz="2000"/>
+            </a:pPr>
+          </a:p>
+          <a:p>
+            <a:pPr>
+              <a:lnSpc>
+                <a:spcPct val="90000"/>
+              </a:lnSpc>
+              <a:spcAft>
+                <a:spcPts val="300"/>
               </a:spcAft>
               <a:defRPr sz="2000" b="1"/>
             </a:pPr>
             <a:r>
-              <a:rPr sz="1400"/>
+              <a:rPr sz="1300"/>
               <a:t>✅ İyileştirme Süreci:</a:t>
             </a:r>
           </a:p>
           <a:p>
             <a:pPr>
-              <a:spcAft>
-                <a:spcPts val="1200"/>
-              </a:spcAft>
-              <a:defRPr sz="2000"/>
-            </a:pPr>
-          </a:p>
-          <a:p>
-            <a:pPr>
-              <a:spcAft>
-                <a:spcPts val="1200"/>
-              </a:spcAft>
-              <a:defRPr sz="2000"/>
-            </a:pPr>
-            <a:r>
-              <a:rPr sz="1400"/>
+              <a:lnSpc>
+                <a:spcPct val="90000"/>
+              </a:lnSpc>
+              <a:spcAft>
+                <a:spcPts val="300"/>
+              </a:spcAft>
+              <a:defRPr sz="2000"/>
+            </a:pPr>
+          </a:p>
+          <a:p>
+            <a:pPr>
+              <a:lnSpc>
+                <a:spcPct val="90000"/>
+              </a:lnSpc>
+              <a:spcAft>
+                <a:spcPts val="300"/>
+              </a:spcAft>
+              <a:defRPr sz="2000"/>
+            </a:pPr>
+            <a:r>
+              <a:rPr sz="1300"/>
               <a:t>1️⃣ Geri Bildirimleri Topla:</a:t>
             </a:r>
           </a:p>
           <a:p>
             <a:pPr lvl="1">
-              <a:spcAft>
-                <a:spcPts val="1200"/>
-              </a:spcAft>
-              <a:defRPr sz="1800"/>
-            </a:pPr>
-            <a:r>
-              <a:rPr sz="1400"/>
+              <a:lnSpc>
+                <a:spcPct val="90000"/>
+              </a:lnSpc>
+              <a:spcAft>
+                <a:spcPts val="300"/>
+              </a:spcAft>
+              <a:defRPr sz="1800"/>
+            </a:pPr>
+            <a:r>
+              <a:rPr sz="1300"/>
               <a:t>    • Kullanıcıların yorumları</a:t>
             </a:r>
           </a:p>
           <a:p>
             <a:pPr lvl="1">
-              <a:spcAft>
-                <a:spcPts val="1200"/>
-              </a:spcAft>
-              <a:defRPr sz="1800"/>
-            </a:pPr>
-            <a:r>
-              <a:rPr sz="1400"/>
+              <a:lnSpc>
+                <a:spcPct val="90000"/>
+              </a:lnSpc>
+              <a:spcAft>
+                <a:spcPts val="300"/>
+              </a:spcAft>
+              <a:defRPr sz="1800"/>
+            </a:pPr>
+            <a:r>
+              <a:rPr sz="1300"/>
               <a:t>    • Test sırasındaki gözlemler</a:t>
             </a:r>
           </a:p>
           <a:p>
             <a:pPr lvl="1">
-              <a:spcAft>
-                <a:spcPts val="1200"/>
-              </a:spcAft>
-              <a:defRPr sz="1800"/>
-            </a:pPr>
-            <a:r>
-              <a:rPr sz="1400"/>
+              <a:lnSpc>
+                <a:spcPct val="90000"/>
+              </a:lnSpc>
+              <a:spcAft>
+                <a:spcPts val="300"/>
+              </a:spcAft>
+              <a:defRPr sz="1800"/>
+            </a:pPr>
+            <a:r>
+              <a:rPr sz="1300"/>
               <a:t>    • Sorunlar ve öneriler</a:t>
             </a:r>
           </a:p>
           <a:p>
             <a:pPr>
-              <a:spcAft>
-                <a:spcPts val="1200"/>
-              </a:spcAft>
-              <a:defRPr sz="2000"/>
-            </a:pPr>
-          </a:p>
-          <a:p>
-            <a:pPr>
-              <a:spcAft>
-                <a:spcPts val="1200"/>
-              </a:spcAft>
-              <a:defRPr sz="2000"/>
-            </a:pPr>
-            <a:r>
-              <a:rPr sz="1400"/>
+              <a:lnSpc>
+                <a:spcPct val="90000"/>
+              </a:lnSpc>
+              <a:spcAft>
+                <a:spcPts val="300"/>
+              </a:spcAft>
+              <a:defRPr sz="2000"/>
+            </a:pPr>
+          </a:p>
+          <a:p>
+            <a:pPr>
+              <a:lnSpc>
+                <a:spcPct val="90000"/>
+              </a:lnSpc>
+              <a:spcAft>
+                <a:spcPts val="300"/>
+              </a:spcAft>
+              <a:defRPr sz="2000"/>
+            </a:pPr>
+            <a:r>
+              <a:rPr sz="1300"/>
               <a:t>2️⃣ Önceliklendirme:</a:t>
             </a:r>
           </a:p>
           <a:p>
             <a:pPr lvl="1">
-              <a:spcAft>
-                <a:spcPts val="1200"/>
-              </a:spcAft>
-              <a:defRPr sz="1800"/>
-            </a:pPr>
-            <a:r>
-              <a:rPr sz="1400"/>
+              <a:lnSpc>
+                <a:spcPct val="90000"/>
+              </a:lnSpc>
+              <a:spcAft>
+                <a:spcPts val="300"/>
+              </a:spcAft>
+              <a:defRPr sz="1800"/>
+            </a:pPr>
+            <a:r>
+              <a:rPr sz="1300"/>
               <a:t>    • Hangileri acil?</a:t>
             </a:r>
           </a:p>
           <a:p>
             <a:pPr lvl="1">
-              <a:spcAft>
-                <a:spcPts val="1200"/>
-              </a:spcAft>
-              <a:defRPr sz="1800"/>
-            </a:pPr>
-            <a:r>
-              <a:rPr sz="1400"/>
+              <a:lnSpc>
+                <a:spcPct val="90000"/>
+              </a:lnSpc>
+              <a:spcAft>
+                <a:spcPts val="300"/>
+              </a:spcAft>
+              <a:defRPr sz="1800"/>
+            </a:pPr>
+            <a:r>
+              <a:rPr sz="1300"/>
               <a:t>    • Hangileri önemli ama acil değil?</a:t>
             </a:r>
           </a:p>
           <a:p>
             <a:pPr lvl="1">
-              <a:spcAft>
-                <a:spcPts val="1200"/>
-              </a:spcAft>
-              <a:defRPr sz="1800"/>
-            </a:pPr>
-            <a:r>
-              <a:rPr sz="1400"/>
+              <a:lnSpc>
+                <a:spcPct val="90000"/>
+              </a:lnSpc>
+              <a:spcAft>
+                <a:spcPts val="300"/>
+              </a:spcAft>
+              <a:defRPr sz="1800"/>
+            </a:pPr>
+            <a:r>
+              <a:rPr sz="1300"/>
               <a:t>    • Hangileri ileride yapılabilir?</a:t>
             </a:r>
           </a:p>
           <a:p>
             <a:pPr>
-              <a:spcAft>
-                <a:spcPts val="1200"/>
-              </a:spcAft>
-              <a:defRPr sz="2000"/>
-            </a:pPr>
-          </a:p>
-          <a:p>
-            <a:pPr>
-              <a:spcAft>
-                <a:spcPts val="1200"/>
-              </a:spcAft>
-              <a:defRPr sz="2000"/>
-            </a:pPr>
-            <a:r>
-              <a:rPr sz="1400"/>
+              <a:lnSpc>
+                <a:spcPct val="90000"/>
+              </a:lnSpc>
+              <a:spcAft>
+                <a:spcPts val="300"/>
+              </a:spcAft>
+              <a:defRPr sz="2000"/>
+            </a:pPr>
+          </a:p>
+          <a:p>
+            <a:pPr>
+              <a:lnSpc>
+                <a:spcPct val="90000"/>
+              </a:lnSpc>
+              <a:spcAft>
+                <a:spcPts val="300"/>
+              </a:spcAft>
+              <a:defRPr sz="2000"/>
+            </a:pPr>
+            <a:r>
+              <a:rPr sz="1300"/>
               <a:t>3️⃣ Değişiklikleri Uygula:</a:t>
             </a:r>
           </a:p>
           <a:p>
             <a:pPr lvl="1">
-              <a:spcAft>
-                <a:spcPts val="1200"/>
-              </a:spcAft>
-              <a:defRPr sz="1800"/>
-            </a:pPr>
-            <a:r>
-              <a:rPr sz="1400"/>
+              <a:lnSpc>
+                <a:spcPct val="90000"/>
+              </a:lnSpc>
+              <a:spcAft>
+                <a:spcPts val="300"/>
+              </a:spcAft>
+              <a:defRPr sz="1800"/>
+            </a:pPr>
+            <a:r>
+              <a:rPr sz="1300"/>
               <a:t>    • Tasarımı düzelt</a:t>
             </a:r>
           </a:p>
           <a:p>
             <a:pPr lvl="1">
-              <a:spcAft>
-                <a:spcPts val="1200"/>
-              </a:spcAft>
-              <a:defRPr sz="1800"/>
-            </a:pPr>
-            <a:r>
-              <a:rPr sz="1400"/>
+              <a:lnSpc>
+                <a:spcPct val="90000"/>
+              </a:lnSpc>
+              <a:spcAft>
+                <a:spcPts val="300"/>
+              </a:spcAft>
+              <a:defRPr sz="1800"/>
+            </a:pPr>
+            <a:r>
+              <a:rPr sz="1300"/>
               <a:t>    • Eksik özellikleri ekle</a:t>
             </a:r>
           </a:p>
           <a:p>
             <a:pPr lvl="1">
-              <a:spcAft>
-                <a:spcPts val="1200"/>
-              </a:spcAft>
-              <a:defRPr sz="1800"/>
-            </a:pPr>
-            <a:r>
-              <a:rPr sz="1400"/>
+              <a:lnSpc>
+                <a:spcPct val="90000"/>
+              </a:lnSpc>
+              <a:spcAft>
+                <a:spcPts val="300"/>
+              </a:spcAft>
+              <a:defRPr sz="1800"/>
+            </a:pPr>
+            <a:r>
+              <a:rPr sz="1300"/>
               <a:t>    • Hataları düzelt</a:t>
             </a:r>
           </a:p>
           <a:p>
             <a:pPr>
-              <a:spcAft>
-                <a:spcPts val="1200"/>
-              </a:spcAft>
-              <a:defRPr sz="2000"/>
-            </a:pPr>
-          </a:p>
-          <a:p>
-            <a:pPr>
-              <a:spcAft>
-                <a:spcPts val="1200"/>
-              </a:spcAft>
-              <a:defRPr sz="2000"/>
-            </a:pPr>
-            <a:r>
-              <a:rPr sz="1400"/>
+              <a:lnSpc>
+                <a:spcPct val="90000"/>
+              </a:lnSpc>
+              <a:spcAft>
+                <a:spcPts val="300"/>
+              </a:spcAft>
+              <a:defRPr sz="2000"/>
+            </a:pPr>
+          </a:p>
+          <a:p>
+            <a:pPr>
+              <a:lnSpc>
+                <a:spcPct val="90000"/>
+              </a:lnSpc>
+              <a:spcAft>
+                <a:spcPts val="300"/>
+              </a:spcAft>
+              <a:defRPr sz="2000"/>
+            </a:pPr>
+            <a:r>
+              <a:rPr sz="1300"/>
               <a:t>4️⃣ Tekrar Test Et:</a:t>
             </a:r>
           </a:p>
           <a:p>
             <a:pPr lvl="1">
-              <a:spcAft>
-                <a:spcPts val="1200"/>
-              </a:spcAft>
-              <a:defRPr sz="1800"/>
-            </a:pPr>
-            <a:r>
-              <a:rPr sz="1400"/>
+              <a:lnSpc>
+                <a:spcPct val="90000"/>
+              </a:lnSpc>
+              <a:spcAft>
+                <a:spcPts val="300"/>
+              </a:spcAft>
+              <a:defRPr sz="1800"/>
+            </a:pPr>
+            <a:r>
+              <a:rPr sz="1300"/>
               <a:t>    • İyileştirmeler işe yaradı mı?</a:t>
             </a:r>
           </a:p>
           <a:p>
             <a:pPr>
-              <a:spcAft>
-                <a:spcPts val="1200"/>
-              </a:spcAft>
-              <a:defRPr sz="2000"/>
-            </a:pPr>
-          </a:p>
-          <a:p>
-            <a:pPr>
-              <a:spcAft>
-                <a:spcPts val="1200"/>
+              <a:lnSpc>
+                <a:spcPct val="90000"/>
+              </a:lnSpc>
+              <a:spcAft>
+                <a:spcPts val="300"/>
+              </a:spcAft>
+              <a:defRPr sz="2000"/>
+            </a:pPr>
+          </a:p>
+          <a:p>
+            <a:pPr>
+              <a:lnSpc>
+                <a:spcPct val="90000"/>
+              </a:lnSpc>
+              <a:spcAft>
+                <a:spcPts val="300"/>
               </a:spcAft>
               <a:defRPr sz="2000" b="1"/>
             </a:pPr>
             <a:r>
-              <a:rPr sz="1400"/>
+              <a:rPr sz="1300"/>
               <a:t>💡 Bu döngü defalarca tekrarlanabilir!</a:t>
             </a:r>
           </a:p>
           <a:p>
             <a:pPr>
-              <a:spcAft>
-                <a:spcPts val="1200"/>
-              </a:spcAft>
-              <a:defRPr sz="2000"/>
-            </a:pPr>
-            <a:r>
-              <a:rPr sz="1400"/>
+              <a:lnSpc>
+                <a:spcPct val="90000"/>
+              </a:lnSpc>
+              <a:spcAft>
+                <a:spcPts val="300"/>
+              </a:spcAft>
+              <a:defRPr sz="2000"/>
+            </a:pPr>
+            <a:r>
+              <a:rPr sz="1300"/>
               <a:t>Tasarım → Test → İyileştir → Tekrar Test</a:t>
             </a:r>
           </a:p>
@@ -7131,7 +7377,7 @@
         </p:nvSpPr>
         <p:spPr/>
         <p:txBody>
-          <a:bodyPr/>
+          <a:bodyPr wrap="square"/>
           <a:lstStyle/>
           <a:p>
             <a:pPr>
@@ -7185,256 +7431,334 @@
             <a:spAutoFit/>
           </a:bodyPr>
           <a:lstStyle/>
-          <a:p/>
-          <a:p>
-            <a:pPr>
-              <a:spcAft>
-                <a:spcPts val="1200"/>
-              </a:spcAft>
-              <a:defRPr sz="2000"/>
-            </a:pPr>
-            <a:r>
-              <a:rPr sz="1400"/>
+          <a:p>
+            <a:pPr>
+              <a:lnSpc>
+                <a:spcPct val="90000"/>
+              </a:lnSpc>
+              <a:spcAft>
+                <a:spcPts val="300"/>
+              </a:spcAft>
+            </a:pPr>
+          </a:p>
+          <a:p>
+            <a:pPr>
+              <a:lnSpc>
+                <a:spcPct val="90000"/>
+              </a:lnSpc>
+              <a:spcAft>
+                <a:spcPts val="300"/>
+              </a:spcAft>
+              <a:defRPr sz="2000"/>
+            </a:pPr>
+            <a:r>
+              <a:rPr sz="1300"/>
               <a:t>Ürün hazır! Kullanıcılara nasıl ulaştırırız?</a:t>
             </a:r>
           </a:p>
           <a:p>
             <a:pPr>
-              <a:spcAft>
-                <a:spcPts val="1200"/>
-              </a:spcAft>
-              <a:defRPr sz="2000"/>
-            </a:pPr>
-          </a:p>
-          <a:p>
-            <a:pPr>
-              <a:spcAft>
-                <a:spcPts val="1200"/>
+              <a:lnSpc>
+                <a:spcPct val="90000"/>
+              </a:lnSpc>
+              <a:spcAft>
+                <a:spcPts val="300"/>
+              </a:spcAft>
+              <a:defRPr sz="2000"/>
+            </a:pPr>
+          </a:p>
+          <a:p>
+            <a:pPr>
+              <a:lnSpc>
+                <a:spcPct val="90000"/>
+              </a:lnSpc>
+              <a:spcAft>
+                <a:spcPts val="300"/>
               </a:spcAft>
               <a:defRPr sz="2000" b="1"/>
             </a:pPr>
             <a:r>
-              <a:rPr sz="1400"/>
+              <a:rPr sz="1300"/>
               <a:t>✅ Yayınlama Platformları:</a:t>
             </a:r>
           </a:p>
           <a:p>
             <a:pPr>
-              <a:spcAft>
-                <a:spcPts val="1200"/>
-              </a:spcAft>
-              <a:defRPr sz="2000"/>
-            </a:pPr>
-          </a:p>
-          <a:p>
-            <a:pPr>
-              <a:spcAft>
-                <a:spcPts val="1200"/>
-              </a:spcAft>
-              <a:defRPr sz="2000"/>
-            </a:pPr>
-            <a:r>
-              <a:rPr sz="1400"/>
+              <a:lnSpc>
+                <a:spcPct val="90000"/>
+              </a:lnSpc>
+              <a:spcAft>
+                <a:spcPts val="300"/>
+              </a:spcAft>
+              <a:defRPr sz="2000"/>
+            </a:pPr>
+          </a:p>
+          <a:p>
+            <a:pPr>
+              <a:lnSpc>
+                <a:spcPct val="90000"/>
+              </a:lnSpc>
+              <a:spcAft>
+                <a:spcPts val="300"/>
+              </a:spcAft>
+              <a:defRPr sz="2000"/>
+            </a:pPr>
+            <a:r>
+              <a:rPr sz="1300"/>
               <a:t>📱 Mobil Uygulamalar:</a:t>
             </a:r>
           </a:p>
           <a:p>
             <a:pPr lvl="1">
-              <a:spcAft>
-                <a:spcPts val="1200"/>
-              </a:spcAft>
-              <a:defRPr sz="1800"/>
-            </a:pPr>
-            <a:r>
-              <a:rPr sz="1400"/>
+              <a:lnSpc>
+                <a:spcPct val="90000"/>
+              </a:lnSpc>
+              <a:spcAft>
+                <a:spcPts val="300"/>
+              </a:spcAft>
+              <a:defRPr sz="1800"/>
+            </a:pPr>
+            <a:r>
+              <a:rPr sz="1300"/>
               <a:t>    • Google Play Store (Android)</a:t>
             </a:r>
           </a:p>
           <a:p>
             <a:pPr lvl="1">
-              <a:spcAft>
-                <a:spcPts val="1200"/>
-              </a:spcAft>
-              <a:defRPr sz="1800"/>
-            </a:pPr>
-            <a:r>
-              <a:rPr sz="1400"/>
+              <a:lnSpc>
+                <a:spcPct val="90000"/>
+              </a:lnSpc>
+              <a:spcAft>
+                <a:spcPts val="300"/>
+              </a:spcAft>
+              <a:defRPr sz="1800"/>
+            </a:pPr>
+            <a:r>
+              <a:rPr sz="1300"/>
               <a:t>    • App Store (iOS - iPhone/iPad)</a:t>
             </a:r>
           </a:p>
           <a:p>
             <a:pPr>
-              <a:spcAft>
-                <a:spcPts val="1200"/>
-              </a:spcAft>
-              <a:defRPr sz="2000"/>
-            </a:pPr>
-          </a:p>
-          <a:p>
-            <a:pPr>
-              <a:spcAft>
-                <a:spcPts val="1200"/>
-              </a:spcAft>
-              <a:defRPr sz="2000"/>
-            </a:pPr>
-            <a:r>
-              <a:rPr sz="1400"/>
+              <a:lnSpc>
+                <a:spcPct val="90000"/>
+              </a:lnSpc>
+              <a:spcAft>
+                <a:spcPts val="300"/>
+              </a:spcAft>
+              <a:defRPr sz="2000"/>
+            </a:pPr>
+          </a:p>
+          <a:p>
+            <a:pPr>
+              <a:lnSpc>
+                <a:spcPct val="90000"/>
+              </a:lnSpc>
+              <a:spcAft>
+                <a:spcPts val="300"/>
+              </a:spcAft>
+              <a:defRPr sz="2000"/>
+            </a:pPr>
+            <a:r>
+              <a:rPr sz="1300"/>
               <a:t>🌐 Web Uygulamaları:</a:t>
             </a:r>
           </a:p>
           <a:p>
             <a:pPr lvl="1">
-              <a:spcAft>
-                <a:spcPts val="1200"/>
-              </a:spcAft>
-              <a:defRPr sz="1800"/>
-            </a:pPr>
-            <a:r>
-              <a:rPr sz="1400"/>
+              <a:lnSpc>
+                <a:spcPct val="90000"/>
+              </a:lnSpc>
+              <a:spcAft>
+                <a:spcPts val="300"/>
+              </a:spcAft>
+              <a:defRPr sz="1800"/>
+            </a:pPr>
+            <a:r>
+              <a:rPr sz="1300"/>
               <a:t>    • Web sunucusuna yükleme</a:t>
             </a:r>
           </a:p>
           <a:p>
             <a:pPr lvl="1">
-              <a:spcAft>
-                <a:spcPts val="1200"/>
-              </a:spcAft>
-              <a:defRPr sz="1800"/>
-            </a:pPr>
-            <a:r>
-              <a:rPr sz="1400"/>
+              <a:lnSpc>
+                <a:spcPct val="90000"/>
+              </a:lnSpc>
+              <a:spcAft>
+                <a:spcPts val="300"/>
+              </a:spcAft>
+              <a:defRPr sz="1800"/>
+            </a:pPr>
+            <a:r>
+              <a:rPr sz="1300"/>
               <a:t>    • Domain (alan adı) satın alma</a:t>
             </a:r>
           </a:p>
           <a:p>
             <a:pPr>
-              <a:spcAft>
-                <a:spcPts val="1200"/>
-              </a:spcAft>
-              <a:defRPr sz="2000"/>
-            </a:pPr>
-          </a:p>
-          <a:p>
-            <a:pPr>
-              <a:spcAft>
-                <a:spcPts val="1200"/>
-              </a:spcAft>
-              <a:defRPr sz="2000"/>
-            </a:pPr>
-            <a:r>
-              <a:rPr sz="1400"/>
+              <a:lnSpc>
+                <a:spcPct val="90000"/>
+              </a:lnSpc>
+              <a:spcAft>
+                <a:spcPts val="300"/>
+              </a:spcAft>
+              <a:defRPr sz="2000"/>
+            </a:pPr>
+          </a:p>
+          <a:p>
+            <a:pPr>
+              <a:lnSpc>
+                <a:spcPct val="90000"/>
+              </a:lnSpc>
+              <a:spcAft>
+                <a:spcPts val="300"/>
+              </a:spcAft>
+              <a:defRPr sz="2000"/>
+            </a:pPr>
+            <a:r>
+              <a:rPr sz="1300"/>
               <a:t>🎮 Oyunlar:</a:t>
             </a:r>
           </a:p>
           <a:p>
             <a:pPr lvl="1">
-              <a:spcAft>
-                <a:spcPts val="1200"/>
-              </a:spcAft>
-              <a:defRPr sz="1800"/>
-            </a:pPr>
-            <a:r>
-              <a:rPr sz="1400"/>
+              <a:lnSpc>
+                <a:spcPct val="90000"/>
+              </a:lnSpc>
+              <a:spcAft>
+                <a:spcPts val="300"/>
+              </a:spcAft>
+              <a:defRPr sz="1800"/>
+            </a:pPr>
+            <a:r>
+              <a:rPr sz="1300"/>
               <a:t>    • Steam, Epic Games Store</a:t>
             </a:r>
           </a:p>
           <a:p>
             <a:pPr lvl="1">
-              <a:spcAft>
-                <a:spcPts val="1200"/>
-              </a:spcAft>
-              <a:defRPr sz="1800"/>
-            </a:pPr>
-            <a:r>
-              <a:rPr sz="1400"/>
+              <a:lnSpc>
+                <a:spcPct val="90000"/>
+              </a:lnSpc>
+              <a:spcAft>
+                <a:spcPts val="300"/>
+              </a:spcAft>
+              <a:defRPr sz="1800"/>
+            </a:pPr>
+            <a:r>
+              <a:rPr sz="1300"/>
               <a:t>    • Scratch Community (basit oyunlar)</a:t>
             </a:r>
           </a:p>
           <a:p>
             <a:pPr>
-              <a:spcAft>
-                <a:spcPts val="1200"/>
-              </a:spcAft>
-              <a:defRPr sz="2000"/>
-            </a:pPr>
-          </a:p>
-          <a:p>
-            <a:pPr>
-              <a:spcAft>
-                <a:spcPts val="1200"/>
+              <a:lnSpc>
+                <a:spcPct val="90000"/>
+              </a:lnSpc>
+              <a:spcAft>
+                <a:spcPts val="300"/>
+              </a:spcAft>
+              <a:defRPr sz="2000"/>
+            </a:pPr>
+          </a:p>
+          <a:p>
+            <a:pPr>
+              <a:lnSpc>
+                <a:spcPct val="90000"/>
+              </a:lnSpc>
+              <a:spcAft>
+                <a:spcPts val="300"/>
               </a:spcAft>
               <a:defRPr sz="2000" b="1"/>
             </a:pPr>
             <a:r>
-              <a:rPr sz="1400"/>
+              <a:rPr sz="1300"/>
               <a:t>📌 Yayınlama Öncesi Kontroller:</a:t>
             </a:r>
           </a:p>
           <a:p>
             <a:pPr lvl="1">
-              <a:spcAft>
-                <a:spcPts val="1200"/>
-              </a:spcAft>
-              <a:defRPr sz="1800"/>
-            </a:pPr>
-            <a:r>
-              <a:rPr sz="1400"/>
+              <a:lnSpc>
+                <a:spcPct val="90000"/>
+              </a:lnSpc>
+              <a:spcAft>
+                <a:spcPts val="300"/>
+              </a:spcAft>
+              <a:defRPr sz="1800"/>
+            </a:pPr>
+            <a:r>
+              <a:rPr sz="1300"/>
               <a:t>    • Tüm özellikler çalışıyor mu?</a:t>
             </a:r>
           </a:p>
           <a:p>
             <a:pPr lvl="1">
-              <a:spcAft>
-                <a:spcPts val="1200"/>
-              </a:spcAft>
-              <a:defRPr sz="1800"/>
-            </a:pPr>
-            <a:r>
-              <a:rPr sz="1400"/>
+              <a:lnSpc>
+                <a:spcPct val="90000"/>
+              </a:lnSpc>
+              <a:spcAft>
+                <a:spcPts val="300"/>
+              </a:spcAft>
+              <a:defRPr sz="1800"/>
+            </a:pPr>
+            <a:r>
+              <a:rPr sz="1300"/>
               <a:t>    • Hatalar düzeltildi mi?</a:t>
             </a:r>
           </a:p>
           <a:p>
             <a:pPr lvl="1">
-              <a:spcAft>
-                <a:spcPts val="1200"/>
-              </a:spcAft>
-              <a:defRPr sz="1800"/>
-            </a:pPr>
-            <a:r>
-              <a:rPr sz="1400"/>
+              <a:lnSpc>
+                <a:spcPct val="90000"/>
+              </a:lnSpc>
+              <a:spcAft>
+                <a:spcPts val="300"/>
+              </a:spcAft>
+              <a:defRPr sz="1800"/>
+            </a:pPr>
+            <a:r>
+              <a:rPr sz="1300"/>
               <a:t>    • Güvenlik kontrolleri yapıldı mı?</a:t>
             </a:r>
           </a:p>
           <a:p>
             <a:pPr lvl="1">
-              <a:spcAft>
-                <a:spcPts val="1200"/>
-              </a:spcAft>
-              <a:defRPr sz="1800"/>
-            </a:pPr>
-            <a:r>
-              <a:rPr sz="1400"/>
+              <a:lnSpc>
+                <a:spcPct val="90000"/>
+              </a:lnSpc>
+              <a:spcAft>
+                <a:spcPts val="300"/>
+              </a:spcAft>
+              <a:defRPr sz="1800"/>
+            </a:pPr>
+            <a:r>
+              <a:rPr sz="1300"/>
               <a:t>    • Kullanım kılavuzu hazır mı?</a:t>
             </a:r>
           </a:p>
           <a:p>
             <a:pPr>
-              <a:spcAft>
-                <a:spcPts val="1200"/>
-              </a:spcAft>
-              <a:defRPr sz="2000"/>
-            </a:pPr>
-          </a:p>
-          <a:p>
-            <a:pPr>
-              <a:spcAft>
-                <a:spcPts val="1200"/>
+              <a:lnSpc>
+                <a:spcPct val="90000"/>
+              </a:lnSpc>
+              <a:spcAft>
+                <a:spcPts val="300"/>
+              </a:spcAft>
+              <a:defRPr sz="2000"/>
+            </a:pPr>
+          </a:p>
+          <a:p>
+            <a:pPr>
+              <a:lnSpc>
+                <a:spcPct val="90000"/>
+              </a:lnSpc>
+              <a:spcAft>
+                <a:spcPts val="300"/>
               </a:spcAft>
               <a:defRPr sz="2000" b="1"/>
             </a:pPr>
             <a:r>
-              <a:rPr sz="1400"/>
+              <a:rPr sz="1300"/>
               <a:t>💡 İlk kullanıcılara özel tanıtım yapın (lansман)!</a:t>
             </a:r>
           </a:p>
@@ -7470,7 +7794,7 @@
         </p:nvSpPr>
         <p:spPr/>
         <p:txBody>
-          <a:bodyPr/>
+          <a:bodyPr wrap="square"/>
           <a:lstStyle/>
           <a:p>
             <a:pPr>
@@ -7524,240 +7848,315 @@
             <a:spAutoFit/>
           </a:bodyPr>
           <a:lstStyle/>
-          <a:p/>
-          <a:p>
-            <a:pPr>
-              <a:spcAft>
-                <a:spcPts val="1200"/>
-              </a:spcAft>
-              <a:defRPr sz="2000"/>
-            </a:pPr>
-            <a:r>
-              <a:rPr sz="1400"/>
+          <a:p>
+            <a:pPr>
+              <a:lnSpc>
+                <a:spcPct val="90000"/>
+              </a:lnSpc>
+              <a:spcAft>
+                <a:spcPts val="300"/>
+              </a:spcAft>
+            </a:pPr>
+          </a:p>
+          <a:p>
+            <a:pPr>
+              <a:lnSpc>
+                <a:spcPct val="90000"/>
+              </a:lnSpc>
+              <a:spcAft>
+                <a:spcPts val="300"/>
+              </a:spcAft>
+              <a:defRPr sz="2000"/>
+            </a:pPr>
+            <a:r>
+              <a:rPr sz="1300"/>
               <a:t>Dijital ürün tasarım sürecini örnek ile görelim:</a:t>
             </a:r>
           </a:p>
           <a:p>
             <a:pPr>
-              <a:spcAft>
-                <a:spcPts val="1200"/>
-              </a:spcAft>
-              <a:defRPr sz="2000"/>
-            </a:pPr>
-          </a:p>
-          <a:p>
-            <a:pPr>
-              <a:spcAft>
-                <a:spcPts val="1200"/>
-              </a:spcAft>
-              <a:defRPr sz="2000"/>
-            </a:pPr>
-            <a:r>
-              <a:rPr sz="1400"/>
+              <a:lnSpc>
+                <a:spcPct val="90000"/>
+              </a:lnSpc>
+              <a:spcAft>
+                <a:spcPts val="300"/>
+              </a:spcAft>
+              <a:defRPr sz="2000"/>
+            </a:pPr>
+          </a:p>
+          <a:p>
+            <a:pPr>
+              <a:lnSpc>
+                <a:spcPct val="90000"/>
+              </a:lnSpc>
+              <a:spcAft>
+                <a:spcPts val="300"/>
+              </a:spcAft>
+              <a:defRPr sz="2000"/>
+            </a:pPr>
+            <a:r>
+              <a:rPr sz="1300"/>
               <a:t>1️⃣ Problem: İngilizce kelime ezberleme sıkıcı</a:t>
             </a:r>
           </a:p>
           <a:p>
             <a:pPr>
-              <a:spcAft>
-                <a:spcPts val="1200"/>
-              </a:spcAft>
-              <a:defRPr sz="2000"/>
-            </a:pPr>
-          </a:p>
-          <a:p>
-            <a:pPr>
-              <a:spcAft>
-                <a:spcPts val="1200"/>
-              </a:spcAft>
-              <a:defRPr sz="2000"/>
-            </a:pPr>
-            <a:r>
-              <a:rPr sz="1400"/>
+              <a:lnSpc>
+                <a:spcPct val="90000"/>
+              </a:lnSpc>
+              <a:spcAft>
+                <a:spcPts val="300"/>
+              </a:spcAft>
+              <a:defRPr sz="2000"/>
+            </a:pPr>
+          </a:p>
+          <a:p>
+            <a:pPr>
+              <a:lnSpc>
+                <a:spcPct val="90000"/>
+              </a:lnSpc>
+              <a:spcAft>
+                <a:spcPts val="300"/>
+              </a:spcAft>
+              <a:defRPr sz="2000"/>
+            </a:pPr>
+            <a:r>
+              <a:rPr sz="1300"/>
               <a:t>2️⃣ Çözüm Fikri: Oyunlaştırılmış kelime öğrenme uygulaması</a:t>
             </a:r>
           </a:p>
           <a:p>
             <a:pPr>
-              <a:spcAft>
-                <a:spcPts val="1200"/>
-              </a:spcAft>
-              <a:defRPr sz="2000"/>
-            </a:pPr>
-          </a:p>
-          <a:p>
-            <a:pPr>
-              <a:spcAft>
-                <a:spcPts val="1200"/>
-              </a:spcAft>
-              <a:defRPr sz="2000"/>
-            </a:pPr>
-            <a:r>
-              <a:rPr sz="1400"/>
+              <a:lnSpc>
+                <a:spcPct val="90000"/>
+              </a:lnSpc>
+              <a:spcAft>
+                <a:spcPts val="300"/>
+              </a:spcAft>
+              <a:defRPr sz="2000"/>
+            </a:pPr>
+          </a:p>
+          <a:p>
+            <a:pPr>
+              <a:lnSpc>
+                <a:spcPct val="90000"/>
+              </a:lnSpc>
+              <a:spcAft>
+                <a:spcPts val="300"/>
+              </a:spcAft>
+              <a:defRPr sz="2000"/>
+            </a:pPr>
+            <a:r>
+              <a:rPr sz="1300"/>
               <a:t>3️⃣ Tasarım:</a:t>
             </a:r>
           </a:p>
           <a:p>
             <a:pPr lvl="1">
-              <a:spcAft>
-                <a:spcPts val="1200"/>
-              </a:spcAft>
-              <a:defRPr sz="1800"/>
-            </a:pPr>
-            <a:r>
-              <a:rPr sz="1400"/>
+              <a:lnSpc>
+                <a:spcPct val="90000"/>
+              </a:lnSpc>
+              <a:spcAft>
+                <a:spcPts val="300"/>
+              </a:spcAft>
+              <a:defRPr sz="1800"/>
+            </a:pPr>
+            <a:r>
+              <a:rPr sz="1300"/>
               <a:t>    • Ana ekran: Seviye seçimi</a:t>
             </a:r>
           </a:p>
           <a:p>
             <a:pPr lvl="1">
-              <a:spcAft>
-                <a:spcPts val="1200"/>
-              </a:spcAft>
-              <a:defRPr sz="1800"/>
-            </a:pPr>
-            <a:r>
-              <a:rPr sz="1400"/>
+              <a:lnSpc>
+                <a:spcPct val="90000"/>
+              </a:lnSpc>
+              <a:spcAft>
+                <a:spcPts val="300"/>
+              </a:spcAft>
+              <a:defRPr sz="1800"/>
+            </a:pPr>
+            <a:r>
+              <a:rPr sz="1300"/>
               <a:t>    • Oyun ekranı: Kelime kartları, zamanlayıcı</a:t>
             </a:r>
           </a:p>
           <a:p>
             <a:pPr lvl="1">
-              <a:spcAft>
-                <a:spcPts val="1200"/>
-              </a:spcAft>
-              <a:defRPr sz="1800"/>
-            </a:pPr>
-            <a:r>
-              <a:rPr sz="1400"/>
+              <a:lnSpc>
+                <a:spcPct val="90000"/>
+              </a:lnSpc>
+              <a:spcAft>
+                <a:spcPts val="300"/>
+              </a:spcAft>
+              <a:defRPr sz="1800"/>
+            </a:pPr>
+            <a:r>
+              <a:rPr sz="1300"/>
               <a:t>    • Renkli ve çocuk dostu tasarım</a:t>
             </a:r>
           </a:p>
           <a:p>
             <a:pPr>
-              <a:spcAft>
-                <a:spcPts val="1200"/>
-              </a:spcAft>
-              <a:defRPr sz="2000"/>
-            </a:pPr>
-          </a:p>
-          <a:p>
-            <a:pPr>
-              <a:spcAft>
-                <a:spcPts val="1200"/>
-              </a:spcAft>
-              <a:defRPr sz="2000"/>
-            </a:pPr>
-            <a:r>
-              <a:rPr sz="1400"/>
+              <a:lnSpc>
+                <a:spcPct val="90000"/>
+              </a:lnSpc>
+              <a:spcAft>
+                <a:spcPts val="300"/>
+              </a:spcAft>
+              <a:defRPr sz="2000"/>
+            </a:pPr>
+          </a:p>
+          <a:p>
+            <a:pPr>
+              <a:lnSpc>
+                <a:spcPct val="90000"/>
+              </a:lnSpc>
+              <a:spcAft>
+                <a:spcPts val="300"/>
+              </a:spcAft>
+              <a:defRPr sz="2000"/>
+            </a:pPr>
+            <a:r>
+              <a:rPr sz="1300"/>
               <a:t>4️⃣ Özellikler:</a:t>
             </a:r>
           </a:p>
           <a:p>
             <a:pPr lvl="1">
-              <a:spcAft>
-                <a:spcPts val="1200"/>
-              </a:spcAft>
-              <a:defRPr sz="1800"/>
-            </a:pPr>
-            <a:r>
-              <a:rPr sz="1400"/>
+              <a:lnSpc>
+                <a:spcPct val="90000"/>
+              </a:lnSpc>
+              <a:spcAft>
+                <a:spcPts val="300"/>
+              </a:spcAft>
+              <a:defRPr sz="1800"/>
+            </a:pPr>
+            <a:r>
+              <a:rPr sz="1300"/>
               <a:t>    • Günlük 10 yeni kelime</a:t>
             </a:r>
           </a:p>
           <a:p>
             <a:pPr lvl="1">
-              <a:spcAft>
-                <a:spcPts val="1200"/>
-              </a:spcAft>
-              <a:defRPr sz="1800"/>
-            </a:pPr>
-            <a:r>
-              <a:rPr sz="1400"/>
+              <a:lnSpc>
+                <a:spcPct val="90000"/>
+              </a:lnSpc>
+              <a:spcAft>
+                <a:spcPts val="300"/>
+              </a:spcAft>
+              <a:defRPr sz="1800"/>
+            </a:pPr>
+            <a:r>
+              <a:rPr sz="1300"/>
               <a:t>    • Eşleştirme oyunu</a:t>
             </a:r>
           </a:p>
           <a:p>
             <a:pPr lvl="1">
-              <a:spcAft>
-                <a:spcPts val="1200"/>
-              </a:spcAft>
-              <a:defRPr sz="1800"/>
-            </a:pPr>
-            <a:r>
-              <a:rPr sz="1400"/>
+              <a:lnSpc>
+                <a:spcPct val="90000"/>
+              </a:lnSpc>
+              <a:spcAft>
+                <a:spcPts val="300"/>
+              </a:spcAft>
+              <a:defRPr sz="1800"/>
+            </a:pPr>
+            <a:r>
+              <a:rPr sz="1300"/>
               <a:t>    • Puan sistemi ve rozetler</a:t>
             </a:r>
           </a:p>
           <a:p>
             <a:pPr lvl="1">
-              <a:spcAft>
-                <a:spcPts val="1200"/>
-              </a:spcAft>
-              <a:defRPr sz="1800"/>
-            </a:pPr>
-            <a:r>
-              <a:rPr sz="1400"/>
+              <a:lnSpc>
+                <a:spcPct val="90000"/>
+              </a:lnSpc>
+              <a:spcAft>
+                <a:spcPts val="300"/>
+              </a:spcAft>
+              <a:defRPr sz="1800"/>
+            </a:pPr>
+            <a:r>
+              <a:rPr sz="1300"/>
               <a:t>    • Arkadaşlarla yarışma</a:t>
             </a:r>
           </a:p>
           <a:p>
             <a:pPr>
-              <a:spcAft>
-                <a:spcPts val="1200"/>
-              </a:spcAft>
-              <a:defRPr sz="2000"/>
-            </a:pPr>
-          </a:p>
-          <a:p>
-            <a:pPr>
-              <a:spcAft>
-                <a:spcPts val="1200"/>
-              </a:spcAft>
-              <a:defRPr sz="2000"/>
-            </a:pPr>
-            <a:r>
-              <a:rPr sz="1400"/>
+              <a:lnSpc>
+                <a:spcPct val="90000"/>
+              </a:lnSpc>
+              <a:spcAft>
+                <a:spcPts val="300"/>
+              </a:spcAft>
+              <a:defRPr sz="2000"/>
+            </a:pPr>
+          </a:p>
+          <a:p>
+            <a:pPr>
+              <a:lnSpc>
+                <a:spcPct val="90000"/>
+              </a:lnSpc>
+              <a:spcAft>
+                <a:spcPts val="300"/>
+              </a:spcAft>
+              <a:defRPr sz="2000"/>
+            </a:pPr>
+            <a:r>
+              <a:rPr sz="1300"/>
               <a:t>5️⃣ Test: 20 öğrenci ile deneme</a:t>
             </a:r>
           </a:p>
           <a:p>
             <a:pPr>
-              <a:spcAft>
-                <a:spcPts val="1200"/>
-              </a:spcAft>
-              <a:defRPr sz="2000"/>
-            </a:pPr>
-          </a:p>
-          <a:p>
-            <a:pPr>
-              <a:spcAft>
-                <a:spcPts val="1200"/>
-              </a:spcAft>
-              <a:defRPr sz="2000"/>
-            </a:pPr>
-            <a:r>
-              <a:rPr sz="1400"/>
+              <a:lnSpc>
+                <a:spcPct val="90000"/>
+              </a:lnSpc>
+              <a:spcAft>
+                <a:spcPts val="300"/>
+              </a:spcAft>
+              <a:defRPr sz="2000"/>
+            </a:pPr>
+          </a:p>
+          <a:p>
+            <a:pPr>
+              <a:lnSpc>
+                <a:spcPct val="90000"/>
+              </a:lnSpc>
+              <a:spcAft>
+                <a:spcPts val="300"/>
+              </a:spcAft>
+              <a:defRPr sz="2000"/>
+            </a:pPr>
+            <a:r>
+              <a:rPr sz="1300"/>
               <a:t>6️⃣ Geri Bildirim: 'Kelimeler çok zor' → Seviye sistemi eklendi</a:t>
             </a:r>
           </a:p>
           <a:p>
             <a:pPr>
-              <a:spcAft>
-                <a:spcPts val="1200"/>
-              </a:spcAft>
-              <a:defRPr sz="2000"/>
-            </a:pPr>
-          </a:p>
-          <a:p>
-            <a:pPr>
-              <a:spcAft>
-                <a:spcPts val="1200"/>
-              </a:spcAft>
-              <a:defRPr sz="2000"/>
-            </a:pPr>
-            <a:r>
-              <a:rPr sz="1400"/>
+              <a:lnSpc>
+                <a:spcPct val="90000"/>
+              </a:lnSpc>
+              <a:spcAft>
+                <a:spcPts val="300"/>
+              </a:spcAft>
+              <a:defRPr sz="2000"/>
+            </a:pPr>
+          </a:p>
+          <a:p>
+            <a:pPr>
+              <a:lnSpc>
+                <a:spcPct val="90000"/>
+              </a:lnSpc>
+              <a:spcAft>
+                <a:spcPts val="300"/>
+              </a:spcAft>
+              <a:defRPr sz="2000"/>
+            </a:pPr>
+            <a:r>
+              <a:rPr sz="1300"/>
               <a:t>7️⃣ Yayınlama: Scratch'te paylaşıldı</a:t>
             </a:r>
           </a:p>
@@ -7793,7 +8192,7 @@
         </p:nvSpPr>
         <p:spPr/>
         <p:txBody>
-          <a:bodyPr/>
+          <a:bodyPr wrap="square"/>
           <a:lstStyle/>
           <a:p>
             <a:pPr>
@@ -7847,268 +8246,349 @@
             <a:spAutoFit/>
           </a:bodyPr>
           <a:lstStyle/>
-          <a:p/>
-          <a:p>
-            <a:pPr>
-              <a:spcAft>
-                <a:spcPts val="1200"/>
-              </a:spcAft>
-              <a:defRPr sz="2000"/>
-            </a:pPr>
-            <a:r>
-              <a:rPr sz="1400"/>
+          <a:p>
+            <a:pPr>
+              <a:lnSpc>
+                <a:spcPct val="90000"/>
+              </a:lnSpc>
+              <a:spcAft>
+                <a:spcPts val="300"/>
+              </a:spcAft>
+            </a:pPr>
+          </a:p>
+          <a:p>
+            <a:pPr>
+              <a:lnSpc>
+                <a:spcPct val="90000"/>
+              </a:lnSpc>
+              <a:spcAft>
+                <a:spcPts val="300"/>
+              </a:spcAft>
+              <a:defRPr sz="2000"/>
+            </a:pPr>
+            <a:r>
+              <a:rPr sz="1300"/>
               <a:t>Projenizi organize etmek için araçlar:</a:t>
             </a:r>
           </a:p>
           <a:p>
             <a:pPr>
-              <a:spcAft>
-                <a:spcPts val="1200"/>
-              </a:spcAft>
-              <a:defRPr sz="2000"/>
-            </a:pPr>
-          </a:p>
-          <a:p>
-            <a:pPr>
-              <a:spcAft>
-                <a:spcPts val="1200"/>
+              <a:lnSpc>
+                <a:spcPct val="90000"/>
+              </a:lnSpc>
+              <a:spcAft>
+                <a:spcPts val="300"/>
+              </a:spcAft>
+              <a:defRPr sz="2000"/>
+            </a:pPr>
+          </a:p>
+          <a:p>
+            <a:pPr>
+              <a:lnSpc>
+                <a:spcPct val="90000"/>
+              </a:lnSpc>
+              <a:spcAft>
+                <a:spcPts val="300"/>
               </a:spcAft>
               <a:defRPr sz="2000" b="1"/>
             </a:pPr>
             <a:r>
-              <a:rPr sz="1400"/>
+              <a:rPr sz="1300"/>
               <a:t>✅ Görev Listesi (To-Do List):</a:t>
             </a:r>
           </a:p>
           <a:p>
             <a:pPr lvl="1">
-              <a:spcAft>
-                <a:spcPts val="1200"/>
-              </a:spcAft>
-              <a:defRPr sz="1800"/>
-            </a:pPr>
-            <a:r>
-              <a:rPr sz="1400"/>
+              <a:lnSpc>
+                <a:spcPct val="90000"/>
+              </a:lnSpc>
+              <a:spcAft>
+                <a:spcPts val="300"/>
+              </a:spcAft>
+              <a:defRPr sz="1800"/>
+            </a:pPr>
+            <a:r>
+              <a:rPr sz="1300"/>
               <a:t>    • Yapılacaklar listesi</a:t>
             </a:r>
           </a:p>
           <a:p>
             <a:pPr lvl="1">
-              <a:spcAft>
-                <a:spcPts val="1200"/>
-              </a:spcAft>
-              <a:defRPr sz="1800"/>
-            </a:pPr>
-            <a:r>
-              <a:rPr sz="1400"/>
+              <a:lnSpc>
+                <a:spcPct val="90000"/>
+              </a:lnSpc>
+              <a:spcAft>
+                <a:spcPts val="300"/>
+              </a:spcAft>
+              <a:defRPr sz="1800"/>
+            </a:pPr>
+            <a:r>
+              <a:rPr sz="1300"/>
               <a:t>    • Tamamlananları işaretleme</a:t>
             </a:r>
           </a:p>
           <a:p>
             <a:pPr lvl="1">
-              <a:spcAft>
-                <a:spcPts val="1200"/>
-              </a:spcAft>
-              <a:defRPr sz="1800"/>
-            </a:pPr>
-            <a:r>
-              <a:rPr sz="1400"/>
+              <a:lnSpc>
+                <a:spcPct val="90000"/>
+              </a:lnSpc>
+              <a:spcAft>
+                <a:spcPts val="300"/>
+              </a:spcAft>
+              <a:defRPr sz="1800"/>
+            </a:pPr>
+            <a:r>
+              <a:rPr sz="1300"/>
               <a:t>    • Örnek: Google Keep, Microsoft To Do</a:t>
             </a:r>
           </a:p>
           <a:p>
             <a:pPr>
-              <a:spcAft>
-                <a:spcPts val="1200"/>
-              </a:spcAft>
-              <a:defRPr sz="2000"/>
-            </a:pPr>
-          </a:p>
-          <a:p>
-            <a:pPr>
-              <a:spcAft>
-                <a:spcPts val="1200"/>
-              </a:spcAft>
-              <a:defRPr sz="2000"/>
-            </a:pPr>
-            <a:r>
-              <a:rPr sz="1400"/>
+              <a:lnSpc>
+                <a:spcPct val="90000"/>
+              </a:lnSpc>
+              <a:spcAft>
+                <a:spcPts val="300"/>
+              </a:spcAft>
+              <a:defRPr sz="2000"/>
+            </a:pPr>
+          </a:p>
+          <a:p>
+            <a:pPr>
+              <a:lnSpc>
+                <a:spcPct val="90000"/>
+              </a:lnSpc>
+              <a:spcAft>
+                <a:spcPts val="300"/>
+              </a:spcAft>
+              <a:defRPr sz="2000"/>
+            </a:pPr>
+            <a:r>
+              <a:rPr sz="1300"/>
               <a:t>📅 Takvim ve Zaman Çizelgesi:</a:t>
             </a:r>
           </a:p>
           <a:p>
             <a:pPr lvl="1">
-              <a:spcAft>
-                <a:spcPts val="1200"/>
-              </a:spcAft>
-              <a:defRPr sz="1800"/>
-            </a:pPr>
-            <a:r>
-              <a:rPr sz="1400"/>
+              <a:lnSpc>
+                <a:spcPct val="90000"/>
+              </a:lnSpc>
+              <a:spcAft>
+                <a:spcPts val="300"/>
+              </a:spcAft>
+              <a:defRPr sz="1800"/>
+            </a:pPr>
+            <a:r>
+              <a:rPr sz="1300"/>
               <a:t>    • Her görev ne zaman yapılacak?</a:t>
             </a:r>
           </a:p>
           <a:p>
             <a:pPr lvl="1">
-              <a:spcAft>
-                <a:spcPts val="1200"/>
-              </a:spcAft>
-              <a:defRPr sz="1800"/>
-            </a:pPr>
-            <a:r>
-              <a:rPr sz="1400"/>
+              <a:lnSpc>
+                <a:spcPct val="90000"/>
+              </a:lnSpc>
+              <a:spcAft>
+                <a:spcPts val="300"/>
+              </a:spcAft>
+              <a:defRPr sz="1800"/>
+            </a:pPr>
+            <a:r>
+              <a:rPr sz="1300"/>
               <a:t>    • Tarih belirleme</a:t>
             </a:r>
           </a:p>
           <a:p>
             <a:pPr lvl="1">
-              <a:spcAft>
-                <a:spcPts val="1200"/>
-              </a:spcAft>
-              <a:defRPr sz="1800"/>
-            </a:pPr>
-            <a:r>
-              <a:rPr sz="1400"/>
+              <a:lnSpc>
+                <a:spcPct val="90000"/>
+              </a:lnSpc>
+              <a:spcAft>
+                <a:spcPts val="300"/>
+              </a:spcAft>
+              <a:defRPr sz="1800"/>
+            </a:pPr>
+            <a:r>
+              <a:rPr sz="1300"/>
               <a:t>    • Örnek: Google Takvim</a:t>
             </a:r>
           </a:p>
           <a:p>
             <a:pPr>
-              <a:spcAft>
-                <a:spcPts val="1200"/>
-              </a:spcAft>
-              <a:defRPr sz="2000"/>
-            </a:pPr>
-          </a:p>
-          <a:p>
-            <a:pPr>
-              <a:spcAft>
-                <a:spcPts val="1200"/>
+              <a:lnSpc>
+                <a:spcPct val="90000"/>
+              </a:lnSpc>
+              <a:spcAft>
+                <a:spcPts val="300"/>
+              </a:spcAft>
+              <a:defRPr sz="2000"/>
+            </a:pPr>
+          </a:p>
+          <a:p>
+            <a:pPr>
+              <a:lnSpc>
+                <a:spcPct val="90000"/>
+              </a:lnSpc>
+              <a:spcAft>
+                <a:spcPts val="300"/>
               </a:spcAft>
               <a:defRPr sz="2000" b="1"/>
             </a:pPr>
             <a:r>
-              <a:rPr sz="1400"/>
+              <a:rPr sz="1300"/>
               <a:t>🎯 Gantt Şeması:</a:t>
             </a:r>
           </a:p>
           <a:p>
             <a:pPr lvl="1">
-              <a:spcAft>
-                <a:spcPts val="1200"/>
-              </a:spcAft>
-              <a:defRPr sz="1800"/>
-            </a:pPr>
-            <a:r>
-              <a:rPr sz="1400"/>
+              <a:lnSpc>
+                <a:spcPct val="90000"/>
+              </a:lnSpc>
+              <a:spcAft>
+                <a:spcPts val="300"/>
+              </a:spcAft>
+              <a:defRPr sz="1800"/>
+            </a:pPr>
+            <a:r>
+              <a:rPr sz="1300"/>
               <a:t>    • Görevlerin zaman çizelgesi</a:t>
             </a:r>
           </a:p>
           <a:p>
             <a:pPr lvl="1">
-              <a:spcAft>
-                <a:spcPts val="1200"/>
-              </a:spcAft>
-              <a:defRPr sz="1800"/>
-            </a:pPr>
-            <a:r>
-              <a:rPr sz="1400"/>
+              <a:lnSpc>
+                <a:spcPct val="90000"/>
+              </a:lnSpc>
+              <a:spcAft>
+                <a:spcPts val="300"/>
+              </a:spcAft>
+              <a:defRPr sz="1800"/>
+            </a:pPr>
+            <a:r>
+              <a:rPr sz="1300"/>
               <a:t>    • Hangi görev ne zaman başlıyor/bitiyor?</a:t>
             </a:r>
           </a:p>
           <a:p>
             <a:pPr>
-              <a:spcAft>
-                <a:spcPts val="1200"/>
-              </a:spcAft>
-              <a:defRPr sz="2000"/>
-            </a:pPr>
-          </a:p>
-          <a:p>
-            <a:pPr>
-              <a:spcAft>
-                <a:spcPts val="1200"/>
-              </a:spcAft>
-              <a:defRPr sz="2000"/>
-            </a:pPr>
-            <a:r>
-              <a:rPr sz="1400"/>
+              <a:lnSpc>
+                <a:spcPct val="90000"/>
+              </a:lnSpc>
+              <a:spcAft>
+                <a:spcPts val="300"/>
+              </a:spcAft>
+              <a:defRPr sz="2000"/>
+            </a:pPr>
+          </a:p>
+          <a:p>
+            <a:pPr>
+              <a:lnSpc>
+                <a:spcPct val="90000"/>
+              </a:lnSpc>
+              <a:spcAft>
+                <a:spcPts val="300"/>
+              </a:spcAft>
+              <a:defRPr sz="2000"/>
+            </a:pPr>
+            <a:r>
+              <a:rPr sz="1300"/>
               <a:t>📊 Kanban Tahtası:</a:t>
             </a:r>
           </a:p>
           <a:p>
             <a:pPr lvl="1">
-              <a:spcAft>
-                <a:spcPts val="1200"/>
-              </a:spcAft>
-              <a:defRPr sz="1800"/>
-            </a:pPr>
-            <a:r>
-              <a:rPr sz="1400"/>
+              <a:lnSpc>
+                <a:spcPct val="90000"/>
+              </a:lnSpc>
+              <a:spcAft>
+                <a:spcPts val="300"/>
+              </a:spcAft>
+              <a:defRPr sz="1800"/>
+            </a:pPr>
+            <a:r>
+              <a:rPr sz="1300"/>
               <a:t>    • Yapılacak / Yapılıyor / Tamamlandı sütunları</a:t>
             </a:r>
           </a:p>
           <a:p>
             <a:pPr lvl="1">
-              <a:spcAft>
-                <a:spcPts val="1200"/>
-              </a:spcAft>
-              <a:defRPr sz="1800"/>
-            </a:pPr>
-            <a:r>
-              <a:rPr sz="1400"/>
+              <a:lnSpc>
+                <a:spcPct val="90000"/>
+              </a:lnSpc>
+              <a:spcAft>
+                <a:spcPts val="300"/>
+              </a:spcAft>
+              <a:defRPr sz="1800"/>
+            </a:pPr>
+            <a:r>
+              <a:rPr sz="1300"/>
               <a:t>    • Görevleri kartlar ile gösterme</a:t>
             </a:r>
           </a:p>
           <a:p>
             <a:pPr lvl="1">
-              <a:spcAft>
-                <a:spcPts val="1200"/>
-              </a:spcAft>
-              <a:defRPr sz="1800"/>
-            </a:pPr>
-            <a:r>
-              <a:rPr sz="1400"/>
+              <a:lnSpc>
+                <a:spcPct val="90000"/>
+              </a:lnSpc>
+              <a:spcAft>
+                <a:spcPts val="300"/>
+              </a:spcAft>
+              <a:defRPr sz="1800"/>
+            </a:pPr>
+            <a:r>
+              <a:rPr sz="1300"/>
               <a:t>    • Örnek: Trello, Padlet</a:t>
             </a:r>
           </a:p>
           <a:p>
             <a:pPr>
-              <a:spcAft>
-                <a:spcPts val="1200"/>
-              </a:spcAft>
-              <a:defRPr sz="2000"/>
-            </a:pPr>
-          </a:p>
-          <a:p>
-            <a:pPr>
-              <a:spcAft>
-                <a:spcPts val="1200"/>
+              <a:lnSpc>
+                <a:spcPct val="90000"/>
+              </a:lnSpc>
+              <a:spcAft>
+                <a:spcPts val="300"/>
+              </a:spcAft>
+              <a:defRPr sz="2000"/>
+            </a:pPr>
+          </a:p>
+          <a:p>
+            <a:pPr>
+              <a:lnSpc>
+                <a:spcPct val="90000"/>
+              </a:lnSpc>
+              <a:spcAft>
+                <a:spcPts val="300"/>
               </a:spcAft>
               <a:defRPr sz="2000" b="1"/>
             </a:pPr>
             <a:r>
-              <a:rPr sz="1400"/>
+              <a:rPr sz="1300"/>
               <a:t>💡 Basit bir kağıt kalem de yeterli olabilir!</a:t>
             </a:r>
           </a:p>
           <a:p>
             <a:pPr>
-              <a:spcAft>
-                <a:spcPts val="1200"/>
-              </a:spcAft>
-              <a:defRPr sz="2000"/>
-            </a:pPr>
-          </a:p>
-          <a:p>
-            <a:pPr>
-              <a:spcAft>
-                <a:spcPts val="1200"/>
+              <a:lnSpc>
+                <a:spcPct val="90000"/>
+              </a:lnSpc>
+              <a:spcAft>
+                <a:spcPts val="300"/>
+              </a:spcAft>
+              <a:defRPr sz="2000"/>
+            </a:pPr>
+          </a:p>
+          <a:p>
+            <a:pPr>
+              <a:lnSpc>
+                <a:spcPct val="90000"/>
+              </a:lnSpc>
+              <a:spcAft>
+                <a:spcPts val="300"/>
               </a:spcAft>
               <a:defRPr sz="2000" b="1"/>
             </a:pPr>
             <a:r>
-              <a:rPr sz="1400"/>
+              <a:rPr sz="1300"/>
               <a:t>🎯 Önemli olan: Düzenli ve planlı çalışmak</a:t>
             </a:r>
           </a:p>
@@ -8144,7 +8624,7 @@
         </p:nvSpPr>
         <p:spPr/>
         <p:txBody>
-          <a:bodyPr/>
+          <a:bodyPr wrap="square"/>
           <a:lstStyle/>
           <a:p>
             <a:pPr>
@@ -8198,288 +8678,375 @@
             <a:spAutoFit/>
           </a:bodyPr>
           <a:lstStyle/>
-          <a:p/>
-          <a:p>
-            <a:pPr>
-              <a:spcAft>
-                <a:spcPts val="1200"/>
-              </a:spcAft>
-              <a:defRPr sz="2000"/>
-            </a:pPr>
-            <a:r>
-              <a:rPr sz="1600"/>
+          <a:p>
+            <a:pPr>
+              <a:lnSpc>
+                <a:spcPct val="90000"/>
+              </a:lnSpc>
+              <a:spcAft>
+                <a:spcPts val="300"/>
+              </a:spcAft>
+            </a:pPr>
+          </a:p>
+          <a:p>
+            <a:pPr>
+              <a:lnSpc>
+                <a:spcPct val="90000"/>
+              </a:lnSpc>
+              <a:spcAft>
+                <a:spcPts val="300"/>
+              </a:spcAft>
+              <a:defRPr sz="2000"/>
+            </a:pPr>
+            <a:r>
+              <a:rPr sz="1400"/>
               <a:t>Büyük projeler tek başına yapılmaz!</a:t>
             </a:r>
           </a:p>
           <a:p>
             <a:pPr>
-              <a:spcAft>
-                <a:spcPts val="1200"/>
-              </a:spcAft>
-              <a:defRPr sz="2000"/>
-            </a:pPr>
-          </a:p>
-          <a:p>
-            <a:pPr>
-              <a:spcAft>
-                <a:spcPts val="1200"/>
+              <a:lnSpc>
+                <a:spcPct val="90000"/>
+              </a:lnSpc>
+              <a:spcAft>
+                <a:spcPts val="300"/>
+              </a:spcAft>
+              <a:defRPr sz="2000"/>
+            </a:pPr>
+          </a:p>
+          <a:p>
+            <a:pPr>
+              <a:lnSpc>
+                <a:spcPct val="90000"/>
+              </a:lnSpc>
+              <a:spcAft>
+                <a:spcPts val="300"/>
               </a:spcAft>
               <a:defRPr sz="2000" b="1"/>
             </a:pPr>
             <a:r>
-              <a:rPr sz="1600"/>
+              <a:rPr sz="1400"/>
               <a:t>✅ Proje Takımındaki Roller:</a:t>
             </a:r>
           </a:p>
           <a:p>
             <a:pPr>
-              <a:spcAft>
-                <a:spcPts val="1200"/>
-              </a:spcAft>
-              <a:defRPr sz="2000"/>
-            </a:pPr>
-          </a:p>
-          <a:p>
-            <a:pPr>
-              <a:spcAft>
-                <a:spcPts val="1200"/>
+              <a:lnSpc>
+                <a:spcPct val="90000"/>
+              </a:lnSpc>
+              <a:spcAft>
+                <a:spcPts val="300"/>
+              </a:spcAft>
+              <a:defRPr sz="2000"/>
+            </a:pPr>
+          </a:p>
+          <a:p>
+            <a:pPr>
+              <a:lnSpc>
+                <a:spcPct val="90000"/>
+              </a:lnSpc>
+              <a:spcAft>
+                <a:spcPts val="300"/>
               </a:spcAft>
               <a:defRPr sz="2000" b="1"/>
             </a:pPr>
             <a:r>
-              <a:rPr sz="1600"/>
+              <a:rPr sz="1400"/>
               <a:t>🎯 Proje Yöneticisi:</a:t>
             </a:r>
           </a:p>
           <a:p>
             <a:pPr lvl="1">
-              <a:spcAft>
-                <a:spcPts val="1200"/>
-              </a:spcAft>
-              <a:defRPr sz="1800"/>
-            </a:pPr>
-            <a:r>
-              <a:rPr sz="1600"/>
+              <a:lnSpc>
+                <a:spcPct val="90000"/>
+              </a:lnSpc>
+              <a:spcAft>
+                <a:spcPts val="300"/>
+              </a:spcAft>
+              <a:defRPr sz="1800"/>
+            </a:pPr>
+            <a:r>
+              <a:rPr sz="1400"/>
               <a:t>    • Planlamayı yapar</a:t>
             </a:r>
           </a:p>
           <a:p>
             <a:pPr lvl="1">
-              <a:spcAft>
-                <a:spcPts val="1200"/>
-              </a:spcAft>
-              <a:defRPr sz="1800"/>
-            </a:pPr>
-            <a:r>
-              <a:rPr sz="1600"/>
+              <a:lnSpc>
+                <a:spcPct val="90000"/>
+              </a:lnSpc>
+              <a:spcAft>
+                <a:spcPts val="300"/>
+              </a:spcAft>
+              <a:defRPr sz="1800"/>
+            </a:pPr>
+            <a:r>
+              <a:rPr sz="1400"/>
               <a:t>    • Görevleri dağıtır</a:t>
             </a:r>
           </a:p>
           <a:p>
             <a:pPr lvl="1">
-              <a:spcAft>
-                <a:spcPts val="1200"/>
-              </a:spcAft>
-              <a:defRPr sz="1800"/>
-            </a:pPr>
-            <a:r>
-              <a:rPr sz="1600"/>
+              <a:lnSpc>
+                <a:spcPct val="90000"/>
+              </a:lnSpc>
+              <a:spcAft>
+                <a:spcPts val="300"/>
+              </a:spcAft>
+              <a:defRPr sz="1800"/>
+            </a:pPr>
+            <a:r>
+              <a:rPr sz="1400"/>
               <a:t>    • İlerlemeyi takip eder</a:t>
             </a:r>
           </a:p>
           <a:p>
             <a:pPr>
-              <a:spcAft>
-                <a:spcPts val="1200"/>
-              </a:spcAft>
-              <a:defRPr sz="2000"/>
-            </a:pPr>
-          </a:p>
-          <a:p>
-            <a:pPr>
-              <a:spcAft>
-                <a:spcPts val="1200"/>
-              </a:spcAft>
-              <a:defRPr sz="2000"/>
-            </a:pPr>
-            <a:r>
-              <a:rPr sz="1600"/>
+              <a:lnSpc>
+                <a:spcPct val="90000"/>
+              </a:lnSpc>
+              <a:spcAft>
+                <a:spcPts val="300"/>
+              </a:spcAft>
+              <a:defRPr sz="2000"/>
+            </a:pPr>
+          </a:p>
+          <a:p>
+            <a:pPr>
+              <a:lnSpc>
+                <a:spcPct val="90000"/>
+              </a:lnSpc>
+              <a:spcAft>
+                <a:spcPts val="300"/>
+              </a:spcAft>
+              <a:defRPr sz="2000"/>
+            </a:pPr>
+            <a:r>
+              <a:rPr sz="1400"/>
               <a:t>🎨 Tasarımcı:</a:t>
             </a:r>
           </a:p>
           <a:p>
             <a:pPr lvl="1">
-              <a:spcAft>
-                <a:spcPts val="1200"/>
-              </a:spcAft>
-              <a:defRPr sz="1800"/>
-            </a:pPr>
-            <a:r>
-              <a:rPr sz="1600"/>
+              <a:lnSpc>
+                <a:spcPct val="90000"/>
+              </a:lnSpc>
+              <a:spcAft>
+                <a:spcPts val="300"/>
+              </a:spcAft>
+              <a:defRPr sz="1800"/>
+            </a:pPr>
+            <a:r>
+              <a:rPr sz="1400"/>
               <a:t>    • Görsel tasarımı yapar</a:t>
             </a:r>
           </a:p>
           <a:p>
             <a:pPr lvl="1">
-              <a:spcAft>
-                <a:spcPts val="1200"/>
-              </a:spcAft>
-              <a:defRPr sz="1800"/>
-            </a:pPr>
-            <a:r>
-              <a:rPr sz="1600"/>
+              <a:lnSpc>
+                <a:spcPct val="90000"/>
+              </a:lnSpc>
+              <a:spcAft>
+                <a:spcPts val="300"/>
+              </a:spcAft>
+              <a:defRPr sz="1800"/>
+            </a:pPr>
+            <a:r>
+              <a:rPr sz="1400"/>
               <a:t>    • Kullanıcı arayüzünü çizer</a:t>
             </a:r>
           </a:p>
           <a:p>
             <a:pPr>
-              <a:spcAft>
-                <a:spcPts val="1200"/>
-              </a:spcAft>
-              <a:defRPr sz="2000"/>
-            </a:pPr>
-          </a:p>
-          <a:p>
-            <a:pPr>
-              <a:spcAft>
-                <a:spcPts val="1200"/>
-              </a:spcAft>
-              <a:defRPr sz="2000"/>
-            </a:pPr>
-            <a:r>
-              <a:rPr sz="1600"/>
+              <a:lnSpc>
+                <a:spcPct val="90000"/>
+              </a:lnSpc>
+              <a:spcAft>
+                <a:spcPts val="300"/>
+              </a:spcAft>
+              <a:defRPr sz="2000"/>
+            </a:pPr>
+          </a:p>
+          <a:p>
+            <a:pPr>
+              <a:lnSpc>
+                <a:spcPct val="90000"/>
+              </a:lnSpc>
+              <a:spcAft>
+                <a:spcPts val="300"/>
+              </a:spcAft>
+              <a:defRPr sz="2000"/>
+            </a:pPr>
+            <a:r>
+              <a:rPr sz="1400"/>
               <a:t>💻 Geliştirici (Programcı):</a:t>
             </a:r>
           </a:p>
           <a:p>
             <a:pPr lvl="1">
-              <a:spcAft>
-                <a:spcPts val="1200"/>
-              </a:spcAft>
-              <a:defRPr sz="1800"/>
-            </a:pPr>
-            <a:r>
-              <a:rPr sz="1600"/>
+              <a:lnSpc>
+                <a:spcPct val="90000"/>
+              </a:lnSpc>
+              <a:spcAft>
+                <a:spcPts val="300"/>
+              </a:spcAft>
+              <a:defRPr sz="1800"/>
+            </a:pPr>
+            <a:r>
+              <a:rPr sz="1400"/>
               <a:t>    • Kodu yazar</a:t>
             </a:r>
           </a:p>
           <a:p>
             <a:pPr lvl="1">
-              <a:spcAft>
-                <a:spcPts val="1200"/>
-              </a:spcAft>
-              <a:defRPr sz="1800"/>
-            </a:pPr>
-            <a:r>
-              <a:rPr sz="1600"/>
+              <a:lnSpc>
+                <a:spcPct val="90000"/>
+              </a:lnSpc>
+              <a:spcAft>
+                <a:spcPts val="300"/>
+              </a:spcAft>
+              <a:defRPr sz="1800"/>
+            </a:pPr>
+            <a:r>
+              <a:rPr sz="1400"/>
               <a:t>    • Uygulamayı geliştirir</a:t>
             </a:r>
           </a:p>
           <a:p>
             <a:pPr>
-              <a:spcAft>
-                <a:spcPts val="1200"/>
-              </a:spcAft>
-              <a:defRPr sz="2000"/>
-            </a:pPr>
-          </a:p>
-          <a:p>
-            <a:pPr>
-              <a:spcAft>
-                <a:spcPts val="1200"/>
-              </a:spcAft>
-              <a:defRPr sz="2000"/>
-            </a:pPr>
-            <a:r>
-              <a:rPr sz="1600"/>
+              <a:lnSpc>
+                <a:spcPct val="90000"/>
+              </a:lnSpc>
+              <a:spcAft>
+                <a:spcPts val="300"/>
+              </a:spcAft>
+              <a:defRPr sz="2000"/>
+            </a:pPr>
+          </a:p>
+          <a:p>
+            <a:pPr>
+              <a:lnSpc>
+                <a:spcPct val="90000"/>
+              </a:lnSpc>
+              <a:spcAft>
+                <a:spcPts val="300"/>
+              </a:spcAft>
+              <a:defRPr sz="2000"/>
+            </a:pPr>
+            <a:r>
+              <a:rPr sz="1400"/>
               <a:t>🧪 Test Uzmanı:</a:t>
             </a:r>
           </a:p>
           <a:p>
             <a:pPr lvl="1">
-              <a:spcAft>
-                <a:spcPts val="1200"/>
-              </a:spcAft>
-              <a:defRPr sz="1800"/>
-            </a:pPr>
-            <a:r>
-              <a:rPr sz="1600"/>
+              <a:lnSpc>
+                <a:spcPct val="90000"/>
+              </a:lnSpc>
+              <a:spcAft>
+                <a:spcPts val="300"/>
+              </a:spcAft>
+              <a:defRPr sz="1800"/>
+            </a:pPr>
+            <a:r>
+              <a:rPr sz="1400"/>
               <a:t>    • Testleri yapar</a:t>
             </a:r>
           </a:p>
           <a:p>
             <a:pPr lvl="1">
-              <a:spcAft>
-                <a:spcPts val="1200"/>
-              </a:spcAft>
-              <a:defRPr sz="1800"/>
-            </a:pPr>
-            <a:r>
-              <a:rPr sz="1600"/>
+              <a:lnSpc>
+                <a:spcPct val="90000"/>
+              </a:lnSpc>
+              <a:spcAft>
+                <a:spcPts val="300"/>
+              </a:spcAft>
+              <a:defRPr sz="1800"/>
+            </a:pPr>
+            <a:r>
+              <a:rPr sz="1400"/>
               <a:t>    • Hataları bulur</a:t>
             </a:r>
           </a:p>
           <a:p>
             <a:pPr>
-              <a:spcAft>
-                <a:spcPts val="1200"/>
-              </a:spcAft>
-              <a:defRPr sz="2000"/>
-            </a:pPr>
-          </a:p>
-          <a:p>
-            <a:pPr>
-              <a:spcAft>
-                <a:spcPts val="1200"/>
-              </a:spcAft>
-              <a:defRPr sz="2000"/>
-            </a:pPr>
-            <a:r>
-              <a:rPr sz="1600"/>
+              <a:lnSpc>
+                <a:spcPct val="90000"/>
+              </a:lnSpc>
+              <a:spcAft>
+                <a:spcPts val="300"/>
+              </a:spcAft>
+              <a:defRPr sz="2000"/>
+            </a:pPr>
+          </a:p>
+          <a:p>
+            <a:pPr>
+              <a:lnSpc>
+                <a:spcPct val="90000"/>
+              </a:lnSpc>
+              <a:spcAft>
+                <a:spcPts val="300"/>
+              </a:spcAft>
+              <a:defRPr sz="2000"/>
+            </a:pPr>
+            <a:r>
+              <a:rPr sz="1400"/>
               <a:t>📝 İçerik Üreticisi:</a:t>
             </a:r>
           </a:p>
           <a:p>
             <a:pPr lvl="1">
-              <a:spcAft>
-                <a:spcPts val="1200"/>
-              </a:spcAft>
-              <a:defRPr sz="1800"/>
-            </a:pPr>
-            <a:r>
-              <a:rPr sz="1600"/>
+              <a:lnSpc>
+                <a:spcPct val="90000"/>
+              </a:lnSpc>
+              <a:spcAft>
+                <a:spcPts val="300"/>
+              </a:spcAft>
+              <a:defRPr sz="1800"/>
+            </a:pPr>
+            <a:r>
+              <a:rPr sz="1400"/>
               <a:t>    • Metinleri yazar</a:t>
             </a:r>
           </a:p>
           <a:p>
             <a:pPr lvl="1">
-              <a:spcAft>
-                <a:spcPts val="1200"/>
-              </a:spcAft>
-              <a:defRPr sz="1800"/>
-            </a:pPr>
-            <a:r>
-              <a:rPr sz="1600"/>
+              <a:lnSpc>
+                <a:spcPct val="90000"/>
+              </a:lnSpc>
+              <a:spcAft>
+                <a:spcPts val="300"/>
+              </a:spcAft>
+              <a:defRPr sz="1800"/>
+            </a:pPr>
+            <a:r>
+              <a:rPr sz="1400"/>
               <a:t>    • Görselleri hazırlar</a:t>
             </a:r>
           </a:p>
           <a:p>
             <a:pPr>
-              <a:spcAft>
-                <a:spcPts val="1200"/>
-              </a:spcAft>
-              <a:defRPr sz="2000"/>
-            </a:pPr>
-          </a:p>
-          <a:p>
-            <a:pPr>
-              <a:spcAft>
-                <a:spcPts val="1200"/>
+              <a:lnSpc>
+                <a:spcPct val="90000"/>
+              </a:lnSpc>
+              <a:spcAft>
+                <a:spcPts val="300"/>
+              </a:spcAft>
+              <a:defRPr sz="2000"/>
+            </a:pPr>
+          </a:p>
+          <a:p>
+            <a:pPr>
+              <a:lnSpc>
+                <a:spcPct val="90000"/>
+              </a:lnSpc>
+              <a:spcAft>
+                <a:spcPts val="300"/>
               </a:spcAft>
               <a:defRPr sz="2000" b="1"/>
             </a:pPr>
             <a:r>
-              <a:rPr sz="1600"/>
+              <a:rPr sz="1400"/>
               <a:t>💡 Küçük projelerde bir kişi birden fazla rol alabilir!</a:t>
             </a:r>
           </a:p>
@@ -8515,7 +9082,7 @@
         </p:nvSpPr>
         <p:spPr/>
         <p:txBody>
-          <a:bodyPr/>
+          <a:bodyPr wrap="square"/>
           <a:lstStyle/>
           <a:p>
             <a:pPr>
@@ -8569,248 +9136,323 @@
             <a:spAutoFit/>
           </a:bodyPr>
           <a:lstStyle/>
-          <a:p/>
-          <a:p>
-            <a:pPr>
-              <a:spcAft>
-                <a:spcPts val="1200"/>
-              </a:spcAft>
-              <a:defRPr sz="2000"/>
-            </a:pPr>
-            <a:r>
-              <a:rPr sz="1400"/>
+          <a:p>
+            <a:pPr>
+              <a:lnSpc>
+                <a:spcPct val="90000"/>
+              </a:lnSpc>
+              <a:spcAft>
+                <a:spcPts val="300"/>
+              </a:spcAft>
+            </a:pPr>
+          </a:p>
+          <a:p>
+            <a:pPr>
+              <a:lnSpc>
+                <a:spcPct val="90000"/>
+              </a:lnSpc>
+              <a:spcAft>
+                <a:spcPts val="300"/>
+              </a:spcAft>
+              <a:defRPr sz="2000"/>
+            </a:pPr>
+            <a:r>
+              <a:rPr sz="1300"/>
               <a:t>Dünyaca ünlü dijital ürünler nasıl başladı?</a:t>
             </a:r>
           </a:p>
           <a:p>
             <a:pPr>
-              <a:spcAft>
-                <a:spcPts val="1200"/>
-              </a:spcAft>
-              <a:defRPr sz="2000"/>
-            </a:pPr>
-          </a:p>
-          <a:p>
-            <a:pPr>
-              <a:spcAft>
-                <a:spcPts val="1200"/>
-              </a:spcAft>
-              <a:defRPr sz="2000"/>
-            </a:pPr>
-            <a:r>
-              <a:rPr sz="1400"/>
+              <a:lnSpc>
+                <a:spcPct val="90000"/>
+              </a:lnSpc>
+              <a:spcAft>
+                <a:spcPts val="300"/>
+              </a:spcAft>
+              <a:defRPr sz="2000"/>
+            </a:pPr>
+          </a:p>
+          <a:p>
+            <a:pPr>
+              <a:lnSpc>
+                <a:spcPct val="90000"/>
+              </a:lnSpc>
+              <a:spcAft>
+                <a:spcPts val="300"/>
+              </a:spcAft>
+              <a:defRPr sz="2000"/>
+            </a:pPr>
+            <a:r>
+              <a:rPr sz="1300"/>
               <a:t>📱 Instagram:</a:t>
             </a:r>
           </a:p>
           <a:p>
             <a:pPr lvl="1">
-              <a:spcAft>
-                <a:spcPts val="1200"/>
-              </a:spcAft>
-              <a:defRPr sz="1800"/>
-            </a:pPr>
-            <a:r>
-              <a:rPr sz="1400"/>
+              <a:lnSpc>
+                <a:spcPct val="90000"/>
+              </a:lnSpc>
+              <a:spcAft>
+                <a:spcPts val="300"/>
+              </a:spcAft>
+              <a:defRPr sz="1800"/>
+            </a:pPr>
+            <a:r>
+              <a:rPr sz="1300"/>
               <a:t>    • Başlangıç: Fotoğraf paylaşım uygulaması</a:t>
             </a:r>
           </a:p>
           <a:p>
             <a:pPr lvl="1">
-              <a:spcAft>
-                <a:spcPts val="1200"/>
-              </a:spcAft>
-              <a:defRPr sz="1800"/>
-            </a:pPr>
-            <a:r>
-              <a:rPr sz="1400"/>
+              <a:lnSpc>
+                <a:spcPct val="90000"/>
+              </a:lnSpc>
+              <a:spcAft>
+                <a:spcPts val="300"/>
+              </a:spcAft>
+              <a:defRPr sz="1800"/>
+            </a:pPr>
+            <a:r>
+              <a:rPr sz="1300"/>
               <a:t>    • İhtiyaç: Fotoğrafları güzel göstermek</a:t>
             </a:r>
           </a:p>
           <a:p>
             <a:pPr lvl="1">
-              <a:spcAft>
-                <a:spcPts val="1200"/>
-              </a:spcAft>
-              <a:defRPr sz="1800"/>
-            </a:pPr>
-            <a:r>
-              <a:rPr sz="1400"/>
+              <a:lnSpc>
+                <a:spcPct val="90000"/>
+              </a:lnSpc>
+              <a:spcAft>
+                <a:spcPts val="300"/>
+              </a:spcAft>
+              <a:defRPr sz="1800"/>
+            </a:pPr>
+            <a:r>
+              <a:rPr sz="1300"/>
               <a:t>    • 2010'da başladı, şimdi milyarlarca kullanıcı</a:t>
             </a:r>
           </a:p>
           <a:p>
             <a:pPr>
-              <a:spcAft>
-                <a:spcPts val="1200"/>
-              </a:spcAft>
-              <a:defRPr sz="2000"/>
-            </a:pPr>
-          </a:p>
-          <a:p>
-            <a:pPr>
-              <a:spcAft>
-                <a:spcPts val="1200"/>
-              </a:spcAft>
-              <a:defRPr sz="2000"/>
-            </a:pPr>
-            <a:r>
-              <a:rPr sz="1400"/>
+              <a:lnSpc>
+                <a:spcPct val="90000"/>
+              </a:lnSpc>
+              <a:spcAft>
+                <a:spcPts val="300"/>
+              </a:spcAft>
+              <a:defRPr sz="2000"/>
+            </a:pPr>
+          </a:p>
+          <a:p>
+            <a:pPr>
+              <a:lnSpc>
+                <a:spcPct val="90000"/>
+              </a:lnSpc>
+              <a:spcAft>
+                <a:spcPts val="300"/>
+              </a:spcAft>
+              <a:defRPr sz="2000"/>
+            </a:pPr>
+            <a:r>
+              <a:rPr sz="1300"/>
               <a:t>🎮 Minecraft:</a:t>
             </a:r>
           </a:p>
           <a:p>
             <a:pPr lvl="1">
-              <a:spcAft>
-                <a:spcPts val="1200"/>
-              </a:spcAft>
-              <a:defRPr sz="1800"/>
-            </a:pPr>
-            <a:r>
-              <a:rPr sz="1400"/>
+              <a:lnSpc>
+                <a:spcPct val="90000"/>
+              </a:lnSpc>
+              <a:spcAft>
+                <a:spcPts val="300"/>
+              </a:spcAft>
+              <a:defRPr sz="1800"/>
+            </a:pPr>
+            <a:r>
+              <a:rPr sz="1300"/>
               <a:t>    • Başlangıç: Tek kişinin hobi projesi</a:t>
             </a:r>
           </a:p>
           <a:p>
             <a:pPr lvl="1">
-              <a:spcAft>
-                <a:spcPts val="1200"/>
-              </a:spcAft>
-              <a:defRPr sz="1800"/>
-            </a:pPr>
-            <a:r>
-              <a:rPr sz="1400"/>
+              <a:lnSpc>
+                <a:spcPct val="90000"/>
+              </a:lnSpc>
+              <a:spcAft>
+                <a:spcPts val="300"/>
+              </a:spcAft>
+              <a:defRPr sz="1800"/>
+            </a:pPr>
+            <a:r>
+              <a:rPr sz="1300"/>
               <a:t>    • İhtiyaç: Yaratıcı bir oyun</a:t>
             </a:r>
           </a:p>
           <a:p>
             <a:pPr lvl="1">
-              <a:spcAft>
-                <a:spcPts val="1200"/>
-              </a:spcAft>
-              <a:defRPr sz="1800"/>
-            </a:pPr>
-            <a:r>
-              <a:rPr sz="1400"/>
+              <a:lnSpc>
+                <a:spcPct val="90000"/>
+              </a:lnSpc>
+              <a:spcAft>
+                <a:spcPts val="300"/>
+              </a:spcAft>
+              <a:defRPr sz="1800"/>
+            </a:pPr>
+            <a:r>
+              <a:rPr sz="1300"/>
               <a:t>    • Dünyanın en çok satan oyunu oldu</a:t>
             </a:r>
           </a:p>
           <a:p>
             <a:pPr>
-              <a:spcAft>
-                <a:spcPts val="1200"/>
-              </a:spcAft>
-              <a:defRPr sz="2000"/>
-            </a:pPr>
-          </a:p>
-          <a:p>
-            <a:pPr>
-              <a:spcAft>
-                <a:spcPts val="1200"/>
-              </a:spcAft>
-              <a:defRPr sz="2000"/>
-            </a:pPr>
-            <a:r>
-              <a:rPr sz="1400"/>
+              <a:lnSpc>
+                <a:spcPct val="90000"/>
+              </a:lnSpc>
+              <a:spcAft>
+                <a:spcPts val="300"/>
+              </a:spcAft>
+              <a:defRPr sz="2000"/>
+            </a:pPr>
+          </a:p>
+          <a:p>
+            <a:pPr>
+              <a:lnSpc>
+                <a:spcPct val="90000"/>
+              </a:lnSpc>
+              <a:spcAft>
+                <a:spcPts val="300"/>
+              </a:spcAft>
+              <a:defRPr sz="2000"/>
+            </a:pPr>
+            <a:r>
+              <a:rPr sz="1300"/>
               <a:t>📚 Duolingo:</a:t>
             </a:r>
           </a:p>
           <a:p>
             <a:pPr lvl="1">
-              <a:spcAft>
-                <a:spcPts val="1200"/>
-              </a:spcAft>
-              <a:defRPr sz="1800"/>
-            </a:pPr>
-            <a:r>
-              <a:rPr sz="1400"/>
+              <a:lnSpc>
+                <a:spcPct val="90000"/>
+              </a:lnSpc>
+              <a:spcAft>
+                <a:spcPts val="300"/>
+              </a:spcAft>
+              <a:defRPr sz="1800"/>
+            </a:pPr>
+            <a:r>
+              <a:rPr sz="1300"/>
               <a:t>    • Başlangıç: Ücretsiz dil öğrenme</a:t>
             </a:r>
           </a:p>
           <a:p>
             <a:pPr lvl="1">
-              <a:spcAft>
-                <a:spcPts val="1200"/>
-              </a:spcAft>
-              <a:defRPr sz="1800"/>
-            </a:pPr>
-            <a:r>
-              <a:rPr sz="1400"/>
+              <a:lnSpc>
+                <a:spcPct val="90000"/>
+              </a:lnSpc>
+              <a:spcAft>
+                <a:spcPts val="300"/>
+              </a:spcAft>
+              <a:defRPr sz="1800"/>
+            </a:pPr>
+            <a:r>
+              <a:rPr sz="1300"/>
               <a:t>    • İhtiyaç: Eğlenceli dil eğitimi</a:t>
             </a:r>
           </a:p>
           <a:p>
             <a:pPr lvl="1">
-              <a:spcAft>
-                <a:spcPts val="1200"/>
-              </a:spcAft>
-              <a:defRPr sz="1800"/>
-            </a:pPr>
-            <a:r>
-              <a:rPr sz="1400"/>
+              <a:lnSpc>
+                <a:spcPct val="90000"/>
+              </a:lnSpc>
+              <a:spcAft>
+                <a:spcPts val="300"/>
+              </a:spcAft>
+              <a:defRPr sz="1800"/>
+            </a:pPr>
+            <a:r>
+              <a:rPr sz="1300"/>
               <a:t>    • 500 milyondan fazla kullanıcı</a:t>
             </a:r>
           </a:p>
           <a:p>
             <a:pPr>
-              <a:spcAft>
-                <a:spcPts val="1200"/>
-              </a:spcAft>
-              <a:defRPr sz="2000"/>
-            </a:pPr>
-          </a:p>
-          <a:p>
-            <a:pPr>
-              <a:spcAft>
-                <a:spcPts val="1200"/>
-              </a:spcAft>
-              <a:defRPr sz="2000"/>
-            </a:pPr>
-            <a:r>
-              <a:rPr sz="1400"/>
+              <a:lnSpc>
+                <a:spcPct val="90000"/>
+              </a:lnSpc>
+              <a:spcAft>
+                <a:spcPts val="300"/>
+              </a:spcAft>
+              <a:defRPr sz="2000"/>
+            </a:pPr>
+          </a:p>
+          <a:p>
+            <a:pPr>
+              <a:lnSpc>
+                <a:spcPct val="90000"/>
+              </a:lnSpc>
+              <a:spcAft>
+                <a:spcPts val="300"/>
+              </a:spcAft>
+              <a:defRPr sz="2000"/>
+            </a:pPr>
+            <a:r>
+              <a:rPr sz="1300"/>
               <a:t>🐦 Twitter (X):</a:t>
             </a:r>
           </a:p>
           <a:p>
             <a:pPr lvl="1">
-              <a:spcAft>
-                <a:spcPts val="1200"/>
-              </a:spcAft>
-              <a:defRPr sz="1800"/>
-            </a:pPr>
-            <a:r>
-              <a:rPr sz="1400"/>
+              <a:lnSpc>
+                <a:spcPct val="90000"/>
+              </a:lnSpc>
+              <a:spcAft>
+                <a:spcPts val="300"/>
+              </a:spcAft>
+              <a:defRPr sz="1800"/>
+            </a:pPr>
+            <a:r>
+              <a:rPr sz="1300"/>
               <a:t>    • Başlangıç: Kısa mesajlaşma platformu</a:t>
             </a:r>
           </a:p>
           <a:p>
             <a:pPr lvl="1">
-              <a:spcAft>
-                <a:spcPts val="1200"/>
-              </a:spcAft>
-              <a:defRPr sz="1800"/>
-            </a:pPr>
-            <a:r>
-              <a:rPr sz="1400"/>
+              <a:lnSpc>
+                <a:spcPct val="90000"/>
+              </a:lnSpc>
+              <a:spcAft>
+                <a:spcPts val="300"/>
+              </a:spcAft>
+              <a:defRPr sz="1800"/>
+            </a:pPr>
+            <a:r>
+              <a:rPr sz="1300"/>
               <a:t>    • İhtiyaç: Hızlı fikir paylaşımı</a:t>
             </a:r>
           </a:p>
           <a:p>
             <a:pPr>
-              <a:spcAft>
-                <a:spcPts val="1200"/>
-              </a:spcAft>
-              <a:defRPr sz="2000"/>
-            </a:pPr>
-          </a:p>
-          <a:p>
-            <a:pPr>
-              <a:spcAft>
-                <a:spcPts val="1200"/>
+              <a:lnSpc>
+                <a:spcPct val="90000"/>
+              </a:lnSpc>
+              <a:spcAft>
+                <a:spcPts val="300"/>
+              </a:spcAft>
+              <a:defRPr sz="2000"/>
+            </a:pPr>
+          </a:p>
+          <a:p>
+            <a:pPr>
+              <a:lnSpc>
+                <a:spcPct val="90000"/>
+              </a:lnSpc>
+              <a:spcAft>
+                <a:spcPts val="300"/>
               </a:spcAft>
               <a:defRPr sz="2000" b="1"/>
             </a:pPr>
             <a:r>
-              <a:rPr sz="1400"/>
+              <a:rPr sz="1300"/>
               <a:t>💡 Hepsi küçük fikirlerle başladı ve kullanıcı ihtiyacını çözdü!</a:t>
             </a:r>
           </a:p>
@@ -8846,7 +9488,7 @@
         </p:nvSpPr>
         <p:spPr/>
         <p:txBody>
-          <a:bodyPr/>
+          <a:bodyPr wrap="square"/>
           <a:lstStyle/>
           <a:p>
             <a:pPr>
@@ -8900,240 +9542,312 @@
             <a:spAutoFit/>
           </a:bodyPr>
           <a:lstStyle/>
-          <a:p/>
-          <a:p>
-            <a:pPr>
-              <a:spcAft>
-                <a:spcPts val="1200"/>
-              </a:spcAft>
-              <a:defRPr sz="2000"/>
-            </a:pPr>
-            <a:r>
-              <a:rPr sz="1600"/>
+          <a:p>
+            <a:pPr>
+              <a:lnSpc>
+                <a:spcPct val="90000"/>
+              </a:lnSpc>
+              <a:spcAft>
+                <a:spcPts val="300"/>
+              </a:spcAft>
+            </a:pPr>
+          </a:p>
+          <a:p>
+            <a:pPr>
+              <a:lnSpc>
+                <a:spcPct val="90000"/>
+              </a:lnSpc>
+              <a:spcAft>
+                <a:spcPts val="300"/>
+              </a:spcAft>
+              <a:defRPr sz="2000"/>
+            </a:pPr>
+            <a:r>
+              <a:rPr sz="1400"/>
               <a:t>Şimdi öğrendiklerinizi uygulama zamanı!</a:t>
             </a:r>
           </a:p>
           <a:p>
             <a:pPr>
-              <a:spcAft>
-                <a:spcPts val="1200"/>
-              </a:spcAft>
-              <a:defRPr sz="2000"/>
-            </a:pPr>
-          </a:p>
-          <a:p>
-            <a:pPr>
-              <a:spcAft>
-                <a:spcPts val="1200"/>
+              <a:lnSpc>
+                <a:spcPct val="90000"/>
+              </a:lnSpc>
+              <a:spcAft>
+                <a:spcPts val="300"/>
+              </a:spcAft>
+              <a:defRPr sz="2000"/>
+            </a:pPr>
+          </a:p>
+          <a:p>
+            <a:pPr>
+              <a:lnSpc>
+                <a:spcPct val="90000"/>
+              </a:lnSpc>
+              <a:spcAft>
+                <a:spcPts val="300"/>
               </a:spcAft>
               <a:defRPr sz="2000" b="1"/>
             </a:pPr>
             <a:r>
-              <a:rPr sz="1600"/>
+              <a:rPr sz="1400"/>
               <a:t>🎯 Proje Görevi:</a:t>
             </a:r>
           </a:p>
           <a:p>
             <a:pPr>
-              <a:spcAft>
-                <a:spcPts val="1200"/>
-              </a:spcAft>
-              <a:defRPr sz="2000"/>
-            </a:pPr>
-            <a:r>
-              <a:rPr sz="1600"/>
+              <a:lnSpc>
+                <a:spcPct val="90000"/>
+              </a:lnSpc>
+              <a:spcAft>
+                <a:spcPts val="300"/>
+              </a:spcAft>
+              <a:defRPr sz="2000"/>
+            </a:pPr>
+            <a:r>
+              <a:rPr sz="1400"/>
               <a:t>Grup olarak basit bir dijital ürün tasarlayın</a:t>
             </a:r>
           </a:p>
           <a:p>
             <a:pPr>
-              <a:spcAft>
-                <a:spcPts val="1200"/>
-              </a:spcAft>
-              <a:defRPr sz="2000"/>
-            </a:pPr>
-          </a:p>
-          <a:p>
-            <a:pPr>
-              <a:spcAft>
-                <a:spcPts val="1200"/>
+              <a:lnSpc>
+                <a:spcPct val="90000"/>
+              </a:lnSpc>
+              <a:spcAft>
+                <a:spcPts val="300"/>
+              </a:spcAft>
+              <a:defRPr sz="2000"/>
+            </a:pPr>
+          </a:p>
+          <a:p>
+            <a:pPr>
+              <a:lnSpc>
+                <a:spcPct val="90000"/>
+              </a:lnSpc>
+              <a:spcAft>
+                <a:spcPts val="300"/>
               </a:spcAft>
               <a:defRPr sz="2000" b="1"/>
             </a:pPr>
             <a:r>
-              <a:rPr sz="1600"/>
+              <a:rPr sz="1400"/>
               <a:t>✅ Adımlar:</a:t>
             </a:r>
           </a:p>
           <a:p>
             <a:pPr>
-              <a:spcAft>
-                <a:spcPts val="1200"/>
-              </a:spcAft>
-              <a:defRPr sz="2000"/>
-            </a:pPr>
-            <a:r>
-              <a:rPr sz="1600"/>
+              <a:lnSpc>
+                <a:spcPct val="90000"/>
+              </a:lnSpc>
+              <a:spcAft>
+                <a:spcPts val="300"/>
+              </a:spcAft>
+              <a:defRPr sz="2000"/>
+            </a:pPr>
+            <a:r>
+              <a:rPr sz="1400"/>
               <a:t>1️⃣ Bir problem belirleyin (sınıfınızda, okulunuzda)</a:t>
             </a:r>
           </a:p>
           <a:p>
             <a:pPr>
-              <a:spcAft>
-                <a:spcPts val="1200"/>
-              </a:spcAft>
-              <a:defRPr sz="2000"/>
-            </a:pPr>
-            <a:r>
-              <a:rPr sz="1600"/>
+              <a:lnSpc>
+                <a:spcPct val="90000"/>
+              </a:lnSpc>
+              <a:spcAft>
+                <a:spcPts val="300"/>
+              </a:spcAft>
+              <a:defRPr sz="2000"/>
+            </a:pPr>
+            <a:r>
+              <a:rPr sz="1400"/>
               <a:t>2️⃣ Çözüm fikirleri geliştirin (beyin fırtınası)</a:t>
             </a:r>
           </a:p>
           <a:p>
             <a:pPr>
-              <a:spcAft>
-                <a:spcPts val="1200"/>
-              </a:spcAft>
-              <a:defRPr sz="2000"/>
-            </a:pPr>
-            <a:r>
-              <a:rPr sz="1600"/>
+              <a:lnSpc>
+                <a:spcPct val="90000"/>
+              </a:lnSpc>
+              <a:spcAft>
+                <a:spcPts val="300"/>
+              </a:spcAft>
+              <a:defRPr sz="2000"/>
+            </a:pPr>
+            <a:r>
+              <a:rPr sz="1400"/>
               <a:t>3️⃣ En iyi fikri seçin</a:t>
             </a:r>
           </a:p>
           <a:p>
             <a:pPr>
-              <a:spcAft>
-                <a:spcPts val="1200"/>
-              </a:spcAft>
-              <a:defRPr sz="2000"/>
-            </a:pPr>
-            <a:r>
-              <a:rPr sz="1600"/>
+              <a:lnSpc>
+                <a:spcPct val="90000"/>
+              </a:lnSpc>
+              <a:spcAft>
+                <a:spcPts val="300"/>
+              </a:spcAft>
+              <a:defRPr sz="2000"/>
+            </a:pPr>
+            <a:r>
+              <a:rPr sz="1400"/>
               <a:t>4️⃣ Kağıt prototip çizin (en az 3 ekran)</a:t>
             </a:r>
           </a:p>
           <a:p>
             <a:pPr>
-              <a:spcAft>
-                <a:spcPts val="1200"/>
-              </a:spcAft>
-              <a:defRPr sz="2000"/>
-            </a:pPr>
-            <a:r>
-              <a:rPr sz="1600"/>
+              <a:lnSpc>
+                <a:spcPct val="90000"/>
+              </a:lnSpc>
+              <a:spcAft>
+                <a:spcPts val="300"/>
+              </a:spcAft>
+              <a:defRPr sz="2000"/>
+            </a:pPr>
+            <a:r>
+              <a:rPr sz="1400"/>
               <a:t>5️⃣ Başka bir grupla test edin</a:t>
             </a:r>
           </a:p>
           <a:p>
             <a:pPr>
-              <a:spcAft>
-                <a:spcPts val="1200"/>
-              </a:spcAft>
-              <a:defRPr sz="2000"/>
-            </a:pPr>
-            <a:r>
-              <a:rPr sz="1600"/>
+              <a:lnSpc>
+                <a:spcPct val="90000"/>
+              </a:lnSpc>
+              <a:spcAft>
+                <a:spcPts val="300"/>
+              </a:spcAft>
+              <a:defRPr sz="2000"/>
+            </a:pPr>
+            <a:r>
+              <a:rPr sz="1400"/>
               <a:t>6️⃣ Geri bildirime göre iyileştirin</a:t>
             </a:r>
           </a:p>
           <a:p>
             <a:pPr>
-              <a:spcAft>
-                <a:spcPts val="1200"/>
-              </a:spcAft>
-              <a:defRPr sz="2000"/>
-            </a:pPr>
-            <a:r>
-              <a:rPr sz="1600"/>
+              <a:lnSpc>
+                <a:spcPct val="90000"/>
+              </a:lnSpc>
+              <a:spcAft>
+                <a:spcPts val="300"/>
+              </a:spcAft>
+              <a:defRPr sz="2000"/>
+            </a:pPr>
+            <a:r>
+              <a:rPr sz="1400"/>
               <a:t>7️⃣ Sınıfa sunun</a:t>
             </a:r>
           </a:p>
           <a:p>
             <a:pPr>
-              <a:spcAft>
-                <a:spcPts val="1200"/>
-              </a:spcAft>
-              <a:defRPr sz="2000"/>
-            </a:pPr>
-          </a:p>
-          <a:p>
-            <a:pPr>
-              <a:spcAft>
-                <a:spcPts val="1200"/>
+              <a:lnSpc>
+                <a:spcPct val="90000"/>
+              </a:lnSpc>
+              <a:spcAft>
+                <a:spcPts val="300"/>
+              </a:spcAft>
+              <a:defRPr sz="2000"/>
+            </a:pPr>
+          </a:p>
+          <a:p>
+            <a:pPr>
+              <a:lnSpc>
+                <a:spcPct val="90000"/>
+              </a:lnSpc>
+              <a:spcAft>
+                <a:spcPts val="300"/>
               </a:spcAft>
               <a:defRPr sz="2000" b="1"/>
             </a:pPr>
             <a:r>
-              <a:rPr sz="1600"/>
+              <a:rPr sz="1400"/>
               <a:t>📌 Proje Önerileri:</a:t>
             </a:r>
           </a:p>
           <a:p>
             <a:pPr lvl="1">
-              <a:spcAft>
-                <a:spcPts val="1200"/>
-              </a:spcAft>
-              <a:defRPr sz="1800"/>
-            </a:pPr>
-            <a:r>
-              <a:rPr sz="1600"/>
+              <a:lnSpc>
+                <a:spcPct val="90000"/>
+              </a:lnSpc>
+              <a:spcAft>
+                <a:spcPts val="300"/>
+              </a:spcAft>
+              <a:defRPr sz="1800"/>
+            </a:pPr>
+            <a:r>
+              <a:rPr sz="1400"/>
               <a:t>    • Eğitici oyun</a:t>
             </a:r>
           </a:p>
           <a:p>
             <a:pPr lvl="1">
-              <a:spcAft>
-                <a:spcPts val="1200"/>
-              </a:spcAft>
-              <a:defRPr sz="1800"/>
-            </a:pPr>
-            <a:r>
-              <a:rPr sz="1600"/>
+              <a:lnSpc>
+                <a:spcPct val="90000"/>
+              </a:lnSpc>
+              <a:spcAft>
+                <a:spcPts val="300"/>
+              </a:spcAft>
+              <a:defRPr sz="1800"/>
+            </a:pPr>
+            <a:r>
+              <a:rPr sz="1400"/>
               <a:t>    • Ödev takip uygulaması</a:t>
             </a:r>
           </a:p>
           <a:p>
             <a:pPr lvl="1">
-              <a:spcAft>
-                <a:spcPts val="1200"/>
-              </a:spcAft>
-              <a:defRPr sz="1800"/>
-            </a:pPr>
-            <a:r>
-              <a:rPr sz="1600"/>
+              <a:lnSpc>
+                <a:spcPct val="90000"/>
+              </a:lnSpc>
+              <a:spcAft>
+                <a:spcPts val="300"/>
+              </a:spcAft>
+              <a:defRPr sz="1800"/>
+            </a:pPr>
+            <a:r>
+              <a:rPr sz="1400"/>
               <a:t>    • Kitap öneri platformu</a:t>
             </a:r>
           </a:p>
           <a:p>
             <a:pPr lvl="1">
-              <a:spcAft>
-                <a:spcPts val="1200"/>
-              </a:spcAft>
-              <a:defRPr sz="1800"/>
-            </a:pPr>
-            <a:r>
-              <a:rPr sz="1600"/>
+              <a:lnSpc>
+                <a:spcPct val="90000"/>
+              </a:lnSpc>
+              <a:spcAft>
+                <a:spcPts val="300"/>
+              </a:spcAft>
+              <a:defRPr sz="1800"/>
+            </a:pPr>
+            <a:r>
+              <a:rPr sz="1400"/>
               <a:t>    • Okul aktivite takvimi</a:t>
             </a:r>
           </a:p>
           <a:p>
             <a:pPr>
-              <a:spcAft>
-                <a:spcPts val="1200"/>
-              </a:spcAft>
-              <a:defRPr sz="2000"/>
-            </a:pPr>
-          </a:p>
-          <a:p>
-            <a:pPr>
-              <a:spcAft>
-                <a:spcPts val="1200"/>
-              </a:spcAft>
-              <a:defRPr sz="2000"/>
-            </a:pPr>
-            <a:r>
-              <a:rPr sz="1600"/>
+              <a:lnSpc>
+                <a:spcPct val="90000"/>
+              </a:lnSpc>
+              <a:spcAft>
+                <a:spcPts val="300"/>
+              </a:spcAft>
+              <a:defRPr sz="2000"/>
+            </a:pPr>
+          </a:p>
+          <a:p>
+            <a:pPr>
+              <a:lnSpc>
+                <a:spcPct val="90000"/>
+              </a:lnSpc>
+              <a:spcAft>
+                <a:spcPts val="300"/>
+              </a:spcAft>
+              <a:defRPr sz="2000"/>
+            </a:pPr>
+            <a:r>
+              <a:rPr sz="1400"/>
               <a:t>⏰ Süre: 2-3 hafta</a:t>
             </a:r>
           </a:p>
@@ -9169,7 +9883,7 @@
         </p:nvSpPr>
         <p:spPr/>
         <p:txBody>
-          <a:bodyPr/>
+          <a:bodyPr wrap="square"/>
           <a:lstStyle/>
           <a:p>
             <a:pPr>
@@ -9223,244 +9937,316 @@
             <a:spAutoFit/>
           </a:bodyPr>
           <a:lstStyle/>
-          <a:p/>
-          <a:p>
-            <a:pPr>
-              <a:spcAft>
-                <a:spcPts val="1200"/>
-              </a:spcAft>
-              <a:defRPr sz="2000"/>
-            </a:pPr>
-            <a:r>
-              <a:rPr sz="1600"/>
+          <a:p>
+            <a:pPr>
+              <a:lnSpc>
+                <a:spcPct val="90000"/>
+              </a:lnSpc>
+              <a:spcAft>
+                <a:spcPts val="300"/>
+              </a:spcAft>
+            </a:pPr>
+          </a:p>
+          <a:p>
+            <a:pPr>
+              <a:lnSpc>
+                <a:spcPct val="90000"/>
+              </a:lnSpc>
+              <a:spcAft>
+                <a:spcPts val="300"/>
+              </a:spcAft>
+              <a:defRPr sz="2000"/>
+            </a:pPr>
+            <a:r>
+              <a:rPr sz="1400"/>
               <a:t>Bu ünitede neler öğrendik?</a:t>
             </a:r>
           </a:p>
           <a:p>
             <a:pPr>
-              <a:spcAft>
-                <a:spcPts val="1200"/>
-              </a:spcAft>
-              <a:defRPr sz="2000"/>
-            </a:pPr>
-          </a:p>
-          <a:p>
-            <a:pPr>
-              <a:spcAft>
-                <a:spcPts val="1200"/>
+              <a:lnSpc>
+                <a:spcPct val="90000"/>
+              </a:lnSpc>
+              <a:spcAft>
+                <a:spcPts val="300"/>
+              </a:spcAft>
+              <a:defRPr sz="2000"/>
+            </a:pPr>
+          </a:p>
+          <a:p>
+            <a:pPr>
+              <a:lnSpc>
+                <a:spcPct val="90000"/>
+              </a:lnSpc>
+              <a:spcAft>
+                <a:spcPts val="300"/>
               </a:spcAft>
               <a:defRPr sz="2000" b="1"/>
             </a:pPr>
             <a:r>
-              <a:rPr sz="1600"/>
+              <a:rPr sz="1400"/>
               <a:t>✅ Proje ve Proje Yönetimi kavramları</a:t>
             </a:r>
           </a:p>
           <a:p>
             <a:pPr>
-              <a:spcAft>
-                <a:spcPts val="1200"/>
+              <a:lnSpc>
+                <a:spcPct val="90000"/>
+              </a:lnSpc>
+              <a:spcAft>
+                <a:spcPts val="300"/>
               </a:spcAft>
               <a:defRPr sz="2000" b="1"/>
             </a:pPr>
             <a:r>
-              <a:rPr sz="1600"/>
+              <a:rPr sz="1400"/>
               <a:t>✅ Dijital ürün nedir, örnekleri</a:t>
             </a:r>
           </a:p>
           <a:p>
             <a:pPr>
-              <a:spcAft>
-                <a:spcPts val="1200"/>
+              <a:lnSpc>
+                <a:spcPct val="90000"/>
+              </a:lnSpc>
+              <a:spcAft>
+                <a:spcPts val="300"/>
               </a:spcAft>
               <a:defRPr sz="2000" b="1"/>
             </a:pPr>
             <a:r>
-              <a:rPr sz="1600"/>
+              <a:rPr sz="1400"/>
               <a:t>✅ Dijital ürün tasarım süreci:</a:t>
             </a:r>
           </a:p>
           <a:p>
             <a:pPr lvl="1">
-              <a:spcAft>
-                <a:spcPts val="1200"/>
-              </a:spcAft>
-              <a:defRPr sz="1800"/>
-            </a:pPr>
-            <a:r>
-              <a:rPr sz="1600"/>
+              <a:lnSpc>
+                <a:spcPct val="90000"/>
+              </a:lnSpc>
+              <a:spcAft>
+                <a:spcPts val="300"/>
+              </a:spcAft>
+              <a:defRPr sz="1800"/>
+            </a:pPr>
+            <a:r>
+              <a:rPr sz="1400"/>
               <a:t>    • İhtiyaç analizi</a:t>
             </a:r>
           </a:p>
           <a:p>
             <a:pPr lvl="1">
-              <a:spcAft>
-                <a:spcPts val="1200"/>
-              </a:spcAft>
-              <a:defRPr sz="1800"/>
-            </a:pPr>
-            <a:r>
-              <a:rPr sz="1600"/>
+              <a:lnSpc>
+                <a:spcPct val="90000"/>
+              </a:lnSpc>
+              <a:spcAft>
+                <a:spcPts val="300"/>
+              </a:spcAft>
+              <a:defRPr sz="1800"/>
+            </a:pPr>
+            <a:r>
+              <a:rPr sz="1400"/>
               <a:t>    • Fikir geliştirme</a:t>
             </a:r>
           </a:p>
           <a:p>
             <a:pPr lvl="1">
-              <a:spcAft>
-                <a:spcPts val="1200"/>
-              </a:spcAft>
-              <a:defRPr sz="1800"/>
-            </a:pPr>
-            <a:r>
-              <a:rPr sz="1600"/>
+              <a:lnSpc>
+                <a:spcPct val="90000"/>
+              </a:lnSpc>
+              <a:spcAft>
+                <a:spcPts val="300"/>
+              </a:spcAft>
+              <a:defRPr sz="1800"/>
+            </a:pPr>
+            <a:r>
+              <a:rPr sz="1400"/>
               <a:t>    • Tasarım</a:t>
             </a:r>
           </a:p>
           <a:p>
             <a:pPr lvl="1">
-              <a:spcAft>
-                <a:spcPts val="1200"/>
-              </a:spcAft>
-              <a:defRPr sz="1800"/>
-            </a:pPr>
-            <a:r>
-              <a:rPr sz="1600"/>
+              <a:lnSpc>
+                <a:spcPct val="90000"/>
+              </a:lnSpc>
+              <a:spcAft>
+                <a:spcPts val="300"/>
+              </a:spcAft>
+              <a:defRPr sz="1800"/>
+            </a:pPr>
+            <a:r>
+              <a:rPr sz="1400"/>
               <a:t>    • Prototip</a:t>
             </a:r>
           </a:p>
           <a:p>
             <a:pPr lvl="1">
-              <a:spcAft>
-                <a:spcPts val="1200"/>
-              </a:spcAft>
-              <a:defRPr sz="1800"/>
-            </a:pPr>
-            <a:r>
-              <a:rPr sz="1600"/>
+              <a:lnSpc>
+                <a:spcPct val="90000"/>
+              </a:lnSpc>
+              <a:spcAft>
+                <a:spcPts val="300"/>
+              </a:spcAft>
+              <a:defRPr sz="1800"/>
+            </a:pPr>
+            <a:r>
+              <a:rPr sz="1400"/>
               <a:t>    • Test</a:t>
             </a:r>
           </a:p>
           <a:p>
             <a:pPr lvl="1">
-              <a:spcAft>
-                <a:spcPts val="1200"/>
-              </a:spcAft>
-              <a:defRPr sz="1800"/>
-            </a:pPr>
-            <a:r>
-              <a:rPr sz="1600"/>
+              <a:lnSpc>
+                <a:spcPct val="90000"/>
+              </a:lnSpc>
+              <a:spcAft>
+                <a:spcPts val="300"/>
+              </a:spcAft>
+              <a:defRPr sz="1800"/>
+            </a:pPr>
+            <a:r>
+              <a:rPr sz="1400"/>
               <a:t>    • Geri bildirim</a:t>
             </a:r>
           </a:p>
           <a:p>
             <a:pPr lvl="1">
-              <a:spcAft>
-                <a:spcPts val="1200"/>
-              </a:spcAft>
-              <a:defRPr sz="1800"/>
-            </a:pPr>
-            <a:r>
-              <a:rPr sz="1600"/>
+              <a:lnSpc>
+                <a:spcPct val="90000"/>
+              </a:lnSpc>
+              <a:spcAft>
+                <a:spcPts val="300"/>
+              </a:spcAft>
+              <a:defRPr sz="1800"/>
+            </a:pPr>
+            <a:r>
+              <a:rPr sz="1400"/>
               <a:t>    • Yayınlama</a:t>
             </a:r>
           </a:p>
           <a:p>
             <a:pPr>
-              <a:spcAft>
-                <a:spcPts val="1200"/>
+              <a:lnSpc>
+                <a:spcPct val="90000"/>
+              </a:lnSpc>
+              <a:spcAft>
+                <a:spcPts val="300"/>
               </a:spcAft>
               <a:defRPr sz="2000" b="1"/>
             </a:pPr>
             <a:r>
-              <a:rPr sz="1600"/>
+              <a:rPr sz="1400"/>
               <a:t>✅ Kullanıcı deneyimi ve kullanılabilirlik</a:t>
             </a:r>
           </a:p>
           <a:p>
             <a:pPr>
-              <a:spcAft>
-                <a:spcPts val="1200"/>
+              <a:lnSpc>
+                <a:spcPct val="90000"/>
+              </a:lnSpc>
+              <a:spcAft>
+                <a:spcPts val="300"/>
               </a:spcAft>
               <a:defRPr sz="2000" b="1"/>
             </a:pPr>
             <a:r>
-              <a:rPr sz="1600"/>
+              <a:rPr sz="1400"/>
               <a:t>✅ Proje planlama araçları</a:t>
             </a:r>
           </a:p>
           <a:p>
             <a:pPr>
-              <a:spcAft>
-                <a:spcPts val="1200"/>
+              <a:lnSpc>
+                <a:spcPct val="90000"/>
+              </a:lnSpc>
+              <a:spcAft>
+                <a:spcPts val="300"/>
               </a:spcAft>
               <a:defRPr sz="2000" b="1"/>
             </a:pPr>
             <a:r>
-              <a:rPr sz="1600"/>
+              <a:rPr sz="1400"/>
               <a:t>✅ Takım çalışması ve roller</a:t>
             </a:r>
           </a:p>
           <a:p>
             <a:pPr>
-              <a:spcAft>
-                <a:spcPts val="1200"/>
-              </a:spcAft>
-              <a:defRPr sz="2000"/>
-            </a:pPr>
-          </a:p>
-          <a:p>
-            <a:pPr>
-              <a:spcAft>
-                <a:spcPts val="1200"/>
+              <a:lnSpc>
+                <a:spcPct val="90000"/>
+              </a:lnSpc>
+              <a:spcAft>
+                <a:spcPts val="300"/>
+              </a:spcAft>
+              <a:defRPr sz="2000"/>
+            </a:pPr>
+          </a:p>
+          <a:p>
+            <a:pPr>
+              <a:lnSpc>
+                <a:spcPct val="90000"/>
+              </a:lnSpc>
+              <a:spcAft>
+                <a:spcPts val="300"/>
               </a:spcAft>
               <a:defRPr sz="2000" b="1"/>
             </a:pPr>
             <a:r>
-              <a:rPr sz="1600"/>
+              <a:rPr sz="1400"/>
               <a:t>💡 Anahtar Mesaj:</a:t>
             </a:r>
           </a:p>
           <a:p>
             <a:pPr>
-              <a:spcAft>
-                <a:spcPts val="1200"/>
-              </a:spcAft>
-              <a:defRPr sz="2000"/>
-            </a:pPr>
-            <a:r>
-              <a:rPr sz="1600"/>
+              <a:lnSpc>
+                <a:spcPct val="90000"/>
+              </a:lnSpc>
+              <a:spcAft>
+                <a:spcPts val="300"/>
+              </a:spcAft>
+              <a:defRPr sz="2000"/>
+            </a:pPr>
+            <a:r>
+              <a:rPr sz="1400"/>
               <a:t>Her büyük dijital ürün küçük bir fikirle başlar.</a:t>
             </a:r>
           </a:p>
           <a:p>
             <a:pPr>
-              <a:spcAft>
-                <a:spcPts val="1200"/>
-              </a:spcAft>
-              <a:defRPr sz="2000"/>
-            </a:pPr>
-            <a:r>
-              <a:rPr sz="1600"/>
+              <a:lnSpc>
+                <a:spcPct val="90000"/>
+              </a:lnSpc>
+              <a:spcAft>
+                <a:spcPts val="300"/>
+              </a:spcAft>
+              <a:defRPr sz="2000"/>
+            </a:pPr>
+            <a:r>
+              <a:rPr sz="1400"/>
               <a:t>Siz de kendi dijital ürününüzü tasarlayabilirsiniz!</a:t>
             </a:r>
           </a:p>
           <a:p>
             <a:pPr>
-              <a:spcAft>
-                <a:spcPts val="1200"/>
-              </a:spcAft>
-              <a:defRPr sz="2000"/>
-            </a:pPr>
-          </a:p>
-          <a:p>
-            <a:pPr>
-              <a:spcAft>
-                <a:spcPts val="1200"/>
+              <a:lnSpc>
+                <a:spcPct val="90000"/>
+              </a:lnSpc>
+              <a:spcAft>
+                <a:spcPts val="300"/>
+              </a:spcAft>
+              <a:defRPr sz="2000"/>
+            </a:pPr>
+          </a:p>
+          <a:p>
+            <a:pPr>
+              <a:lnSpc>
+                <a:spcPct val="90000"/>
+              </a:lnSpc>
+              <a:spcAft>
+                <a:spcPts val="300"/>
               </a:spcAft>
               <a:defRPr sz="2000" b="1"/>
             </a:pPr>
             <a:r>
-              <a:rPr sz="1600"/>
+              <a:rPr sz="1400"/>
               <a:t>🎯 Artık küçük bir dijital ürün tasarımcısısınız!</a:t>
             </a:r>
           </a:p>
@@ -9496,7 +10282,7 @@
         </p:nvSpPr>
         <p:spPr/>
         <p:txBody>
-          <a:bodyPr/>
+          <a:bodyPr wrap="square"/>
           <a:lstStyle/>
           <a:p>
             <a:pPr>
@@ -9550,141 +10336,200 @@
             <a:spAutoFit/>
           </a:bodyPr>
           <a:lstStyle/>
-          <a:p/>
-          <a:p>
-            <a:pPr>
-              <a:spcAft>
-                <a:spcPts val="1200"/>
-              </a:spcAft>
-              <a:defRPr sz="2000"/>
-            </a:pPr>
-            <a:r>
+          <a:p>
+            <a:pPr>
+              <a:lnSpc>
+                <a:spcPct val="90000"/>
+              </a:lnSpc>
+              <a:spcAft>
+                <a:spcPts val="300"/>
+              </a:spcAft>
+            </a:pPr>
+          </a:p>
+          <a:p>
+            <a:pPr>
+              <a:lnSpc>
+                <a:spcPct val="90000"/>
+              </a:lnSpc>
+              <a:spcAft>
+                <a:spcPts val="300"/>
+              </a:spcAft>
+              <a:defRPr sz="2000"/>
+            </a:pPr>
+            <a:r>
+              <a:rPr sz="1500"/>
               <a:t>Bu ünitede neler öğreneceğiz?</a:t>
             </a:r>
           </a:p>
           <a:p>
             <a:pPr>
-              <a:spcAft>
-                <a:spcPts val="1200"/>
-              </a:spcAft>
-              <a:defRPr sz="2000"/>
-            </a:pPr>
-          </a:p>
-          <a:p>
-            <a:pPr>
-              <a:spcAft>
-                <a:spcPts val="1200"/>
+              <a:lnSpc>
+                <a:spcPct val="90000"/>
+              </a:lnSpc>
+              <a:spcAft>
+                <a:spcPts val="300"/>
+              </a:spcAft>
+              <a:defRPr sz="2000"/>
+            </a:pPr>
+          </a:p>
+          <a:p>
+            <a:pPr>
+              <a:lnSpc>
+                <a:spcPct val="90000"/>
+              </a:lnSpc>
+              <a:spcAft>
+                <a:spcPts val="300"/>
               </a:spcAft>
               <a:defRPr sz="2000" b="1"/>
             </a:pPr>
             <a:r>
+              <a:rPr sz="1500"/>
               <a:t>✅ 1. Proje Kavramı ve Proje Yönetimi</a:t>
             </a:r>
           </a:p>
           <a:p>
             <a:pPr>
-              <a:spcAft>
-                <a:spcPts val="1200"/>
+              <a:lnSpc>
+                <a:spcPct val="90000"/>
+              </a:lnSpc>
+              <a:spcAft>
+                <a:spcPts val="300"/>
               </a:spcAft>
               <a:defRPr sz="2000" b="1"/>
             </a:pPr>
             <a:r>
+              <a:rPr sz="1500"/>
               <a:t>✅ 2. Dijital Ürün Nedir?</a:t>
             </a:r>
           </a:p>
           <a:p>
             <a:pPr>
-              <a:spcAft>
-                <a:spcPts val="1200"/>
+              <a:lnSpc>
+                <a:spcPct val="90000"/>
+              </a:lnSpc>
+              <a:spcAft>
+                <a:spcPts val="300"/>
               </a:spcAft>
               <a:defRPr sz="2000" b="1"/>
             </a:pPr>
             <a:r>
+              <a:rPr sz="1500"/>
               <a:t>✅ 3. Dijital Ürün Tasarımı Süreci</a:t>
             </a:r>
           </a:p>
           <a:p>
             <a:pPr>
-              <a:spcAft>
-                <a:spcPts val="1200"/>
+              <a:lnSpc>
+                <a:spcPct val="90000"/>
+              </a:lnSpc>
+              <a:spcAft>
+                <a:spcPts val="300"/>
               </a:spcAft>
               <a:defRPr sz="2000" b="1"/>
             </a:pPr>
             <a:r>
+              <a:rPr sz="1500"/>
               <a:t>✅ 4. İhtiyaç Analizi ve Problem Tanımlama</a:t>
             </a:r>
           </a:p>
           <a:p>
             <a:pPr>
-              <a:spcAft>
-                <a:spcPts val="1200"/>
+              <a:lnSpc>
+                <a:spcPct val="90000"/>
+              </a:lnSpc>
+              <a:spcAft>
+                <a:spcPts val="300"/>
               </a:spcAft>
               <a:defRPr sz="2000" b="1"/>
             </a:pPr>
             <a:r>
+              <a:rPr sz="1500"/>
               <a:t>✅ 5. Çözüm Önerileri Geliştirme</a:t>
             </a:r>
           </a:p>
           <a:p>
             <a:pPr>
-              <a:spcAft>
-                <a:spcPts val="1200"/>
+              <a:lnSpc>
+                <a:spcPct val="90000"/>
+              </a:lnSpc>
+              <a:spcAft>
+                <a:spcPts val="300"/>
               </a:spcAft>
               <a:defRPr sz="2000" b="1"/>
             </a:pPr>
             <a:r>
+              <a:rPr sz="1500"/>
               <a:t>✅ 6. Prototip Oluşturma</a:t>
             </a:r>
           </a:p>
           <a:p>
             <a:pPr>
-              <a:spcAft>
-                <a:spcPts val="1200"/>
+              <a:lnSpc>
+                <a:spcPct val="90000"/>
+              </a:lnSpc>
+              <a:spcAft>
+                <a:spcPts val="300"/>
               </a:spcAft>
               <a:defRPr sz="2000" b="1"/>
             </a:pPr>
             <a:r>
+              <a:rPr sz="1500"/>
               <a:t>✅ 7. Test Etme ve Geri Bildirim</a:t>
             </a:r>
           </a:p>
           <a:p>
             <a:pPr>
-              <a:spcAft>
-                <a:spcPts val="1200"/>
+              <a:lnSpc>
+                <a:spcPct val="90000"/>
+              </a:lnSpc>
+              <a:spcAft>
+                <a:spcPts val="300"/>
               </a:spcAft>
               <a:defRPr sz="2000" b="1"/>
             </a:pPr>
             <a:r>
+              <a:rPr sz="1500"/>
               <a:t>✅ 8. Dijital Ürün Örnekleri</a:t>
             </a:r>
           </a:p>
           <a:p>
             <a:pPr>
-              <a:spcAft>
-                <a:spcPts val="1200"/>
-              </a:spcAft>
-              <a:defRPr sz="2000"/>
-            </a:pPr>
-          </a:p>
-          <a:p>
-            <a:pPr>
-              <a:spcAft>
-                <a:spcPts val="1200"/>
-              </a:spcAft>
-              <a:defRPr sz="2000"/>
-            </a:pPr>
-            <a:r>
+              <a:lnSpc>
+                <a:spcPct val="90000"/>
+              </a:lnSpc>
+              <a:spcAft>
+                <a:spcPts val="300"/>
+              </a:spcAft>
+              <a:defRPr sz="2000"/>
+            </a:pPr>
+          </a:p>
+          <a:p>
+            <a:pPr>
+              <a:lnSpc>
+                <a:spcPct val="90000"/>
+              </a:lnSpc>
+              <a:spcAft>
+                <a:spcPts val="300"/>
+              </a:spcAft>
+              <a:defRPr sz="2000"/>
+            </a:pPr>
+            <a:r>
+              <a:rPr sz="1500"/>
               <a:t>⏰ Süre: 6 Hafta</a:t>
             </a:r>
           </a:p>
           <a:p>
             <a:pPr>
-              <a:spcAft>
-                <a:spcPts val="1200"/>
+              <a:lnSpc>
+                <a:spcPct val="90000"/>
+              </a:lnSpc>
+              <a:spcAft>
+                <a:spcPts val="300"/>
               </a:spcAft>
               <a:defRPr sz="2000" b="1"/>
             </a:pPr>
             <a:r>
+              <a:rPr sz="1500"/>
               <a:t>🎯 Amaç: Kendi dijital ürününüzü tasarlayabilmek!</a:t>
             </a:r>
           </a:p>
@@ -9720,7 +10565,7 @@
         </p:nvSpPr>
         <p:spPr/>
         <p:txBody>
-          <a:bodyPr/>
+          <a:bodyPr wrap="square"/>
           <a:lstStyle/>
           <a:p>
             <a:pPr>
@@ -9774,228 +10619,297 @@
             <a:spAutoFit/>
           </a:bodyPr>
           <a:lstStyle/>
-          <a:p/>
-          <a:p>
-            <a:pPr>
-              <a:spcAft>
-                <a:spcPts val="1200"/>
-              </a:spcAft>
-              <a:defRPr sz="2000"/>
-            </a:pPr>
-            <a:r>
-              <a:rPr sz="1400"/>
+          <a:p>
+            <a:pPr>
+              <a:lnSpc>
+                <a:spcPct val="90000"/>
+              </a:lnSpc>
+              <a:spcAft>
+                <a:spcPts val="300"/>
+              </a:spcAft>
+            </a:pPr>
+          </a:p>
+          <a:p>
+            <a:pPr>
+              <a:lnSpc>
+                <a:spcPct val="90000"/>
+              </a:lnSpc>
+              <a:spcAft>
+                <a:spcPts val="300"/>
+              </a:spcAft>
+              <a:defRPr sz="2000"/>
+            </a:pPr>
+            <a:r>
+              <a:rPr sz="1300"/>
               <a:t>Daha fazla öğrenmek için:</a:t>
             </a:r>
           </a:p>
           <a:p>
             <a:pPr>
-              <a:spcAft>
-                <a:spcPts val="1200"/>
-              </a:spcAft>
-              <a:defRPr sz="2000"/>
-            </a:pPr>
-          </a:p>
-          <a:p>
-            <a:pPr>
-              <a:spcAft>
-                <a:spcPts val="1200"/>
-              </a:spcAft>
-              <a:defRPr sz="2000"/>
-            </a:pPr>
-            <a:r>
-              <a:rPr sz="1400"/>
+              <a:lnSpc>
+                <a:spcPct val="90000"/>
+              </a:lnSpc>
+              <a:spcAft>
+                <a:spcPts val="300"/>
+              </a:spcAft>
+              <a:defRPr sz="2000"/>
+            </a:pPr>
+          </a:p>
+          <a:p>
+            <a:pPr>
+              <a:lnSpc>
+                <a:spcPct val="90000"/>
+              </a:lnSpc>
+              <a:spcAft>
+                <a:spcPts val="300"/>
+              </a:spcAft>
+              <a:defRPr sz="2000"/>
+            </a:pPr>
+            <a:r>
+              <a:rPr sz="1300"/>
               <a:t>🎥 İzlenecek Videolar:</a:t>
             </a:r>
           </a:p>
           <a:p>
             <a:pPr lvl="1">
-              <a:spcAft>
-                <a:spcPts val="1200"/>
-              </a:spcAft>
-              <a:defRPr sz="1800"/>
-            </a:pPr>
-            <a:r>
-              <a:rPr sz="1400"/>
+              <a:lnSpc>
+                <a:spcPct val="90000"/>
+              </a:lnSpc>
+              <a:spcAft>
+                <a:spcPts val="300"/>
+              </a:spcAft>
+              <a:defRPr sz="1800"/>
+            </a:pPr>
+            <a:r>
+              <a:rPr sz="1300"/>
               <a:t>    • 'Proje Yönetimi Nedir?' - TRT Okul</a:t>
             </a:r>
           </a:p>
           <a:p>
             <a:pPr lvl="1">
-              <a:spcAft>
-                <a:spcPts val="1200"/>
-              </a:spcAft>
-              <a:defRPr sz="1800"/>
-            </a:pPr>
-            <a:r>
-              <a:rPr sz="1400"/>
+              <a:lnSpc>
+                <a:spcPct val="90000"/>
+              </a:lnSpc>
+              <a:spcAft>
+                <a:spcPts val="300"/>
+              </a:spcAft>
+              <a:defRPr sz="1800"/>
+            </a:pPr>
+            <a:r>
+              <a:rPr sz="1300"/>
               <a:t>    • 'Bir Mobil Uygulama Nasıl Yapılır?' - Scratch Türkiye</a:t>
             </a:r>
           </a:p>
           <a:p>
             <a:pPr lvl="1">
-              <a:spcAft>
-                <a:spcPts val="1200"/>
-              </a:spcAft>
-              <a:defRPr sz="1800"/>
-            </a:pPr>
-            <a:r>
-              <a:rPr sz="1400"/>
+              <a:lnSpc>
+                <a:spcPct val="90000"/>
+              </a:lnSpc>
+              <a:spcAft>
+                <a:spcPts val="300"/>
+              </a:spcAft>
+              <a:defRPr sz="1800"/>
+            </a:pPr>
+            <a:r>
+              <a:rPr sz="1300"/>
               <a:t>    • 'Kullanıcı Deneyimi (UX) Nedir?' - YouTube</a:t>
             </a:r>
           </a:p>
           <a:p>
             <a:pPr lvl="1">
-              <a:spcAft>
-                <a:spcPts val="1200"/>
-              </a:spcAft>
-              <a:defRPr sz="1800"/>
-            </a:pPr>
-            <a:r>
-              <a:rPr sz="1400"/>
+              <a:lnSpc>
+                <a:spcPct val="90000"/>
+              </a:lnSpc>
+              <a:spcAft>
+                <a:spcPts val="300"/>
+              </a:spcAft>
+              <a:defRPr sz="1800"/>
+            </a:pPr>
+            <a:r>
+              <a:rPr sz="1300"/>
               <a:t>    • 'Instagram'ın Hikayesi' - Belgesel</a:t>
             </a:r>
           </a:p>
           <a:p>
             <a:pPr>
-              <a:spcAft>
-                <a:spcPts val="1200"/>
-              </a:spcAft>
-              <a:defRPr sz="2000"/>
-            </a:pPr>
-          </a:p>
-          <a:p>
-            <a:pPr>
-              <a:spcAft>
-                <a:spcPts val="1200"/>
-              </a:spcAft>
-              <a:defRPr sz="2000"/>
-            </a:pPr>
-            <a:r>
-              <a:rPr sz="1400"/>
+              <a:lnSpc>
+                <a:spcPct val="90000"/>
+              </a:lnSpc>
+              <a:spcAft>
+                <a:spcPts val="300"/>
+              </a:spcAft>
+              <a:defRPr sz="2000"/>
+            </a:pPr>
+          </a:p>
+          <a:p>
+            <a:pPr>
+              <a:lnSpc>
+                <a:spcPct val="90000"/>
+              </a:lnSpc>
+              <a:spcAft>
+                <a:spcPts val="300"/>
+              </a:spcAft>
+              <a:defRPr sz="2000"/>
+            </a:pPr>
+            <a:r>
+              <a:rPr sz="1300"/>
               <a:t>🌐 Keşfedilecek Siteler:</a:t>
             </a:r>
           </a:p>
           <a:p>
             <a:pPr lvl="1">
-              <a:spcAft>
-                <a:spcPts val="1200"/>
-              </a:spcAft>
-              <a:defRPr sz="1800"/>
-            </a:pPr>
-            <a:r>
-              <a:rPr sz="1400"/>
+              <a:lnSpc>
+                <a:spcPct val="90000"/>
+              </a:lnSpc>
+              <a:spcAft>
+                <a:spcPts val="300"/>
+              </a:spcAft>
+              <a:defRPr sz="1800"/>
+            </a:pPr>
+            <a:r>
+              <a:rPr sz="1300"/>
               <a:t>    • Scratch.mit.edu - Basit oyunlar tasarlayın</a:t>
             </a:r>
           </a:p>
           <a:p>
             <a:pPr lvl="1">
-              <a:spcAft>
-                <a:spcPts val="1200"/>
-              </a:spcAft>
-              <a:defRPr sz="1800"/>
-            </a:pPr>
-            <a:r>
-              <a:rPr sz="1400"/>
+              <a:lnSpc>
+                <a:spcPct val="90000"/>
+              </a:lnSpc>
+              <a:spcAft>
+                <a:spcPts val="300"/>
+              </a:spcAft>
+              <a:defRPr sz="1800"/>
+            </a:pPr>
+            <a:r>
+              <a:rPr sz="1300"/>
               <a:t>    • Canva.com - Tasarım yapın</a:t>
             </a:r>
           </a:p>
           <a:p>
             <a:pPr lvl="1">
-              <a:spcAft>
-                <a:spcPts val="1200"/>
-              </a:spcAft>
-              <a:defRPr sz="1800"/>
-            </a:pPr>
-            <a:r>
-              <a:rPr sz="1400"/>
+              <a:lnSpc>
+                <a:spcPct val="90000"/>
+              </a:lnSpc>
+              <a:spcAft>
+                <a:spcPts val="300"/>
+              </a:spcAft>
+              <a:defRPr sz="1800"/>
+            </a:pPr>
+            <a:r>
+              <a:rPr sz="1300"/>
               <a:t>    • Trello.com - Proje yönetimi</a:t>
             </a:r>
           </a:p>
           <a:p>
             <a:pPr>
-              <a:spcAft>
-                <a:spcPts val="1200"/>
-              </a:spcAft>
-              <a:defRPr sz="2000"/>
-            </a:pPr>
-          </a:p>
-          <a:p>
-            <a:pPr>
-              <a:spcAft>
-                <a:spcPts val="1200"/>
-              </a:spcAft>
-              <a:defRPr sz="2000"/>
-            </a:pPr>
-            <a:r>
-              <a:rPr sz="1400"/>
+              <a:lnSpc>
+                <a:spcPct val="90000"/>
+              </a:lnSpc>
+              <a:spcAft>
+                <a:spcPts val="300"/>
+              </a:spcAft>
+              <a:defRPr sz="2000"/>
+            </a:pPr>
+          </a:p>
+          <a:p>
+            <a:pPr>
+              <a:lnSpc>
+                <a:spcPct val="90000"/>
+              </a:lnSpc>
+              <a:spcAft>
+                <a:spcPts val="300"/>
+              </a:spcAft>
+              <a:defRPr sz="2000"/>
+            </a:pPr>
+            <a:r>
+              <a:rPr sz="1300"/>
               <a:t>📖 Deneyebileceğiniz Aktiviteler:</a:t>
             </a:r>
           </a:p>
           <a:p>
             <a:pPr lvl="1">
-              <a:spcAft>
-                <a:spcPts val="1200"/>
-              </a:spcAft>
-              <a:defRPr sz="1800"/>
-            </a:pPr>
-            <a:r>
-              <a:rPr sz="1400"/>
+              <a:lnSpc>
+                <a:spcPct val="90000"/>
+              </a:lnSpc>
+              <a:spcAft>
+                <a:spcPts val="300"/>
+              </a:spcAft>
+              <a:defRPr sz="1800"/>
+            </a:pPr>
+            <a:r>
+              <a:rPr sz="1300"/>
               <a:t>    • Kağıt prototip çizme yarışması</a:t>
             </a:r>
           </a:p>
           <a:p>
             <a:pPr lvl="1">
-              <a:spcAft>
-                <a:spcPts val="1200"/>
-              </a:spcAft>
-              <a:defRPr sz="1800"/>
-            </a:pPr>
-            <a:r>
-              <a:rPr sz="1400"/>
+              <a:lnSpc>
+                <a:spcPct val="90000"/>
+              </a:lnSpc>
+              <a:spcAft>
+                <a:spcPts val="300"/>
+              </a:spcAft>
+              <a:defRPr sz="1800"/>
+            </a:pPr>
+            <a:r>
+              <a:rPr sz="1300"/>
               <a:t>    • Sevdiğiniz uygulamaları analiz edin</a:t>
             </a:r>
           </a:p>
           <a:p>
             <a:pPr lvl="1">
-              <a:spcAft>
-                <a:spcPts val="1200"/>
-              </a:spcAft>
-              <a:defRPr sz="1800"/>
-            </a:pPr>
-            <a:r>
-              <a:rPr sz="1400"/>
+              <a:lnSpc>
+                <a:spcPct val="90000"/>
+              </a:lnSpc>
+              <a:spcAft>
+                <a:spcPts val="300"/>
+              </a:spcAft>
+              <a:defRPr sz="1800"/>
+            </a:pPr>
+            <a:r>
+              <a:rPr sz="1300"/>
               <a:t>    • Mini bir Scratch projesi yapın</a:t>
             </a:r>
           </a:p>
           <a:p>
             <a:pPr>
-              <a:spcAft>
-                <a:spcPts val="1200"/>
-              </a:spcAft>
-              <a:defRPr sz="2000"/>
-            </a:pPr>
-          </a:p>
-          <a:p>
-            <a:pPr>
-              <a:spcAft>
-                <a:spcPts val="1200"/>
+              <a:lnSpc>
+                <a:spcPct val="90000"/>
+              </a:lnSpc>
+              <a:spcAft>
+                <a:spcPts val="300"/>
+              </a:spcAft>
+              <a:defRPr sz="2000"/>
+            </a:pPr>
+          </a:p>
+          <a:p>
+            <a:pPr>
+              <a:lnSpc>
+                <a:spcPct val="90000"/>
+              </a:lnSpc>
+              <a:spcAft>
+                <a:spcPts val="300"/>
               </a:spcAft>
               <a:defRPr sz="2000" b="1"/>
             </a:pPr>
             <a:r>
-              <a:rPr sz="1400"/>
+              <a:rPr sz="1300"/>
               <a:t>💡 Meraklı sorularınızı sorun!</a:t>
             </a:r>
           </a:p>
           <a:p>
             <a:pPr>
-              <a:spcAft>
-                <a:spcPts val="1200"/>
-              </a:spcAft>
-              <a:defRPr sz="2000"/>
-            </a:pPr>
-            <a:r>
-              <a:rPr sz="1400"/>
+              <a:lnSpc>
+                <a:spcPct val="90000"/>
+              </a:lnSpc>
+              <a:spcAft>
+                <a:spcPts val="300"/>
+              </a:spcAft>
+              <a:defRPr sz="2000"/>
+            </a:pPr>
+            <a:r>
+              <a:rPr sz="1300"/>
               <a:t>Her soru yeni bir öğrenme fırsatıdır.</a:t>
             </a:r>
           </a:p>
@@ -10044,7 +10958,7 @@
           <a:noFill/>
         </p:spPr>
         <p:txBody>
-          <a:bodyPr wrap="none">
+          <a:bodyPr wrap="square">
             <a:spAutoFit/>
           </a:bodyPr>
           <a:lstStyle/>
@@ -10079,7 +10993,7 @@
           <a:noFill/>
         </p:spPr>
         <p:txBody>
-          <a:bodyPr wrap="none">
+          <a:bodyPr wrap="square">
             <a:spAutoFit/>
           </a:bodyPr>
           <a:lstStyle/>
@@ -10127,7 +11041,7 @@
         </p:nvSpPr>
         <p:spPr/>
         <p:txBody>
-          <a:bodyPr/>
+          <a:bodyPr wrap="square"/>
           <a:lstStyle/>
           <a:p>
             <a:pPr>
@@ -10181,184 +11095,241 @@
             <a:spAutoFit/>
           </a:bodyPr>
           <a:lstStyle/>
-          <a:p/>
-          <a:p>
-            <a:pPr>
-              <a:spcAft>
-                <a:spcPts val="1200"/>
+          <a:p>
+            <a:pPr>
+              <a:lnSpc>
+                <a:spcPct val="90000"/>
+              </a:lnSpc>
+              <a:spcAft>
+                <a:spcPts val="300"/>
+              </a:spcAft>
+            </a:pPr>
+          </a:p>
+          <a:p>
+            <a:pPr>
+              <a:lnSpc>
+                <a:spcPct val="90000"/>
+              </a:lnSpc>
+              <a:spcAft>
+                <a:spcPts val="300"/>
               </a:spcAft>
               <a:defRPr sz="2000" b="1"/>
             </a:pPr>
             <a:r>
-              <a:rPr sz="1600"/>
+              <a:rPr sz="1400"/>
               <a:t>🎯 Tanım:</a:t>
             </a:r>
           </a:p>
           <a:p>
             <a:pPr>
-              <a:spcAft>
-                <a:spcPts val="1200"/>
-              </a:spcAft>
-              <a:defRPr sz="2000"/>
-            </a:pPr>
-            <a:r>
-              <a:rPr sz="1600"/>
+              <a:lnSpc>
+                <a:spcPct val="90000"/>
+              </a:lnSpc>
+              <a:spcAft>
+                <a:spcPts val="300"/>
+              </a:spcAft>
+              <a:defRPr sz="2000"/>
+            </a:pPr>
+            <a:r>
+              <a:rPr sz="1400"/>
               <a:t>Proje = Belirli bir hedefe ulaşmak için yapılan planlı çalışma</a:t>
             </a:r>
           </a:p>
           <a:p>
             <a:pPr>
-              <a:spcAft>
-                <a:spcPts val="1200"/>
-              </a:spcAft>
-              <a:defRPr sz="2000"/>
-            </a:pPr>
-          </a:p>
-          <a:p>
-            <a:pPr>
-              <a:spcAft>
-                <a:spcPts val="1200"/>
+              <a:lnSpc>
+                <a:spcPct val="90000"/>
+              </a:lnSpc>
+              <a:spcAft>
+                <a:spcPts val="300"/>
+              </a:spcAft>
+              <a:defRPr sz="2000"/>
+            </a:pPr>
+          </a:p>
+          <a:p>
+            <a:pPr>
+              <a:lnSpc>
+                <a:spcPct val="90000"/>
+              </a:lnSpc>
+              <a:spcAft>
+                <a:spcPts val="300"/>
               </a:spcAft>
               <a:defRPr sz="2000" b="1"/>
             </a:pPr>
             <a:r>
-              <a:rPr sz="1600"/>
+              <a:rPr sz="1400"/>
               <a:t>✅ Projenin Özellikleri:</a:t>
             </a:r>
           </a:p>
           <a:p>
             <a:pPr lvl="1">
-              <a:spcAft>
-                <a:spcPts val="1200"/>
-              </a:spcAft>
-              <a:defRPr sz="1800"/>
-            </a:pPr>
-            <a:r>
-              <a:rPr sz="1600"/>
+              <a:lnSpc>
+                <a:spcPct val="90000"/>
+              </a:lnSpc>
+              <a:spcAft>
+                <a:spcPts val="300"/>
+              </a:spcAft>
+              <a:defRPr sz="1800"/>
+            </a:pPr>
+            <a:r>
+              <a:rPr sz="1400"/>
               <a:t>    • Başlangıç ve bitiş tarihi vardır</a:t>
             </a:r>
           </a:p>
           <a:p>
             <a:pPr lvl="1">
-              <a:spcAft>
-                <a:spcPts val="1200"/>
-              </a:spcAft>
-              <a:defRPr sz="1800"/>
-            </a:pPr>
-            <a:r>
-              <a:rPr sz="1600"/>
+              <a:lnSpc>
+                <a:spcPct val="90000"/>
+              </a:lnSpc>
+              <a:spcAft>
+                <a:spcPts val="300"/>
+              </a:spcAft>
+              <a:defRPr sz="1800"/>
+            </a:pPr>
+            <a:r>
+              <a:rPr sz="1400"/>
               <a:t>    • Belirli bir amacı vardır</a:t>
             </a:r>
           </a:p>
           <a:p>
             <a:pPr lvl="1">
-              <a:spcAft>
-                <a:spcPts val="1200"/>
-              </a:spcAft>
-              <a:defRPr sz="1800"/>
-            </a:pPr>
-            <a:r>
-              <a:rPr sz="1600"/>
+              <a:lnSpc>
+                <a:spcPct val="90000"/>
+              </a:lnSpc>
+              <a:spcAft>
+                <a:spcPts val="300"/>
+              </a:spcAft>
+              <a:defRPr sz="1800"/>
+            </a:pPr>
+            <a:r>
+              <a:rPr sz="1400"/>
               <a:t>    • Kaynaklar kullanır (zaman, para, insan)</a:t>
             </a:r>
           </a:p>
           <a:p>
             <a:pPr lvl="1">
-              <a:spcAft>
-                <a:spcPts val="1200"/>
-              </a:spcAft>
-              <a:defRPr sz="1800"/>
-            </a:pPr>
-            <a:r>
-              <a:rPr sz="1600"/>
+              <a:lnSpc>
+                <a:spcPct val="90000"/>
+              </a:lnSpc>
+              <a:spcAft>
+                <a:spcPts val="300"/>
+              </a:spcAft>
+              <a:defRPr sz="1800"/>
+            </a:pPr>
+            <a:r>
+              <a:rPr sz="1400"/>
               <a:t>    • Özgün bir ürün veya hizmet ortaya çıkarır</a:t>
             </a:r>
           </a:p>
           <a:p>
             <a:pPr>
-              <a:spcAft>
-                <a:spcPts val="1200"/>
-              </a:spcAft>
-              <a:defRPr sz="2000"/>
-            </a:pPr>
-          </a:p>
-          <a:p>
-            <a:pPr>
-              <a:spcAft>
-                <a:spcPts val="1200"/>
+              <a:lnSpc>
+                <a:spcPct val="90000"/>
+              </a:lnSpc>
+              <a:spcAft>
+                <a:spcPts val="300"/>
+              </a:spcAft>
+              <a:defRPr sz="2000"/>
+            </a:pPr>
+          </a:p>
+          <a:p>
+            <a:pPr>
+              <a:lnSpc>
+                <a:spcPct val="90000"/>
+              </a:lnSpc>
+              <a:spcAft>
+                <a:spcPts val="300"/>
               </a:spcAft>
               <a:defRPr sz="2000" b="1"/>
             </a:pPr>
             <a:r>
-              <a:rPr sz="1600"/>
+              <a:rPr sz="1400"/>
               <a:t>📌 Günlük Hayattan Örnekler:</a:t>
             </a:r>
           </a:p>
           <a:p>
             <a:pPr lvl="1">
-              <a:spcAft>
-                <a:spcPts val="1200"/>
-              </a:spcAft>
-              <a:defRPr sz="1800"/>
-            </a:pPr>
-            <a:r>
-              <a:rPr sz="1600"/>
+              <a:lnSpc>
+                <a:spcPct val="90000"/>
+              </a:lnSpc>
+              <a:spcAft>
+                <a:spcPts val="300"/>
+              </a:spcAft>
+              <a:defRPr sz="1800"/>
+            </a:pPr>
+            <a:r>
+              <a:rPr sz="1400"/>
               <a:t>    • Doğum günü partisi organizasyonu</a:t>
             </a:r>
           </a:p>
           <a:p>
             <a:pPr lvl="1">
-              <a:spcAft>
-                <a:spcPts val="1200"/>
-              </a:spcAft>
-              <a:defRPr sz="1800"/>
-            </a:pPr>
-            <a:r>
-              <a:rPr sz="1600"/>
+              <a:lnSpc>
+                <a:spcPct val="90000"/>
+              </a:lnSpc>
+              <a:spcAft>
+                <a:spcPts val="300"/>
+              </a:spcAft>
+              <a:defRPr sz="1800"/>
+            </a:pPr>
+            <a:r>
+              <a:rPr sz="1400"/>
               <a:t>    • Okul sergisi hazırlığı</a:t>
             </a:r>
           </a:p>
           <a:p>
             <a:pPr lvl="1">
-              <a:spcAft>
-                <a:spcPts val="1200"/>
-              </a:spcAft>
-              <a:defRPr sz="1800"/>
-            </a:pPr>
-            <a:r>
-              <a:rPr sz="1600"/>
+              <a:lnSpc>
+                <a:spcPct val="90000"/>
+              </a:lnSpc>
+              <a:spcAft>
+                <a:spcPts val="300"/>
+              </a:spcAft>
+              <a:defRPr sz="1800"/>
+            </a:pPr>
+            <a:r>
+              <a:rPr sz="1400"/>
               <a:t>    • Bahçeye çiçek dikme projesi</a:t>
             </a:r>
           </a:p>
           <a:p>
             <a:pPr lvl="1">
-              <a:spcAft>
-                <a:spcPts val="1200"/>
-              </a:spcAft>
-              <a:defRPr sz="1800"/>
-            </a:pPr>
-            <a:r>
-              <a:rPr sz="1600"/>
+              <a:lnSpc>
+                <a:spcPct val="90000"/>
+              </a:lnSpc>
+              <a:spcAft>
+                <a:spcPts val="300"/>
+              </a:spcAft>
+              <a:defRPr sz="1800"/>
+            </a:pPr>
+            <a:r>
+              <a:rPr sz="1400"/>
               <a:t>    • Mobil uygulama geliştirme</a:t>
             </a:r>
           </a:p>
           <a:p>
             <a:pPr>
-              <a:spcAft>
-                <a:spcPts val="1200"/>
-              </a:spcAft>
-              <a:defRPr sz="2000"/>
-            </a:pPr>
-          </a:p>
-          <a:p>
-            <a:pPr>
-              <a:spcAft>
-                <a:spcPts val="1200"/>
+              <a:lnSpc>
+                <a:spcPct val="90000"/>
+              </a:lnSpc>
+              <a:spcAft>
+                <a:spcPts val="300"/>
+              </a:spcAft>
+              <a:defRPr sz="2000"/>
+            </a:pPr>
+          </a:p>
+          <a:p>
+            <a:pPr>
+              <a:lnSpc>
+                <a:spcPct val="90000"/>
+              </a:lnSpc>
+              <a:spcAft>
+                <a:spcPts val="300"/>
               </a:spcAft>
               <a:defRPr sz="2000" b="1"/>
             </a:pPr>
             <a:r>
-              <a:rPr sz="1600"/>
+              <a:rPr sz="1400"/>
               <a:t>💡 Her proje benzersizdir ve bir kez yapılır!</a:t>
             </a:r>
           </a:p>
@@ -10394,7 +11365,7 @@
         </p:nvSpPr>
         <p:spPr/>
         <p:txBody>
-          <a:bodyPr/>
+          <a:bodyPr wrap="square"/>
           <a:lstStyle/>
           <a:p>
             <a:pPr>
@@ -10448,209 +11419,293 @@
             <a:spAutoFit/>
           </a:bodyPr>
           <a:lstStyle/>
-          <a:p/>
-          <a:p>
-            <a:pPr>
-              <a:spcAft>
-                <a:spcPts val="1200"/>
-              </a:spcAft>
-              <a:defRPr sz="2000"/>
-            </a:pPr>
-            <a:r>
+          <a:p>
+            <a:pPr>
+              <a:lnSpc>
+                <a:spcPct val="90000"/>
+              </a:lnSpc>
+              <a:spcAft>
+                <a:spcPts val="300"/>
+              </a:spcAft>
+            </a:pPr>
+          </a:p>
+          <a:p>
+            <a:pPr>
+              <a:lnSpc>
+                <a:spcPct val="90000"/>
+              </a:lnSpc>
+              <a:spcAft>
+                <a:spcPts val="300"/>
+              </a:spcAft>
+              <a:defRPr sz="2000"/>
+            </a:pPr>
+            <a:r>
+              <a:rPr sz="1500"/>
               <a:t>Proje yönetimi = Projeyi başarıyla tamamlamak için yapılan planlama ve organizasyon</a:t>
             </a:r>
           </a:p>
           <a:p>
             <a:pPr>
-              <a:spcAft>
-                <a:spcPts val="1200"/>
-              </a:spcAft>
-              <a:defRPr sz="2000"/>
-            </a:pPr>
-          </a:p>
-          <a:p>
-            <a:pPr>
-              <a:spcAft>
-                <a:spcPts val="1200"/>
+              <a:lnSpc>
+                <a:spcPct val="90000"/>
+              </a:lnSpc>
+              <a:spcAft>
+                <a:spcPts val="300"/>
+              </a:spcAft>
+              <a:defRPr sz="2000"/>
+            </a:pPr>
+          </a:p>
+          <a:p>
+            <a:pPr>
+              <a:lnSpc>
+                <a:spcPct val="90000"/>
+              </a:lnSpc>
+              <a:spcAft>
+                <a:spcPts val="300"/>
               </a:spcAft>
               <a:defRPr sz="2000" b="1"/>
             </a:pPr>
             <a:r>
+              <a:rPr sz="1500"/>
               <a:t>✅ Proje Yönetiminin Aşamaları:</a:t>
             </a:r>
           </a:p>
           <a:p>
             <a:pPr>
-              <a:spcAft>
-                <a:spcPts val="1200"/>
-              </a:spcAft>
-              <a:defRPr sz="2000"/>
-            </a:pPr>
-          </a:p>
-          <a:p>
-            <a:pPr>
-              <a:spcAft>
-                <a:spcPts val="1200"/>
-              </a:spcAft>
-              <a:defRPr sz="2000"/>
-            </a:pPr>
-            <a:r>
+              <a:lnSpc>
+                <a:spcPct val="90000"/>
+              </a:lnSpc>
+              <a:spcAft>
+                <a:spcPts val="300"/>
+              </a:spcAft>
+              <a:defRPr sz="2000"/>
+            </a:pPr>
+          </a:p>
+          <a:p>
+            <a:pPr>
+              <a:lnSpc>
+                <a:spcPct val="90000"/>
+              </a:lnSpc>
+              <a:spcAft>
+                <a:spcPts val="300"/>
+              </a:spcAft>
+              <a:defRPr sz="2000"/>
+            </a:pPr>
+            <a:r>
+              <a:rPr sz="1500"/>
               <a:t>1️⃣ PLANLAMA</a:t>
             </a:r>
           </a:p>
           <a:p>
             <a:pPr lvl="1">
-              <a:spcAft>
-                <a:spcPts val="1200"/>
-              </a:spcAft>
-              <a:defRPr sz="1800"/>
-            </a:pPr>
-            <a:r>
+              <a:lnSpc>
+                <a:spcPct val="90000"/>
+              </a:lnSpc>
+              <a:spcAft>
+                <a:spcPts val="300"/>
+              </a:spcAft>
+              <a:defRPr sz="1800"/>
+            </a:pPr>
+            <a:r>
+              <a:rPr sz="1500"/>
               <a:t>    • Ne yapacağız?</a:t>
             </a:r>
           </a:p>
           <a:p>
             <a:pPr lvl="1">
-              <a:spcAft>
-                <a:spcPts val="1200"/>
-              </a:spcAft>
-              <a:defRPr sz="1800"/>
-            </a:pPr>
-            <a:r>
+              <a:lnSpc>
+                <a:spcPct val="90000"/>
+              </a:lnSpc>
+              <a:spcAft>
+                <a:spcPts val="300"/>
+              </a:spcAft>
+              <a:defRPr sz="1800"/>
+            </a:pPr>
+            <a:r>
+              <a:rPr sz="1500"/>
               <a:t>    • Nasıl yapacağız?</a:t>
             </a:r>
           </a:p>
           <a:p>
             <a:pPr lvl="1">
-              <a:spcAft>
-                <a:spcPts val="1200"/>
-              </a:spcAft>
-              <a:defRPr sz="1800"/>
-            </a:pPr>
-            <a:r>
+              <a:lnSpc>
+                <a:spcPct val="90000"/>
+              </a:lnSpc>
+              <a:spcAft>
+                <a:spcPts val="300"/>
+              </a:spcAft>
+              <a:defRPr sz="1800"/>
+            </a:pPr>
+            <a:r>
+              <a:rPr sz="1500"/>
               <a:t>    • Ne zaman bitireceğiz?</a:t>
             </a:r>
           </a:p>
           <a:p>
             <a:pPr>
-              <a:spcAft>
-                <a:spcPts val="1200"/>
-              </a:spcAft>
-              <a:defRPr sz="2000"/>
-            </a:pPr>
-          </a:p>
-          <a:p>
-            <a:pPr>
-              <a:spcAft>
-                <a:spcPts val="1200"/>
-              </a:spcAft>
-              <a:defRPr sz="2000"/>
-            </a:pPr>
-            <a:r>
+              <a:lnSpc>
+                <a:spcPct val="90000"/>
+              </a:lnSpc>
+              <a:spcAft>
+                <a:spcPts val="300"/>
+              </a:spcAft>
+              <a:defRPr sz="2000"/>
+            </a:pPr>
+          </a:p>
+          <a:p>
+            <a:pPr>
+              <a:lnSpc>
+                <a:spcPct val="90000"/>
+              </a:lnSpc>
+              <a:spcAft>
+                <a:spcPts val="300"/>
+              </a:spcAft>
+              <a:defRPr sz="2000"/>
+            </a:pPr>
+            <a:r>
+              <a:rPr sz="1500"/>
               <a:t>2️⃣ UYGULAMA</a:t>
             </a:r>
           </a:p>
           <a:p>
             <a:pPr lvl="1">
-              <a:spcAft>
-                <a:spcPts val="1200"/>
-              </a:spcAft>
-              <a:defRPr sz="1800"/>
-            </a:pPr>
-            <a:r>
+              <a:lnSpc>
+                <a:spcPct val="90000"/>
+              </a:lnSpc>
+              <a:spcAft>
+                <a:spcPts val="300"/>
+              </a:spcAft>
+              <a:defRPr sz="1800"/>
+            </a:pPr>
+            <a:r>
+              <a:rPr sz="1500"/>
               <a:t>    • Planı hayata geçirme</a:t>
             </a:r>
           </a:p>
           <a:p>
             <a:pPr lvl="1">
-              <a:spcAft>
-                <a:spcPts val="1200"/>
-              </a:spcAft>
-              <a:defRPr sz="1800"/>
-            </a:pPr>
-            <a:r>
+              <a:lnSpc>
+                <a:spcPct val="90000"/>
+              </a:lnSpc>
+              <a:spcAft>
+                <a:spcPts val="300"/>
+              </a:spcAft>
+              <a:defRPr sz="1800"/>
+            </a:pPr>
+            <a:r>
+              <a:rPr sz="1500"/>
               <a:t>    • Görevleri yerine getirme</a:t>
             </a:r>
           </a:p>
           <a:p>
             <a:pPr>
-              <a:spcAft>
-                <a:spcPts val="1200"/>
-              </a:spcAft>
-              <a:defRPr sz="2000"/>
-            </a:pPr>
-          </a:p>
-          <a:p>
-            <a:pPr>
-              <a:spcAft>
-                <a:spcPts val="1200"/>
-              </a:spcAft>
-              <a:defRPr sz="2000"/>
-            </a:pPr>
-            <a:r>
+              <a:lnSpc>
+                <a:spcPct val="90000"/>
+              </a:lnSpc>
+              <a:spcAft>
+                <a:spcPts val="300"/>
+              </a:spcAft>
+              <a:defRPr sz="2000"/>
+            </a:pPr>
+          </a:p>
+          <a:p>
+            <a:pPr>
+              <a:lnSpc>
+                <a:spcPct val="90000"/>
+              </a:lnSpc>
+              <a:spcAft>
+                <a:spcPts val="300"/>
+              </a:spcAft>
+              <a:defRPr sz="2000"/>
+            </a:pPr>
+            <a:r>
+              <a:rPr sz="1500"/>
               <a:t>3️⃣ İZLEME VE KONTROL</a:t>
             </a:r>
           </a:p>
           <a:p>
             <a:pPr lvl="1">
-              <a:spcAft>
-                <a:spcPts val="1200"/>
-              </a:spcAft>
-              <a:defRPr sz="1800"/>
-            </a:pPr>
-            <a:r>
+              <a:lnSpc>
+                <a:spcPct val="90000"/>
+              </a:lnSpc>
+              <a:spcAft>
+                <a:spcPts val="300"/>
+              </a:spcAft>
+              <a:defRPr sz="1800"/>
+            </a:pPr>
+            <a:r>
+              <a:rPr sz="1500"/>
               <a:t>    • İşler plana uygun mu?</a:t>
             </a:r>
           </a:p>
           <a:p>
             <a:pPr lvl="1">
-              <a:spcAft>
-                <a:spcPts val="1200"/>
-              </a:spcAft>
-              <a:defRPr sz="1800"/>
-            </a:pPr>
-            <a:r>
+              <a:lnSpc>
+                <a:spcPct val="90000"/>
+              </a:lnSpc>
+              <a:spcAft>
+                <a:spcPts val="300"/>
+              </a:spcAft>
+              <a:defRPr sz="1800"/>
+            </a:pPr>
+            <a:r>
+              <a:rPr sz="1500"/>
               <a:t>    • Sorunlar var mı?</a:t>
             </a:r>
           </a:p>
           <a:p>
             <a:pPr>
-              <a:spcAft>
-                <a:spcPts val="1200"/>
-              </a:spcAft>
-              <a:defRPr sz="2000"/>
-            </a:pPr>
-          </a:p>
-          <a:p>
-            <a:pPr>
-              <a:spcAft>
-                <a:spcPts val="1200"/>
-              </a:spcAft>
-              <a:defRPr sz="2000"/>
-            </a:pPr>
-            <a:r>
+              <a:lnSpc>
+                <a:spcPct val="90000"/>
+              </a:lnSpc>
+              <a:spcAft>
+                <a:spcPts val="300"/>
+              </a:spcAft>
+              <a:defRPr sz="2000"/>
+            </a:pPr>
+          </a:p>
+          <a:p>
+            <a:pPr>
+              <a:lnSpc>
+                <a:spcPct val="90000"/>
+              </a:lnSpc>
+              <a:spcAft>
+                <a:spcPts val="300"/>
+              </a:spcAft>
+              <a:defRPr sz="2000"/>
+            </a:pPr>
+            <a:r>
+              <a:rPr sz="1500"/>
               <a:t>4️⃣ TAMAMLAMA</a:t>
             </a:r>
           </a:p>
           <a:p>
             <a:pPr lvl="1">
-              <a:spcAft>
-                <a:spcPts val="1200"/>
-              </a:spcAft>
-              <a:defRPr sz="1800"/>
-            </a:pPr>
-            <a:r>
+              <a:lnSpc>
+                <a:spcPct val="90000"/>
+              </a:lnSpc>
+              <a:spcAft>
+                <a:spcPts val="300"/>
+              </a:spcAft>
+              <a:defRPr sz="1800"/>
+            </a:pPr>
+            <a:r>
+              <a:rPr sz="1500"/>
               <a:t>    • Projeyi bitirme</a:t>
             </a:r>
           </a:p>
           <a:p>
             <a:pPr lvl="1">
-              <a:spcAft>
-                <a:spcPts val="1200"/>
-              </a:spcAft>
-              <a:defRPr sz="1800"/>
-            </a:pPr>
-            <a:r>
+              <a:lnSpc>
+                <a:spcPct val="90000"/>
+              </a:lnSpc>
+              <a:spcAft>
+                <a:spcPts val="300"/>
+              </a:spcAft>
+              <a:defRPr sz="1800"/>
+            </a:pPr>
+            <a:r>
+              <a:rPr sz="1500"/>
               <a:t>    • Sonuçları değerlendirme</a:t>
             </a:r>
           </a:p>
@@ -10686,7 +11741,7 @@
         </p:nvSpPr>
         <p:spPr/>
         <p:txBody>
-          <a:bodyPr/>
+          <a:bodyPr wrap="square"/>
           <a:lstStyle/>
           <a:p>
             <a:pPr>
@@ -10740,220 +11795,289 @@
             <a:spAutoFit/>
           </a:bodyPr>
           <a:lstStyle/>
-          <a:p/>
-          <a:p>
-            <a:pPr>
-              <a:spcAft>
-                <a:spcPts val="1200"/>
+          <a:p>
+            <a:pPr>
+              <a:lnSpc>
+                <a:spcPct val="90000"/>
+              </a:lnSpc>
+              <a:spcAft>
+                <a:spcPts val="300"/>
+              </a:spcAft>
+            </a:pPr>
+          </a:p>
+          <a:p>
+            <a:pPr>
+              <a:lnSpc>
+                <a:spcPct val="90000"/>
+              </a:lnSpc>
+              <a:spcAft>
+                <a:spcPts val="300"/>
               </a:spcAft>
               <a:defRPr sz="2000" b="1"/>
             </a:pPr>
             <a:r>
-              <a:rPr sz="1600"/>
+              <a:rPr sz="1400"/>
               <a:t>🎯 Tanım:</a:t>
             </a:r>
           </a:p>
           <a:p>
             <a:pPr>
-              <a:spcAft>
-                <a:spcPts val="1200"/>
-              </a:spcAft>
-              <a:defRPr sz="2000"/>
-            </a:pPr>
-            <a:r>
-              <a:rPr sz="1600"/>
+              <a:lnSpc>
+                <a:spcPct val="90000"/>
+              </a:lnSpc>
+              <a:spcAft>
+                <a:spcPts val="300"/>
+              </a:spcAft>
+              <a:defRPr sz="2000"/>
+            </a:pPr>
+            <a:r>
+              <a:rPr sz="1400"/>
               <a:t>Dijital ürün = Bilgisayar, telefon veya tablet gibi cihazlarda kullanılan ürünler</a:t>
             </a:r>
           </a:p>
           <a:p>
             <a:pPr>
-              <a:spcAft>
-                <a:spcPts val="1200"/>
-              </a:spcAft>
-              <a:defRPr sz="2000"/>
-            </a:pPr>
-          </a:p>
-          <a:p>
-            <a:pPr>
-              <a:spcAft>
-                <a:spcPts val="1200"/>
+              <a:lnSpc>
+                <a:spcPct val="90000"/>
+              </a:lnSpc>
+              <a:spcAft>
+                <a:spcPts val="300"/>
+              </a:spcAft>
+              <a:defRPr sz="2000"/>
+            </a:pPr>
+          </a:p>
+          <a:p>
+            <a:pPr>
+              <a:lnSpc>
+                <a:spcPct val="90000"/>
+              </a:lnSpc>
+              <a:spcAft>
+                <a:spcPts val="300"/>
               </a:spcAft>
               <a:defRPr sz="2000" b="1"/>
             </a:pPr>
             <a:r>
-              <a:rPr sz="1600"/>
+              <a:rPr sz="1400"/>
               <a:t>✅ Dijital Ürün Örnekleri:</a:t>
             </a:r>
           </a:p>
           <a:p>
             <a:pPr>
-              <a:spcAft>
-                <a:spcPts val="1200"/>
-              </a:spcAft>
-              <a:defRPr sz="2000"/>
-            </a:pPr>
-          </a:p>
-          <a:p>
-            <a:pPr>
-              <a:spcAft>
-                <a:spcPts val="1200"/>
-              </a:spcAft>
-              <a:defRPr sz="2000"/>
-            </a:pPr>
-            <a:r>
-              <a:rPr sz="1600"/>
+              <a:lnSpc>
+                <a:spcPct val="90000"/>
+              </a:lnSpc>
+              <a:spcAft>
+                <a:spcPts val="300"/>
+              </a:spcAft>
+              <a:defRPr sz="2000"/>
+            </a:pPr>
+          </a:p>
+          <a:p>
+            <a:pPr>
+              <a:lnSpc>
+                <a:spcPct val="90000"/>
+              </a:lnSpc>
+              <a:spcAft>
+                <a:spcPts val="300"/>
+              </a:spcAft>
+              <a:defRPr sz="2000"/>
+            </a:pPr>
+            <a:r>
+              <a:rPr sz="1400"/>
               <a:t>📱 Mobil Uygulamalar:</a:t>
             </a:r>
           </a:p>
           <a:p>
             <a:pPr lvl="1">
-              <a:spcAft>
-                <a:spcPts val="1200"/>
-              </a:spcAft>
-              <a:defRPr sz="1800"/>
-            </a:pPr>
-            <a:r>
-              <a:rPr sz="1600"/>
+              <a:lnSpc>
+                <a:spcPct val="90000"/>
+              </a:lnSpc>
+              <a:spcAft>
+                <a:spcPts val="300"/>
+              </a:spcAft>
+              <a:defRPr sz="1800"/>
+            </a:pPr>
+            <a:r>
+              <a:rPr sz="1400"/>
               <a:t>    • WhatsApp, Instagram, TikTok</a:t>
             </a:r>
           </a:p>
           <a:p>
             <a:pPr lvl="1">
-              <a:spcAft>
-                <a:spcPts val="1200"/>
-              </a:spcAft>
-              <a:defRPr sz="1800"/>
-            </a:pPr>
-            <a:r>
-              <a:rPr sz="1600"/>
+              <a:lnSpc>
+                <a:spcPct val="90000"/>
+              </a:lnSpc>
+              <a:spcAft>
+                <a:spcPts val="300"/>
+              </a:spcAft>
+              <a:defRPr sz="1800"/>
+            </a:pPr>
+            <a:r>
+              <a:rPr sz="1400"/>
               <a:t>    • Oyun uygulamaları (Subway Surfers, Roblox)</a:t>
             </a:r>
           </a:p>
           <a:p>
             <a:pPr lvl="1">
-              <a:spcAft>
-                <a:spcPts val="1200"/>
-              </a:spcAft>
-              <a:defRPr sz="1800"/>
-            </a:pPr>
-            <a:r>
-              <a:rPr sz="1600"/>
+              <a:lnSpc>
+                <a:spcPct val="90000"/>
+              </a:lnSpc>
+              <a:spcAft>
+                <a:spcPts val="300"/>
+              </a:spcAft>
+              <a:defRPr sz="1800"/>
+            </a:pPr>
+            <a:r>
+              <a:rPr sz="1400"/>
               <a:t>    • Eğitim uygulamaları (Morpa Kampüs, EBA)</a:t>
             </a:r>
           </a:p>
           <a:p>
             <a:pPr>
-              <a:spcAft>
-                <a:spcPts val="1200"/>
-              </a:spcAft>
-              <a:defRPr sz="2000"/>
-            </a:pPr>
-          </a:p>
-          <a:p>
-            <a:pPr>
-              <a:spcAft>
-                <a:spcPts val="1200"/>
-              </a:spcAft>
-              <a:defRPr sz="2000"/>
-            </a:pPr>
-            <a:r>
-              <a:rPr sz="1600"/>
+              <a:lnSpc>
+                <a:spcPct val="90000"/>
+              </a:lnSpc>
+              <a:spcAft>
+                <a:spcPts val="300"/>
+              </a:spcAft>
+              <a:defRPr sz="2000"/>
+            </a:pPr>
+          </a:p>
+          <a:p>
+            <a:pPr>
+              <a:lnSpc>
+                <a:spcPct val="90000"/>
+              </a:lnSpc>
+              <a:spcAft>
+                <a:spcPts val="300"/>
+              </a:spcAft>
+              <a:defRPr sz="2000"/>
+            </a:pPr>
+            <a:r>
+              <a:rPr sz="1400"/>
               <a:t>🌐 Web Siteleri:</a:t>
             </a:r>
           </a:p>
           <a:p>
             <a:pPr lvl="1">
-              <a:spcAft>
-                <a:spcPts val="1200"/>
-              </a:spcAft>
-              <a:defRPr sz="1800"/>
-            </a:pPr>
-            <a:r>
-              <a:rPr sz="1600"/>
+              <a:lnSpc>
+                <a:spcPct val="90000"/>
+              </a:lnSpc>
+              <a:spcAft>
+                <a:spcPts val="300"/>
+              </a:spcAft>
+              <a:defRPr sz="1800"/>
+            </a:pPr>
+            <a:r>
+              <a:rPr sz="1400"/>
               <a:t>    • YouTube, Google, Wikipedia</a:t>
             </a:r>
           </a:p>
           <a:p>
             <a:pPr lvl="1">
-              <a:spcAft>
-                <a:spcPts val="1200"/>
-              </a:spcAft>
-              <a:defRPr sz="1800"/>
-            </a:pPr>
-            <a:r>
-              <a:rPr sz="1600"/>
+              <a:lnSpc>
+                <a:spcPct val="90000"/>
+              </a:lnSpc>
+              <a:spcAft>
+                <a:spcPts val="300"/>
+              </a:spcAft>
+              <a:defRPr sz="1800"/>
+            </a:pPr>
+            <a:r>
+              <a:rPr sz="1400"/>
               <a:t>    • Online oyunlar</a:t>
             </a:r>
           </a:p>
           <a:p>
             <a:pPr>
-              <a:spcAft>
-                <a:spcPts val="1200"/>
-              </a:spcAft>
-              <a:defRPr sz="2000"/>
-            </a:pPr>
-          </a:p>
-          <a:p>
-            <a:pPr>
-              <a:spcAft>
-                <a:spcPts val="1200"/>
-              </a:spcAft>
-              <a:defRPr sz="2000"/>
-            </a:pPr>
-            <a:r>
-              <a:rPr sz="1600"/>
+              <a:lnSpc>
+                <a:spcPct val="90000"/>
+              </a:lnSpc>
+              <a:spcAft>
+                <a:spcPts val="300"/>
+              </a:spcAft>
+              <a:defRPr sz="2000"/>
+            </a:pPr>
+          </a:p>
+          <a:p>
+            <a:pPr>
+              <a:lnSpc>
+                <a:spcPct val="90000"/>
+              </a:lnSpc>
+              <a:spcAft>
+                <a:spcPts val="300"/>
+              </a:spcAft>
+              <a:defRPr sz="2000"/>
+            </a:pPr>
+            <a:r>
+              <a:rPr sz="1400"/>
               <a:t>🎮 Dijital Oyunlar:</a:t>
             </a:r>
           </a:p>
           <a:p>
             <a:pPr lvl="1">
-              <a:spcAft>
-                <a:spcPts val="1200"/>
-              </a:spcAft>
-              <a:defRPr sz="1800"/>
-            </a:pPr>
-            <a:r>
-              <a:rPr sz="1600"/>
+              <a:lnSpc>
+                <a:spcPct val="90000"/>
+              </a:lnSpc>
+              <a:spcAft>
+                <a:spcPts val="300"/>
+              </a:spcAft>
+              <a:defRPr sz="1800"/>
+            </a:pPr>
+            <a:r>
+              <a:rPr sz="1400"/>
               <a:t>    • Minecraft, Fortnite</a:t>
             </a:r>
           </a:p>
           <a:p>
             <a:pPr>
-              <a:spcAft>
-                <a:spcPts val="1200"/>
-              </a:spcAft>
-              <a:defRPr sz="2000"/>
-            </a:pPr>
-          </a:p>
-          <a:p>
-            <a:pPr>
-              <a:spcAft>
-                <a:spcPts val="1200"/>
-              </a:spcAft>
-              <a:defRPr sz="2000"/>
-            </a:pPr>
-            <a:r>
-              <a:rPr sz="1600"/>
+              <a:lnSpc>
+                <a:spcPct val="90000"/>
+              </a:lnSpc>
+              <a:spcAft>
+                <a:spcPts val="300"/>
+              </a:spcAft>
+              <a:defRPr sz="2000"/>
+            </a:pPr>
+          </a:p>
+          <a:p>
+            <a:pPr>
+              <a:lnSpc>
+                <a:spcPct val="90000"/>
+              </a:lnSpc>
+              <a:spcAft>
+                <a:spcPts val="300"/>
+              </a:spcAft>
+              <a:defRPr sz="2000"/>
+            </a:pPr>
+            <a:r>
+              <a:rPr sz="1400"/>
               <a:t>📚 E-kitaplar, Podcast'ler, Dijital Sanat</a:t>
             </a:r>
           </a:p>
           <a:p>
             <a:pPr>
-              <a:spcAft>
-                <a:spcPts val="1200"/>
-              </a:spcAft>
-              <a:defRPr sz="2000"/>
-            </a:pPr>
-          </a:p>
-          <a:p>
-            <a:pPr>
-              <a:spcAft>
-                <a:spcPts val="1200"/>
+              <a:lnSpc>
+                <a:spcPct val="90000"/>
+              </a:lnSpc>
+              <a:spcAft>
+                <a:spcPts val="300"/>
+              </a:spcAft>
+              <a:defRPr sz="2000"/>
+            </a:pPr>
+          </a:p>
+          <a:p>
+            <a:pPr>
+              <a:lnSpc>
+                <a:spcPct val="90000"/>
+              </a:lnSpc>
+              <a:spcAft>
+                <a:spcPts val="300"/>
               </a:spcAft>
               <a:defRPr sz="2000" b="1"/>
             </a:pPr>
             <a:r>
-              <a:rPr sz="1600"/>
+              <a:rPr sz="1400"/>
               <a:t>💡 Fiziksel olmayan, elektronik cihazlarda çalışan her şey!</a:t>
             </a:r>
           </a:p>
@@ -10989,7 +12113,7 @@
         </p:nvSpPr>
         <p:spPr/>
         <p:txBody>
-          <a:bodyPr/>
+          <a:bodyPr wrap="square"/>
           <a:lstStyle/>
           <a:p>
             <a:pPr>
@@ -11043,244 +12167,341 @@
             <a:spAutoFit/>
           </a:bodyPr>
           <a:lstStyle/>
-          <a:p/>
-          <a:p>
-            <a:pPr>
-              <a:spcAft>
-                <a:spcPts val="1200"/>
-              </a:spcAft>
-              <a:defRPr sz="2000"/>
-            </a:pPr>
-            <a:r>
+          <a:p>
+            <a:pPr>
+              <a:lnSpc>
+                <a:spcPct val="90000"/>
+              </a:lnSpc>
+              <a:spcAft>
+                <a:spcPts val="300"/>
+              </a:spcAft>
+            </a:pPr>
+          </a:p>
+          <a:p>
+            <a:pPr>
+              <a:lnSpc>
+                <a:spcPct val="90000"/>
+              </a:lnSpc>
+              <a:spcAft>
+                <a:spcPts val="300"/>
+              </a:spcAft>
+              <a:defRPr sz="2000"/>
+            </a:pPr>
+            <a:r>
+              <a:rPr sz="1500"/>
               <a:t>Bir dijital ürün nasıl tasarlanır?</a:t>
             </a:r>
           </a:p>
           <a:p>
             <a:pPr>
-              <a:spcAft>
-                <a:spcPts val="1200"/>
-              </a:spcAft>
-              <a:defRPr sz="2000"/>
-            </a:pPr>
-          </a:p>
-          <a:p>
-            <a:pPr>
-              <a:spcAft>
-                <a:spcPts val="1200"/>
+              <a:lnSpc>
+                <a:spcPct val="90000"/>
+              </a:lnSpc>
+              <a:spcAft>
+                <a:spcPts val="300"/>
+              </a:spcAft>
+              <a:defRPr sz="2000"/>
+            </a:pPr>
+          </a:p>
+          <a:p>
+            <a:pPr>
+              <a:lnSpc>
+                <a:spcPct val="90000"/>
+              </a:lnSpc>
+              <a:spcAft>
+                <a:spcPts val="300"/>
               </a:spcAft>
               <a:defRPr sz="2000" b="1"/>
             </a:pPr>
             <a:r>
+              <a:rPr sz="1500"/>
               <a:t>✅ Tasarım Süreci Adımları:</a:t>
             </a:r>
           </a:p>
           <a:p>
             <a:pPr>
-              <a:spcAft>
-                <a:spcPts val="1200"/>
-              </a:spcAft>
-              <a:defRPr sz="2000"/>
-            </a:pPr>
-          </a:p>
-          <a:p>
-            <a:pPr>
-              <a:spcAft>
-                <a:spcPts val="1200"/>
-              </a:spcAft>
-              <a:defRPr sz="2000"/>
-            </a:pPr>
-            <a:r>
+              <a:lnSpc>
+                <a:spcPct val="90000"/>
+              </a:lnSpc>
+              <a:spcAft>
+                <a:spcPts val="300"/>
+              </a:spcAft>
+              <a:defRPr sz="2000"/>
+            </a:pPr>
+          </a:p>
+          <a:p>
+            <a:pPr>
+              <a:lnSpc>
+                <a:spcPct val="90000"/>
+              </a:lnSpc>
+              <a:spcAft>
+                <a:spcPts val="300"/>
+              </a:spcAft>
+              <a:defRPr sz="2000"/>
+            </a:pPr>
+            <a:r>
+              <a:rPr sz="1500"/>
               <a:t>1️⃣ İHTİYAÇ ANALİZİ</a:t>
             </a:r>
           </a:p>
           <a:p>
             <a:pPr lvl="1">
-              <a:spcAft>
-                <a:spcPts val="1200"/>
-              </a:spcAft>
-              <a:defRPr sz="1800"/>
-            </a:pPr>
-            <a:r>
+              <a:lnSpc>
+                <a:spcPct val="90000"/>
+              </a:lnSpc>
+              <a:spcAft>
+                <a:spcPts val="300"/>
+              </a:spcAft>
+              <a:defRPr sz="1800"/>
+            </a:pPr>
+            <a:r>
+              <a:rPr sz="1500"/>
               <a:t>    • Hangi problemi çözeceğiz?</a:t>
             </a:r>
           </a:p>
           <a:p>
             <a:pPr>
-              <a:spcAft>
-                <a:spcPts val="1200"/>
-              </a:spcAft>
-              <a:defRPr sz="2000"/>
-            </a:pPr>
-          </a:p>
-          <a:p>
-            <a:pPr>
-              <a:spcAft>
-                <a:spcPts val="1200"/>
-              </a:spcAft>
-              <a:defRPr sz="2000"/>
-            </a:pPr>
-            <a:r>
+              <a:lnSpc>
+                <a:spcPct val="90000"/>
+              </a:lnSpc>
+              <a:spcAft>
+                <a:spcPts val="300"/>
+              </a:spcAft>
+              <a:defRPr sz="2000"/>
+            </a:pPr>
+          </a:p>
+          <a:p>
+            <a:pPr>
+              <a:lnSpc>
+                <a:spcPct val="90000"/>
+              </a:lnSpc>
+              <a:spcAft>
+                <a:spcPts val="300"/>
+              </a:spcAft>
+              <a:defRPr sz="2000"/>
+            </a:pPr>
+            <a:r>
+              <a:rPr sz="1500"/>
               <a:t>2️⃣ FIKIR GELIŞTIRME</a:t>
             </a:r>
           </a:p>
           <a:p>
             <a:pPr lvl="1">
-              <a:spcAft>
-                <a:spcPts val="1200"/>
-              </a:spcAft>
-              <a:defRPr sz="1800"/>
-            </a:pPr>
-            <a:r>
+              <a:lnSpc>
+                <a:spcPct val="90000"/>
+              </a:lnSpc>
+              <a:spcAft>
+                <a:spcPts val="300"/>
+              </a:spcAft>
+              <a:defRPr sz="1800"/>
+            </a:pPr>
+            <a:r>
+              <a:rPr sz="1500"/>
               <a:t>    • Çözüm önerileri</a:t>
             </a:r>
           </a:p>
           <a:p>
             <a:pPr>
-              <a:spcAft>
-                <a:spcPts val="1200"/>
-              </a:spcAft>
-              <a:defRPr sz="2000"/>
-            </a:pPr>
-          </a:p>
-          <a:p>
-            <a:pPr>
-              <a:spcAft>
-                <a:spcPts val="1200"/>
-              </a:spcAft>
-              <a:defRPr sz="2000"/>
-            </a:pPr>
-            <a:r>
+              <a:lnSpc>
+                <a:spcPct val="90000"/>
+              </a:lnSpc>
+              <a:spcAft>
+                <a:spcPts val="300"/>
+              </a:spcAft>
+              <a:defRPr sz="2000"/>
+            </a:pPr>
+          </a:p>
+          <a:p>
+            <a:pPr>
+              <a:lnSpc>
+                <a:spcPct val="90000"/>
+              </a:lnSpc>
+              <a:spcAft>
+                <a:spcPts val="300"/>
+              </a:spcAft>
+              <a:defRPr sz="2000"/>
+            </a:pPr>
+            <a:r>
+              <a:rPr sz="1500"/>
               <a:t>3️⃣ TASARIM</a:t>
             </a:r>
           </a:p>
           <a:p>
             <a:pPr lvl="1">
-              <a:spcAft>
-                <a:spcPts val="1200"/>
-              </a:spcAft>
-              <a:defRPr sz="1800"/>
-            </a:pPr>
-            <a:r>
+              <a:lnSpc>
+                <a:spcPct val="90000"/>
+              </a:lnSpc>
+              <a:spcAft>
+                <a:spcPts val="300"/>
+              </a:spcAft>
+              <a:defRPr sz="1800"/>
+            </a:pPr>
+            <a:r>
+              <a:rPr sz="1500"/>
               <a:t>    • Ürünün görünümünü planlama</a:t>
             </a:r>
           </a:p>
           <a:p>
             <a:pPr>
-              <a:spcAft>
-                <a:spcPts val="1200"/>
-              </a:spcAft>
-              <a:defRPr sz="2000"/>
-            </a:pPr>
-          </a:p>
-          <a:p>
-            <a:pPr>
-              <a:spcAft>
-                <a:spcPts val="1200"/>
-              </a:spcAft>
-              <a:defRPr sz="2000"/>
-            </a:pPr>
-            <a:r>
+              <a:lnSpc>
+                <a:spcPct val="90000"/>
+              </a:lnSpc>
+              <a:spcAft>
+                <a:spcPts val="300"/>
+              </a:spcAft>
+              <a:defRPr sz="2000"/>
+            </a:pPr>
+          </a:p>
+          <a:p>
+            <a:pPr>
+              <a:lnSpc>
+                <a:spcPct val="90000"/>
+              </a:lnSpc>
+              <a:spcAft>
+                <a:spcPts val="300"/>
+              </a:spcAft>
+              <a:defRPr sz="2000"/>
+            </a:pPr>
+            <a:r>
+              <a:rPr sz="1500"/>
               <a:t>4️⃣ PROTOTİP OLUŞTURMA</a:t>
             </a:r>
           </a:p>
           <a:p>
             <a:pPr lvl="1">
-              <a:spcAft>
-                <a:spcPts val="1200"/>
-              </a:spcAft>
-              <a:defRPr sz="1800"/>
-            </a:pPr>
-            <a:r>
+              <a:lnSpc>
+                <a:spcPct val="90000"/>
+              </a:lnSpc>
+              <a:spcAft>
+                <a:spcPts val="300"/>
+              </a:spcAft>
+              <a:defRPr sz="1800"/>
+            </a:pPr>
+            <a:r>
+              <a:rPr sz="1500"/>
               <a:t>    • İlk deneme versiyonu</a:t>
             </a:r>
           </a:p>
           <a:p>
             <a:pPr>
-              <a:spcAft>
-                <a:spcPts val="1200"/>
-              </a:spcAft>
-              <a:defRPr sz="2000"/>
-            </a:pPr>
-          </a:p>
-          <a:p>
-            <a:pPr>
-              <a:spcAft>
-                <a:spcPts val="1200"/>
-              </a:spcAft>
-              <a:defRPr sz="2000"/>
-            </a:pPr>
-            <a:r>
+              <a:lnSpc>
+                <a:spcPct val="90000"/>
+              </a:lnSpc>
+              <a:spcAft>
+                <a:spcPts val="300"/>
+              </a:spcAft>
+              <a:defRPr sz="2000"/>
+            </a:pPr>
+          </a:p>
+          <a:p>
+            <a:pPr>
+              <a:lnSpc>
+                <a:spcPct val="90000"/>
+              </a:lnSpc>
+              <a:spcAft>
+                <a:spcPts val="300"/>
+              </a:spcAft>
+              <a:defRPr sz="2000"/>
+            </a:pPr>
+            <a:r>
+              <a:rPr sz="1500"/>
               <a:t>5️⃣ TEST ETME</a:t>
             </a:r>
           </a:p>
           <a:p>
             <a:pPr lvl="1">
-              <a:spcAft>
-                <a:spcPts val="1200"/>
-              </a:spcAft>
-              <a:defRPr sz="1800"/>
-            </a:pPr>
-            <a:r>
+              <a:lnSpc>
+                <a:spcPct val="90000"/>
+              </a:lnSpc>
+              <a:spcAft>
+                <a:spcPts val="300"/>
+              </a:spcAft>
+              <a:defRPr sz="1800"/>
+            </a:pPr>
+            <a:r>
+              <a:rPr sz="1500"/>
               <a:t>    • Kullanıcılarla deneme</a:t>
             </a:r>
           </a:p>
           <a:p>
             <a:pPr>
-              <a:spcAft>
-                <a:spcPts val="1200"/>
-              </a:spcAft>
-              <a:defRPr sz="2000"/>
-            </a:pPr>
-          </a:p>
-          <a:p>
-            <a:pPr>
-              <a:spcAft>
-                <a:spcPts val="1200"/>
-              </a:spcAft>
-              <a:defRPr sz="2000"/>
-            </a:pPr>
-            <a:r>
+              <a:lnSpc>
+                <a:spcPct val="90000"/>
+              </a:lnSpc>
+              <a:spcAft>
+                <a:spcPts val="300"/>
+              </a:spcAft>
+              <a:defRPr sz="2000"/>
+            </a:pPr>
+          </a:p>
+          <a:p>
+            <a:pPr>
+              <a:lnSpc>
+                <a:spcPct val="90000"/>
+              </a:lnSpc>
+              <a:spcAft>
+                <a:spcPts val="300"/>
+              </a:spcAft>
+              <a:defRPr sz="2000"/>
+            </a:pPr>
+            <a:r>
+              <a:rPr sz="1500"/>
               <a:t>6️⃣ GERİ BİLDİRİM VE İYİLEŞTİRME</a:t>
             </a:r>
           </a:p>
           <a:p>
             <a:pPr lvl="1">
-              <a:spcAft>
-                <a:spcPts val="1200"/>
-              </a:spcAft>
-              <a:defRPr sz="1800"/>
-            </a:pPr>
-            <a:r>
+              <a:lnSpc>
+                <a:spcPct val="90000"/>
+              </a:lnSpc>
+              <a:spcAft>
+                <a:spcPts val="300"/>
+              </a:spcAft>
+              <a:defRPr sz="1800"/>
+            </a:pPr>
+            <a:r>
+              <a:rPr sz="1500"/>
               <a:t>    • Eksikleri düzeltme</a:t>
             </a:r>
           </a:p>
           <a:p>
             <a:pPr>
-              <a:spcAft>
-                <a:spcPts val="1200"/>
-              </a:spcAft>
-              <a:defRPr sz="2000"/>
-            </a:pPr>
-          </a:p>
-          <a:p>
-            <a:pPr>
-              <a:spcAft>
-                <a:spcPts val="1200"/>
-              </a:spcAft>
-              <a:defRPr sz="2000"/>
-            </a:pPr>
-            <a:r>
+              <a:lnSpc>
+                <a:spcPct val="90000"/>
+              </a:lnSpc>
+              <a:spcAft>
+                <a:spcPts val="300"/>
+              </a:spcAft>
+              <a:defRPr sz="2000"/>
+            </a:pPr>
+          </a:p>
+          <a:p>
+            <a:pPr>
+              <a:lnSpc>
+                <a:spcPct val="90000"/>
+              </a:lnSpc>
+              <a:spcAft>
+                <a:spcPts val="300"/>
+              </a:spcAft>
+              <a:defRPr sz="2000"/>
+            </a:pPr>
+            <a:r>
+              <a:rPr sz="1500"/>
               <a:t>7️⃣ YAYINLAMA</a:t>
             </a:r>
           </a:p>
           <a:p>
             <a:pPr lvl="1">
-              <a:spcAft>
-                <a:spcPts val="1200"/>
-              </a:spcAft>
-              <a:defRPr sz="1800"/>
-            </a:pPr>
-            <a:r>
+              <a:lnSpc>
+                <a:spcPct val="90000"/>
+              </a:lnSpc>
+              <a:spcAft>
+                <a:spcPts val="300"/>
+              </a:spcAft>
+              <a:defRPr sz="1800"/>
+            </a:pPr>
+            <a:r>
+              <a:rPr sz="1500"/>
               <a:t>    • Ürünü kullanıma sunma</a:t>
             </a:r>
           </a:p>
@@ -11316,7 +12537,7 @@
         </p:nvSpPr>
         <p:spPr/>
         <p:txBody>
-          <a:bodyPr/>
+          <a:bodyPr wrap="square"/>
           <a:lstStyle/>
           <a:p>
             <a:pPr>
@@ -11370,192 +12591,252 @@
             <a:spAutoFit/>
           </a:bodyPr>
           <a:lstStyle/>
-          <a:p/>
-          <a:p>
-            <a:pPr>
-              <a:spcAft>
-                <a:spcPts val="1200"/>
-              </a:spcAft>
-              <a:defRPr sz="2000"/>
-            </a:pPr>
-            <a:r>
-              <a:rPr sz="1400"/>
+          <a:p>
+            <a:pPr>
+              <a:lnSpc>
+                <a:spcPct val="90000"/>
+              </a:lnSpc>
+              <a:spcAft>
+                <a:spcPts val="300"/>
+              </a:spcAft>
+            </a:pPr>
+          </a:p>
+          <a:p>
+            <a:pPr>
+              <a:lnSpc>
+                <a:spcPct val="90000"/>
+              </a:lnSpc>
+              <a:spcAft>
+                <a:spcPts val="300"/>
+              </a:spcAft>
+              <a:defRPr sz="2000"/>
+            </a:pPr>
+            <a:r>
+              <a:rPr sz="1300"/>
               <a:t>En önemli adım: Hangi problemi çözeceğiz?</a:t>
             </a:r>
           </a:p>
           <a:p>
             <a:pPr>
-              <a:spcAft>
-                <a:spcPts val="1200"/>
-              </a:spcAft>
-              <a:defRPr sz="2000"/>
-            </a:pPr>
-          </a:p>
-          <a:p>
-            <a:pPr>
-              <a:spcAft>
-                <a:spcPts val="1200"/>
+              <a:lnSpc>
+                <a:spcPct val="90000"/>
+              </a:lnSpc>
+              <a:spcAft>
+                <a:spcPts val="300"/>
+              </a:spcAft>
+              <a:defRPr sz="2000"/>
+            </a:pPr>
+          </a:p>
+          <a:p>
+            <a:pPr>
+              <a:lnSpc>
+                <a:spcPct val="90000"/>
+              </a:lnSpc>
+              <a:spcAft>
+                <a:spcPts val="300"/>
               </a:spcAft>
               <a:defRPr sz="2000" b="1"/>
             </a:pPr>
             <a:r>
-              <a:rPr sz="1400"/>
+              <a:rPr sz="1300"/>
               <a:t>✅ İhtiyaç Analizi Soruları:</a:t>
             </a:r>
           </a:p>
           <a:p>
             <a:pPr lvl="1">
-              <a:spcAft>
-                <a:spcPts val="1200"/>
-              </a:spcAft>
-              <a:defRPr sz="1800"/>
-            </a:pPr>
-            <a:r>
-              <a:rPr sz="1400"/>
+              <a:lnSpc>
+                <a:spcPct val="90000"/>
+              </a:lnSpc>
+              <a:spcAft>
+                <a:spcPts val="300"/>
+              </a:spcAft>
+              <a:defRPr sz="1800"/>
+            </a:pPr>
+            <a:r>
+              <a:rPr sz="1300"/>
               <a:t>    • İnsanların hangi sorunu var?</a:t>
             </a:r>
           </a:p>
           <a:p>
             <a:pPr lvl="1">
-              <a:spcAft>
-                <a:spcPts val="1200"/>
-              </a:spcAft>
-              <a:defRPr sz="1800"/>
-            </a:pPr>
-            <a:r>
-              <a:rPr sz="1400"/>
+              <a:lnSpc>
+                <a:spcPct val="90000"/>
+              </a:lnSpc>
+              <a:spcAft>
+                <a:spcPts val="300"/>
+              </a:spcAft>
+              <a:defRPr sz="1800"/>
+            </a:pPr>
+            <a:r>
+              <a:rPr sz="1300"/>
               <a:t>    • Bu sorunu kim yaşıyor?</a:t>
             </a:r>
           </a:p>
           <a:p>
             <a:pPr lvl="1">
-              <a:spcAft>
-                <a:spcPts val="1200"/>
-              </a:spcAft>
-              <a:defRPr sz="1800"/>
-            </a:pPr>
-            <a:r>
-              <a:rPr sz="1400"/>
+              <a:lnSpc>
+                <a:spcPct val="90000"/>
+              </a:lnSpc>
+              <a:spcAft>
+                <a:spcPts val="300"/>
+              </a:spcAft>
+              <a:defRPr sz="1800"/>
+            </a:pPr>
+            <a:r>
+              <a:rPr sz="1300"/>
               <a:t>    • Sorun ne kadar önemli?</a:t>
             </a:r>
           </a:p>
           <a:p>
             <a:pPr lvl="1">
-              <a:spcAft>
-                <a:spcPts val="1200"/>
-              </a:spcAft>
-              <a:defRPr sz="1800"/>
-            </a:pPr>
-            <a:r>
-              <a:rPr sz="1400"/>
+              <a:lnSpc>
+                <a:spcPct val="90000"/>
+              </a:lnSpc>
+              <a:spcAft>
+                <a:spcPts val="300"/>
+              </a:spcAft>
+              <a:defRPr sz="1800"/>
+            </a:pPr>
+            <a:r>
+              <a:rPr sz="1300"/>
               <a:t>    • Mevcut çözümler var mı? Yeterli mi?</a:t>
             </a:r>
           </a:p>
           <a:p>
             <a:pPr>
-              <a:spcAft>
-                <a:spcPts val="1200"/>
-              </a:spcAft>
-              <a:defRPr sz="2000"/>
-            </a:pPr>
-          </a:p>
-          <a:p>
-            <a:pPr>
-              <a:spcAft>
-                <a:spcPts val="1200"/>
+              <a:lnSpc>
+                <a:spcPct val="90000"/>
+              </a:lnSpc>
+              <a:spcAft>
+                <a:spcPts val="300"/>
+              </a:spcAft>
+              <a:defRPr sz="2000"/>
+            </a:pPr>
+          </a:p>
+          <a:p>
+            <a:pPr>
+              <a:lnSpc>
+                <a:spcPct val="90000"/>
+              </a:lnSpc>
+              <a:spcAft>
+                <a:spcPts val="300"/>
               </a:spcAft>
               <a:defRPr sz="2000" b="1"/>
             </a:pPr>
             <a:r>
-              <a:rPr sz="1400"/>
+              <a:rPr sz="1300"/>
               <a:t>📌 Örnek Problemler:</a:t>
             </a:r>
           </a:p>
           <a:p>
             <a:pPr lvl="1">
-              <a:spcAft>
-                <a:spcPts val="1200"/>
-              </a:spcAft>
-              <a:defRPr sz="1800"/>
-            </a:pPr>
-            <a:r>
-              <a:rPr sz="1400"/>
+              <a:lnSpc>
+                <a:spcPct val="90000"/>
+              </a:lnSpc>
+              <a:spcAft>
+                <a:spcPts val="300"/>
+              </a:spcAft>
+              <a:defRPr sz="1800"/>
+            </a:pPr>
+            <a:r>
+              <a:rPr sz="1300"/>
               <a:t>    • Öğrenciler matematik çalışırken zorlanıyor</a:t>
             </a:r>
           </a:p>
           <a:p>
             <a:pPr lvl="1">
-              <a:spcAft>
-                <a:spcPts val="1200"/>
-              </a:spcAft>
-              <a:defRPr sz="1800"/>
-            </a:pPr>
-            <a:r>
-              <a:rPr sz="1400"/>
+              <a:lnSpc>
+                <a:spcPct val="90000"/>
+              </a:lnSpc>
+              <a:spcAft>
+                <a:spcPts val="300"/>
+              </a:spcAft>
+              <a:defRPr sz="1800"/>
+            </a:pPr>
+            <a:r>
+              <a:rPr sz="1300"/>
               <a:t>    • Çocuklar İngilizce kelime ezberlemekte sıkılıyor</a:t>
             </a:r>
           </a:p>
           <a:p>
             <a:pPr lvl="1">
-              <a:spcAft>
-                <a:spcPts val="1200"/>
-              </a:spcAft>
-              <a:defRPr sz="1800"/>
-            </a:pPr>
-            <a:r>
-              <a:rPr sz="1400"/>
+              <a:lnSpc>
+                <a:spcPct val="90000"/>
+              </a:lnSpc>
+              <a:spcAft>
+                <a:spcPts val="300"/>
+              </a:spcAft>
+              <a:defRPr sz="1800"/>
+            </a:pPr>
+            <a:r>
+              <a:rPr sz="1300"/>
               <a:t>    • Küçük kardeşim zamanını planlamayı bilmiyor</a:t>
             </a:r>
           </a:p>
           <a:p>
             <a:pPr lvl="1">
-              <a:spcAft>
-                <a:spcPts val="1200"/>
-              </a:spcAft>
-              <a:defRPr sz="1800"/>
-            </a:pPr>
-            <a:r>
-              <a:rPr sz="1400"/>
+              <a:lnSpc>
+                <a:spcPct val="90000"/>
+              </a:lnSpc>
+              <a:spcAft>
+                <a:spcPts val="300"/>
+              </a:spcAft>
+              <a:defRPr sz="1800"/>
+            </a:pPr>
+            <a:r>
+              <a:rPr sz="1300"/>
               <a:t>    • Arkadaşlar hangi oyunu oynayacağına karar veremiyor</a:t>
             </a:r>
           </a:p>
           <a:p>
             <a:pPr>
-              <a:spcAft>
-                <a:spcPts val="1200"/>
-              </a:spcAft>
-              <a:defRPr sz="2000"/>
-            </a:pPr>
-          </a:p>
-          <a:p>
-            <a:pPr>
-              <a:spcAft>
-                <a:spcPts val="1200"/>
+              <a:lnSpc>
+                <a:spcPct val="90000"/>
+              </a:lnSpc>
+              <a:spcAft>
+                <a:spcPts val="300"/>
+              </a:spcAft>
+              <a:defRPr sz="2000"/>
+            </a:pPr>
+          </a:p>
+          <a:p>
+            <a:pPr>
+              <a:lnSpc>
+                <a:spcPct val="90000"/>
+              </a:lnSpc>
+              <a:spcAft>
+                <a:spcPts val="300"/>
               </a:spcAft>
               <a:defRPr sz="2000" b="1"/>
             </a:pPr>
             <a:r>
-              <a:rPr sz="1400"/>
+              <a:rPr sz="1300"/>
               <a:t>💡 İyi bir problem tanımı = Başarılı ürünün yarısı!</a:t>
             </a:r>
           </a:p>
           <a:p>
             <a:pPr>
-              <a:spcAft>
-                <a:spcPts val="1200"/>
-              </a:spcAft>
-              <a:defRPr sz="2000"/>
-            </a:pPr>
-          </a:p>
-          <a:p>
-            <a:pPr>
-              <a:spcAft>
-                <a:spcPts val="1200"/>
+              <a:lnSpc>
+                <a:spcPct val="90000"/>
+              </a:lnSpc>
+              <a:spcAft>
+                <a:spcPts val="300"/>
+              </a:spcAft>
+              <a:defRPr sz="2000"/>
+            </a:pPr>
+          </a:p>
+          <a:p>
+            <a:pPr>
+              <a:lnSpc>
+                <a:spcPct val="90000"/>
+              </a:lnSpc>
+              <a:spcAft>
+                <a:spcPts val="300"/>
               </a:spcAft>
               <a:defRPr sz="2000" b="1"/>
             </a:pPr>
             <a:r>
-              <a:rPr sz="1400"/>
+              <a:rPr sz="1300"/>
               <a:t>🎯 Etkinlik: Sınıfta karşılaştığınız 3 problemi listeleyin</a:t>
             </a:r>
           </a:p>
@@ -11591,7 +12872,7 @@
         </p:nvSpPr>
         <p:spPr/>
         <p:txBody>
-          <a:bodyPr/>
+          <a:bodyPr wrap="square"/>
           <a:lstStyle/>
           <a:p>
             <a:pPr>
@@ -11645,272 +12926,353 @@
             <a:spAutoFit/>
           </a:bodyPr>
           <a:lstStyle/>
-          <a:p/>
-          <a:p>
-            <a:pPr>
-              <a:spcAft>
-                <a:spcPts val="1200"/>
-              </a:spcAft>
-              <a:defRPr sz="2000"/>
-            </a:pPr>
-            <a:r>
-              <a:rPr sz="1400"/>
+          <a:p>
+            <a:pPr>
+              <a:lnSpc>
+                <a:spcPct val="90000"/>
+              </a:lnSpc>
+              <a:spcAft>
+                <a:spcPts val="300"/>
+              </a:spcAft>
+            </a:pPr>
+          </a:p>
+          <a:p>
+            <a:pPr>
+              <a:lnSpc>
+                <a:spcPct val="90000"/>
+              </a:lnSpc>
+              <a:spcAft>
+                <a:spcPts val="300"/>
+              </a:spcAft>
+              <a:defRPr sz="2000"/>
+            </a:pPr>
+            <a:r>
+              <a:rPr sz="1300"/>
               <a:t>Problem belirlendi, şimdi çözüm zamanı!</a:t>
             </a:r>
           </a:p>
           <a:p>
             <a:pPr>
-              <a:spcAft>
-                <a:spcPts val="1200"/>
-              </a:spcAft>
-              <a:defRPr sz="2000"/>
-            </a:pPr>
-          </a:p>
-          <a:p>
-            <a:pPr>
-              <a:spcAft>
-                <a:spcPts val="1200"/>
+              <a:lnSpc>
+                <a:spcPct val="90000"/>
+              </a:lnSpc>
+              <a:spcAft>
+                <a:spcPts val="300"/>
+              </a:spcAft>
+              <a:defRPr sz="2000"/>
+            </a:pPr>
+          </a:p>
+          <a:p>
+            <a:pPr>
+              <a:lnSpc>
+                <a:spcPct val="90000"/>
+              </a:lnSpc>
+              <a:spcAft>
+                <a:spcPts val="300"/>
               </a:spcAft>
               <a:defRPr sz="2000" b="1"/>
             </a:pPr>
             <a:r>
-              <a:rPr sz="1400"/>
+              <a:rPr sz="1300"/>
               <a:t>✅ Fikir Geliştirme Yöntemleri:</a:t>
             </a:r>
           </a:p>
           <a:p>
             <a:pPr>
-              <a:spcAft>
-                <a:spcPts val="1200"/>
-              </a:spcAft>
-              <a:defRPr sz="2000"/>
-            </a:pPr>
-          </a:p>
-          <a:p>
-            <a:pPr>
-              <a:spcAft>
-                <a:spcPts val="1200"/>
-              </a:spcAft>
-              <a:defRPr sz="2000"/>
-            </a:pPr>
-            <a:r>
-              <a:rPr sz="1400"/>
+              <a:lnSpc>
+                <a:spcPct val="90000"/>
+              </a:lnSpc>
+              <a:spcAft>
+                <a:spcPts val="300"/>
+              </a:spcAft>
+              <a:defRPr sz="2000"/>
+            </a:pPr>
+          </a:p>
+          <a:p>
+            <a:pPr>
+              <a:lnSpc>
+                <a:spcPct val="90000"/>
+              </a:lnSpc>
+              <a:spcAft>
+                <a:spcPts val="300"/>
+              </a:spcAft>
+              <a:defRPr sz="2000"/>
+            </a:pPr>
+            <a:r>
+              <a:rPr sz="1300"/>
               <a:t>🧠 Beyin Fırtınası (Brainstorming):</a:t>
             </a:r>
           </a:p>
           <a:p>
             <a:pPr lvl="1">
-              <a:spcAft>
-                <a:spcPts val="1200"/>
-              </a:spcAft>
-              <a:defRPr sz="1800"/>
-            </a:pPr>
-            <a:r>
-              <a:rPr sz="1400"/>
+              <a:lnSpc>
+                <a:spcPct val="90000"/>
+              </a:lnSpc>
+              <a:spcAft>
+                <a:spcPts val="300"/>
+              </a:spcAft>
+              <a:defRPr sz="1800"/>
+            </a:pPr>
+            <a:r>
+              <a:rPr sz="1300"/>
               <a:t>    • Tüm fikirleri söyleyin</a:t>
             </a:r>
           </a:p>
           <a:p>
             <a:pPr lvl="1">
-              <a:spcAft>
-                <a:spcPts val="1200"/>
-              </a:spcAft>
-              <a:defRPr sz="1800"/>
-            </a:pPr>
-            <a:r>
-              <a:rPr sz="1400"/>
+              <a:lnSpc>
+                <a:spcPct val="90000"/>
+              </a:lnSpc>
+              <a:spcAft>
+                <a:spcPts val="300"/>
+              </a:spcAft>
+              <a:defRPr sz="1800"/>
+            </a:pPr>
+            <a:r>
+              <a:rPr sz="1300"/>
               <a:t>    • Eleştirmeyin, not alın</a:t>
             </a:r>
           </a:p>
           <a:p>
             <a:pPr lvl="1">
-              <a:spcAft>
-                <a:spcPts val="1200"/>
-              </a:spcAft>
-              <a:defRPr sz="1800"/>
-            </a:pPr>
-            <a:r>
-              <a:rPr sz="1400"/>
+              <a:lnSpc>
+                <a:spcPct val="90000"/>
+              </a:lnSpc>
+              <a:spcAft>
+                <a:spcPts val="300"/>
+              </a:spcAft>
+              <a:defRPr sz="1800"/>
+            </a:pPr>
+            <a:r>
+              <a:rPr sz="1300"/>
               <a:t>    • Çılgın fikirler de olabilir!</a:t>
             </a:r>
           </a:p>
           <a:p>
             <a:pPr>
-              <a:spcAft>
-                <a:spcPts val="1200"/>
-              </a:spcAft>
-              <a:defRPr sz="2000"/>
-            </a:pPr>
-          </a:p>
-          <a:p>
-            <a:pPr>
-              <a:spcAft>
-                <a:spcPts val="1200"/>
-              </a:spcAft>
-              <a:defRPr sz="2000"/>
-            </a:pPr>
-            <a:r>
-              <a:rPr sz="1400"/>
+              <a:lnSpc>
+                <a:spcPct val="90000"/>
+              </a:lnSpc>
+              <a:spcAft>
+                <a:spcPts val="300"/>
+              </a:spcAft>
+              <a:defRPr sz="2000"/>
+            </a:pPr>
+          </a:p>
+          <a:p>
+            <a:pPr>
+              <a:lnSpc>
+                <a:spcPct val="90000"/>
+              </a:lnSpc>
+              <a:spcAft>
+                <a:spcPts val="300"/>
+              </a:spcAft>
+              <a:defRPr sz="2000"/>
+            </a:pPr>
+            <a:r>
+              <a:rPr sz="1300"/>
               <a:t>🗣️ Kullanıcı Görüşleri:</a:t>
             </a:r>
           </a:p>
           <a:p>
             <a:pPr lvl="1">
-              <a:spcAft>
-                <a:spcPts val="1200"/>
-              </a:spcAft>
-              <a:defRPr sz="1800"/>
-            </a:pPr>
-            <a:r>
-              <a:rPr sz="1400"/>
+              <a:lnSpc>
+                <a:spcPct val="90000"/>
+              </a:lnSpc>
+              <a:spcAft>
+                <a:spcPts val="300"/>
+              </a:spcAft>
+              <a:defRPr sz="1800"/>
+            </a:pPr>
+            <a:r>
+              <a:rPr sz="1300"/>
               <a:t>    • Problemi yaşayan kişilerle konuşun</a:t>
             </a:r>
           </a:p>
           <a:p>
             <a:pPr lvl="1">
-              <a:spcAft>
-                <a:spcPts val="1200"/>
-              </a:spcAft>
-              <a:defRPr sz="1800"/>
-            </a:pPr>
-            <a:r>
-              <a:rPr sz="1400"/>
+              <a:lnSpc>
+                <a:spcPct val="90000"/>
+              </a:lnSpc>
+              <a:spcAft>
+                <a:spcPts val="300"/>
+              </a:spcAft>
+              <a:defRPr sz="1800"/>
+            </a:pPr>
+            <a:r>
+              <a:rPr sz="1300"/>
               <a:t>    • Ne isterler? Ne işe yarar?</a:t>
             </a:r>
           </a:p>
           <a:p>
             <a:pPr>
-              <a:spcAft>
-                <a:spcPts val="1200"/>
-              </a:spcAft>
-              <a:defRPr sz="2000"/>
-            </a:pPr>
-          </a:p>
-          <a:p>
-            <a:pPr>
-              <a:spcAft>
-                <a:spcPts val="1200"/>
-              </a:spcAft>
-              <a:defRPr sz="2000"/>
-            </a:pPr>
-            <a:r>
-              <a:rPr sz="1400"/>
+              <a:lnSpc>
+                <a:spcPct val="90000"/>
+              </a:lnSpc>
+              <a:spcAft>
+                <a:spcPts val="300"/>
+              </a:spcAft>
+              <a:defRPr sz="2000"/>
+            </a:pPr>
+          </a:p>
+          <a:p>
+            <a:pPr>
+              <a:lnSpc>
+                <a:spcPct val="90000"/>
+              </a:lnSpc>
+              <a:spcAft>
+                <a:spcPts val="300"/>
+              </a:spcAft>
+              <a:defRPr sz="2000"/>
+            </a:pPr>
+            <a:r>
+              <a:rPr sz="1300"/>
               <a:t>🔍 Mevcut Ürünleri İnceleme:</a:t>
             </a:r>
           </a:p>
           <a:p>
             <a:pPr lvl="1">
-              <a:spcAft>
-                <a:spcPts val="1200"/>
-              </a:spcAft>
-              <a:defRPr sz="1800"/>
-            </a:pPr>
-            <a:r>
-              <a:rPr sz="1400"/>
+              <a:lnSpc>
+                <a:spcPct val="90000"/>
+              </a:lnSpc>
+              <a:spcAft>
+                <a:spcPts val="300"/>
+              </a:spcAft>
+              <a:defRPr sz="1800"/>
+            </a:pPr>
+            <a:r>
+              <a:rPr sz="1300"/>
               <a:t>    • Benzer ürünler var mı?</a:t>
             </a:r>
           </a:p>
           <a:p>
             <a:pPr lvl="1">
-              <a:spcAft>
-                <a:spcPts val="1200"/>
-              </a:spcAft>
-              <a:defRPr sz="1800"/>
-            </a:pPr>
-            <a:r>
-              <a:rPr sz="1400"/>
+              <a:lnSpc>
+                <a:spcPct val="90000"/>
+              </a:lnSpc>
+              <a:spcAft>
+                <a:spcPts val="300"/>
+              </a:spcAft>
+              <a:defRPr sz="1800"/>
+            </a:pPr>
+            <a:r>
+              <a:rPr sz="1300"/>
               <a:t>    • Onların eksiği ne?</a:t>
             </a:r>
           </a:p>
           <a:p>
             <a:pPr lvl="1">
-              <a:spcAft>
-                <a:spcPts val="1200"/>
-              </a:spcAft>
-              <a:defRPr sz="1800"/>
-            </a:pPr>
-            <a:r>
-              <a:rPr sz="1400"/>
+              <a:lnSpc>
+                <a:spcPct val="90000"/>
+              </a:lnSpc>
+              <a:spcAft>
+                <a:spcPts val="300"/>
+              </a:spcAft>
+              <a:defRPr sz="1800"/>
+            </a:pPr>
+            <a:r>
+              <a:rPr sz="1300"/>
               <a:t>    • Nasıl daha iyi yapabiliriz?</a:t>
             </a:r>
           </a:p>
           <a:p>
             <a:pPr>
-              <a:spcAft>
-                <a:spcPts val="1200"/>
-              </a:spcAft>
-              <a:defRPr sz="2000"/>
-            </a:pPr>
-          </a:p>
-          <a:p>
-            <a:pPr>
-              <a:spcAft>
-                <a:spcPts val="1200"/>
+              <a:lnSpc>
+                <a:spcPct val="90000"/>
+              </a:lnSpc>
+              <a:spcAft>
+                <a:spcPts val="300"/>
+              </a:spcAft>
+              <a:defRPr sz="2000"/>
+            </a:pPr>
+          </a:p>
+          <a:p>
+            <a:pPr>
+              <a:lnSpc>
+                <a:spcPct val="90000"/>
+              </a:lnSpc>
+              <a:spcAft>
+                <a:spcPts val="300"/>
               </a:spcAft>
               <a:defRPr sz="2000" b="1"/>
             </a:pPr>
             <a:r>
-              <a:rPr sz="1400"/>
+              <a:rPr sz="1300"/>
               <a:t>📌 Örnek:</a:t>
             </a:r>
           </a:p>
           <a:p>
             <a:pPr>
-              <a:spcAft>
-                <a:spcPts val="1200"/>
-              </a:spcAft>
-              <a:defRPr sz="2000"/>
-            </a:pPr>
-            <a:r>
-              <a:rPr sz="1400"/>
+              <a:lnSpc>
+                <a:spcPct val="90000"/>
+              </a:lnSpc>
+              <a:spcAft>
+                <a:spcPts val="300"/>
+              </a:spcAft>
+              <a:defRPr sz="2000"/>
+            </a:pPr>
+            <a:r>
+              <a:rPr sz="1300"/>
               <a:t>Problem: İngilizce kelime ezberleme sıkıcı</a:t>
             </a:r>
           </a:p>
           <a:p>
             <a:pPr>
-              <a:spcAft>
-                <a:spcPts val="1200"/>
-              </a:spcAft>
-              <a:defRPr sz="2000"/>
-            </a:pPr>
-            <a:r>
-              <a:rPr sz="1400"/>
+              <a:lnSpc>
+                <a:spcPct val="90000"/>
+              </a:lnSpc>
+              <a:spcAft>
+                <a:spcPts val="300"/>
+              </a:spcAft>
+              <a:defRPr sz="2000"/>
+            </a:pPr>
+            <a:r>
+              <a:rPr sz="1300"/>
               <a:t>Çözüm Fikirleri:</a:t>
             </a:r>
           </a:p>
           <a:p>
             <a:pPr lvl="1">
-              <a:spcAft>
-                <a:spcPts val="1200"/>
-              </a:spcAft>
-              <a:defRPr sz="1800"/>
-            </a:pPr>
-            <a:r>
-              <a:rPr sz="1400"/>
+              <a:lnSpc>
+                <a:spcPct val="90000"/>
+              </a:lnSpc>
+              <a:spcAft>
+                <a:spcPts val="300"/>
+              </a:spcAft>
+              <a:defRPr sz="1800"/>
+            </a:pPr>
+            <a:r>
+              <a:rPr sz="1300"/>
               <a:t>    • Oyunlaştırılmış kelime uygulaması</a:t>
             </a:r>
           </a:p>
           <a:p>
             <a:pPr lvl="1">
-              <a:spcAft>
-                <a:spcPts val="1200"/>
-              </a:spcAft>
-              <a:defRPr sz="1800"/>
-            </a:pPr>
-            <a:r>
-              <a:rPr sz="1400"/>
+              <a:lnSpc>
+                <a:spcPct val="90000"/>
+              </a:lnSpc>
+              <a:spcAft>
+                <a:spcPts val="300"/>
+              </a:spcAft>
+              <a:defRPr sz="1800"/>
+            </a:pPr>
+            <a:r>
+              <a:rPr sz="1300"/>
               <a:t>    • Hikayelerle kelime öğrenme</a:t>
             </a:r>
           </a:p>
           <a:p>
             <a:pPr lvl="1">
-              <a:spcAft>
-                <a:spcPts val="1200"/>
-              </a:spcAft>
-              <a:defRPr sz="1800"/>
-            </a:pPr>
-            <a:r>
-              <a:rPr sz="1400"/>
+              <a:lnSpc>
+                <a:spcPct val="90000"/>
+              </a:lnSpc>
+              <a:spcAft>
+                <a:spcPts val="300"/>
+              </a:spcAft>
+              <a:defRPr sz="1800"/>
+            </a:pPr>
+            <a:r>
+              <a:rPr sz="1300"/>
               <a:t>    • Günlük kelime yarışması</a:t>
             </a:r>
           </a:p>
@@ -11946,7 +13308,7 @@
         </p:nvSpPr>
         <p:spPr/>
         <p:txBody>
-          <a:bodyPr/>
+          <a:bodyPr wrap="square"/>
           <a:lstStyle/>
           <a:p>
             <a:pPr>
@@ -12000,268 +13362,349 @@
             <a:spAutoFit/>
           </a:bodyPr>
           <a:lstStyle/>
-          <a:p/>
-          <a:p>
-            <a:pPr>
-              <a:spcAft>
-                <a:spcPts val="1200"/>
-              </a:spcAft>
-              <a:defRPr sz="2000"/>
-            </a:pPr>
-            <a:r>
-              <a:rPr sz="1400"/>
+          <a:p>
+            <a:pPr>
+              <a:lnSpc>
+                <a:spcPct val="90000"/>
+              </a:lnSpc>
+              <a:spcAft>
+                <a:spcPts val="300"/>
+              </a:spcAft>
+            </a:pPr>
+          </a:p>
+          <a:p>
+            <a:pPr>
+              <a:lnSpc>
+                <a:spcPct val="90000"/>
+              </a:lnSpc>
+              <a:spcAft>
+                <a:spcPts val="300"/>
+              </a:spcAft>
+              <a:defRPr sz="2000"/>
+            </a:pPr>
+            <a:r>
+              <a:rPr sz="1300"/>
               <a:t>Ürünümüz nasıl görünmeli? Nasıl kullanılmalı?</a:t>
             </a:r>
           </a:p>
           <a:p>
             <a:pPr>
-              <a:spcAft>
-                <a:spcPts val="1200"/>
-              </a:spcAft>
-              <a:defRPr sz="2000"/>
-            </a:pPr>
-          </a:p>
-          <a:p>
-            <a:pPr>
-              <a:spcAft>
-                <a:spcPts val="1200"/>
+              <a:lnSpc>
+                <a:spcPct val="90000"/>
+              </a:lnSpc>
+              <a:spcAft>
+                <a:spcPts val="300"/>
+              </a:spcAft>
+              <a:defRPr sz="2000"/>
+            </a:pPr>
+          </a:p>
+          <a:p>
+            <a:pPr>
+              <a:lnSpc>
+                <a:spcPct val="90000"/>
+              </a:lnSpc>
+              <a:spcAft>
+                <a:spcPts val="300"/>
               </a:spcAft>
               <a:defRPr sz="2000" b="1"/>
             </a:pPr>
             <a:r>
-              <a:rPr sz="1400"/>
+              <a:rPr sz="1300"/>
               <a:t>✅ İyi Tasarımın Özellikleri:</a:t>
             </a:r>
           </a:p>
           <a:p>
             <a:pPr>
-              <a:spcAft>
-                <a:spcPts val="1200"/>
-              </a:spcAft>
-              <a:defRPr sz="2000"/>
-            </a:pPr>
-          </a:p>
-          <a:p>
-            <a:pPr>
-              <a:spcAft>
-                <a:spcPts val="1200"/>
-              </a:spcAft>
-              <a:defRPr sz="2000"/>
-            </a:pPr>
-            <a:r>
-              <a:rPr sz="1400"/>
+              <a:lnSpc>
+                <a:spcPct val="90000"/>
+              </a:lnSpc>
+              <a:spcAft>
+                <a:spcPts val="300"/>
+              </a:spcAft>
+              <a:defRPr sz="2000"/>
+            </a:pPr>
+          </a:p>
+          <a:p>
+            <a:pPr>
+              <a:lnSpc>
+                <a:spcPct val="90000"/>
+              </a:lnSpc>
+              <a:spcAft>
+                <a:spcPts val="300"/>
+              </a:spcAft>
+              <a:defRPr sz="2000"/>
+            </a:pPr>
+            <a:r>
+              <a:rPr sz="1300"/>
               <a:t>👁️ Görsel Tasarım:</a:t>
             </a:r>
           </a:p>
           <a:p>
             <a:pPr lvl="1">
-              <a:spcAft>
-                <a:spcPts val="1200"/>
-              </a:spcAft>
-              <a:defRPr sz="1800"/>
-            </a:pPr>
-            <a:r>
-              <a:rPr sz="1400"/>
+              <a:lnSpc>
+                <a:spcPct val="90000"/>
+              </a:lnSpc>
+              <a:spcAft>
+                <a:spcPts val="300"/>
+              </a:spcAft>
+              <a:defRPr sz="1800"/>
+            </a:pPr>
+            <a:r>
+              <a:rPr sz="1300"/>
               <a:t>    • Renkler uyumlu olmalı</a:t>
             </a:r>
           </a:p>
           <a:p>
             <a:pPr lvl="1">
-              <a:spcAft>
-                <a:spcPts val="1200"/>
-              </a:spcAft>
-              <a:defRPr sz="1800"/>
-            </a:pPr>
-            <a:r>
-              <a:rPr sz="1400"/>
+              <a:lnSpc>
+                <a:spcPct val="90000"/>
+              </a:lnSpc>
+              <a:spcAft>
+                <a:spcPts val="300"/>
+              </a:spcAft>
+              <a:defRPr sz="1800"/>
+            </a:pPr>
+            <a:r>
+              <a:rPr sz="1300"/>
               <a:t>    • Yazılar okunabilir olmalı</a:t>
             </a:r>
           </a:p>
           <a:p>
             <a:pPr lvl="1">
-              <a:spcAft>
-                <a:spcPts val="1200"/>
-              </a:spcAft>
-              <a:defRPr sz="1800"/>
-            </a:pPr>
-            <a:r>
-              <a:rPr sz="1400"/>
+              <a:lnSpc>
+                <a:spcPct val="90000"/>
+              </a:lnSpc>
+              <a:spcAft>
+                <a:spcPts val="300"/>
+              </a:spcAft>
+              <a:defRPr sz="1800"/>
+            </a:pPr>
+            <a:r>
+              <a:rPr sz="1300"/>
               <a:t>    • Görseller çekici olmalı</a:t>
             </a:r>
           </a:p>
           <a:p>
             <a:pPr>
-              <a:spcAft>
-                <a:spcPts val="1200"/>
-              </a:spcAft>
-              <a:defRPr sz="2000"/>
-            </a:pPr>
-          </a:p>
-          <a:p>
-            <a:pPr>
-              <a:spcAft>
-                <a:spcPts val="1200"/>
-              </a:spcAft>
-              <a:defRPr sz="2000"/>
-            </a:pPr>
-            <a:r>
-              <a:rPr sz="1400"/>
+              <a:lnSpc>
+                <a:spcPct val="90000"/>
+              </a:lnSpc>
+              <a:spcAft>
+                <a:spcPts val="300"/>
+              </a:spcAft>
+              <a:defRPr sz="2000"/>
+            </a:pPr>
+          </a:p>
+          <a:p>
+            <a:pPr>
+              <a:lnSpc>
+                <a:spcPct val="90000"/>
+              </a:lnSpc>
+              <a:spcAft>
+                <a:spcPts val="300"/>
+              </a:spcAft>
+              <a:defRPr sz="2000"/>
+            </a:pPr>
+            <a:r>
+              <a:rPr sz="1300"/>
               <a:t>🖱️ Kullanılabilirlik:</a:t>
             </a:r>
           </a:p>
           <a:p>
             <a:pPr lvl="1">
-              <a:spcAft>
-                <a:spcPts val="1200"/>
-              </a:spcAft>
-              <a:defRPr sz="1800"/>
-            </a:pPr>
-            <a:r>
-              <a:rPr sz="1400"/>
+              <a:lnSpc>
+                <a:spcPct val="90000"/>
+              </a:lnSpc>
+              <a:spcAft>
+                <a:spcPts val="300"/>
+              </a:spcAft>
+              <a:defRPr sz="1800"/>
+            </a:pPr>
+            <a:r>
+              <a:rPr sz="1300"/>
               <a:t>    • Kolay anlaşılır olmalı</a:t>
             </a:r>
           </a:p>
           <a:p>
             <a:pPr lvl="1">
-              <a:spcAft>
-                <a:spcPts val="1200"/>
-              </a:spcAft>
-              <a:defRPr sz="1800"/>
-            </a:pPr>
-            <a:r>
-              <a:rPr sz="1400"/>
+              <a:lnSpc>
+                <a:spcPct val="90000"/>
+              </a:lnSpc>
+              <a:spcAft>
+                <a:spcPts val="300"/>
+              </a:spcAft>
+              <a:defRPr sz="1800"/>
+            </a:pPr>
+            <a:r>
+              <a:rPr sz="1300"/>
               <a:t>    • Hızlı öğrenilmeli</a:t>
             </a:r>
           </a:p>
           <a:p>
             <a:pPr lvl="1">
-              <a:spcAft>
-                <a:spcPts val="1200"/>
-              </a:spcAft>
-              <a:defRPr sz="1800"/>
-            </a:pPr>
-            <a:r>
-              <a:rPr sz="1400"/>
+              <a:lnSpc>
+                <a:spcPct val="90000"/>
+              </a:lnSpc>
+              <a:spcAft>
+                <a:spcPts val="300"/>
+              </a:spcAft>
+              <a:defRPr sz="1800"/>
+            </a:pPr>
+            <a:r>
+              <a:rPr sz="1300"/>
               <a:t>    • Az tıklama ile işlem yapılmalı</a:t>
             </a:r>
           </a:p>
           <a:p>
             <a:pPr>
-              <a:spcAft>
-                <a:spcPts val="1200"/>
-              </a:spcAft>
-              <a:defRPr sz="2000"/>
-            </a:pPr>
-          </a:p>
-          <a:p>
-            <a:pPr>
-              <a:spcAft>
-                <a:spcPts val="1200"/>
-              </a:spcAft>
-              <a:defRPr sz="2000"/>
-            </a:pPr>
-            <a:r>
-              <a:rPr sz="1400"/>
+              <a:lnSpc>
+                <a:spcPct val="90000"/>
+              </a:lnSpc>
+              <a:spcAft>
+                <a:spcPts val="300"/>
+              </a:spcAft>
+              <a:defRPr sz="2000"/>
+            </a:pPr>
+          </a:p>
+          <a:p>
+            <a:pPr>
+              <a:lnSpc>
+                <a:spcPct val="90000"/>
+              </a:lnSpc>
+              <a:spcAft>
+                <a:spcPts val="300"/>
+              </a:spcAft>
+              <a:defRPr sz="2000"/>
+            </a:pPr>
+            <a:r>
+              <a:rPr sz="1300"/>
               <a:t>♿ Erişilebilirlik:</a:t>
             </a:r>
           </a:p>
           <a:p>
             <a:pPr lvl="1">
-              <a:spcAft>
-                <a:spcPts val="1200"/>
-              </a:spcAft>
-              <a:defRPr sz="1800"/>
-            </a:pPr>
-            <a:r>
-              <a:rPr sz="1400"/>
+              <a:lnSpc>
+                <a:spcPct val="90000"/>
+              </a:lnSpc>
+              <a:spcAft>
+                <a:spcPts val="300"/>
+              </a:spcAft>
+              <a:defRPr sz="1800"/>
+            </a:pPr>
+            <a:r>
+              <a:rPr sz="1300"/>
               <a:t>    • Herkes kullanabilmeli (engelliler dahil)</a:t>
             </a:r>
           </a:p>
           <a:p>
             <a:pPr lvl="1">
-              <a:spcAft>
-                <a:spcPts val="1200"/>
-              </a:spcAft>
-              <a:defRPr sz="1800"/>
-            </a:pPr>
-            <a:r>
-              <a:rPr sz="1400"/>
+              <a:lnSpc>
+                <a:spcPct val="90000"/>
+              </a:lnSpc>
+              <a:spcAft>
+                <a:spcPts val="300"/>
+              </a:spcAft>
+              <a:defRPr sz="1800"/>
+            </a:pPr>
+            <a:r>
+              <a:rPr sz="1300"/>
               <a:t>    • Farklı cihazlarda çalışmalı</a:t>
             </a:r>
           </a:p>
           <a:p>
             <a:pPr>
-              <a:spcAft>
-                <a:spcPts val="1200"/>
-              </a:spcAft>
-              <a:defRPr sz="2000"/>
-            </a:pPr>
-          </a:p>
-          <a:p>
-            <a:pPr>
-              <a:spcAft>
-                <a:spcPts val="1200"/>
+              <a:lnSpc>
+                <a:spcPct val="90000"/>
+              </a:lnSpc>
+              <a:spcAft>
+                <a:spcPts val="300"/>
+              </a:spcAft>
+              <a:defRPr sz="2000"/>
+            </a:pPr>
+          </a:p>
+          <a:p>
+            <a:pPr>
+              <a:lnSpc>
+                <a:spcPct val="90000"/>
+              </a:lnSpc>
+              <a:spcAft>
+                <a:spcPts val="300"/>
               </a:spcAft>
               <a:defRPr sz="2000" b="1"/>
             </a:pPr>
             <a:r>
-              <a:rPr sz="1400"/>
+              <a:rPr sz="1300"/>
               <a:t>📌 Tasarım Araçları:</a:t>
             </a:r>
           </a:p>
           <a:p>
             <a:pPr lvl="1">
-              <a:spcAft>
-                <a:spcPts val="1200"/>
-              </a:spcAft>
-              <a:defRPr sz="1800"/>
-            </a:pPr>
-            <a:r>
-              <a:rPr sz="1400"/>
+              <a:lnSpc>
+                <a:spcPct val="90000"/>
+              </a:lnSpc>
+              <a:spcAft>
+                <a:spcPts val="300"/>
+              </a:spcAft>
+              <a:defRPr sz="1800"/>
+            </a:pPr>
+            <a:r>
+              <a:rPr sz="1300"/>
               <a:t>    • Kağıt-kalem (eskiz)</a:t>
             </a:r>
           </a:p>
           <a:p>
             <a:pPr lvl="1">
-              <a:spcAft>
-                <a:spcPts val="1200"/>
-              </a:spcAft>
-              <a:defRPr sz="1800"/>
-            </a:pPr>
-            <a:r>
-              <a:rPr sz="1400"/>
+              <a:lnSpc>
+                <a:spcPct val="90000"/>
+              </a:lnSpc>
+              <a:spcAft>
+                <a:spcPts val="300"/>
+              </a:spcAft>
+              <a:defRPr sz="1800"/>
+            </a:pPr>
+            <a:r>
+              <a:rPr sz="1300"/>
               <a:t>    • Canva, Figma (dijital tasarım)</a:t>
             </a:r>
           </a:p>
           <a:p>
             <a:pPr lvl="1">
-              <a:spcAft>
-                <a:spcPts val="1200"/>
-              </a:spcAft>
-              <a:defRPr sz="1800"/>
-            </a:pPr>
-            <a:r>
-              <a:rPr sz="1400"/>
+              <a:lnSpc>
+                <a:spcPct val="90000"/>
+              </a:lnSpc>
+              <a:spcAft>
+                <a:spcPts val="300"/>
+              </a:spcAft>
+              <a:defRPr sz="1800"/>
+            </a:pPr>
+            <a:r>
+              <a:rPr sz="1300"/>
               <a:t>    • PowerPoint (prototip)</a:t>
             </a:r>
           </a:p>
           <a:p>
             <a:pPr>
-              <a:spcAft>
-                <a:spcPts val="1200"/>
-              </a:spcAft>
-              <a:defRPr sz="2000"/>
-            </a:pPr>
-          </a:p>
-          <a:p>
-            <a:pPr>
-              <a:spcAft>
-                <a:spcPts val="1200"/>
+              <a:lnSpc>
+                <a:spcPct val="90000"/>
+              </a:lnSpc>
+              <a:spcAft>
+                <a:spcPts val="300"/>
+              </a:spcAft>
+              <a:defRPr sz="2000"/>
+            </a:pPr>
+          </a:p>
+          <a:p>
+            <a:pPr>
+              <a:lnSpc>
+                <a:spcPct val="90000"/>
+              </a:lnSpc>
+              <a:spcAft>
+                <a:spcPts val="300"/>
               </a:spcAft>
               <a:defRPr sz="2000" b="1"/>
             </a:pPr>
             <a:r>
-              <a:rPr sz="1400"/>
+              <a:rPr sz="1300"/>
               <a:t>💡 Kullanıcı deneyimi = Kullanıcının ürünü kullanırken hissettiği şey</a:t>
             </a:r>
           </a:p>

--- a/sunumlar/5-sinif-unite2-dijital-urun-tasarimi-DETAYLI.pptx
+++ b/sunumlar/5-sinif-unite2-dijital-urun-tasarimi-DETAYLI.pptx
@@ -5983,12 +5983,21 @@
           <a:noFill/>
         </p:spPr>
         <p:txBody>
-          <a:bodyPr wrap="square">
+          <a:bodyPr wrap="square" tIns="25400" bIns="25400" lIns="63500" rIns="63500">
             <a:spAutoFit/>
           </a:bodyPr>
           <a:lstStyle/>
           <a:p>
             <a:pPr algn="ctr">
+              <a:lnSpc>
+                <a:spcPct val="85000"/>
+              </a:lnSpc>
+              <a:spcBef>
+                <a:spcPts val="200"/>
+              </a:spcBef>
+              <a:spcAft>
+                <a:spcPts val="200"/>
+              </a:spcAft>
               <a:defRPr sz="5400" b="1">
                 <a:solidFill>
                   <a:srgbClr val="FFFFFF"/>
@@ -5996,6 +6005,7 @@
               </a:defRPr>
             </a:pPr>
             <a:r>
+              <a:rPr/>
               <a:t>ÜNİTE 2</a:t>
             </a:r>
           </a:p>
@@ -6018,12 +6028,21 @@
           <a:noFill/>
         </p:spPr>
         <p:txBody>
-          <a:bodyPr wrap="square">
+          <a:bodyPr wrap="square" tIns="25400" bIns="25400" lIns="63500" rIns="63500">
             <a:spAutoFit/>
           </a:bodyPr>
           <a:lstStyle/>
           <a:p>
             <a:pPr algn="ctr">
+              <a:lnSpc>
+                <a:spcPct val="85000"/>
+              </a:lnSpc>
+              <a:spcBef>
+                <a:spcPts val="200"/>
+              </a:spcBef>
+              <a:spcAft>
+                <a:spcPts val="200"/>
+              </a:spcAft>
               <a:defRPr sz="2800">
                 <a:solidFill>
                   <a:srgbClr val="FFFFFF"/>
@@ -6031,6 +6050,7 @@
               </a:defRPr>
             </a:pPr>
             <a:r>
+              <a:rPr/>
               <a:t>Dijital Ürün Tasarımı ve Proje Yönetimi</a:t>
             </a:r>
           </a:p>
@@ -6066,10 +6086,19 @@
         </p:nvSpPr>
         <p:spPr/>
         <p:txBody>
-          <a:bodyPr wrap="square"/>
+          <a:bodyPr wrap="square" tIns="25400" bIns="25400" lIns="63500" rIns="63500"/>
           <a:lstStyle/>
           <a:p>
             <a:pPr>
+              <a:lnSpc>
+                <a:spcPct val="85000"/>
+              </a:lnSpc>
+              <a:spcBef>
+                <a:spcPts val="200"/>
+              </a:spcBef>
+              <a:spcAft>
+                <a:spcPts val="200"/>
+              </a:spcAft>
               <a:defRPr sz="4000" b="1">
                 <a:solidFill>
                   <a:srgbClr val="667EEA"/>
@@ -6077,6 +6106,7 @@
               </a:defRPr>
             </a:pPr>
             <a:r>
+              <a:rPr/>
               <a:t>🛠️ Adım 4: Prototip Oluşturma</a:t>
             </a:r>
           </a:p>
@@ -6116,7 +6146,7 @@
           <a:noFill/>
         </p:spPr>
         <p:txBody>
-          <a:bodyPr wrap="square">
+          <a:bodyPr wrap="square" tIns="25400" bIns="25400" lIns="63500" rIns="63500">
             <a:spAutoFit/>
           </a:bodyPr>
           <a:lstStyle/>
@@ -6133,6 +6163,24 @@
           <a:p>
             <a:pPr>
               <a:lnSpc>
+                <a:spcPct val="85000"/>
+              </a:lnSpc>
+              <a:spcBef>
+                <a:spcPts val="200"/>
+              </a:spcBef>
+              <a:spcAft>
+                <a:spcPts val="200"/>
+              </a:spcAft>
+              <a:defRPr sz="2000"/>
+            </a:pPr>
+            <a:r>
+              <a:rPr sz="1300"/>
+              <a:t>Prototip = Ürünün ilk deneme versiyonu</a:t>
+            </a:r>
+          </a:p>
+          <a:p>
+            <a:pPr>
+              <a:lnSpc>
                 <a:spcPct val="90000"/>
               </a:lnSpc>
               <a:spcAft>
@@ -6140,9 +6188,23 @@
               </a:spcAft>
               <a:defRPr sz="2000"/>
             </a:pPr>
-            <a:r>
-              <a:rPr sz="1300"/>
-              <a:t>Prototip = Ürünün ilk deneme versiyonu</a:t>
+          </a:p>
+          <a:p>
+            <a:pPr>
+              <a:lnSpc>
+                <a:spcPct val="85000"/>
+              </a:lnSpc>
+              <a:spcBef>
+                <a:spcPts val="200"/>
+              </a:spcBef>
+              <a:spcAft>
+                <a:spcPts val="200"/>
+              </a:spcAft>
+              <a:defRPr sz="2000" b="1"/>
+            </a:pPr>
+            <a:r>
+              <a:rPr sz="1300"/>
+              <a:t>✅ Prototip Çeşitleri:</a:t>
             </a:r>
           </a:p>
           <a:p>
@@ -6159,16 +6221,239 @@
           <a:p>
             <a:pPr>
               <a:lnSpc>
+                <a:spcPct val="85000"/>
+              </a:lnSpc>
+              <a:spcBef>
+                <a:spcPts val="200"/>
+              </a:spcBef>
+              <a:spcAft>
+                <a:spcPts val="200"/>
+              </a:spcAft>
+              <a:defRPr sz="2000"/>
+            </a:pPr>
+            <a:r>
+              <a:rPr sz="1300"/>
+              <a:t>📄 Kağıt Prototip (Düşük Kalite):</a:t>
+            </a:r>
+          </a:p>
+          <a:p>
+            <a:pPr lvl="1">
+              <a:lnSpc>
+                <a:spcPct val="85000"/>
+              </a:lnSpc>
+              <a:spcBef>
+                <a:spcPts val="200"/>
+              </a:spcBef>
+              <a:spcAft>
+                <a:spcPts val="200"/>
+              </a:spcAft>
+              <a:defRPr sz="1800"/>
+            </a:pPr>
+            <a:r>
+              <a:rPr sz="1300"/>
+              <a:t>    • Kağıda çizilmiş ekranlar</a:t>
+            </a:r>
+          </a:p>
+          <a:p>
+            <a:pPr lvl="1">
+              <a:lnSpc>
+                <a:spcPct val="85000"/>
+              </a:lnSpc>
+              <a:spcBef>
+                <a:spcPts val="200"/>
+              </a:spcBef>
+              <a:spcAft>
+                <a:spcPts val="200"/>
+              </a:spcAft>
+              <a:defRPr sz="1800"/>
+            </a:pPr>
+            <a:r>
+              <a:rPr sz="1300"/>
+              <a:t>    • Hızlı ve ucuz</a:t>
+            </a:r>
+          </a:p>
+          <a:p>
+            <a:pPr lvl="1">
+              <a:lnSpc>
+                <a:spcPct val="85000"/>
+              </a:lnSpc>
+              <a:spcBef>
+                <a:spcPts val="200"/>
+              </a:spcBef>
+              <a:spcAft>
+                <a:spcPts val="200"/>
+              </a:spcAft>
+              <a:defRPr sz="1800"/>
+            </a:pPr>
+            <a:r>
+              <a:rPr sz="1300"/>
+              <a:t>    • İlk fikirleri test etmek için</a:t>
+            </a:r>
+          </a:p>
+          <a:p>
+            <a:pPr>
+              <a:lnSpc>
                 <a:spcPct val="90000"/>
               </a:lnSpc>
               <a:spcAft>
                 <a:spcPts val="300"/>
               </a:spcAft>
+              <a:defRPr sz="2000"/>
+            </a:pPr>
+          </a:p>
+          <a:p>
+            <a:pPr>
+              <a:lnSpc>
+                <a:spcPct val="85000"/>
+              </a:lnSpc>
+              <a:spcBef>
+                <a:spcPts val="200"/>
+              </a:spcBef>
+              <a:spcAft>
+                <a:spcPts val="200"/>
+              </a:spcAft>
+              <a:defRPr sz="2000"/>
+            </a:pPr>
+            <a:r>
+              <a:rPr sz="1300"/>
+              <a:t>💻 Dijital Prototip (Yüksek Kalite):</a:t>
+            </a:r>
+          </a:p>
+          <a:p>
+            <a:pPr lvl="1">
+              <a:lnSpc>
+                <a:spcPct val="85000"/>
+              </a:lnSpc>
+              <a:spcBef>
+                <a:spcPts val="200"/>
+              </a:spcBef>
+              <a:spcAft>
+                <a:spcPts val="200"/>
+              </a:spcAft>
+              <a:defRPr sz="1800"/>
+            </a:pPr>
+            <a:r>
+              <a:rPr sz="1300"/>
+              <a:t>    • Bilgisayarda tasarlanan mockup</a:t>
+            </a:r>
+          </a:p>
+          <a:p>
+            <a:pPr lvl="1">
+              <a:lnSpc>
+                <a:spcPct val="85000"/>
+              </a:lnSpc>
+              <a:spcBef>
+                <a:spcPts val="200"/>
+              </a:spcBef>
+              <a:spcAft>
+                <a:spcPts val="200"/>
+              </a:spcAft>
+              <a:defRPr sz="1800"/>
+            </a:pPr>
+            <a:r>
+              <a:rPr sz="1300"/>
+              <a:t>    • Daha gerçekçi</a:t>
+            </a:r>
+          </a:p>
+          <a:p>
+            <a:pPr lvl="1">
+              <a:lnSpc>
+                <a:spcPct val="85000"/>
+              </a:lnSpc>
+              <a:spcBef>
+                <a:spcPts val="200"/>
+              </a:spcBef>
+              <a:spcAft>
+                <a:spcPts val="200"/>
+              </a:spcAft>
+              <a:defRPr sz="1800"/>
+            </a:pPr>
+            <a:r>
+              <a:rPr sz="1300"/>
+              <a:t>    • PowerPoint, Canva, Figma ile yapılabilir</a:t>
+            </a:r>
+          </a:p>
+          <a:p>
+            <a:pPr>
+              <a:lnSpc>
+                <a:spcPct val="90000"/>
+              </a:lnSpc>
+              <a:spcAft>
+                <a:spcPts val="300"/>
+              </a:spcAft>
+              <a:defRPr sz="2000"/>
+            </a:pPr>
+          </a:p>
+          <a:p>
+            <a:pPr>
+              <a:lnSpc>
+                <a:spcPct val="85000"/>
+              </a:lnSpc>
+              <a:spcBef>
+                <a:spcPts val="200"/>
+              </a:spcBef>
+              <a:spcAft>
+                <a:spcPts val="200"/>
+              </a:spcAft>
               <a:defRPr sz="2000" b="1"/>
             </a:pPr>
             <a:r>
               <a:rPr sz="1300"/>
-              <a:t>✅ Prototip Çeşitleri:</a:t>
+              <a:t>📌 Prototipte Olması Gerekenler:</a:t>
+            </a:r>
+          </a:p>
+          <a:p>
+            <a:pPr lvl="1">
+              <a:lnSpc>
+                <a:spcPct val="85000"/>
+              </a:lnSpc>
+              <a:spcBef>
+                <a:spcPts val="200"/>
+              </a:spcBef>
+              <a:spcAft>
+                <a:spcPts val="200"/>
+              </a:spcAft>
+              <a:defRPr sz="1800"/>
+            </a:pPr>
+            <a:r>
+              <a:rPr sz="1300"/>
+              <a:t>    • Ana ekranlar</a:t>
+            </a:r>
+          </a:p>
+          <a:p>
+            <a:pPr lvl="1">
+              <a:lnSpc>
+                <a:spcPct val="85000"/>
+              </a:lnSpc>
+              <a:spcBef>
+                <a:spcPts val="200"/>
+              </a:spcBef>
+              <a:spcAft>
+                <a:spcPts val="200"/>
+              </a:spcAft>
+              <a:defRPr sz="1800"/>
+            </a:pPr>
+            <a:r>
+              <a:rPr sz="1300"/>
+              <a:t>    • Temel özellikler</a:t>
+            </a:r>
+          </a:p>
+          <a:p>
+            <a:pPr lvl="1">
+              <a:lnSpc>
+                <a:spcPct val="85000"/>
+              </a:lnSpc>
+              <a:spcBef>
+                <a:spcPts val="200"/>
+              </a:spcBef>
+              <a:spcAft>
+                <a:spcPts val="200"/>
+              </a:spcAft>
+              <a:defRPr sz="1800"/>
+            </a:pPr>
+            <a:r>
+              <a:rPr sz="1300"/>
+              <a:t>    • Navigasyon (geçiş) sistemi</a:t>
             </a:r>
           </a:p>
           <a:p>
@@ -6185,6 +6470,42 @@
           <a:p>
             <a:pPr>
               <a:lnSpc>
+                <a:spcPct val="85000"/>
+              </a:lnSpc>
+              <a:spcBef>
+                <a:spcPts val="200"/>
+              </a:spcBef>
+              <a:spcAft>
+                <a:spcPts val="200"/>
+              </a:spcAft>
+              <a:defRPr sz="2000" b="1"/>
+            </a:pPr>
+            <a:r>
+              <a:rPr sz="1300"/>
+              <a:t>💡 Prototip mükemmel olmak zorunda değil!</a:t>
+            </a:r>
+          </a:p>
+          <a:p>
+            <a:pPr>
+              <a:lnSpc>
+                <a:spcPct val="85000"/>
+              </a:lnSpc>
+              <a:spcBef>
+                <a:spcPts val="200"/>
+              </a:spcBef>
+              <a:spcAft>
+                <a:spcPts val="200"/>
+              </a:spcAft>
+              <a:defRPr sz="2000"/>
+            </a:pPr>
+            <a:r>
+              <a:rPr sz="1300"/>
+              <a:t>Amaç: Fikri görmek ve test etmek</a:t>
+            </a:r>
+          </a:p>
+          <a:p>
+            <a:pPr>
+              <a:lnSpc>
                 <a:spcPct val="90000"/>
               </a:lnSpc>
               <a:spcAft>
@@ -6192,257 +6513,17 @@
               </a:spcAft>
               <a:defRPr sz="2000"/>
             </a:pPr>
-            <a:r>
-              <a:rPr sz="1300"/>
-              <a:t>📄 Kağıt Prototip (Düşük Kalite):</a:t>
-            </a:r>
-          </a:p>
-          <a:p>
-            <a:pPr lvl="1">
-              <a:lnSpc>
-                <a:spcPct val="90000"/>
-              </a:lnSpc>
-              <a:spcAft>
-                <a:spcPts val="300"/>
-              </a:spcAft>
-              <a:defRPr sz="1800"/>
-            </a:pPr>
-            <a:r>
-              <a:rPr sz="1300"/>
-              <a:t>    • Kağıda çizilmiş ekranlar</a:t>
-            </a:r>
-          </a:p>
-          <a:p>
-            <a:pPr lvl="1">
-              <a:lnSpc>
-                <a:spcPct val="90000"/>
-              </a:lnSpc>
-              <a:spcAft>
-                <a:spcPts val="300"/>
-              </a:spcAft>
-              <a:defRPr sz="1800"/>
-            </a:pPr>
-            <a:r>
-              <a:rPr sz="1300"/>
-              <a:t>    • Hızlı ve ucuz</a:t>
-            </a:r>
-          </a:p>
-          <a:p>
-            <a:pPr lvl="1">
-              <a:lnSpc>
-                <a:spcPct val="90000"/>
-              </a:lnSpc>
-              <a:spcAft>
-                <a:spcPts val="300"/>
-              </a:spcAft>
-              <a:defRPr sz="1800"/>
-            </a:pPr>
-            <a:r>
-              <a:rPr sz="1300"/>
-              <a:t>    • İlk fikirleri test etmek için</a:t>
-            </a:r>
-          </a:p>
-          <a:p>
-            <a:pPr>
-              <a:lnSpc>
-                <a:spcPct val="90000"/>
-              </a:lnSpc>
-              <a:spcAft>
-                <a:spcPts val="300"/>
-              </a:spcAft>
-              <a:defRPr sz="2000"/>
-            </a:pPr>
-          </a:p>
-          <a:p>
-            <a:pPr>
-              <a:lnSpc>
-                <a:spcPct val="90000"/>
-              </a:lnSpc>
-              <a:spcAft>
-                <a:spcPts val="300"/>
-              </a:spcAft>
-              <a:defRPr sz="2000"/>
-            </a:pPr>
-            <a:r>
-              <a:rPr sz="1300"/>
-              <a:t>💻 Dijital Prototip (Yüksek Kalite):</a:t>
-            </a:r>
-          </a:p>
-          <a:p>
-            <a:pPr lvl="1">
-              <a:lnSpc>
-                <a:spcPct val="90000"/>
-              </a:lnSpc>
-              <a:spcAft>
-                <a:spcPts val="300"/>
-              </a:spcAft>
-              <a:defRPr sz="1800"/>
-            </a:pPr>
-            <a:r>
-              <a:rPr sz="1300"/>
-              <a:t>    • Bilgisayarda tasarlanan mockup</a:t>
-            </a:r>
-          </a:p>
-          <a:p>
-            <a:pPr lvl="1">
-              <a:lnSpc>
-                <a:spcPct val="90000"/>
-              </a:lnSpc>
-              <a:spcAft>
-                <a:spcPts val="300"/>
-              </a:spcAft>
-              <a:defRPr sz="1800"/>
-            </a:pPr>
-            <a:r>
-              <a:rPr sz="1300"/>
-              <a:t>    • Daha gerçekçi</a:t>
-            </a:r>
-          </a:p>
-          <a:p>
-            <a:pPr lvl="1">
-              <a:lnSpc>
-                <a:spcPct val="90000"/>
-              </a:lnSpc>
-              <a:spcAft>
-                <a:spcPts val="300"/>
-              </a:spcAft>
-              <a:defRPr sz="1800"/>
-            </a:pPr>
-            <a:r>
-              <a:rPr sz="1300"/>
-              <a:t>    • PowerPoint, Canva, Figma ile yapılabilir</a:t>
-            </a:r>
-          </a:p>
-          <a:p>
-            <a:pPr>
-              <a:lnSpc>
-                <a:spcPct val="90000"/>
-              </a:lnSpc>
-              <a:spcAft>
-                <a:spcPts val="300"/>
-              </a:spcAft>
-              <a:defRPr sz="2000"/>
-            </a:pPr>
-          </a:p>
-          <a:p>
-            <a:pPr>
-              <a:lnSpc>
-                <a:spcPct val="90000"/>
-              </a:lnSpc>
-              <a:spcAft>
-                <a:spcPts val="300"/>
-              </a:spcAft>
-              <a:defRPr sz="2000" b="1"/>
-            </a:pPr>
-            <a:r>
-              <a:rPr sz="1300"/>
-              <a:t>📌 Prototipte Olması Gerekenler:</a:t>
-            </a:r>
-          </a:p>
-          <a:p>
-            <a:pPr lvl="1">
-              <a:lnSpc>
-                <a:spcPct val="90000"/>
-              </a:lnSpc>
-              <a:spcAft>
-                <a:spcPts val="300"/>
-              </a:spcAft>
-              <a:defRPr sz="1800"/>
-            </a:pPr>
-            <a:r>
-              <a:rPr sz="1300"/>
-              <a:t>    • Ana ekranlar</a:t>
-            </a:r>
-          </a:p>
-          <a:p>
-            <a:pPr lvl="1">
-              <a:lnSpc>
-                <a:spcPct val="90000"/>
-              </a:lnSpc>
-              <a:spcAft>
-                <a:spcPts val="300"/>
-              </a:spcAft>
-              <a:defRPr sz="1800"/>
-            </a:pPr>
-            <a:r>
-              <a:rPr sz="1300"/>
-              <a:t>    • Temel özellikler</a:t>
-            </a:r>
-          </a:p>
-          <a:p>
-            <a:pPr lvl="1">
-              <a:lnSpc>
-                <a:spcPct val="90000"/>
-              </a:lnSpc>
-              <a:spcAft>
-                <a:spcPts val="300"/>
-              </a:spcAft>
-              <a:defRPr sz="1800"/>
-            </a:pPr>
-            <a:r>
-              <a:rPr sz="1300"/>
-              <a:t>    • Navigasyon (geçiş) sistemi</a:t>
-            </a:r>
-          </a:p>
-          <a:p>
-            <a:pPr>
-              <a:lnSpc>
-                <a:spcPct val="90000"/>
-              </a:lnSpc>
-              <a:spcAft>
-                <a:spcPts val="300"/>
-              </a:spcAft>
-              <a:defRPr sz="2000"/>
-            </a:pPr>
-          </a:p>
-          <a:p>
-            <a:pPr>
-              <a:lnSpc>
-                <a:spcPct val="90000"/>
-              </a:lnSpc>
-              <a:spcAft>
-                <a:spcPts val="300"/>
-              </a:spcAft>
-              <a:defRPr sz="2000" b="1"/>
-            </a:pPr>
-            <a:r>
-              <a:rPr sz="1300"/>
-              <a:t>💡 Prototip mükemmel olmak zorunda değil!</a:t>
-            </a:r>
-          </a:p>
-          <a:p>
-            <a:pPr>
-              <a:lnSpc>
-                <a:spcPct val="90000"/>
-              </a:lnSpc>
-              <a:spcAft>
-                <a:spcPts val="300"/>
-              </a:spcAft>
-              <a:defRPr sz="2000"/>
-            </a:pPr>
-            <a:r>
-              <a:rPr sz="1300"/>
-              <a:t>Amaç: Fikri görmek ve test etmek</a:t>
-            </a:r>
-          </a:p>
-          <a:p>
-            <a:pPr>
-              <a:lnSpc>
-                <a:spcPct val="90000"/>
-              </a:lnSpc>
-              <a:spcAft>
-                <a:spcPts val="300"/>
-              </a:spcAft>
-              <a:defRPr sz="2000"/>
-            </a:pPr>
-          </a:p>
-          <a:p>
-            <a:pPr>
-              <a:lnSpc>
-                <a:spcPct val="90000"/>
-              </a:lnSpc>
-              <a:spcAft>
-                <a:spcPts val="300"/>
+          </a:p>
+          <a:p>
+            <a:pPr>
+              <a:lnSpc>
+                <a:spcPct val="85000"/>
+              </a:lnSpc>
+              <a:spcBef>
+                <a:spcPts val="200"/>
+              </a:spcBef>
+              <a:spcAft>
+                <a:spcPts val="200"/>
               </a:spcAft>
               <a:defRPr sz="2000" b="1"/>
             </a:pPr>
@@ -6483,10 +6564,19 @@
         </p:nvSpPr>
         <p:spPr/>
         <p:txBody>
-          <a:bodyPr wrap="square"/>
+          <a:bodyPr wrap="square" tIns="25400" bIns="25400" lIns="63500" rIns="63500"/>
           <a:lstStyle/>
           <a:p>
             <a:pPr>
+              <a:lnSpc>
+                <a:spcPct val="85000"/>
+              </a:lnSpc>
+              <a:spcBef>
+                <a:spcPts val="200"/>
+              </a:spcBef>
+              <a:spcAft>
+                <a:spcPts val="200"/>
+              </a:spcAft>
               <a:defRPr sz="4000" b="1">
                 <a:solidFill>
                   <a:srgbClr val="667EEA"/>
@@ -6494,6 +6584,7 @@
               </a:defRPr>
             </a:pPr>
             <a:r>
+              <a:rPr/>
               <a:t>🧪 Adım 5: Test Etme</a:t>
             </a:r>
           </a:p>
@@ -6533,7 +6624,7 @@
           <a:noFill/>
         </p:spPr>
         <p:txBody>
-          <a:bodyPr wrap="square">
+          <a:bodyPr wrap="square" tIns="25400" bIns="25400" lIns="63500" rIns="63500">
             <a:spAutoFit/>
           </a:bodyPr>
           <a:lstStyle/>
@@ -6550,6 +6641,24 @@
           <a:p>
             <a:pPr>
               <a:lnSpc>
+                <a:spcPct val="85000"/>
+              </a:lnSpc>
+              <a:spcBef>
+                <a:spcPts val="200"/>
+              </a:spcBef>
+              <a:spcAft>
+                <a:spcPts val="200"/>
+              </a:spcAft>
+              <a:defRPr sz="2000"/>
+            </a:pPr>
+            <a:r>
+              <a:rPr sz="1300"/>
+              <a:t>Prototip hazır! Şimdi test zamanı!</a:t>
+            </a:r>
+          </a:p>
+          <a:p>
+            <a:pPr>
+              <a:lnSpc>
                 <a:spcPct val="90000"/>
               </a:lnSpc>
               <a:spcAft>
@@ -6557,9 +6666,23 @@
               </a:spcAft>
               <a:defRPr sz="2000"/>
             </a:pPr>
-            <a:r>
-              <a:rPr sz="1300"/>
-              <a:t>Prototip hazır! Şimdi test zamanı!</a:t>
+          </a:p>
+          <a:p>
+            <a:pPr>
+              <a:lnSpc>
+                <a:spcPct val="85000"/>
+              </a:lnSpc>
+              <a:spcBef>
+                <a:spcPts val="200"/>
+              </a:spcBef>
+              <a:spcAft>
+                <a:spcPts val="200"/>
+              </a:spcAft>
+              <a:defRPr sz="2000" b="1"/>
+            </a:pPr>
+            <a:r>
+              <a:rPr sz="1300"/>
+              <a:t>✅ Test Etme Yöntemleri:</a:t>
             </a:r>
           </a:p>
           <a:p>
@@ -6576,16 +6699,340 @@
           <a:p>
             <a:pPr>
               <a:lnSpc>
+                <a:spcPct val="85000"/>
+              </a:lnSpc>
+              <a:spcBef>
+                <a:spcPts val="200"/>
+              </a:spcBef>
+              <a:spcAft>
+                <a:spcPts val="200"/>
+              </a:spcAft>
+              <a:defRPr sz="2000"/>
+            </a:pPr>
+            <a:r>
+              <a:rPr sz="1300"/>
+              <a:t>👥 Kullanıcı Testleri:</a:t>
+            </a:r>
+          </a:p>
+          <a:p>
+            <a:pPr lvl="1">
+              <a:lnSpc>
+                <a:spcPct val="85000"/>
+              </a:lnSpc>
+              <a:spcBef>
+                <a:spcPts val="200"/>
+              </a:spcBef>
+              <a:spcAft>
+                <a:spcPts val="200"/>
+              </a:spcAft>
+              <a:defRPr sz="1800"/>
+            </a:pPr>
+            <a:r>
+              <a:rPr sz="1300"/>
+              <a:t>    • Hedef kitleye prototipi gösterin</a:t>
+            </a:r>
+          </a:p>
+          <a:p>
+            <a:pPr lvl="1">
+              <a:lnSpc>
+                <a:spcPct val="85000"/>
+              </a:lnSpc>
+              <a:spcBef>
+                <a:spcPts val="200"/>
+              </a:spcBef>
+              <a:spcAft>
+                <a:spcPts val="200"/>
+              </a:spcAft>
+              <a:defRPr sz="1800"/>
+            </a:pPr>
+            <a:r>
+              <a:rPr sz="1300"/>
+              <a:t>    • Onları kullanırken izleyin</a:t>
+            </a:r>
+          </a:p>
+          <a:p>
+            <a:pPr lvl="1">
+              <a:lnSpc>
+                <a:spcPct val="85000"/>
+              </a:lnSpc>
+              <a:spcBef>
+                <a:spcPts val="200"/>
+              </a:spcBef>
+              <a:spcAft>
+                <a:spcPts val="200"/>
+              </a:spcAft>
+              <a:defRPr sz="1800"/>
+            </a:pPr>
+            <a:r>
+              <a:rPr sz="1300"/>
+              <a:t>    • Nerede zorlanıyorlar?</a:t>
+            </a:r>
+          </a:p>
+          <a:p>
+            <a:pPr>
+              <a:lnSpc>
                 <a:spcPct val="90000"/>
               </a:lnSpc>
               <a:spcAft>
                 <a:spcPts val="300"/>
               </a:spcAft>
+              <a:defRPr sz="2000"/>
+            </a:pPr>
+          </a:p>
+          <a:p>
+            <a:pPr>
+              <a:lnSpc>
+                <a:spcPct val="85000"/>
+              </a:lnSpc>
+              <a:spcBef>
+                <a:spcPts val="200"/>
+              </a:spcBef>
+              <a:spcAft>
+                <a:spcPts val="200"/>
+              </a:spcAft>
+              <a:defRPr sz="2000"/>
+            </a:pPr>
+            <a:r>
+              <a:rPr sz="1300"/>
+              <a:t>❓ Sorular Sorun:</a:t>
+            </a:r>
+          </a:p>
+          <a:p>
+            <a:pPr lvl="1">
+              <a:lnSpc>
+                <a:spcPct val="85000"/>
+              </a:lnSpc>
+              <a:spcBef>
+                <a:spcPts val="200"/>
+              </a:spcBef>
+              <a:spcAft>
+                <a:spcPts val="200"/>
+              </a:spcAft>
+              <a:defRPr sz="1800"/>
+            </a:pPr>
+            <a:r>
+              <a:rPr sz="1300"/>
+              <a:t>    • Ürün anlaşılıyor mu?</a:t>
+            </a:r>
+          </a:p>
+          <a:p>
+            <a:pPr lvl="1">
+              <a:lnSpc>
+                <a:spcPct val="85000"/>
+              </a:lnSpc>
+              <a:spcBef>
+                <a:spcPts val="200"/>
+              </a:spcBef>
+              <a:spcAft>
+                <a:spcPts val="200"/>
+              </a:spcAft>
+              <a:defRPr sz="1800"/>
+            </a:pPr>
+            <a:r>
+              <a:rPr sz="1300"/>
+              <a:t>    • Kullanmak kolay mı?</a:t>
+            </a:r>
+          </a:p>
+          <a:p>
+            <a:pPr lvl="1">
+              <a:lnSpc>
+                <a:spcPct val="85000"/>
+              </a:lnSpc>
+              <a:spcBef>
+                <a:spcPts val="200"/>
+              </a:spcBef>
+              <a:spcAft>
+                <a:spcPts val="200"/>
+              </a:spcAft>
+              <a:defRPr sz="1800"/>
+            </a:pPr>
+            <a:r>
+              <a:rPr sz="1300"/>
+              <a:t>    • Eksik ne var?</a:t>
+            </a:r>
+          </a:p>
+          <a:p>
+            <a:pPr lvl="1">
+              <a:lnSpc>
+                <a:spcPct val="85000"/>
+              </a:lnSpc>
+              <a:spcBef>
+                <a:spcPts val="200"/>
+              </a:spcBef>
+              <a:spcAft>
+                <a:spcPts val="200"/>
+              </a:spcAft>
+              <a:defRPr sz="1800"/>
+            </a:pPr>
+            <a:r>
+              <a:rPr sz="1300"/>
+              <a:t>    • Beğendikleri özellikler?</a:t>
+            </a:r>
+          </a:p>
+          <a:p>
+            <a:pPr>
+              <a:lnSpc>
+                <a:spcPct val="90000"/>
+              </a:lnSpc>
+              <a:spcAft>
+                <a:spcPts val="300"/>
+              </a:spcAft>
+              <a:defRPr sz="2000"/>
+            </a:pPr>
+          </a:p>
+          <a:p>
+            <a:pPr>
+              <a:lnSpc>
+                <a:spcPct val="85000"/>
+              </a:lnSpc>
+              <a:spcBef>
+                <a:spcPts val="200"/>
+              </a:spcBef>
+              <a:spcAft>
+                <a:spcPts val="200"/>
+              </a:spcAft>
+              <a:defRPr sz="2000"/>
+            </a:pPr>
+            <a:r>
+              <a:rPr sz="1300"/>
+              <a:t>📝 Gözlem Yapın:</a:t>
+            </a:r>
+          </a:p>
+          <a:p>
+            <a:pPr lvl="1">
+              <a:lnSpc>
+                <a:spcPct val="85000"/>
+              </a:lnSpc>
+              <a:spcBef>
+                <a:spcPts val="200"/>
+              </a:spcBef>
+              <a:spcAft>
+                <a:spcPts val="200"/>
+              </a:spcAft>
+              <a:defRPr sz="1800"/>
+            </a:pPr>
+            <a:r>
+              <a:rPr sz="1300"/>
+              <a:t>    • Hangi butona tıkladılar?</a:t>
+            </a:r>
+          </a:p>
+          <a:p>
+            <a:pPr lvl="1">
+              <a:lnSpc>
+                <a:spcPct val="85000"/>
+              </a:lnSpc>
+              <a:spcBef>
+                <a:spcPts val="200"/>
+              </a:spcBef>
+              <a:spcAft>
+                <a:spcPts val="200"/>
+              </a:spcAft>
+              <a:defRPr sz="1800"/>
+            </a:pPr>
+            <a:r>
+              <a:rPr sz="1300"/>
+              <a:t>    • Nerede kafa karıştı?</a:t>
+            </a:r>
+          </a:p>
+          <a:p>
+            <a:pPr lvl="1">
+              <a:lnSpc>
+                <a:spcPct val="85000"/>
+              </a:lnSpc>
+              <a:spcBef>
+                <a:spcPts val="200"/>
+              </a:spcBef>
+              <a:spcAft>
+                <a:spcPts val="200"/>
+              </a:spcAft>
+              <a:defRPr sz="1800"/>
+            </a:pPr>
+            <a:r>
+              <a:rPr sz="1300"/>
+              <a:t>    • Ne kadar sürede öğrendiler?</a:t>
+            </a:r>
+          </a:p>
+          <a:p>
+            <a:pPr>
+              <a:lnSpc>
+                <a:spcPct val="90000"/>
+              </a:lnSpc>
+              <a:spcAft>
+                <a:spcPts val="300"/>
+              </a:spcAft>
+              <a:defRPr sz="2000"/>
+            </a:pPr>
+          </a:p>
+          <a:p>
+            <a:pPr>
+              <a:lnSpc>
+                <a:spcPct val="85000"/>
+              </a:lnSpc>
+              <a:spcBef>
+                <a:spcPts val="200"/>
+              </a:spcBef>
+              <a:spcAft>
+                <a:spcPts val="200"/>
+              </a:spcAft>
               <a:defRPr sz="2000" b="1"/>
             </a:pPr>
             <a:r>
               <a:rPr sz="1300"/>
-              <a:t>✅ Test Etme Yöntemleri:</a:t>
+              <a:t>📌 Test Sonuçları:</a:t>
+            </a:r>
+          </a:p>
+          <a:p>
+            <a:pPr lvl="1">
+              <a:lnSpc>
+                <a:spcPct val="85000"/>
+              </a:lnSpc>
+              <a:spcBef>
+                <a:spcPts val="200"/>
+              </a:spcBef>
+              <a:spcAft>
+                <a:spcPts val="200"/>
+              </a:spcAft>
+              <a:defRPr sz="1800"/>
+            </a:pPr>
+            <a:r>
+              <a:rPr sz="1300"/>
+              <a:t>    • Not alın</a:t>
+            </a:r>
+          </a:p>
+          <a:p>
+            <a:pPr lvl="1">
+              <a:lnSpc>
+                <a:spcPct val="85000"/>
+              </a:lnSpc>
+              <a:spcBef>
+                <a:spcPts val="200"/>
+              </a:spcBef>
+              <a:spcAft>
+                <a:spcPts val="200"/>
+              </a:spcAft>
+              <a:defRPr sz="1800"/>
+            </a:pPr>
+            <a:r>
+              <a:rPr sz="1300"/>
+              <a:t>    • Ortak sorunları belirleyin</a:t>
+            </a:r>
+          </a:p>
+          <a:p>
+            <a:pPr lvl="1">
+              <a:lnSpc>
+                <a:spcPct val="85000"/>
+              </a:lnSpc>
+              <a:spcBef>
+                <a:spcPts val="200"/>
+              </a:spcBef>
+              <a:spcAft>
+                <a:spcPts val="200"/>
+              </a:spcAft>
+              <a:defRPr sz="1800"/>
+            </a:pPr>
+            <a:r>
+              <a:rPr sz="1300"/>
+              <a:t>    • Önceliklendirin (en önemliler önce)</a:t>
             </a:r>
           </a:p>
           <a:p>
@@ -6602,309 +7049,13 @@
           <a:p>
             <a:pPr>
               <a:lnSpc>
-                <a:spcPct val="90000"/>
-              </a:lnSpc>
-              <a:spcAft>
-                <a:spcPts val="300"/>
-              </a:spcAft>
-              <a:defRPr sz="2000"/>
-            </a:pPr>
-            <a:r>
-              <a:rPr sz="1300"/>
-              <a:t>👥 Kullanıcı Testleri:</a:t>
-            </a:r>
-          </a:p>
-          <a:p>
-            <a:pPr lvl="1">
-              <a:lnSpc>
-                <a:spcPct val="90000"/>
-              </a:lnSpc>
-              <a:spcAft>
-                <a:spcPts val="300"/>
-              </a:spcAft>
-              <a:defRPr sz="1800"/>
-            </a:pPr>
-            <a:r>
-              <a:rPr sz="1300"/>
-              <a:t>    • Hedef kitleye prototipi gösterin</a:t>
-            </a:r>
-          </a:p>
-          <a:p>
-            <a:pPr lvl="1">
-              <a:lnSpc>
-                <a:spcPct val="90000"/>
-              </a:lnSpc>
-              <a:spcAft>
-                <a:spcPts val="300"/>
-              </a:spcAft>
-              <a:defRPr sz="1800"/>
-            </a:pPr>
-            <a:r>
-              <a:rPr sz="1300"/>
-              <a:t>    • Onları kullanırken izleyin</a:t>
-            </a:r>
-          </a:p>
-          <a:p>
-            <a:pPr lvl="1">
-              <a:lnSpc>
-                <a:spcPct val="90000"/>
-              </a:lnSpc>
-              <a:spcAft>
-                <a:spcPts val="300"/>
-              </a:spcAft>
-              <a:defRPr sz="1800"/>
-            </a:pPr>
-            <a:r>
-              <a:rPr sz="1300"/>
-              <a:t>    • Nerede zorlanıyorlar?</a:t>
-            </a:r>
-          </a:p>
-          <a:p>
-            <a:pPr>
-              <a:lnSpc>
-                <a:spcPct val="90000"/>
-              </a:lnSpc>
-              <a:spcAft>
-                <a:spcPts val="300"/>
-              </a:spcAft>
-              <a:defRPr sz="2000"/>
-            </a:pPr>
-          </a:p>
-          <a:p>
-            <a:pPr>
-              <a:lnSpc>
-                <a:spcPct val="90000"/>
-              </a:lnSpc>
-              <a:spcAft>
-                <a:spcPts val="300"/>
-              </a:spcAft>
-              <a:defRPr sz="2000"/>
-            </a:pPr>
-            <a:r>
-              <a:rPr sz="1300"/>
-              <a:t>❓ Sorular Sorun:</a:t>
-            </a:r>
-          </a:p>
-          <a:p>
-            <a:pPr lvl="1">
-              <a:lnSpc>
-                <a:spcPct val="90000"/>
-              </a:lnSpc>
-              <a:spcAft>
-                <a:spcPts val="300"/>
-              </a:spcAft>
-              <a:defRPr sz="1800"/>
-            </a:pPr>
-            <a:r>
-              <a:rPr sz="1300"/>
-              <a:t>    • Ürün anlaşılıyor mu?</a:t>
-            </a:r>
-          </a:p>
-          <a:p>
-            <a:pPr lvl="1">
-              <a:lnSpc>
-                <a:spcPct val="90000"/>
-              </a:lnSpc>
-              <a:spcAft>
-                <a:spcPts val="300"/>
-              </a:spcAft>
-              <a:defRPr sz="1800"/>
-            </a:pPr>
-            <a:r>
-              <a:rPr sz="1300"/>
-              <a:t>    • Kullanmak kolay mı?</a:t>
-            </a:r>
-          </a:p>
-          <a:p>
-            <a:pPr lvl="1">
-              <a:lnSpc>
-                <a:spcPct val="90000"/>
-              </a:lnSpc>
-              <a:spcAft>
-                <a:spcPts val="300"/>
-              </a:spcAft>
-              <a:defRPr sz="1800"/>
-            </a:pPr>
-            <a:r>
-              <a:rPr sz="1300"/>
-              <a:t>    • Eksik ne var?</a:t>
-            </a:r>
-          </a:p>
-          <a:p>
-            <a:pPr lvl="1">
-              <a:lnSpc>
-                <a:spcPct val="90000"/>
-              </a:lnSpc>
-              <a:spcAft>
-                <a:spcPts val="300"/>
-              </a:spcAft>
-              <a:defRPr sz="1800"/>
-            </a:pPr>
-            <a:r>
-              <a:rPr sz="1300"/>
-              <a:t>    • Beğendikleri özellikler?</a:t>
-            </a:r>
-          </a:p>
-          <a:p>
-            <a:pPr>
-              <a:lnSpc>
-                <a:spcPct val="90000"/>
-              </a:lnSpc>
-              <a:spcAft>
-                <a:spcPts val="300"/>
-              </a:spcAft>
-              <a:defRPr sz="2000"/>
-            </a:pPr>
-          </a:p>
-          <a:p>
-            <a:pPr>
-              <a:lnSpc>
-                <a:spcPct val="90000"/>
-              </a:lnSpc>
-              <a:spcAft>
-                <a:spcPts val="300"/>
-              </a:spcAft>
-              <a:defRPr sz="2000"/>
-            </a:pPr>
-            <a:r>
-              <a:rPr sz="1300"/>
-              <a:t>📝 Gözlem Yapın:</a:t>
-            </a:r>
-          </a:p>
-          <a:p>
-            <a:pPr lvl="1">
-              <a:lnSpc>
-                <a:spcPct val="90000"/>
-              </a:lnSpc>
-              <a:spcAft>
-                <a:spcPts val="300"/>
-              </a:spcAft>
-              <a:defRPr sz="1800"/>
-            </a:pPr>
-            <a:r>
-              <a:rPr sz="1300"/>
-              <a:t>    • Hangi butona tıkladılar?</a:t>
-            </a:r>
-          </a:p>
-          <a:p>
-            <a:pPr lvl="1">
-              <a:lnSpc>
-                <a:spcPct val="90000"/>
-              </a:lnSpc>
-              <a:spcAft>
-                <a:spcPts val="300"/>
-              </a:spcAft>
-              <a:defRPr sz="1800"/>
-            </a:pPr>
-            <a:r>
-              <a:rPr sz="1300"/>
-              <a:t>    • Nerede kafa karıştı?</a:t>
-            </a:r>
-          </a:p>
-          <a:p>
-            <a:pPr lvl="1">
-              <a:lnSpc>
-                <a:spcPct val="90000"/>
-              </a:lnSpc>
-              <a:spcAft>
-                <a:spcPts val="300"/>
-              </a:spcAft>
-              <a:defRPr sz="1800"/>
-            </a:pPr>
-            <a:r>
-              <a:rPr sz="1300"/>
-              <a:t>    • Ne kadar sürede öğrendiler?</a:t>
-            </a:r>
-          </a:p>
-          <a:p>
-            <a:pPr>
-              <a:lnSpc>
-                <a:spcPct val="90000"/>
-              </a:lnSpc>
-              <a:spcAft>
-                <a:spcPts val="300"/>
-              </a:spcAft>
-              <a:defRPr sz="2000"/>
-            </a:pPr>
-          </a:p>
-          <a:p>
-            <a:pPr>
-              <a:lnSpc>
-                <a:spcPct val="90000"/>
-              </a:lnSpc>
-              <a:spcAft>
-                <a:spcPts val="300"/>
-              </a:spcAft>
-              <a:defRPr sz="2000" b="1"/>
-            </a:pPr>
-            <a:r>
-              <a:rPr sz="1300"/>
-              <a:t>📌 Test Sonuçları:</a:t>
-            </a:r>
-          </a:p>
-          <a:p>
-            <a:pPr lvl="1">
-              <a:lnSpc>
-                <a:spcPct val="90000"/>
-              </a:lnSpc>
-              <a:spcAft>
-                <a:spcPts val="300"/>
-              </a:spcAft>
-              <a:defRPr sz="1800"/>
-            </a:pPr>
-            <a:r>
-              <a:rPr sz="1300"/>
-              <a:t>    • Not alın</a:t>
-            </a:r>
-          </a:p>
-          <a:p>
-            <a:pPr lvl="1">
-              <a:lnSpc>
-                <a:spcPct val="90000"/>
-              </a:lnSpc>
-              <a:spcAft>
-                <a:spcPts val="300"/>
-              </a:spcAft>
-              <a:defRPr sz="1800"/>
-            </a:pPr>
-            <a:r>
-              <a:rPr sz="1300"/>
-              <a:t>    • Ortak sorunları belirleyin</a:t>
-            </a:r>
-          </a:p>
-          <a:p>
-            <a:pPr lvl="1">
-              <a:lnSpc>
-                <a:spcPct val="90000"/>
-              </a:lnSpc>
-              <a:spcAft>
-                <a:spcPts val="300"/>
-              </a:spcAft>
-              <a:defRPr sz="1800"/>
-            </a:pPr>
-            <a:r>
-              <a:rPr sz="1300"/>
-              <a:t>    • Önceliklendirin (en önemliler önce)</a:t>
-            </a:r>
-          </a:p>
-          <a:p>
-            <a:pPr>
-              <a:lnSpc>
-                <a:spcPct val="90000"/>
-              </a:lnSpc>
-              <a:spcAft>
-                <a:spcPts val="300"/>
-              </a:spcAft>
-              <a:defRPr sz="2000"/>
-            </a:pPr>
-          </a:p>
-          <a:p>
-            <a:pPr>
-              <a:lnSpc>
-                <a:spcPct val="90000"/>
-              </a:lnSpc>
-              <a:spcAft>
-                <a:spcPts val="300"/>
+                <a:spcPct val="85000"/>
+              </a:lnSpc>
+              <a:spcBef>
+                <a:spcPts val="200"/>
+              </a:spcBef>
+              <a:spcAft>
+                <a:spcPts val="200"/>
               </a:spcAft>
               <a:defRPr sz="2000" b="1"/>
             </a:pPr>
@@ -6945,10 +7096,19 @@
         </p:nvSpPr>
         <p:spPr/>
         <p:txBody>
-          <a:bodyPr wrap="square"/>
+          <a:bodyPr wrap="square" tIns="25400" bIns="25400" lIns="63500" rIns="63500"/>
           <a:lstStyle/>
           <a:p>
             <a:pPr>
+              <a:lnSpc>
+                <a:spcPct val="85000"/>
+              </a:lnSpc>
+              <a:spcBef>
+                <a:spcPts val="200"/>
+              </a:spcBef>
+              <a:spcAft>
+                <a:spcPts val="200"/>
+              </a:spcAft>
               <a:defRPr sz="4000" b="1">
                 <a:solidFill>
                   <a:srgbClr val="667EEA"/>
@@ -6956,6 +7116,7 @@
               </a:defRPr>
             </a:pPr>
             <a:r>
+              <a:rPr/>
               <a:t>🔄 Adım 6: Geri Bildirim ve İyileştirme</a:t>
             </a:r>
           </a:p>
@@ -6995,7 +7156,7 @@
           <a:noFill/>
         </p:spPr>
         <p:txBody>
-          <a:bodyPr wrap="square">
+          <a:bodyPr wrap="square" tIns="25400" bIns="25400" lIns="63500" rIns="63500">
             <a:spAutoFit/>
           </a:bodyPr>
           <a:lstStyle/>
@@ -7012,6 +7173,24 @@
           <a:p>
             <a:pPr>
               <a:lnSpc>
+                <a:spcPct val="85000"/>
+              </a:lnSpc>
+              <a:spcBef>
+                <a:spcPts val="200"/>
+              </a:spcBef>
+              <a:spcAft>
+                <a:spcPts val="200"/>
+              </a:spcAft>
+              <a:defRPr sz="2000"/>
+            </a:pPr>
+            <a:r>
+              <a:rPr sz="1300"/>
+              <a:t>Test sonuçlarına göre ürünü iyileştirin!</a:t>
+            </a:r>
+          </a:p>
+          <a:p>
+            <a:pPr>
+              <a:lnSpc>
                 <a:spcPct val="90000"/>
               </a:lnSpc>
               <a:spcAft>
@@ -7019,9 +7198,23 @@
               </a:spcAft>
               <a:defRPr sz="2000"/>
             </a:pPr>
-            <a:r>
-              <a:rPr sz="1300"/>
-              <a:t>Test sonuçlarına göre ürünü iyileştirin!</a:t>
+          </a:p>
+          <a:p>
+            <a:pPr>
+              <a:lnSpc>
+                <a:spcPct val="85000"/>
+              </a:lnSpc>
+              <a:spcBef>
+                <a:spcPts val="200"/>
+              </a:spcBef>
+              <a:spcAft>
+                <a:spcPts val="200"/>
+              </a:spcAft>
+              <a:defRPr sz="2000" b="1"/>
+            </a:pPr>
+            <a:r>
+              <a:rPr sz="1300"/>
+              <a:t>✅ İyileştirme Süreci:</a:t>
             </a:r>
           </a:p>
           <a:p>
@@ -7038,305 +7231,327 @@
           <a:p>
             <a:pPr>
               <a:lnSpc>
+                <a:spcPct val="85000"/>
+              </a:lnSpc>
+              <a:spcBef>
+                <a:spcPts val="200"/>
+              </a:spcBef>
+              <a:spcAft>
+                <a:spcPts val="200"/>
+              </a:spcAft>
+              <a:defRPr sz="2000"/>
+            </a:pPr>
+            <a:r>
+              <a:rPr sz="1300"/>
+              <a:t>1️⃣ Geri Bildirimleri Topla:</a:t>
+            </a:r>
+          </a:p>
+          <a:p>
+            <a:pPr lvl="1">
+              <a:lnSpc>
+                <a:spcPct val="85000"/>
+              </a:lnSpc>
+              <a:spcBef>
+                <a:spcPts val="200"/>
+              </a:spcBef>
+              <a:spcAft>
+                <a:spcPts val="200"/>
+              </a:spcAft>
+              <a:defRPr sz="1800"/>
+            </a:pPr>
+            <a:r>
+              <a:rPr sz="1300"/>
+              <a:t>    • Kullanıcıların yorumları</a:t>
+            </a:r>
+          </a:p>
+          <a:p>
+            <a:pPr lvl="1">
+              <a:lnSpc>
+                <a:spcPct val="85000"/>
+              </a:lnSpc>
+              <a:spcBef>
+                <a:spcPts val="200"/>
+              </a:spcBef>
+              <a:spcAft>
+                <a:spcPts val="200"/>
+              </a:spcAft>
+              <a:defRPr sz="1800"/>
+            </a:pPr>
+            <a:r>
+              <a:rPr sz="1300"/>
+              <a:t>    • Test sırasındaki gözlemler</a:t>
+            </a:r>
+          </a:p>
+          <a:p>
+            <a:pPr lvl="1">
+              <a:lnSpc>
+                <a:spcPct val="85000"/>
+              </a:lnSpc>
+              <a:spcBef>
+                <a:spcPts val="200"/>
+              </a:spcBef>
+              <a:spcAft>
+                <a:spcPts val="200"/>
+              </a:spcAft>
+              <a:defRPr sz="1800"/>
+            </a:pPr>
+            <a:r>
+              <a:rPr sz="1300"/>
+              <a:t>    • Sorunlar ve öneriler</a:t>
+            </a:r>
+          </a:p>
+          <a:p>
+            <a:pPr>
+              <a:lnSpc>
                 <a:spcPct val="90000"/>
               </a:lnSpc>
               <a:spcAft>
                 <a:spcPts val="300"/>
               </a:spcAft>
+              <a:defRPr sz="2000"/>
+            </a:pPr>
+          </a:p>
+          <a:p>
+            <a:pPr>
+              <a:lnSpc>
+                <a:spcPct val="85000"/>
+              </a:lnSpc>
+              <a:spcBef>
+                <a:spcPts val="200"/>
+              </a:spcBef>
+              <a:spcAft>
+                <a:spcPts val="200"/>
+              </a:spcAft>
+              <a:defRPr sz="2000"/>
+            </a:pPr>
+            <a:r>
+              <a:rPr sz="1300"/>
+              <a:t>2️⃣ Önceliklendirme:</a:t>
+            </a:r>
+          </a:p>
+          <a:p>
+            <a:pPr lvl="1">
+              <a:lnSpc>
+                <a:spcPct val="85000"/>
+              </a:lnSpc>
+              <a:spcBef>
+                <a:spcPts val="200"/>
+              </a:spcBef>
+              <a:spcAft>
+                <a:spcPts val="200"/>
+              </a:spcAft>
+              <a:defRPr sz="1800"/>
+            </a:pPr>
+            <a:r>
+              <a:rPr sz="1300"/>
+              <a:t>    • Hangileri acil?</a:t>
+            </a:r>
+          </a:p>
+          <a:p>
+            <a:pPr lvl="1">
+              <a:lnSpc>
+                <a:spcPct val="85000"/>
+              </a:lnSpc>
+              <a:spcBef>
+                <a:spcPts val="200"/>
+              </a:spcBef>
+              <a:spcAft>
+                <a:spcPts val="200"/>
+              </a:spcAft>
+              <a:defRPr sz="1800"/>
+            </a:pPr>
+            <a:r>
+              <a:rPr sz="1300"/>
+              <a:t>    • Hangileri önemli ama acil değil?</a:t>
+            </a:r>
+          </a:p>
+          <a:p>
+            <a:pPr lvl="1">
+              <a:lnSpc>
+                <a:spcPct val="85000"/>
+              </a:lnSpc>
+              <a:spcBef>
+                <a:spcPts val="200"/>
+              </a:spcBef>
+              <a:spcAft>
+                <a:spcPts val="200"/>
+              </a:spcAft>
+              <a:defRPr sz="1800"/>
+            </a:pPr>
+            <a:r>
+              <a:rPr sz="1300"/>
+              <a:t>    • Hangileri ileride yapılabilir?</a:t>
+            </a:r>
+          </a:p>
+          <a:p>
+            <a:pPr>
+              <a:lnSpc>
+                <a:spcPct val="90000"/>
+              </a:lnSpc>
+              <a:spcAft>
+                <a:spcPts val="300"/>
+              </a:spcAft>
+              <a:defRPr sz="2000"/>
+            </a:pPr>
+          </a:p>
+          <a:p>
+            <a:pPr>
+              <a:lnSpc>
+                <a:spcPct val="85000"/>
+              </a:lnSpc>
+              <a:spcBef>
+                <a:spcPts val="200"/>
+              </a:spcBef>
+              <a:spcAft>
+                <a:spcPts val="200"/>
+              </a:spcAft>
+              <a:defRPr sz="2000"/>
+            </a:pPr>
+            <a:r>
+              <a:rPr sz="1300"/>
+              <a:t>3️⃣ Değişiklikleri Uygula:</a:t>
+            </a:r>
+          </a:p>
+          <a:p>
+            <a:pPr lvl="1">
+              <a:lnSpc>
+                <a:spcPct val="85000"/>
+              </a:lnSpc>
+              <a:spcBef>
+                <a:spcPts val="200"/>
+              </a:spcBef>
+              <a:spcAft>
+                <a:spcPts val="200"/>
+              </a:spcAft>
+              <a:defRPr sz="1800"/>
+            </a:pPr>
+            <a:r>
+              <a:rPr sz="1300"/>
+              <a:t>    • Tasarımı düzelt</a:t>
+            </a:r>
+          </a:p>
+          <a:p>
+            <a:pPr lvl="1">
+              <a:lnSpc>
+                <a:spcPct val="85000"/>
+              </a:lnSpc>
+              <a:spcBef>
+                <a:spcPts val="200"/>
+              </a:spcBef>
+              <a:spcAft>
+                <a:spcPts val="200"/>
+              </a:spcAft>
+              <a:defRPr sz="1800"/>
+            </a:pPr>
+            <a:r>
+              <a:rPr sz="1300"/>
+              <a:t>    • Eksik özellikleri ekle</a:t>
+            </a:r>
+          </a:p>
+          <a:p>
+            <a:pPr lvl="1">
+              <a:lnSpc>
+                <a:spcPct val="85000"/>
+              </a:lnSpc>
+              <a:spcBef>
+                <a:spcPts val="200"/>
+              </a:spcBef>
+              <a:spcAft>
+                <a:spcPts val="200"/>
+              </a:spcAft>
+              <a:defRPr sz="1800"/>
+            </a:pPr>
+            <a:r>
+              <a:rPr sz="1300"/>
+              <a:t>    • Hataları düzelt</a:t>
+            </a:r>
+          </a:p>
+          <a:p>
+            <a:pPr>
+              <a:lnSpc>
+                <a:spcPct val="90000"/>
+              </a:lnSpc>
+              <a:spcAft>
+                <a:spcPts val="300"/>
+              </a:spcAft>
+              <a:defRPr sz="2000"/>
+            </a:pPr>
+          </a:p>
+          <a:p>
+            <a:pPr>
+              <a:lnSpc>
+                <a:spcPct val="85000"/>
+              </a:lnSpc>
+              <a:spcBef>
+                <a:spcPts val="200"/>
+              </a:spcBef>
+              <a:spcAft>
+                <a:spcPts val="200"/>
+              </a:spcAft>
+              <a:defRPr sz="2000"/>
+            </a:pPr>
+            <a:r>
+              <a:rPr sz="1300"/>
+              <a:t>4️⃣ Tekrar Test Et:</a:t>
+            </a:r>
+          </a:p>
+          <a:p>
+            <a:pPr lvl="1">
+              <a:lnSpc>
+                <a:spcPct val="85000"/>
+              </a:lnSpc>
+              <a:spcBef>
+                <a:spcPts val="200"/>
+              </a:spcBef>
+              <a:spcAft>
+                <a:spcPts val="200"/>
+              </a:spcAft>
+              <a:defRPr sz="1800"/>
+            </a:pPr>
+            <a:r>
+              <a:rPr sz="1300"/>
+              <a:t>    • İyileştirmeler işe yaradı mı?</a:t>
+            </a:r>
+          </a:p>
+          <a:p>
+            <a:pPr>
+              <a:lnSpc>
+                <a:spcPct val="90000"/>
+              </a:lnSpc>
+              <a:spcAft>
+                <a:spcPts val="300"/>
+              </a:spcAft>
+              <a:defRPr sz="2000"/>
+            </a:pPr>
+          </a:p>
+          <a:p>
+            <a:pPr>
+              <a:lnSpc>
+                <a:spcPct val="85000"/>
+              </a:lnSpc>
+              <a:spcBef>
+                <a:spcPts val="200"/>
+              </a:spcBef>
+              <a:spcAft>
+                <a:spcPts val="200"/>
+              </a:spcAft>
               <a:defRPr sz="2000" b="1"/>
             </a:pPr>
             <a:r>
               <a:rPr sz="1300"/>
-              <a:t>✅ İyileştirme Süreci:</a:t>
-            </a:r>
-          </a:p>
-          <a:p>
-            <a:pPr>
-              <a:lnSpc>
-                <a:spcPct val="90000"/>
-              </a:lnSpc>
-              <a:spcAft>
-                <a:spcPts val="300"/>
-              </a:spcAft>
-              <a:defRPr sz="2000"/>
-            </a:pPr>
-          </a:p>
-          <a:p>
-            <a:pPr>
-              <a:lnSpc>
-                <a:spcPct val="90000"/>
-              </a:lnSpc>
-              <a:spcAft>
-                <a:spcPts val="300"/>
-              </a:spcAft>
-              <a:defRPr sz="2000"/>
-            </a:pPr>
-            <a:r>
-              <a:rPr sz="1300"/>
-              <a:t>1️⃣ Geri Bildirimleri Topla:</a:t>
-            </a:r>
-          </a:p>
-          <a:p>
-            <a:pPr lvl="1">
-              <a:lnSpc>
-                <a:spcPct val="90000"/>
-              </a:lnSpc>
-              <a:spcAft>
-                <a:spcPts val="300"/>
-              </a:spcAft>
-              <a:defRPr sz="1800"/>
-            </a:pPr>
-            <a:r>
-              <a:rPr sz="1300"/>
-              <a:t>    • Kullanıcıların yorumları</a:t>
-            </a:r>
-          </a:p>
-          <a:p>
-            <a:pPr lvl="1">
-              <a:lnSpc>
-                <a:spcPct val="90000"/>
-              </a:lnSpc>
-              <a:spcAft>
-                <a:spcPts val="300"/>
-              </a:spcAft>
-              <a:defRPr sz="1800"/>
-            </a:pPr>
-            <a:r>
-              <a:rPr sz="1300"/>
-              <a:t>    • Test sırasındaki gözlemler</a:t>
-            </a:r>
-          </a:p>
-          <a:p>
-            <a:pPr lvl="1">
-              <a:lnSpc>
-                <a:spcPct val="90000"/>
-              </a:lnSpc>
-              <a:spcAft>
-                <a:spcPts val="300"/>
-              </a:spcAft>
-              <a:defRPr sz="1800"/>
-            </a:pPr>
-            <a:r>
-              <a:rPr sz="1300"/>
-              <a:t>    • Sorunlar ve öneriler</a:t>
-            </a:r>
-          </a:p>
-          <a:p>
-            <a:pPr>
-              <a:lnSpc>
-                <a:spcPct val="90000"/>
-              </a:lnSpc>
-              <a:spcAft>
-                <a:spcPts val="300"/>
-              </a:spcAft>
-              <a:defRPr sz="2000"/>
-            </a:pPr>
-          </a:p>
-          <a:p>
-            <a:pPr>
-              <a:lnSpc>
-                <a:spcPct val="90000"/>
-              </a:lnSpc>
-              <a:spcAft>
-                <a:spcPts val="300"/>
-              </a:spcAft>
-              <a:defRPr sz="2000"/>
-            </a:pPr>
-            <a:r>
-              <a:rPr sz="1300"/>
-              <a:t>2️⃣ Önceliklendirme:</a:t>
-            </a:r>
-          </a:p>
-          <a:p>
-            <a:pPr lvl="1">
-              <a:lnSpc>
-                <a:spcPct val="90000"/>
-              </a:lnSpc>
-              <a:spcAft>
-                <a:spcPts val="300"/>
-              </a:spcAft>
-              <a:defRPr sz="1800"/>
-            </a:pPr>
-            <a:r>
-              <a:rPr sz="1300"/>
-              <a:t>    • Hangileri acil?</a:t>
-            </a:r>
-          </a:p>
-          <a:p>
-            <a:pPr lvl="1">
-              <a:lnSpc>
-                <a:spcPct val="90000"/>
-              </a:lnSpc>
-              <a:spcAft>
-                <a:spcPts val="300"/>
-              </a:spcAft>
-              <a:defRPr sz="1800"/>
-            </a:pPr>
-            <a:r>
-              <a:rPr sz="1300"/>
-              <a:t>    • Hangileri önemli ama acil değil?</a:t>
-            </a:r>
-          </a:p>
-          <a:p>
-            <a:pPr lvl="1">
-              <a:lnSpc>
-                <a:spcPct val="90000"/>
-              </a:lnSpc>
-              <a:spcAft>
-                <a:spcPts val="300"/>
-              </a:spcAft>
-              <a:defRPr sz="1800"/>
-            </a:pPr>
-            <a:r>
-              <a:rPr sz="1300"/>
-              <a:t>    • Hangileri ileride yapılabilir?</a:t>
-            </a:r>
-          </a:p>
-          <a:p>
-            <a:pPr>
-              <a:lnSpc>
-                <a:spcPct val="90000"/>
-              </a:lnSpc>
-              <a:spcAft>
-                <a:spcPts val="300"/>
-              </a:spcAft>
-              <a:defRPr sz="2000"/>
-            </a:pPr>
-          </a:p>
-          <a:p>
-            <a:pPr>
-              <a:lnSpc>
-                <a:spcPct val="90000"/>
-              </a:lnSpc>
-              <a:spcAft>
-                <a:spcPts val="300"/>
-              </a:spcAft>
-              <a:defRPr sz="2000"/>
-            </a:pPr>
-            <a:r>
-              <a:rPr sz="1300"/>
-              <a:t>3️⃣ Değişiklikleri Uygula:</a:t>
-            </a:r>
-          </a:p>
-          <a:p>
-            <a:pPr lvl="1">
-              <a:lnSpc>
-                <a:spcPct val="90000"/>
-              </a:lnSpc>
-              <a:spcAft>
-                <a:spcPts val="300"/>
-              </a:spcAft>
-              <a:defRPr sz="1800"/>
-            </a:pPr>
-            <a:r>
-              <a:rPr sz="1300"/>
-              <a:t>    • Tasarımı düzelt</a:t>
-            </a:r>
-          </a:p>
-          <a:p>
-            <a:pPr lvl="1">
-              <a:lnSpc>
-                <a:spcPct val="90000"/>
-              </a:lnSpc>
-              <a:spcAft>
-                <a:spcPts val="300"/>
-              </a:spcAft>
-              <a:defRPr sz="1800"/>
-            </a:pPr>
-            <a:r>
-              <a:rPr sz="1300"/>
-              <a:t>    • Eksik özellikleri ekle</a:t>
-            </a:r>
-          </a:p>
-          <a:p>
-            <a:pPr lvl="1">
-              <a:lnSpc>
-                <a:spcPct val="90000"/>
-              </a:lnSpc>
-              <a:spcAft>
-                <a:spcPts val="300"/>
-              </a:spcAft>
-              <a:defRPr sz="1800"/>
-            </a:pPr>
-            <a:r>
-              <a:rPr sz="1300"/>
-              <a:t>    • Hataları düzelt</a:t>
-            </a:r>
-          </a:p>
-          <a:p>
-            <a:pPr>
-              <a:lnSpc>
-                <a:spcPct val="90000"/>
-              </a:lnSpc>
-              <a:spcAft>
-                <a:spcPts val="300"/>
-              </a:spcAft>
-              <a:defRPr sz="2000"/>
-            </a:pPr>
-          </a:p>
-          <a:p>
-            <a:pPr>
-              <a:lnSpc>
-                <a:spcPct val="90000"/>
-              </a:lnSpc>
-              <a:spcAft>
-                <a:spcPts val="300"/>
-              </a:spcAft>
-              <a:defRPr sz="2000"/>
-            </a:pPr>
-            <a:r>
-              <a:rPr sz="1300"/>
-              <a:t>4️⃣ Tekrar Test Et:</a:t>
-            </a:r>
-          </a:p>
-          <a:p>
-            <a:pPr lvl="1">
-              <a:lnSpc>
-                <a:spcPct val="90000"/>
-              </a:lnSpc>
-              <a:spcAft>
-                <a:spcPts val="300"/>
-              </a:spcAft>
-              <a:defRPr sz="1800"/>
-            </a:pPr>
-            <a:r>
-              <a:rPr sz="1300"/>
-              <a:t>    • İyileştirmeler işe yaradı mı?</a:t>
-            </a:r>
-          </a:p>
-          <a:p>
-            <a:pPr>
-              <a:lnSpc>
-                <a:spcPct val="90000"/>
-              </a:lnSpc>
-              <a:spcAft>
-                <a:spcPts val="300"/>
-              </a:spcAft>
-              <a:defRPr sz="2000"/>
-            </a:pPr>
-          </a:p>
-          <a:p>
-            <a:pPr>
-              <a:lnSpc>
-                <a:spcPct val="90000"/>
-              </a:lnSpc>
-              <a:spcAft>
-                <a:spcPts val="300"/>
-              </a:spcAft>
-              <a:defRPr sz="2000" b="1"/>
-            </a:pPr>
-            <a:r>
-              <a:rPr sz="1300"/>
               <a:t>💡 Bu döngü defalarca tekrarlanabilir!</a:t>
             </a:r>
           </a:p>
           <a:p>
             <a:pPr>
               <a:lnSpc>
-                <a:spcPct val="90000"/>
-              </a:lnSpc>
-              <a:spcAft>
-                <a:spcPts val="300"/>
+                <a:spcPct val="85000"/>
+              </a:lnSpc>
+              <a:spcBef>
+                <a:spcPts val="200"/>
+              </a:spcBef>
+              <a:spcAft>
+                <a:spcPts val="200"/>
               </a:spcAft>
               <a:defRPr sz="2000"/>
             </a:pPr>
@@ -7377,10 +7592,19 @@
         </p:nvSpPr>
         <p:spPr/>
         <p:txBody>
-          <a:bodyPr wrap="square"/>
+          <a:bodyPr wrap="square" tIns="25400" bIns="25400" lIns="63500" rIns="63500"/>
           <a:lstStyle/>
           <a:p>
             <a:pPr>
+              <a:lnSpc>
+                <a:spcPct val="85000"/>
+              </a:lnSpc>
+              <a:spcBef>
+                <a:spcPts val="200"/>
+              </a:spcBef>
+              <a:spcAft>
+                <a:spcPts val="200"/>
+              </a:spcAft>
               <a:defRPr sz="4000" b="1">
                 <a:solidFill>
                   <a:srgbClr val="667EEA"/>
@@ -7388,6 +7612,7 @@
               </a:defRPr>
             </a:pPr>
             <a:r>
+              <a:rPr/>
               <a:t>🚀 Adım 7: Yayınlama ve Dağıtım</a:t>
             </a:r>
           </a:p>
@@ -7427,7 +7652,7 @@
           <a:noFill/>
         </p:spPr>
         <p:txBody>
-          <a:bodyPr wrap="square">
+          <a:bodyPr wrap="square" tIns="25400" bIns="25400" lIns="63500" rIns="63500">
             <a:spAutoFit/>
           </a:bodyPr>
           <a:lstStyle/>
@@ -7444,6 +7669,24 @@
           <a:p>
             <a:pPr>
               <a:lnSpc>
+                <a:spcPct val="85000"/>
+              </a:lnSpc>
+              <a:spcBef>
+                <a:spcPts val="200"/>
+              </a:spcBef>
+              <a:spcAft>
+                <a:spcPts val="200"/>
+              </a:spcAft>
+              <a:defRPr sz="2000"/>
+            </a:pPr>
+            <a:r>
+              <a:rPr sz="1300"/>
+              <a:t>Ürün hazır! Kullanıcılara nasıl ulaştırırız?</a:t>
+            </a:r>
+          </a:p>
+          <a:p>
+            <a:pPr>
+              <a:lnSpc>
                 <a:spcPct val="90000"/>
               </a:lnSpc>
               <a:spcAft>
@@ -7451,9 +7694,23 @@
               </a:spcAft>
               <a:defRPr sz="2000"/>
             </a:pPr>
-            <a:r>
-              <a:rPr sz="1300"/>
-              <a:t>Ürün hazır! Kullanıcılara nasıl ulaştırırız?</a:t>
+          </a:p>
+          <a:p>
+            <a:pPr>
+              <a:lnSpc>
+                <a:spcPct val="85000"/>
+              </a:lnSpc>
+              <a:spcBef>
+                <a:spcPts val="200"/>
+              </a:spcBef>
+              <a:spcAft>
+                <a:spcPts val="200"/>
+              </a:spcAft>
+              <a:defRPr sz="2000" b="1"/>
+            </a:pPr>
+            <a:r>
+              <a:rPr sz="1300"/>
+              <a:t>✅ Yayınlama Platformları:</a:t>
             </a:r>
           </a:p>
           <a:p>
@@ -7470,16 +7727,286 @@
           <a:p>
             <a:pPr>
               <a:lnSpc>
+                <a:spcPct val="85000"/>
+              </a:lnSpc>
+              <a:spcBef>
+                <a:spcPts val="200"/>
+              </a:spcBef>
+              <a:spcAft>
+                <a:spcPts val="200"/>
+              </a:spcAft>
+              <a:defRPr sz="2000"/>
+            </a:pPr>
+            <a:r>
+              <a:rPr sz="1300"/>
+              <a:t>📱 Mobil Uygulamalar:</a:t>
+            </a:r>
+          </a:p>
+          <a:p>
+            <a:pPr lvl="1">
+              <a:lnSpc>
+                <a:spcPct val="85000"/>
+              </a:lnSpc>
+              <a:spcBef>
+                <a:spcPts val="200"/>
+              </a:spcBef>
+              <a:spcAft>
+                <a:spcPts val="200"/>
+              </a:spcAft>
+              <a:defRPr sz="1800"/>
+            </a:pPr>
+            <a:r>
+              <a:rPr sz="1300"/>
+              <a:t>    • Google Play Store (Android)</a:t>
+            </a:r>
+          </a:p>
+          <a:p>
+            <a:pPr lvl="1">
+              <a:lnSpc>
+                <a:spcPct val="85000"/>
+              </a:lnSpc>
+              <a:spcBef>
+                <a:spcPts val="200"/>
+              </a:spcBef>
+              <a:spcAft>
+                <a:spcPts val="200"/>
+              </a:spcAft>
+              <a:defRPr sz="1800"/>
+            </a:pPr>
+            <a:r>
+              <a:rPr sz="1300"/>
+              <a:t>    • App Store (iOS - iPhone/iPad)</a:t>
+            </a:r>
+          </a:p>
+          <a:p>
+            <a:pPr>
+              <a:lnSpc>
                 <a:spcPct val="90000"/>
               </a:lnSpc>
               <a:spcAft>
                 <a:spcPts val="300"/>
               </a:spcAft>
+              <a:defRPr sz="2000"/>
+            </a:pPr>
+          </a:p>
+          <a:p>
+            <a:pPr>
+              <a:lnSpc>
+                <a:spcPct val="85000"/>
+              </a:lnSpc>
+              <a:spcBef>
+                <a:spcPts val="200"/>
+              </a:spcBef>
+              <a:spcAft>
+                <a:spcPts val="200"/>
+              </a:spcAft>
+              <a:defRPr sz="2000"/>
+            </a:pPr>
+            <a:r>
+              <a:rPr sz="1300"/>
+              <a:t>🌐 Web Uygulamaları:</a:t>
+            </a:r>
+          </a:p>
+          <a:p>
+            <a:pPr lvl="1">
+              <a:lnSpc>
+                <a:spcPct val="85000"/>
+              </a:lnSpc>
+              <a:spcBef>
+                <a:spcPts val="200"/>
+              </a:spcBef>
+              <a:spcAft>
+                <a:spcPts val="200"/>
+              </a:spcAft>
+              <a:defRPr sz="1800"/>
+            </a:pPr>
+            <a:r>
+              <a:rPr sz="1300"/>
+              <a:t>    • Web sunucusuna yükleme</a:t>
+            </a:r>
+          </a:p>
+          <a:p>
+            <a:pPr lvl="1">
+              <a:lnSpc>
+                <a:spcPct val="85000"/>
+              </a:lnSpc>
+              <a:spcBef>
+                <a:spcPts val="200"/>
+              </a:spcBef>
+              <a:spcAft>
+                <a:spcPts val="200"/>
+              </a:spcAft>
+              <a:defRPr sz="1800"/>
+            </a:pPr>
+            <a:r>
+              <a:rPr sz="1300"/>
+              <a:t>    • Domain (alan adı) satın alma</a:t>
+            </a:r>
+          </a:p>
+          <a:p>
+            <a:pPr>
+              <a:lnSpc>
+                <a:spcPct val="90000"/>
+              </a:lnSpc>
+              <a:spcAft>
+                <a:spcPts val="300"/>
+              </a:spcAft>
+              <a:defRPr sz="2000"/>
+            </a:pPr>
+          </a:p>
+          <a:p>
+            <a:pPr>
+              <a:lnSpc>
+                <a:spcPct val="85000"/>
+              </a:lnSpc>
+              <a:spcBef>
+                <a:spcPts val="200"/>
+              </a:spcBef>
+              <a:spcAft>
+                <a:spcPts val="200"/>
+              </a:spcAft>
+              <a:defRPr sz="2000"/>
+            </a:pPr>
+            <a:r>
+              <a:rPr sz="1300"/>
+              <a:t>🎮 Oyunlar:</a:t>
+            </a:r>
+          </a:p>
+          <a:p>
+            <a:pPr lvl="1">
+              <a:lnSpc>
+                <a:spcPct val="85000"/>
+              </a:lnSpc>
+              <a:spcBef>
+                <a:spcPts val="200"/>
+              </a:spcBef>
+              <a:spcAft>
+                <a:spcPts val="200"/>
+              </a:spcAft>
+              <a:defRPr sz="1800"/>
+            </a:pPr>
+            <a:r>
+              <a:rPr sz="1300"/>
+              <a:t>    • Steam, Epic Games Store</a:t>
+            </a:r>
+          </a:p>
+          <a:p>
+            <a:pPr lvl="1">
+              <a:lnSpc>
+                <a:spcPct val="85000"/>
+              </a:lnSpc>
+              <a:spcBef>
+                <a:spcPts val="200"/>
+              </a:spcBef>
+              <a:spcAft>
+                <a:spcPts val="200"/>
+              </a:spcAft>
+              <a:defRPr sz="1800"/>
+            </a:pPr>
+            <a:r>
+              <a:rPr sz="1300"/>
+              <a:t>    • Scratch Community (basit oyunlar)</a:t>
+            </a:r>
+          </a:p>
+          <a:p>
+            <a:pPr>
+              <a:lnSpc>
+                <a:spcPct val="90000"/>
+              </a:lnSpc>
+              <a:spcAft>
+                <a:spcPts val="300"/>
+              </a:spcAft>
+              <a:defRPr sz="2000"/>
+            </a:pPr>
+          </a:p>
+          <a:p>
+            <a:pPr>
+              <a:lnSpc>
+                <a:spcPct val="85000"/>
+              </a:lnSpc>
+              <a:spcBef>
+                <a:spcPts val="200"/>
+              </a:spcBef>
+              <a:spcAft>
+                <a:spcPts val="200"/>
+              </a:spcAft>
               <a:defRPr sz="2000" b="1"/>
             </a:pPr>
             <a:r>
               <a:rPr sz="1300"/>
-              <a:t>✅ Yayınlama Platformları:</a:t>
+              <a:t>📌 Yayınlama Öncesi Kontroller:</a:t>
+            </a:r>
+          </a:p>
+          <a:p>
+            <a:pPr lvl="1">
+              <a:lnSpc>
+                <a:spcPct val="85000"/>
+              </a:lnSpc>
+              <a:spcBef>
+                <a:spcPts val="200"/>
+              </a:spcBef>
+              <a:spcAft>
+                <a:spcPts val="200"/>
+              </a:spcAft>
+              <a:defRPr sz="1800"/>
+            </a:pPr>
+            <a:r>
+              <a:rPr sz="1300"/>
+              <a:t>    • Tüm özellikler çalışıyor mu?</a:t>
+            </a:r>
+          </a:p>
+          <a:p>
+            <a:pPr lvl="1">
+              <a:lnSpc>
+                <a:spcPct val="85000"/>
+              </a:lnSpc>
+              <a:spcBef>
+                <a:spcPts val="200"/>
+              </a:spcBef>
+              <a:spcAft>
+                <a:spcPts val="200"/>
+              </a:spcAft>
+              <a:defRPr sz="1800"/>
+            </a:pPr>
+            <a:r>
+              <a:rPr sz="1300"/>
+              <a:t>    • Hatalar düzeltildi mi?</a:t>
+            </a:r>
+          </a:p>
+          <a:p>
+            <a:pPr lvl="1">
+              <a:lnSpc>
+                <a:spcPct val="85000"/>
+              </a:lnSpc>
+              <a:spcBef>
+                <a:spcPts val="200"/>
+              </a:spcBef>
+              <a:spcAft>
+                <a:spcPts val="200"/>
+              </a:spcAft>
+              <a:defRPr sz="1800"/>
+            </a:pPr>
+            <a:r>
+              <a:rPr sz="1300"/>
+              <a:t>    • Güvenlik kontrolleri yapıldı mı?</a:t>
+            </a:r>
+          </a:p>
+          <a:p>
+            <a:pPr lvl="1">
+              <a:lnSpc>
+                <a:spcPct val="85000"/>
+              </a:lnSpc>
+              <a:spcBef>
+                <a:spcPts val="200"/>
+              </a:spcBef>
+              <a:spcAft>
+                <a:spcPts val="200"/>
+              </a:spcAft>
+              <a:defRPr sz="1800"/>
+            </a:pPr>
+            <a:r>
+              <a:rPr sz="1300"/>
+              <a:t>    • Kullanım kılavuzu hazır mı?</a:t>
             </a:r>
           </a:p>
           <a:p>
@@ -7496,264 +8023,13 @@
           <a:p>
             <a:pPr>
               <a:lnSpc>
-                <a:spcPct val="90000"/>
-              </a:lnSpc>
-              <a:spcAft>
-                <a:spcPts val="300"/>
-              </a:spcAft>
-              <a:defRPr sz="2000"/>
-            </a:pPr>
-            <a:r>
-              <a:rPr sz="1300"/>
-              <a:t>📱 Mobil Uygulamalar:</a:t>
-            </a:r>
-          </a:p>
-          <a:p>
-            <a:pPr lvl="1">
-              <a:lnSpc>
-                <a:spcPct val="90000"/>
-              </a:lnSpc>
-              <a:spcAft>
-                <a:spcPts val="300"/>
-              </a:spcAft>
-              <a:defRPr sz="1800"/>
-            </a:pPr>
-            <a:r>
-              <a:rPr sz="1300"/>
-              <a:t>    • Google Play Store (Android)</a:t>
-            </a:r>
-          </a:p>
-          <a:p>
-            <a:pPr lvl="1">
-              <a:lnSpc>
-                <a:spcPct val="90000"/>
-              </a:lnSpc>
-              <a:spcAft>
-                <a:spcPts val="300"/>
-              </a:spcAft>
-              <a:defRPr sz="1800"/>
-            </a:pPr>
-            <a:r>
-              <a:rPr sz="1300"/>
-              <a:t>    • App Store (iOS - iPhone/iPad)</a:t>
-            </a:r>
-          </a:p>
-          <a:p>
-            <a:pPr>
-              <a:lnSpc>
-                <a:spcPct val="90000"/>
-              </a:lnSpc>
-              <a:spcAft>
-                <a:spcPts val="300"/>
-              </a:spcAft>
-              <a:defRPr sz="2000"/>
-            </a:pPr>
-          </a:p>
-          <a:p>
-            <a:pPr>
-              <a:lnSpc>
-                <a:spcPct val="90000"/>
-              </a:lnSpc>
-              <a:spcAft>
-                <a:spcPts val="300"/>
-              </a:spcAft>
-              <a:defRPr sz="2000"/>
-            </a:pPr>
-            <a:r>
-              <a:rPr sz="1300"/>
-              <a:t>🌐 Web Uygulamaları:</a:t>
-            </a:r>
-          </a:p>
-          <a:p>
-            <a:pPr lvl="1">
-              <a:lnSpc>
-                <a:spcPct val="90000"/>
-              </a:lnSpc>
-              <a:spcAft>
-                <a:spcPts val="300"/>
-              </a:spcAft>
-              <a:defRPr sz="1800"/>
-            </a:pPr>
-            <a:r>
-              <a:rPr sz="1300"/>
-              <a:t>    • Web sunucusuna yükleme</a:t>
-            </a:r>
-          </a:p>
-          <a:p>
-            <a:pPr lvl="1">
-              <a:lnSpc>
-                <a:spcPct val="90000"/>
-              </a:lnSpc>
-              <a:spcAft>
-                <a:spcPts val="300"/>
-              </a:spcAft>
-              <a:defRPr sz="1800"/>
-            </a:pPr>
-            <a:r>
-              <a:rPr sz="1300"/>
-              <a:t>    • Domain (alan adı) satın alma</a:t>
-            </a:r>
-          </a:p>
-          <a:p>
-            <a:pPr>
-              <a:lnSpc>
-                <a:spcPct val="90000"/>
-              </a:lnSpc>
-              <a:spcAft>
-                <a:spcPts val="300"/>
-              </a:spcAft>
-              <a:defRPr sz="2000"/>
-            </a:pPr>
-          </a:p>
-          <a:p>
-            <a:pPr>
-              <a:lnSpc>
-                <a:spcPct val="90000"/>
-              </a:lnSpc>
-              <a:spcAft>
-                <a:spcPts val="300"/>
-              </a:spcAft>
-              <a:defRPr sz="2000"/>
-            </a:pPr>
-            <a:r>
-              <a:rPr sz="1300"/>
-              <a:t>🎮 Oyunlar:</a:t>
-            </a:r>
-          </a:p>
-          <a:p>
-            <a:pPr lvl="1">
-              <a:lnSpc>
-                <a:spcPct val="90000"/>
-              </a:lnSpc>
-              <a:spcAft>
-                <a:spcPts val="300"/>
-              </a:spcAft>
-              <a:defRPr sz="1800"/>
-            </a:pPr>
-            <a:r>
-              <a:rPr sz="1300"/>
-              <a:t>    • Steam, Epic Games Store</a:t>
-            </a:r>
-          </a:p>
-          <a:p>
-            <a:pPr lvl="1">
-              <a:lnSpc>
-                <a:spcPct val="90000"/>
-              </a:lnSpc>
-              <a:spcAft>
-                <a:spcPts val="300"/>
-              </a:spcAft>
-              <a:defRPr sz="1800"/>
-            </a:pPr>
-            <a:r>
-              <a:rPr sz="1300"/>
-              <a:t>    • Scratch Community (basit oyunlar)</a:t>
-            </a:r>
-          </a:p>
-          <a:p>
-            <a:pPr>
-              <a:lnSpc>
-                <a:spcPct val="90000"/>
-              </a:lnSpc>
-              <a:spcAft>
-                <a:spcPts val="300"/>
-              </a:spcAft>
-              <a:defRPr sz="2000"/>
-            </a:pPr>
-          </a:p>
-          <a:p>
-            <a:pPr>
-              <a:lnSpc>
-                <a:spcPct val="90000"/>
-              </a:lnSpc>
-              <a:spcAft>
-                <a:spcPts val="300"/>
-              </a:spcAft>
-              <a:defRPr sz="2000" b="1"/>
-            </a:pPr>
-            <a:r>
-              <a:rPr sz="1300"/>
-              <a:t>📌 Yayınlama Öncesi Kontroller:</a:t>
-            </a:r>
-          </a:p>
-          <a:p>
-            <a:pPr lvl="1">
-              <a:lnSpc>
-                <a:spcPct val="90000"/>
-              </a:lnSpc>
-              <a:spcAft>
-                <a:spcPts val="300"/>
-              </a:spcAft>
-              <a:defRPr sz="1800"/>
-            </a:pPr>
-            <a:r>
-              <a:rPr sz="1300"/>
-              <a:t>    • Tüm özellikler çalışıyor mu?</a:t>
-            </a:r>
-          </a:p>
-          <a:p>
-            <a:pPr lvl="1">
-              <a:lnSpc>
-                <a:spcPct val="90000"/>
-              </a:lnSpc>
-              <a:spcAft>
-                <a:spcPts val="300"/>
-              </a:spcAft>
-              <a:defRPr sz="1800"/>
-            </a:pPr>
-            <a:r>
-              <a:rPr sz="1300"/>
-              <a:t>    • Hatalar düzeltildi mi?</a:t>
-            </a:r>
-          </a:p>
-          <a:p>
-            <a:pPr lvl="1">
-              <a:lnSpc>
-                <a:spcPct val="90000"/>
-              </a:lnSpc>
-              <a:spcAft>
-                <a:spcPts val="300"/>
-              </a:spcAft>
-              <a:defRPr sz="1800"/>
-            </a:pPr>
-            <a:r>
-              <a:rPr sz="1300"/>
-              <a:t>    • Güvenlik kontrolleri yapıldı mı?</a:t>
-            </a:r>
-          </a:p>
-          <a:p>
-            <a:pPr lvl="1">
-              <a:lnSpc>
-                <a:spcPct val="90000"/>
-              </a:lnSpc>
-              <a:spcAft>
-                <a:spcPts val="300"/>
-              </a:spcAft>
-              <a:defRPr sz="1800"/>
-            </a:pPr>
-            <a:r>
-              <a:rPr sz="1300"/>
-              <a:t>    • Kullanım kılavuzu hazır mı?</a:t>
-            </a:r>
-          </a:p>
-          <a:p>
-            <a:pPr>
-              <a:lnSpc>
-                <a:spcPct val="90000"/>
-              </a:lnSpc>
-              <a:spcAft>
-                <a:spcPts val="300"/>
-              </a:spcAft>
-              <a:defRPr sz="2000"/>
-            </a:pPr>
-          </a:p>
-          <a:p>
-            <a:pPr>
-              <a:lnSpc>
-                <a:spcPct val="90000"/>
-              </a:lnSpc>
-              <a:spcAft>
-                <a:spcPts val="300"/>
+                <a:spcPct val="85000"/>
+              </a:lnSpc>
+              <a:spcBef>
+                <a:spcPts val="200"/>
+              </a:spcBef>
+              <a:spcAft>
+                <a:spcPts val="200"/>
               </a:spcAft>
               <a:defRPr sz="2000" b="1"/>
             </a:pPr>
@@ -7794,10 +8070,19 @@
         </p:nvSpPr>
         <p:spPr/>
         <p:txBody>
-          <a:bodyPr wrap="square"/>
+          <a:bodyPr wrap="square" tIns="25400" bIns="25400" lIns="63500" rIns="63500"/>
           <a:lstStyle/>
           <a:p>
             <a:pPr>
+              <a:lnSpc>
+                <a:spcPct val="85000"/>
+              </a:lnSpc>
+              <a:spcBef>
+                <a:spcPts val="200"/>
+              </a:spcBef>
+              <a:spcAft>
+                <a:spcPts val="200"/>
+              </a:spcAft>
               <a:defRPr sz="4000" b="1">
                 <a:solidFill>
                   <a:srgbClr val="667EEA"/>
@@ -7805,6 +8090,7 @@
               </a:defRPr>
             </a:pPr>
             <a:r>
+              <a:rPr/>
               <a:t>🎮 Örnek Proje: Eğlenceli Kelime Oyunu</a:t>
             </a:r>
           </a:p>
@@ -7844,7 +8130,7 @@
           <a:noFill/>
         </p:spPr>
         <p:txBody>
-          <a:bodyPr wrap="square">
+          <a:bodyPr wrap="square" tIns="25400" bIns="25400" lIns="63500" rIns="63500">
             <a:spAutoFit/>
           </a:bodyPr>
           <a:lstStyle/>
@@ -7861,6 +8147,24 @@
           <a:p>
             <a:pPr>
               <a:lnSpc>
+                <a:spcPct val="85000"/>
+              </a:lnSpc>
+              <a:spcBef>
+                <a:spcPts val="200"/>
+              </a:spcBef>
+              <a:spcAft>
+                <a:spcPts val="200"/>
+              </a:spcAft>
+              <a:defRPr sz="2000"/>
+            </a:pPr>
+            <a:r>
+              <a:rPr sz="1300"/>
+              <a:t>Dijital ürün tasarım sürecini örnek ile görelim:</a:t>
+            </a:r>
+          </a:p>
+          <a:p>
+            <a:pPr>
+              <a:lnSpc>
                 <a:spcPct val="90000"/>
               </a:lnSpc>
               <a:spcAft>
@@ -7868,9 +8172,23 @@
               </a:spcAft>
               <a:defRPr sz="2000"/>
             </a:pPr>
-            <a:r>
-              <a:rPr sz="1300"/>
-              <a:t>Dijital ürün tasarım sürecini örnek ile görelim:</a:t>
+          </a:p>
+          <a:p>
+            <a:pPr>
+              <a:lnSpc>
+                <a:spcPct val="85000"/>
+              </a:lnSpc>
+              <a:spcBef>
+                <a:spcPts val="200"/>
+              </a:spcBef>
+              <a:spcAft>
+                <a:spcPts val="200"/>
+              </a:spcAft>
+              <a:defRPr sz="2000"/>
+            </a:pPr>
+            <a:r>
+              <a:rPr sz="1300"/>
+              <a:t>1️⃣ Problem: İngilizce kelime ezberleme sıkıcı</a:t>
             </a:r>
           </a:p>
           <a:p>
@@ -7887,6 +8205,24 @@
           <a:p>
             <a:pPr>
               <a:lnSpc>
+                <a:spcPct val="85000"/>
+              </a:lnSpc>
+              <a:spcBef>
+                <a:spcPts val="200"/>
+              </a:spcBef>
+              <a:spcAft>
+                <a:spcPts val="200"/>
+              </a:spcAft>
+              <a:defRPr sz="2000"/>
+            </a:pPr>
+            <a:r>
+              <a:rPr sz="1300"/>
+              <a:t>2️⃣ Çözüm Fikri: Oyunlaştırılmış kelime öğrenme uygulaması</a:t>
+            </a:r>
+          </a:p>
+          <a:p>
+            <a:pPr>
+              <a:lnSpc>
                 <a:spcPct val="90000"/>
               </a:lnSpc>
               <a:spcAft>
@@ -7894,9 +8230,77 @@
               </a:spcAft>
               <a:defRPr sz="2000"/>
             </a:pPr>
-            <a:r>
-              <a:rPr sz="1300"/>
-              <a:t>1️⃣ Problem: İngilizce kelime ezberleme sıkıcı</a:t>
+          </a:p>
+          <a:p>
+            <a:pPr>
+              <a:lnSpc>
+                <a:spcPct val="85000"/>
+              </a:lnSpc>
+              <a:spcBef>
+                <a:spcPts val="200"/>
+              </a:spcBef>
+              <a:spcAft>
+                <a:spcPts val="200"/>
+              </a:spcAft>
+              <a:defRPr sz="2000"/>
+            </a:pPr>
+            <a:r>
+              <a:rPr sz="1300"/>
+              <a:t>3️⃣ Tasarım:</a:t>
+            </a:r>
+          </a:p>
+          <a:p>
+            <a:pPr lvl="1">
+              <a:lnSpc>
+                <a:spcPct val="85000"/>
+              </a:lnSpc>
+              <a:spcBef>
+                <a:spcPts val="200"/>
+              </a:spcBef>
+              <a:spcAft>
+                <a:spcPts val="200"/>
+              </a:spcAft>
+              <a:defRPr sz="1800"/>
+            </a:pPr>
+            <a:r>
+              <a:rPr sz="1300"/>
+              <a:t>    • Ana ekran: Seviye seçimi</a:t>
+            </a:r>
+          </a:p>
+          <a:p>
+            <a:pPr lvl="1">
+              <a:lnSpc>
+                <a:spcPct val="85000"/>
+              </a:lnSpc>
+              <a:spcBef>
+                <a:spcPts val="200"/>
+              </a:spcBef>
+              <a:spcAft>
+                <a:spcPts val="200"/>
+              </a:spcAft>
+              <a:defRPr sz="1800"/>
+            </a:pPr>
+            <a:r>
+              <a:rPr sz="1300"/>
+              <a:t>    • Oyun ekranı: Kelime kartları, zamanlayıcı</a:t>
+            </a:r>
+          </a:p>
+          <a:p>
+            <a:pPr lvl="1">
+              <a:lnSpc>
+                <a:spcPct val="85000"/>
+              </a:lnSpc>
+              <a:spcBef>
+                <a:spcPts val="200"/>
+              </a:spcBef>
+              <a:spcAft>
+                <a:spcPts val="200"/>
+              </a:spcAft>
+              <a:defRPr sz="1800"/>
+            </a:pPr>
+            <a:r>
+              <a:rPr sz="1300"/>
+              <a:t>    • Renkli ve çocuk dostu tasarım</a:t>
             </a:r>
           </a:p>
           <a:p>
@@ -7913,6 +8317,96 @@
           <a:p>
             <a:pPr>
               <a:lnSpc>
+                <a:spcPct val="85000"/>
+              </a:lnSpc>
+              <a:spcBef>
+                <a:spcPts val="200"/>
+              </a:spcBef>
+              <a:spcAft>
+                <a:spcPts val="200"/>
+              </a:spcAft>
+              <a:defRPr sz="2000"/>
+            </a:pPr>
+            <a:r>
+              <a:rPr sz="1300"/>
+              <a:t>4️⃣ Özellikler:</a:t>
+            </a:r>
+          </a:p>
+          <a:p>
+            <a:pPr lvl="1">
+              <a:lnSpc>
+                <a:spcPct val="85000"/>
+              </a:lnSpc>
+              <a:spcBef>
+                <a:spcPts val="200"/>
+              </a:spcBef>
+              <a:spcAft>
+                <a:spcPts val="200"/>
+              </a:spcAft>
+              <a:defRPr sz="1800"/>
+            </a:pPr>
+            <a:r>
+              <a:rPr sz="1300"/>
+              <a:t>    • Günlük 10 yeni kelime</a:t>
+            </a:r>
+          </a:p>
+          <a:p>
+            <a:pPr lvl="1">
+              <a:lnSpc>
+                <a:spcPct val="85000"/>
+              </a:lnSpc>
+              <a:spcBef>
+                <a:spcPts val="200"/>
+              </a:spcBef>
+              <a:spcAft>
+                <a:spcPts val="200"/>
+              </a:spcAft>
+              <a:defRPr sz="1800"/>
+            </a:pPr>
+            <a:r>
+              <a:rPr sz="1300"/>
+              <a:t>    • Eşleştirme oyunu</a:t>
+            </a:r>
+          </a:p>
+          <a:p>
+            <a:pPr lvl="1">
+              <a:lnSpc>
+                <a:spcPct val="85000"/>
+              </a:lnSpc>
+              <a:spcBef>
+                <a:spcPts val="200"/>
+              </a:spcBef>
+              <a:spcAft>
+                <a:spcPts val="200"/>
+              </a:spcAft>
+              <a:defRPr sz="1800"/>
+            </a:pPr>
+            <a:r>
+              <a:rPr sz="1300"/>
+              <a:t>    • Puan sistemi ve rozetler</a:t>
+            </a:r>
+          </a:p>
+          <a:p>
+            <a:pPr lvl="1">
+              <a:lnSpc>
+                <a:spcPct val="85000"/>
+              </a:lnSpc>
+              <a:spcBef>
+                <a:spcPts val="200"/>
+              </a:spcBef>
+              <a:spcAft>
+                <a:spcPts val="200"/>
+              </a:spcAft>
+              <a:defRPr sz="1800"/>
+            </a:pPr>
+            <a:r>
+              <a:rPr sz="1300"/>
+              <a:t>    • Arkadaşlarla yarışma</a:t>
+            </a:r>
+          </a:p>
+          <a:p>
+            <a:pPr>
+              <a:lnSpc>
                 <a:spcPct val="90000"/>
               </a:lnSpc>
               <a:spcAft>
@@ -7920,9 +8414,23 @@
               </a:spcAft>
               <a:defRPr sz="2000"/>
             </a:pPr>
-            <a:r>
-              <a:rPr sz="1300"/>
-              <a:t>2️⃣ Çözüm Fikri: Oyunlaştırılmış kelime öğrenme uygulaması</a:t>
+          </a:p>
+          <a:p>
+            <a:pPr>
+              <a:lnSpc>
+                <a:spcPct val="85000"/>
+              </a:lnSpc>
+              <a:spcBef>
+                <a:spcPts val="200"/>
+              </a:spcBef>
+              <a:spcAft>
+                <a:spcPts val="200"/>
+              </a:spcAft>
+              <a:defRPr sz="2000"/>
+            </a:pPr>
+            <a:r>
+              <a:rPr sz="1300"/>
+              <a:t>5️⃣ Test: 20 öğrenci ile deneme</a:t>
             </a:r>
           </a:p>
           <a:p>
@@ -7939,6 +8447,24 @@
           <a:p>
             <a:pPr>
               <a:lnSpc>
+                <a:spcPct val="85000"/>
+              </a:lnSpc>
+              <a:spcBef>
+                <a:spcPts val="200"/>
+              </a:spcBef>
+              <a:spcAft>
+                <a:spcPts val="200"/>
+              </a:spcAft>
+              <a:defRPr sz="2000"/>
+            </a:pPr>
+            <a:r>
+              <a:rPr sz="1300"/>
+              <a:t>6️⃣ Geri Bildirim: 'Kelimeler çok zor' → Seviye sistemi eklendi</a:t>
+            </a:r>
+          </a:p>
+          <a:p>
+            <a:pPr>
+              <a:lnSpc>
                 <a:spcPct val="90000"/>
               </a:lnSpc>
               <a:spcAft>
@@ -7946,212 +8472,17 @@
               </a:spcAft>
               <a:defRPr sz="2000"/>
             </a:pPr>
-            <a:r>
-              <a:rPr sz="1300"/>
-              <a:t>3️⃣ Tasarım:</a:t>
-            </a:r>
-          </a:p>
-          <a:p>
-            <a:pPr lvl="1">
-              <a:lnSpc>
-                <a:spcPct val="90000"/>
-              </a:lnSpc>
-              <a:spcAft>
-                <a:spcPts val="300"/>
-              </a:spcAft>
-              <a:defRPr sz="1800"/>
-            </a:pPr>
-            <a:r>
-              <a:rPr sz="1300"/>
-              <a:t>    • Ana ekran: Seviye seçimi</a:t>
-            </a:r>
-          </a:p>
-          <a:p>
-            <a:pPr lvl="1">
-              <a:lnSpc>
-                <a:spcPct val="90000"/>
-              </a:lnSpc>
-              <a:spcAft>
-                <a:spcPts val="300"/>
-              </a:spcAft>
-              <a:defRPr sz="1800"/>
-            </a:pPr>
-            <a:r>
-              <a:rPr sz="1300"/>
-              <a:t>    • Oyun ekranı: Kelime kartları, zamanlayıcı</a:t>
-            </a:r>
-          </a:p>
-          <a:p>
-            <a:pPr lvl="1">
-              <a:lnSpc>
-                <a:spcPct val="90000"/>
-              </a:lnSpc>
-              <a:spcAft>
-                <a:spcPts val="300"/>
-              </a:spcAft>
-              <a:defRPr sz="1800"/>
-            </a:pPr>
-            <a:r>
-              <a:rPr sz="1300"/>
-              <a:t>    • Renkli ve çocuk dostu tasarım</a:t>
-            </a:r>
-          </a:p>
-          <a:p>
-            <a:pPr>
-              <a:lnSpc>
-                <a:spcPct val="90000"/>
-              </a:lnSpc>
-              <a:spcAft>
-                <a:spcPts val="300"/>
-              </a:spcAft>
-              <a:defRPr sz="2000"/>
-            </a:pPr>
-          </a:p>
-          <a:p>
-            <a:pPr>
-              <a:lnSpc>
-                <a:spcPct val="90000"/>
-              </a:lnSpc>
-              <a:spcAft>
-                <a:spcPts val="300"/>
-              </a:spcAft>
-              <a:defRPr sz="2000"/>
-            </a:pPr>
-            <a:r>
-              <a:rPr sz="1300"/>
-              <a:t>4️⃣ Özellikler:</a:t>
-            </a:r>
-          </a:p>
-          <a:p>
-            <a:pPr lvl="1">
-              <a:lnSpc>
-                <a:spcPct val="90000"/>
-              </a:lnSpc>
-              <a:spcAft>
-                <a:spcPts val="300"/>
-              </a:spcAft>
-              <a:defRPr sz="1800"/>
-            </a:pPr>
-            <a:r>
-              <a:rPr sz="1300"/>
-              <a:t>    • Günlük 10 yeni kelime</a:t>
-            </a:r>
-          </a:p>
-          <a:p>
-            <a:pPr lvl="1">
-              <a:lnSpc>
-                <a:spcPct val="90000"/>
-              </a:lnSpc>
-              <a:spcAft>
-                <a:spcPts val="300"/>
-              </a:spcAft>
-              <a:defRPr sz="1800"/>
-            </a:pPr>
-            <a:r>
-              <a:rPr sz="1300"/>
-              <a:t>    • Eşleştirme oyunu</a:t>
-            </a:r>
-          </a:p>
-          <a:p>
-            <a:pPr lvl="1">
-              <a:lnSpc>
-                <a:spcPct val="90000"/>
-              </a:lnSpc>
-              <a:spcAft>
-                <a:spcPts val="300"/>
-              </a:spcAft>
-              <a:defRPr sz="1800"/>
-            </a:pPr>
-            <a:r>
-              <a:rPr sz="1300"/>
-              <a:t>    • Puan sistemi ve rozetler</a:t>
-            </a:r>
-          </a:p>
-          <a:p>
-            <a:pPr lvl="1">
-              <a:lnSpc>
-                <a:spcPct val="90000"/>
-              </a:lnSpc>
-              <a:spcAft>
-                <a:spcPts val="300"/>
-              </a:spcAft>
-              <a:defRPr sz="1800"/>
-            </a:pPr>
-            <a:r>
-              <a:rPr sz="1300"/>
-              <a:t>    • Arkadaşlarla yarışma</a:t>
-            </a:r>
-          </a:p>
-          <a:p>
-            <a:pPr>
-              <a:lnSpc>
-                <a:spcPct val="90000"/>
-              </a:lnSpc>
-              <a:spcAft>
-                <a:spcPts val="300"/>
-              </a:spcAft>
-              <a:defRPr sz="2000"/>
-            </a:pPr>
-          </a:p>
-          <a:p>
-            <a:pPr>
-              <a:lnSpc>
-                <a:spcPct val="90000"/>
-              </a:lnSpc>
-              <a:spcAft>
-                <a:spcPts val="300"/>
-              </a:spcAft>
-              <a:defRPr sz="2000"/>
-            </a:pPr>
-            <a:r>
-              <a:rPr sz="1300"/>
-              <a:t>5️⃣ Test: 20 öğrenci ile deneme</a:t>
-            </a:r>
-          </a:p>
-          <a:p>
-            <a:pPr>
-              <a:lnSpc>
-                <a:spcPct val="90000"/>
-              </a:lnSpc>
-              <a:spcAft>
-                <a:spcPts val="300"/>
-              </a:spcAft>
-              <a:defRPr sz="2000"/>
-            </a:pPr>
-          </a:p>
-          <a:p>
-            <a:pPr>
-              <a:lnSpc>
-                <a:spcPct val="90000"/>
-              </a:lnSpc>
-              <a:spcAft>
-                <a:spcPts val="300"/>
-              </a:spcAft>
-              <a:defRPr sz="2000"/>
-            </a:pPr>
-            <a:r>
-              <a:rPr sz="1300"/>
-              <a:t>6️⃣ Geri Bildirim: 'Kelimeler çok zor' → Seviye sistemi eklendi</a:t>
-            </a:r>
-          </a:p>
-          <a:p>
-            <a:pPr>
-              <a:lnSpc>
-                <a:spcPct val="90000"/>
-              </a:lnSpc>
-              <a:spcAft>
-                <a:spcPts val="300"/>
-              </a:spcAft>
-              <a:defRPr sz="2000"/>
-            </a:pPr>
-          </a:p>
-          <a:p>
-            <a:pPr>
-              <a:lnSpc>
-                <a:spcPct val="90000"/>
-              </a:lnSpc>
-              <a:spcAft>
-                <a:spcPts val="300"/>
+          </a:p>
+          <a:p>
+            <a:pPr>
+              <a:lnSpc>
+                <a:spcPct val="85000"/>
+              </a:lnSpc>
+              <a:spcBef>
+                <a:spcPts val="200"/>
+              </a:spcBef>
+              <a:spcAft>
+                <a:spcPts val="200"/>
               </a:spcAft>
               <a:defRPr sz="2000"/>
             </a:pPr>
@@ -8192,10 +8523,19 @@
         </p:nvSpPr>
         <p:spPr/>
         <p:txBody>
-          <a:bodyPr wrap="square"/>
+          <a:bodyPr wrap="square" tIns="25400" bIns="25400" lIns="63500" rIns="63500"/>
           <a:lstStyle/>
           <a:p>
             <a:pPr>
+              <a:lnSpc>
+                <a:spcPct val="85000"/>
+              </a:lnSpc>
+              <a:spcBef>
+                <a:spcPts val="200"/>
+              </a:spcBef>
+              <a:spcAft>
+                <a:spcPts val="200"/>
+              </a:spcAft>
               <a:defRPr sz="4000" b="1">
                 <a:solidFill>
                   <a:srgbClr val="667EEA"/>
@@ -8203,6 +8543,7 @@
               </a:defRPr>
             </a:pPr>
             <a:r>
+              <a:rPr/>
               <a:t>🗓️ Proje Planlama Araçları</a:t>
             </a:r>
           </a:p>
@@ -8242,7 +8583,7 @@
           <a:noFill/>
         </p:spPr>
         <p:txBody>
-          <a:bodyPr wrap="square">
+          <a:bodyPr wrap="square" tIns="25400" bIns="25400" lIns="63500" rIns="63500">
             <a:spAutoFit/>
           </a:bodyPr>
           <a:lstStyle/>
@@ -8259,6 +8600,24 @@
           <a:p>
             <a:pPr>
               <a:lnSpc>
+                <a:spcPct val="85000"/>
+              </a:lnSpc>
+              <a:spcBef>
+                <a:spcPts val="200"/>
+              </a:spcBef>
+              <a:spcAft>
+                <a:spcPts val="200"/>
+              </a:spcAft>
+              <a:defRPr sz="2000"/>
+            </a:pPr>
+            <a:r>
+              <a:rPr sz="1300"/>
+              <a:t>Projenizi organize etmek için araçlar:</a:t>
+            </a:r>
+          </a:p>
+          <a:p>
+            <a:pPr>
+              <a:lnSpc>
                 <a:spcPct val="90000"/>
               </a:lnSpc>
               <a:spcAft>
@@ -8266,9 +8625,77 @@
               </a:spcAft>
               <a:defRPr sz="2000"/>
             </a:pPr>
-            <a:r>
-              <a:rPr sz="1300"/>
-              <a:t>Projenizi organize etmek için araçlar:</a:t>
+          </a:p>
+          <a:p>
+            <a:pPr>
+              <a:lnSpc>
+                <a:spcPct val="85000"/>
+              </a:lnSpc>
+              <a:spcBef>
+                <a:spcPts val="200"/>
+              </a:spcBef>
+              <a:spcAft>
+                <a:spcPts val="200"/>
+              </a:spcAft>
+              <a:defRPr sz="2000" b="1"/>
+            </a:pPr>
+            <a:r>
+              <a:rPr sz="1300"/>
+              <a:t>✅ Görev Listesi (To-Do List):</a:t>
+            </a:r>
+          </a:p>
+          <a:p>
+            <a:pPr lvl="1">
+              <a:lnSpc>
+                <a:spcPct val="85000"/>
+              </a:lnSpc>
+              <a:spcBef>
+                <a:spcPts val="200"/>
+              </a:spcBef>
+              <a:spcAft>
+                <a:spcPts val="200"/>
+              </a:spcAft>
+              <a:defRPr sz="1800"/>
+            </a:pPr>
+            <a:r>
+              <a:rPr sz="1300"/>
+              <a:t>    • Yapılacaklar listesi</a:t>
+            </a:r>
+          </a:p>
+          <a:p>
+            <a:pPr lvl="1">
+              <a:lnSpc>
+                <a:spcPct val="85000"/>
+              </a:lnSpc>
+              <a:spcBef>
+                <a:spcPts val="200"/>
+              </a:spcBef>
+              <a:spcAft>
+                <a:spcPts val="200"/>
+              </a:spcAft>
+              <a:defRPr sz="1800"/>
+            </a:pPr>
+            <a:r>
+              <a:rPr sz="1300"/>
+              <a:t>    • Tamamlananları işaretleme</a:t>
+            </a:r>
+          </a:p>
+          <a:p>
+            <a:pPr lvl="1">
+              <a:lnSpc>
+                <a:spcPct val="85000"/>
+              </a:lnSpc>
+              <a:spcBef>
+                <a:spcPts val="200"/>
+              </a:spcBef>
+              <a:spcAft>
+                <a:spcPts val="200"/>
+              </a:spcAft>
+              <a:defRPr sz="1800"/>
+            </a:pPr>
+            <a:r>
+              <a:rPr sz="1300"/>
+              <a:t>    • Örnek: Google Keep, Microsoft To Do</a:t>
             </a:r>
           </a:p>
           <a:p>
@@ -8285,305 +8712,273 @@
           <a:p>
             <a:pPr>
               <a:lnSpc>
+                <a:spcPct val="85000"/>
+              </a:lnSpc>
+              <a:spcBef>
+                <a:spcPts val="200"/>
+              </a:spcBef>
+              <a:spcAft>
+                <a:spcPts val="200"/>
+              </a:spcAft>
+              <a:defRPr sz="2000"/>
+            </a:pPr>
+            <a:r>
+              <a:rPr sz="1300"/>
+              <a:t>📅 Takvim ve Zaman Çizelgesi:</a:t>
+            </a:r>
+          </a:p>
+          <a:p>
+            <a:pPr lvl="1">
+              <a:lnSpc>
+                <a:spcPct val="85000"/>
+              </a:lnSpc>
+              <a:spcBef>
+                <a:spcPts val="200"/>
+              </a:spcBef>
+              <a:spcAft>
+                <a:spcPts val="200"/>
+              </a:spcAft>
+              <a:defRPr sz="1800"/>
+            </a:pPr>
+            <a:r>
+              <a:rPr sz="1300"/>
+              <a:t>    • Her görev ne zaman yapılacak?</a:t>
+            </a:r>
+          </a:p>
+          <a:p>
+            <a:pPr lvl="1">
+              <a:lnSpc>
+                <a:spcPct val="85000"/>
+              </a:lnSpc>
+              <a:spcBef>
+                <a:spcPts val="200"/>
+              </a:spcBef>
+              <a:spcAft>
+                <a:spcPts val="200"/>
+              </a:spcAft>
+              <a:defRPr sz="1800"/>
+            </a:pPr>
+            <a:r>
+              <a:rPr sz="1300"/>
+              <a:t>    • Tarih belirleme</a:t>
+            </a:r>
+          </a:p>
+          <a:p>
+            <a:pPr lvl="1">
+              <a:lnSpc>
+                <a:spcPct val="85000"/>
+              </a:lnSpc>
+              <a:spcBef>
+                <a:spcPts val="200"/>
+              </a:spcBef>
+              <a:spcAft>
+                <a:spcPts val="200"/>
+              </a:spcAft>
+              <a:defRPr sz="1800"/>
+            </a:pPr>
+            <a:r>
+              <a:rPr sz="1300"/>
+              <a:t>    • Örnek: Google Takvim</a:t>
+            </a:r>
+          </a:p>
+          <a:p>
+            <a:pPr>
+              <a:lnSpc>
                 <a:spcPct val="90000"/>
               </a:lnSpc>
               <a:spcAft>
                 <a:spcPts val="300"/>
               </a:spcAft>
+              <a:defRPr sz="2000"/>
+            </a:pPr>
+          </a:p>
+          <a:p>
+            <a:pPr>
+              <a:lnSpc>
+                <a:spcPct val="85000"/>
+              </a:lnSpc>
+              <a:spcBef>
+                <a:spcPts val="200"/>
+              </a:spcBef>
+              <a:spcAft>
+                <a:spcPts val="200"/>
+              </a:spcAft>
               <a:defRPr sz="2000" b="1"/>
             </a:pPr>
             <a:r>
               <a:rPr sz="1300"/>
-              <a:t>✅ Görev Listesi (To-Do List):</a:t>
-            </a:r>
-          </a:p>
-          <a:p>
-            <a:pPr lvl="1">
+              <a:t>🎯 Gantt Şeması:</a:t>
+            </a:r>
+          </a:p>
+          <a:p>
+            <a:pPr lvl="1">
+              <a:lnSpc>
+                <a:spcPct val="85000"/>
+              </a:lnSpc>
+              <a:spcBef>
+                <a:spcPts val="200"/>
+              </a:spcBef>
+              <a:spcAft>
+                <a:spcPts val="200"/>
+              </a:spcAft>
+              <a:defRPr sz="1800"/>
+            </a:pPr>
+            <a:r>
+              <a:rPr sz="1300"/>
+              <a:t>    • Görevlerin zaman çizelgesi</a:t>
+            </a:r>
+          </a:p>
+          <a:p>
+            <a:pPr lvl="1">
+              <a:lnSpc>
+                <a:spcPct val="85000"/>
+              </a:lnSpc>
+              <a:spcBef>
+                <a:spcPts val="200"/>
+              </a:spcBef>
+              <a:spcAft>
+                <a:spcPts val="200"/>
+              </a:spcAft>
+              <a:defRPr sz="1800"/>
+            </a:pPr>
+            <a:r>
+              <a:rPr sz="1300"/>
+              <a:t>    • Hangi görev ne zaman başlıyor/bitiyor?</a:t>
+            </a:r>
+          </a:p>
+          <a:p>
+            <a:pPr>
               <a:lnSpc>
                 <a:spcPct val="90000"/>
               </a:lnSpc>
               <a:spcAft>
                 <a:spcPts val="300"/>
               </a:spcAft>
-              <a:defRPr sz="1800"/>
-            </a:pPr>
-            <a:r>
-              <a:rPr sz="1300"/>
-              <a:t>    • Yapılacaklar listesi</a:t>
-            </a:r>
-          </a:p>
-          <a:p>
-            <a:pPr lvl="1">
+              <a:defRPr sz="2000"/>
+            </a:pPr>
+          </a:p>
+          <a:p>
+            <a:pPr>
+              <a:lnSpc>
+                <a:spcPct val="85000"/>
+              </a:lnSpc>
+              <a:spcBef>
+                <a:spcPts val="200"/>
+              </a:spcBef>
+              <a:spcAft>
+                <a:spcPts val="200"/>
+              </a:spcAft>
+              <a:defRPr sz="2000"/>
+            </a:pPr>
+            <a:r>
+              <a:rPr sz="1300"/>
+              <a:t>📊 Kanban Tahtası:</a:t>
+            </a:r>
+          </a:p>
+          <a:p>
+            <a:pPr lvl="1">
+              <a:lnSpc>
+                <a:spcPct val="85000"/>
+              </a:lnSpc>
+              <a:spcBef>
+                <a:spcPts val="200"/>
+              </a:spcBef>
+              <a:spcAft>
+                <a:spcPts val="200"/>
+              </a:spcAft>
+              <a:defRPr sz="1800"/>
+            </a:pPr>
+            <a:r>
+              <a:rPr sz="1300"/>
+              <a:t>    • Yapılacak / Yapılıyor / Tamamlandı sütunları</a:t>
+            </a:r>
+          </a:p>
+          <a:p>
+            <a:pPr lvl="1">
+              <a:lnSpc>
+                <a:spcPct val="85000"/>
+              </a:lnSpc>
+              <a:spcBef>
+                <a:spcPts val="200"/>
+              </a:spcBef>
+              <a:spcAft>
+                <a:spcPts val="200"/>
+              </a:spcAft>
+              <a:defRPr sz="1800"/>
+            </a:pPr>
+            <a:r>
+              <a:rPr sz="1300"/>
+              <a:t>    • Görevleri kartlar ile gösterme</a:t>
+            </a:r>
+          </a:p>
+          <a:p>
+            <a:pPr lvl="1">
+              <a:lnSpc>
+                <a:spcPct val="85000"/>
+              </a:lnSpc>
+              <a:spcBef>
+                <a:spcPts val="200"/>
+              </a:spcBef>
+              <a:spcAft>
+                <a:spcPts val="200"/>
+              </a:spcAft>
+              <a:defRPr sz="1800"/>
+            </a:pPr>
+            <a:r>
+              <a:rPr sz="1300"/>
+              <a:t>    • Örnek: Trello, Padlet</a:t>
+            </a:r>
+          </a:p>
+          <a:p>
+            <a:pPr>
               <a:lnSpc>
                 <a:spcPct val="90000"/>
               </a:lnSpc>
               <a:spcAft>
                 <a:spcPts val="300"/>
               </a:spcAft>
-              <a:defRPr sz="1800"/>
-            </a:pPr>
-            <a:r>
-              <a:rPr sz="1300"/>
-              <a:t>    • Tamamlananları işaretleme</a:t>
-            </a:r>
-          </a:p>
-          <a:p>
-            <a:pPr lvl="1">
+              <a:defRPr sz="2000"/>
+            </a:pPr>
+          </a:p>
+          <a:p>
+            <a:pPr>
+              <a:lnSpc>
+                <a:spcPct val="85000"/>
+              </a:lnSpc>
+              <a:spcBef>
+                <a:spcPts val="200"/>
+              </a:spcBef>
+              <a:spcAft>
+                <a:spcPts val="200"/>
+              </a:spcAft>
+              <a:defRPr sz="2000" b="1"/>
+            </a:pPr>
+            <a:r>
+              <a:rPr sz="1300"/>
+              <a:t>💡 Basit bir kağıt kalem de yeterli olabilir!</a:t>
+            </a:r>
+          </a:p>
+          <a:p>
+            <a:pPr>
               <a:lnSpc>
                 <a:spcPct val="90000"/>
               </a:lnSpc>
               <a:spcAft>
                 <a:spcPts val="300"/>
               </a:spcAft>
-              <a:defRPr sz="1800"/>
-            </a:pPr>
-            <a:r>
-              <a:rPr sz="1300"/>
-              <a:t>    • Örnek: Google Keep, Microsoft To Do</a:t>
-            </a:r>
-          </a:p>
-          <a:p>
-            <a:pPr>
-              <a:lnSpc>
-                <a:spcPct val="90000"/>
-              </a:lnSpc>
-              <a:spcAft>
-                <a:spcPts val="300"/>
-              </a:spcAft>
-              <a:defRPr sz="2000"/>
-            </a:pPr>
-          </a:p>
-          <a:p>
-            <a:pPr>
-              <a:lnSpc>
-                <a:spcPct val="90000"/>
-              </a:lnSpc>
-              <a:spcAft>
-                <a:spcPts val="300"/>
-              </a:spcAft>
-              <a:defRPr sz="2000"/>
-            </a:pPr>
-            <a:r>
-              <a:rPr sz="1300"/>
-              <a:t>📅 Takvim ve Zaman Çizelgesi:</a:t>
-            </a:r>
-          </a:p>
-          <a:p>
-            <a:pPr lvl="1">
-              <a:lnSpc>
-                <a:spcPct val="90000"/>
-              </a:lnSpc>
-              <a:spcAft>
-                <a:spcPts val="300"/>
-              </a:spcAft>
-              <a:defRPr sz="1800"/>
-            </a:pPr>
-            <a:r>
-              <a:rPr sz="1300"/>
-              <a:t>    • Her görev ne zaman yapılacak?</a:t>
-            </a:r>
-          </a:p>
-          <a:p>
-            <a:pPr lvl="1">
-              <a:lnSpc>
-                <a:spcPct val="90000"/>
-              </a:lnSpc>
-              <a:spcAft>
-                <a:spcPts val="300"/>
-              </a:spcAft>
-              <a:defRPr sz="1800"/>
-            </a:pPr>
-            <a:r>
-              <a:rPr sz="1300"/>
-              <a:t>    • Tarih belirleme</a:t>
-            </a:r>
-          </a:p>
-          <a:p>
-            <a:pPr lvl="1">
-              <a:lnSpc>
-                <a:spcPct val="90000"/>
-              </a:lnSpc>
-              <a:spcAft>
-                <a:spcPts val="300"/>
-              </a:spcAft>
-              <a:defRPr sz="1800"/>
-            </a:pPr>
-            <a:r>
-              <a:rPr sz="1300"/>
-              <a:t>    • Örnek: Google Takvim</a:t>
-            </a:r>
-          </a:p>
-          <a:p>
-            <a:pPr>
-              <a:lnSpc>
-                <a:spcPct val="90000"/>
-              </a:lnSpc>
-              <a:spcAft>
-                <a:spcPts val="300"/>
-              </a:spcAft>
-              <a:defRPr sz="2000"/>
-            </a:pPr>
-          </a:p>
-          <a:p>
-            <a:pPr>
-              <a:lnSpc>
-                <a:spcPct val="90000"/>
-              </a:lnSpc>
-              <a:spcAft>
-                <a:spcPts val="300"/>
-              </a:spcAft>
-              <a:defRPr sz="2000" b="1"/>
-            </a:pPr>
-            <a:r>
-              <a:rPr sz="1300"/>
-              <a:t>🎯 Gantt Şeması:</a:t>
-            </a:r>
-          </a:p>
-          <a:p>
-            <a:pPr lvl="1">
-              <a:lnSpc>
-                <a:spcPct val="90000"/>
-              </a:lnSpc>
-              <a:spcAft>
-                <a:spcPts val="300"/>
-              </a:spcAft>
-              <a:defRPr sz="1800"/>
-            </a:pPr>
-            <a:r>
-              <a:rPr sz="1300"/>
-              <a:t>    • Görevlerin zaman çizelgesi</a:t>
-            </a:r>
-          </a:p>
-          <a:p>
-            <a:pPr lvl="1">
-              <a:lnSpc>
-                <a:spcPct val="90000"/>
-              </a:lnSpc>
-              <a:spcAft>
-                <a:spcPts val="300"/>
-              </a:spcAft>
-              <a:defRPr sz="1800"/>
-            </a:pPr>
-            <a:r>
-              <a:rPr sz="1300"/>
-              <a:t>    • Hangi görev ne zaman başlıyor/bitiyor?</a:t>
-            </a:r>
-          </a:p>
-          <a:p>
-            <a:pPr>
-              <a:lnSpc>
-                <a:spcPct val="90000"/>
-              </a:lnSpc>
-              <a:spcAft>
-                <a:spcPts val="300"/>
-              </a:spcAft>
-              <a:defRPr sz="2000"/>
-            </a:pPr>
-          </a:p>
-          <a:p>
-            <a:pPr>
-              <a:lnSpc>
-                <a:spcPct val="90000"/>
-              </a:lnSpc>
-              <a:spcAft>
-                <a:spcPts val="300"/>
-              </a:spcAft>
-              <a:defRPr sz="2000"/>
-            </a:pPr>
-            <a:r>
-              <a:rPr sz="1300"/>
-              <a:t>📊 Kanban Tahtası:</a:t>
-            </a:r>
-          </a:p>
-          <a:p>
-            <a:pPr lvl="1">
-              <a:lnSpc>
-                <a:spcPct val="90000"/>
-              </a:lnSpc>
-              <a:spcAft>
-                <a:spcPts val="300"/>
-              </a:spcAft>
-              <a:defRPr sz="1800"/>
-            </a:pPr>
-            <a:r>
-              <a:rPr sz="1300"/>
-              <a:t>    • Yapılacak / Yapılıyor / Tamamlandı sütunları</a:t>
-            </a:r>
-          </a:p>
-          <a:p>
-            <a:pPr lvl="1">
-              <a:lnSpc>
-                <a:spcPct val="90000"/>
-              </a:lnSpc>
-              <a:spcAft>
-                <a:spcPts val="300"/>
-              </a:spcAft>
-              <a:defRPr sz="1800"/>
-            </a:pPr>
-            <a:r>
-              <a:rPr sz="1300"/>
-              <a:t>    • Görevleri kartlar ile gösterme</a:t>
-            </a:r>
-          </a:p>
-          <a:p>
-            <a:pPr lvl="1">
-              <a:lnSpc>
-                <a:spcPct val="90000"/>
-              </a:lnSpc>
-              <a:spcAft>
-                <a:spcPts val="300"/>
-              </a:spcAft>
-              <a:defRPr sz="1800"/>
-            </a:pPr>
-            <a:r>
-              <a:rPr sz="1300"/>
-              <a:t>    • Örnek: Trello, Padlet</a:t>
-            </a:r>
-          </a:p>
-          <a:p>
-            <a:pPr>
-              <a:lnSpc>
-                <a:spcPct val="90000"/>
-              </a:lnSpc>
-              <a:spcAft>
-                <a:spcPts val="300"/>
-              </a:spcAft>
-              <a:defRPr sz="2000"/>
-            </a:pPr>
-          </a:p>
-          <a:p>
-            <a:pPr>
-              <a:lnSpc>
-                <a:spcPct val="90000"/>
-              </a:lnSpc>
-              <a:spcAft>
-                <a:spcPts val="300"/>
-              </a:spcAft>
-              <a:defRPr sz="2000" b="1"/>
-            </a:pPr>
-            <a:r>
-              <a:rPr sz="1300"/>
-              <a:t>💡 Basit bir kağıt kalem de yeterli olabilir!</a:t>
-            </a:r>
-          </a:p>
-          <a:p>
-            <a:pPr>
-              <a:lnSpc>
-                <a:spcPct val="90000"/>
-              </a:lnSpc>
-              <a:spcAft>
-                <a:spcPts val="300"/>
-              </a:spcAft>
-              <a:defRPr sz="2000"/>
-            </a:pPr>
-          </a:p>
-          <a:p>
-            <a:pPr>
-              <a:lnSpc>
-                <a:spcPct val="90000"/>
-              </a:lnSpc>
-              <a:spcAft>
-                <a:spcPts val="300"/>
+              <a:defRPr sz="2000"/>
+            </a:pPr>
+          </a:p>
+          <a:p>
+            <a:pPr>
+              <a:lnSpc>
+                <a:spcPct val="85000"/>
+              </a:lnSpc>
+              <a:spcBef>
+                <a:spcPts val="200"/>
+              </a:spcBef>
+              <a:spcAft>
+                <a:spcPts val="200"/>
               </a:spcAft>
               <a:defRPr sz="2000" b="1"/>
             </a:pPr>
@@ -8624,10 +9019,19 @@
         </p:nvSpPr>
         <p:spPr/>
         <p:txBody>
-          <a:bodyPr wrap="square"/>
+          <a:bodyPr wrap="square" tIns="25400" bIns="25400" lIns="63500" rIns="63500"/>
           <a:lstStyle/>
           <a:p>
             <a:pPr>
+              <a:lnSpc>
+                <a:spcPct val="85000"/>
+              </a:lnSpc>
+              <a:spcBef>
+                <a:spcPts val="200"/>
+              </a:spcBef>
+              <a:spcAft>
+                <a:spcPts val="200"/>
+              </a:spcAft>
               <a:defRPr sz="4000" b="1">
                 <a:solidFill>
                   <a:srgbClr val="667EEA"/>
@@ -8635,6 +9039,7 @@
               </a:defRPr>
             </a:pPr>
             <a:r>
+              <a:rPr/>
               <a:t>👥 Takım Çalışması ve Roller</a:t>
             </a:r>
           </a:p>
@@ -8674,7 +9079,7 @@
           <a:noFill/>
         </p:spPr>
         <p:txBody>
-          <a:bodyPr wrap="square">
+          <a:bodyPr wrap="square" tIns="25400" bIns="25400" lIns="63500" rIns="63500">
             <a:spAutoFit/>
           </a:bodyPr>
           <a:lstStyle/>
@@ -8691,10 +9096,13 @@
           <a:p>
             <a:pPr>
               <a:lnSpc>
-                <a:spcPct val="90000"/>
-              </a:lnSpc>
-              <a:spcAft>
-                <a:spcPts val="300"/>
+                <a:spcPct val="85000"/>
+              </a:lnSpc>
+              <a:spcBef>
+                <a:spcPts val="200"/>
+              </a:spcBef>
+              <a:spcAft>
+                <a:spcPts val="200"/>
               </a:spcAft>
               <a:defRPr sz="2000"/>
             </a:pPr>
@@ -8717,10 +9125,13 @@
           <a:p>
             <a:pPr>
               <a:lnSpc>
-                <a:spcPct val="90000"/>
-              </a:lnSpc>
-              <a:spcAft>
-                <a:spcPts val="300"/>
+                <a:spcPct val="85000"/>
+              </a:lnSpc>
+              <a:spcBef>
+                <a:spcPts val="200"/>
+              </a:spcBef>
+              <a:spcAft>
+                <a:spcPts val="200"/>
               </a:spcAft>
               <a:defRPr sz="2000" b="1"/>
             </a:pPr>
@@ -8743,10 +9154,13 @@
           <a:p>
             <a:pPr>
               <a:lnSpc>
-                <a:spcPct val="90000"/>
-              </a:lnSpc>
-              <a:spcAft>
-                <a:spcPts val="300"/>
+                <a:spcPct val="85000"/>
+              </a:lnSpc>
+              <a:spcBef>
+                <a:spcPts val="200"/>
+              </a:spcBef>
+              <a:spcAft>
+                <a:spcPts val="200"/>
               </a:spcAft>
               <a:defRPr sz="2000" b="1"/>
             </a:pPr>
@@ -8758,10 +9172,13 @@
           <a:p>
             <a:pPr lvl="1">
               <a:lnSpc>
-                <a:spcPct val="90000"/>
-              </a:lnSpc>
-              <a:spcAft>
-                <a:spcPts val="300"/>
+                <a:spcPct val="85000"/>
+              </a:lnSpc>
+              <a:spcBef>
+                <a:spcPts val="200"/>
+              </a:spcBef>
+              <a:spcAft>
+                <a:spcPts val="200"/>
               </a:spcAft>
               <a:defRPr sz="1800"/>
             </a:pPr>
@@ -8773,10 +9190,13 @@
           <a:p>
             <a:pPr lvl="1">
               <a:lnSpc>
-                <a:spcPct val="90000"/>
-              </a:lnSpc>
-              <a:spcAft>
-                <a:spcPts val="300"/>
+                <a:spcPct val="85000"/>
+              </a:lnSpc>
+              <a:spcBef>
+                <a:spcPts val="200"/>
+              </a:spcBef>
+              <a:spcAft>
+                <a:spcPts val="200"/>
               </a:spcAft>
               <a:defRPr sz="1800"/>
             </a:pPr>
@@ -8788,10 +9208,13 @@
           <a:p>
             <a:pPr lvl="1">
               <a:lnSpc>
-                <a:spcPct val="90000"/>
-              </a:lnSpc>
-              <a:spcAft>
-                <a:spcPts val="300"/>
+                <a:spcPct val="85000"/>
+              </a:lnSpc>
+              <a:spcBef>
+                <a:spcPts val="200"/>
+              </a:spcBef>
+              <a:spcAft>
+                <a:spcPts val="200"/>
               </a:spcAft>
               <a:defRPr sz="1800"/>
             </a:pPr>
@@ -8814,10 +9237,13 @@
           <a:p>
             <a:pPr>
               <a:lnSpc>
-                <a:spcPct val="90000"/>
-              </a:lnSpc>
-              <a:spcAft>
-                <a:spcPts val="300"/>
+                <a:spcPct val="85000"/>
+              </a:lnSpc>
+              <a:spcBef>
+                <a:spcPts val="200"/>
+              </a:spcBef>
+              <a:spcAft>
+                <a:spcPts val="200"/>
               </a:spcAft>
               <a:defRPr sz="2000"/>
             </a:pPr>
@@ -8829,10 +9255,13 @@
           <a:p>
             <a:pPr lvl="1">
               <a:lnSpc>
-                <a:spcPct val="90000"/>
-              </a:lnSpc>
-              <a:spcAft>
-                <a:spcPts val="300"/>
+                <a:spcPct val="85000"/>
+              </a:lnSpc>
+              <a:spcBef>
+                <a:spcPts val="200"/>
+              </a:spcBef>
+              <a:spcAft>
+                <a:spcPts val="200"/>
               </a:spcAft>
               <a:defRPr sz="1800"/>
             </a:pPr>
@@ -8844,10 +9273,13 @@
           <a:p>
             <a:pPr lvl="1">
               <a:lnSpc>
-                <a:spcPct val="90000"/>
-              </a:lnSpc>
-              <a:spcAft>
-                <a:spcPts val="300"/>
+                <a:spcPct val="85000"/>
+              </a:lnSpc>
+              <a:spcBef>
+                <a:spcPts val="200"/>
+              </a:spcBef>
+              <a:spcAft>
+                <a:spcPts val="200"/>
               </a:spcAft>
               <a:defRPr sz="1800"/>
             </a:pPr>
@@ -8870,10 +9302,13 @@
           <a:p>
             <a:pPr>
               <a:lnSpc>
-                <a:spcPct val="90000"/>
-              </a:lnSpc>
-              <a:spcAft>
-                <a:spcPts val="300"/>
+                <a:spcPct val="85000"/>
+              </a:lnSpc>
+              <a:spcBef>
+                <a:spcPts val="200"/>
+              </a:spcBef>
+              <a:spcAft>
+                <a:spcPts val="200"/>
               </a:spcAft>
               <a:defRPr sz="2000"/>
             </a:pPr>
@@ -8885,10 +9320,13 @@
           <a:p>
             <a:pPr lvl="1">
               <a:lnSpc>
-                <a:spcPct val="90000"/>
-              </a:lnSpc>
-              <a:spcAft>
-                <a:spcPts val="300"/>
+                <a:spcPct val="85000"/>
+              </a:lnSpc>
+              <a:spcBef>
+                <a:spcPts val="200"/>
+              </a:spcBef>
+              <a:spcAft>
+                <a:spcPts val="200"/>
               </a:spcAft>
               <a:defRPr sz="1800"/>
             </a:pPr>
@@ -8900,10 +9338,13 @@
           <a:p>
             <a:pPr lvl="1">
               <a:lnSpc>
-                <a:spcPct val="90000"/>
-              </a:lnSpc>
-              <a:spcAft>
-                <a:spcPts val="300"/>
+                <a:spcPct val="85000"/>
+              </a:lnSpc>
+              <a:spcBef>
+                <a:spcPts val="200"/>
+              </a:spcBef>
+              <a:spcAft>
+                <a:spcPts val="200"/>
               </a:spcAft>
               <a:defRPr sz="1800"/>
             </a:pPr>
@@ -8926,10 +9367,13 @@
           <a:p>
             <a:pPr>
               <a:lnSpc>
-                <a:spcPct val="90000"/>
-              </a:lnSpc>
-              <a:spcAft>
-                <a:spcPts val="300"/>
+                <a:spcPct val="85000"/>
+              </a:lnSpc>
+              <a:spcBef>
+                <a:spcPts val="200"/>
+              </a:spcBef>
+              <a:spcAft>
+                <a:spcPts val="200"/>
               </a:spcAft>
               <a:defRPr sz="2000"/>
             </a:pPr>
@@ -8941,10 +9385,13 @@
           <a:p>
             <a:pPr lvl="1">
               <a:lnSpc>
-                <a:spcPct val="90000"/>
-              </a:lnSpc>
-              <a:spcAft>
-                <a:spcPts val="300"/>
+                <a:spcPct val="85000"/>
+              </a:lnSpc>
+              <a:spcBef>
+                <a:spcPts val="200"/>
+              </a:spcBef>
+              <a:spcAft>
+                <a:spcPts val="200"/>
               </a:spcAft>
               <a:defRPr sz="1800"/>
             </a:pPr>
@@ -8956,10 +9403,13 @@
           <a:p>
             <a:pPr lvl="1">
               <a:lnSpc>
-                <a:spcPct val="90000"/>
-              </a:lnSpc>
-              <a:spcAft>
-                <a:spcPts val="300"/>
+                <a:spcPct val="85000"/>
+              </a:lnSpc>
+              <a:spcBef>
+                <a:spcPts val="200"/>
+              </a:spcBef>
+              <a:spcAft>
+                <a:spcPts val="200"/>
               </a:spcAft>
               <a:defRPr sz="1800"/>
             </a:pPr>
@@ -8982,10 +9432,13 @@
           <a:p>
             <a:pPr>
               <a:lnSpc>
-                <a:spcPct val="90000"/>
-              </a:lnSpc>
-              <a:spcAft>
-                <a:spcPts val="300"/>
+                <a:spcPct val="85000"/>
+              </a:lnSpc>
+              <a:spcBef>
+                <a:spcPts val="200"/>
+              </a:spcBef>
+              <a:spcAft>
+                <a:spcPts val="200"/>
               </a:spcAft>
               <a:defRPr sz="2000"/>
             </a:pPr>
@@ -8997,10 +9450,13 @@
           <a:p>
             <a:pPr lvl="1">
               <a:lnSpc>
-                <a:spcPct val="90000"/>
-              </a:lnSpc>
-              <a:spcAft>
-                <a:spcPts val="300"/>
+                <a:spcPct val="85000"/>
+              </a:lnSpc>
+              <a:spcBef>
+                <a:spcPts val="200"/>
+              </a:spcBef>
+              <a:spcAft>
+                <a:spcPts val="200"/>
               </a:spcAft>
               <a:defRPr sz="1800"/>
             </a:pPr>
@@ -9012,10 +9468,13 @@
           <a:p>
             <a:pPr lvl="1">
               <a:lnSpc>
-                <a:spcPct val="90000"/>
-              </a:lnSpc>
-              <a:spcAft>
-                <a:spcPts val="300"/>
+                <a:spcPct val="85000"/>
+              </a:lnSpc>
+              <a:spcBef>
+                <a:spcPts val="200"/>
+              </a:spcBef>
+              <a:spcAft>
+                <a:spcPts val="200"/>
               </a:spcAft>
               <a:defRPr sz="1800"/>
             </a:pPr>
@@ -9038,10 +9497,13 @@
           <a:p>
             <a:pPr>
               <a:lnSpc>
-                <a:spcPct val="90000"/>
-              </a:lnSpc>
-              <a:spcAft>
-                <a:spcPts val="300"/>
+                <a:spcPct val="85000"/>
+              </a:lnSpc>
+              <a:spcBef>
+                <a:spcPts val="200"/>
+              </a:spcBef>
+              <a:spcAft>
+                <a:spcPts val="200"/>
               </a:spcAft>
               <a:defRPr sz="2000" b="1"/>
             </a:pPr>
@@ -9082,10 +9544,19 @@
         </p:nvSpPr>
         <p:spPr/>
         <p:txBody>
-          <a:bodyPr wrap="square"/>
+          <a:bodyPr wrap="square" tIns="25400" bIns="25400" lIns="63500" rIns="63500"/>
           <a:lstStyle/>
           <a:p>
             <a:pPr>
+              <a:lnSpc>
+                <a:spcPct val="85000"/>
+              </a:lnSpc>
+              <a:spcBef>
+                <a:spcPts val="200"/>
+              </a:spcBef>
+              <a:spcAft>
+                <a:spcPts val="200"/>
+              </a:spcAft>
               <a:defRPr sz="4000" b="1">
                 <a:solidFill>
                   <a:srgbClr val="667EEA"/>
@@ -9093,6 +9564,7 @@
               </a:defRPr>
             </a:pPr>
             <a:r>
+              <a:rPr/>
               <a:t>🏆 Başarılı Dijital Ürün Örnekleri</a:t>
             </a:r>
           </a:p>
@@ -9132,7 +9604,7 @@
           <a:noFill/>
         </p:spPr>
         <p:txBody>
-          <a:bodyPr wrap="square">
+          <a:bodyPr wrap="square" tIns="25400" bIns="25400" lIns="63500" rIns="63500">
             <a:spAutoFit/>
           </a:bodyPr>
           <a:lstStyle/>
@@ -9149,6 +9621,24 @@
           <a:p>
             <a:pPr>
               <a:lnSpc>
+                <a:spcPct val="85000"/>
+              </a:lnSpc>
+              <a:spcBef>
+                <a:spcPts val="200"/>
+              </a:spcBef>
+              <a:spcAft>
+                <a:spcPts val="200"/>
+              </a:spcAft>
+              <a:defRPr sz="2000"/>
+            </a:pPr>
+            <a:r>
+              <a:rPr sz="1300"/>
+              <a:t>Dünyaca ünlü dijital ürünler nasıl başladı?</a:t>
+            </a:r>
+          </a:p>
+          <a:p>
+            <a:pPr>
+              <a:lnSpc>
                 <a:spcPct val="90000"/>
               </a:lnSpc>
               <a:spcAft>
@@ -9156,9 +9646,77 @@
               </a:spcAft>
               <a:defRPr sz="2000"/>
             </a:pPr>
-            <a:r>
-              <a:rPr sz="1300"/>
-              <a:t>Dünyaca ünlü dijital ürünler nasıl başladı?</a:t>
+          </a:p>
+          <a:p>
+            <a:pPr>
+              <a:lnSpc>
+                <a:spcPct val="85000"/>
+              </a:lnSpc>
+              <a:spcBef>
+                <a:spcPts val="200"/>
+              </a:spcBef>
+              <a:spcAft>
+                <a:spcPts val="200"/>
+              </a:spcAft>
+              <a:defRPr sz="2000"/>
+            </a:pPr>
+            <a:r>
+              <a:rPr sz="1300"/>
+              <a:t>📱 Instagram:</a:t>
+            </a:r>
+          </a:p>
+          <a:p>
+            <a:pPr lvl="1">
+              <a:lnSpc>
+                <a:spcPct val="85000"/>
+              </a:lnSpc>
+              <a:spcBef>
+                <a:spcPts val="200"/>
+              </a:spcBef>
+              <a:spcAft>
+                <a:spcPts val="200"/>
+              </a:spcAft>
+              <a:defRPr sz="1800"/>
+            </a:pPr>
+            <a:r>
+              <a:rPr sz="1300"/>
+              <a:t>    • Başlangıç: Fotoğraf paylaşım uygulaması</a:t>
+            </a:r>
+          </a:p>
+          <a:p>
+            <a:pPr lvl="1">
+              <a:lnSpc>
+                <a:spcPct val="85000"/>
+              </a:lnSpc>
+              <a:spcBef>
+                <a:spcPts val="200"/>
+              </a:spcBef>
+              <a:spcAft>
+                <a:spcPts val="200"/>
+              </a:spcAft>
+              <a:defRPr sz="1800"/>
+            </a:pPr>
+            <a:r>
+              <a:rPr sz="1300"/>
+              <a:t>    • İhtiyaç: Fotoğrafları güzel göstermek</a:t>
+            </a:r>
+          </a:p>
+          <a:p>
+            <a:pPr lvl="1">
+              <a:lnSpc>
+                <a:spcPct val="85000"/>
+              </a:lnSpc>
+              <a:spcBef>
+                <a:spcPts val="200"/>
+              </a:spcBef>
+              <a:spcAft>
+                <a:spcPts val="200"/>
+              </a:spcAft>
+              <a:defRPr sz="1800"/>
+            </a:pPr>
+            <a:r>
+              <a:rPr sz="1300"/>
+              <a:t>    • 2010'da başladı, şimdi milyarlarca kullanıcı</a:t>
             </a:r>
           </a:p>
           <a:p>
@@ -9175,6 +9733,78 @@
           <a:p>
             <a:pPr>
               <a:lnSpc>
+                <a:spcPct val="85000"/>
+              </a:lnSpc>
+              <a:spcBef>
+                <a:spcPts val="200"/>
+              </a:spcBef>
+              <a:spcAft>
+                <a:spcPts val="200"/>
+              </a:spcAft>
+              <a:defRPr sz="2000"/>
+            </a:pPr>
+            <a:r>
+              <a:rPr sz="1300"/>
+              <a:t>🎮 Minecraft:</a:t>
+            </a:r>
+          </a:p>
+          <a:p>
+            <a:pPr lvl="1">
+              <a:lnSpc>
+                <a:spcPct val="85000"/>
+              </a:lnSpc>
+              <a:spcBef>
+                <a:spcPts val="200"/>
+              </a:spcBef>
+              <a:spcAft>
+                <a:spcPts val="200"/>
+              </a:spcAft>
+              <a:defRPr sz="1800"/>
+            </a:pPr>
+            <a:r>
+              <a:rPr sz="1300"/>
+              <a:t>    • Başlangıç: Tek kişinin hobi projesi</a:t>
+            </a:r>
+          </a:p>
+          <a:p>
+            <a:pPr lvl="1">
+              <a:lnSpc>
+                <a:spcPct val="85000"/>
+              </a:lnSpc>
+              <a:spcBef>
+                <a:spcPts val="200"/>
+              </a:spcBef>
+              <a:spcAft>
+                <a:spcPts val="200"/>
+              </a:spcAft>
+              <a:defRPr sz="1800"/>
+            </a:pPr>
+            <a:r>
+              <a:rPr sz="1300"/>
+              <a:t>    • İhtiyaç: Yaratıcı bir oyun</a:t>
+            </a:r>
+          </a:p>
+          <a:p>
+            <a:pPr lvl="1">
+              <a:lnSpc>
+                <a:spcPct val="85000"/>
+              </a:lnSpc>
+              <a:spcBef>
+                <a:spcPts val="200"/>
+              </a:spcBef>
+              <a:spcAft>
+                <a:spcPts val="200"/>
+              </a:spcAft>
+              <a:defRPr sz="1800"/>
+            </a:pPr>
+            <a:r>
+              <a:rPr sz="1300"/>
+              <a:t>    • Dünyanın en çok satan oyunu oldu</a:t>
+            </a:r>
+          </a:p>
+          <a:p>
+            <a:pPr>
+              <a:lnSpc>
                 <a:spcPct val="90000"/>
               </a:lnSpc>
               <a:spcAft>
@@ -9182,272 +9812,165 @@
               </a:spcAft>
               <a:defRPr sz="2000"/>
             </a:pPr>
-            <a:r>
-              <a:rPr sz="1300"/>
-              <a:t>📱 Instagram:</a:t>
-            </a:r>
-          </a:p>
-          <a:p>
-            <a:pPr lvl="1">
+          </a:p>
+          <a:p>
+            <a:pPr>
+              <a:lnSpc>
+                <a:spcPct val="85000"/>
+              </a:lnSpc>
+              <a:spcBef>
+                <a:spcPts val="200"/>
+              </a:spcBef>
+              <a:spcAft>
+                <a:spcPts val="200"/>
+              </a:spcAft>
+              <a:defRPr sz="2000"/>
+            </a:pPr>
+            <a:r>
+              <a:rPr sz="1300"/>
+              <a:t>📚 Duolingo:</a:t>
+            </a:r>
+          </a:p>
+          <a:p>
+            <a:pPr lvl="1">
+              <a:lnSpc>
+                <a:spcPct val="85000"/>
+              </a:lnSpc>
+              <a:spcBef>
+                <a:spcPts val="200"/>
+              </a:spcBef>
+              <a:spcAft>
+                <a:spcPts val="200"/>
+              </a:spcAft>
+              <a:defRPr sz="1800"/>
+            </a:pPr>
+            <a:r>
+              <a:rPr sz="1300"/>
+              <a:t>    • Başlangıç: Ücretsiz dil öğrenme</a:t>
+            </a:r>
+          </a:p>
+          <a:p>
+            <a:pPr lvl="1">
+              <a:lnSpc>
+                <a:spcPct val="85000"/>
+              </a:lnSpc>
+              <a:spcBef>
+                <a:spcPts val="200"/>
+              </a:spcBef>
+              <a:spcAft>
+                <a:spcPts val="200"/>
+              </a:spcAft>
+              <a:defRPr sz="1800"/>
+            </a:pPr>
+            <a:r>
+              <a:rPr sz="1300"/>
+              <a:t>    • İhtiyaç: Eğlenceli dil eğitimi</a:t>
+            </a:r>
+          </a:p>
+          <a:p>
+            <a:pPr lvl="1">
+              <a:lnSpc>
+                <a:spcPct val="85000"/>
+              </a:lnSpc>
+              <a:spcBef>
+                <a:spcPts val="200"/>
+              </a:spcBef>
+              <a:spcAft>
+                <a:spcPts val="200"/>
+              </a:spcAft>
+              <a:defRPr sz="1800"/>
+            </a:pPr>
+            <a:r>
+              <a:rPr sz="1300"/>
+              <a:t>    • 500 milyondan fazla kullanıcı</a:t>
+            </a:r>
+          </a:p>
+          <a:p>
+            <a:pPr>
               <a:lnSpc>
                 <a:spcPct val="90000"/>
               </a:lnSpc>
               <a:spcAft>
                 <a:spcPts val="300"/>
               </a:spcAft>
-              <a:defRPr sz="1800"/>
-            </a:pPr>
-            <a:r>
-              <a:rPr sz="1300"/>
-              <a:t>    • Başlangıç: Fotoğraf paylaşım uygulaması</a:t>
-            </a:r>
-          </a:p>
-          <a:p>
-            <a:pPr lvl="1">
+              <a:defRPr sz="2000"/>
+            </a:pPr>
+          </a:p>
+          <a:p>
+            <a:pPr>
+              <a:lnSpc>
+                <a:spcPct val="85000"/>
+              </a:lnSpc>
+              <a:spcBef>
+                <a:spcPts val="200"/>
+              </a:spcBef>
+              <a:spcAft>
+                <a:spcPts val="200"/>
+              </a:spcAft>
+              <a:defRPr sz="2000"/>
+            </a:pPr>
+            <a:r>
+              <a:rPr sz="1300"/>
+              <a:t>🐦 Twitter (X):</a:t>
+            </a:r>
+          </a:p>
+          <a:p>
+            <a:pPr lvl="1">
+              <a:lnSpc>
+                <a:spcPct val="85000"/>
+              </a:lnSpc>
+              <a:spcBef>
+                <a:spcPts val="200"/>
+              </a:spcBef>
+              <a:spcAft>
+                <a:spcPts val="200"/>
+              </a:spcAft>
+              <a:defRPr sz="1800"/>
+            </a:pPr>
+            <a:r>
+              <a:rPr sz="1300"/>
+              <a:t>    • Başlangıç: Kısa mesajlaşma platformu</a:t>
+            </a:r>
+          </a:p>
+          <a:p>
+            <a:pPr lvl="1">
+              <a:lnSpc>
+                <a:spcPct val="85000"/>
+              </a:lnSpc>
+              <a:spcBef>
+                <a:spcPts val="200"/>
+              </a:spcBef>
+              <a:spcAft>
+                <a:spcPts val="200"/>
+              </a:spcAft>
+              <a:defRPr sz="1800"/>
+            </a:pPr>
+            <a:r>
+              <a:rPr sz="1300"/>
+              <a:t>    • İhtiyaç: Hızlı fikir paylaşımı</a:t>
+            </a:r>
+          </a:p>
+          <a:p>
+            <a:pPr>
               <a:lnSpc>
                 <a:spcPct val="90000"/>
               </a:lnSpc>
               <a:spcAft>
                 <a:spcPts val="300"/>
               </a:spcAft>
-              <a:defRPr sz="1800"/>
-            </a:pPr>
-            <a:r>
-              <a:rPr sz="1300"/>
-              <a:t>    • İhtiyaç: Fotoğrafları güzel göstermek</a:t>
-            </a:r>
-          </a:p>
-          <a:p>
-            <a:pPr lvl="1">
-              <a:lnSpc>
-                <a:spcPct val="90000"/>
-              </a:lnSpc>
-              <a:spcAft>
-                <a:spcPts val="300"/>
-              </a:spcAft>
-              <a:defRPr sz="1800"/>
-            </a:pPr>
-            <a:r>
-              <a:rPr sz="1300"/>
-              <a:t>    • 2010'da başladı, şimdi milyarlarca kullanıcı</a:t>
-            </a:r>
-          </a:p>
-          <a:p>
-            <a:pPr>
-              <a:lnSpc>
-                <a:spcPct val="90000"/>
-              </a:lnSpc>
-              <a:spcAft>
-                <a:spcPts val="300"/>
-              </a:spcAft>
-              <a:defRPr sz="2000"/>
-            </a:pPr>
-          </a:p>
-          <a:p>
-            <a:pPr>
-              <a:lnSpc>
-                <a:spcPct val="90000"/>
-              </a:lnSpc>
-              <a:spcAft>
-                <a:spcPts val="300"/>
-              </a:spcAft>
-              <a:defRPr sz="2000"/>
-            </a:pPr>
-            <a:r>
-              <a:rPr sz="1300"/>
-              <a:t>🎮 Minecraft:</a:t>
-            </a:r>
-          </a:p>
-          <a:p>
-            <a:pPr lvl="1">
-              <a:lnSpc>
-                <a:spcPct val="90000"/>
-              </a:lnSpc>
-              <a:spcAft>
-                <a:spcPts val="300"/>
-              </a:spcAft>
-              <a:defRPr sz="1800"/>
-            </a:pPr>
-            <a:r>
-              <a:rPr sz="1300"/>
-              <a:t>    • Başlangıç: Tek kişinin hobi projesi</a:t>
-            </a:r>
-          </a:p>
-          <a:p>
-            <a:pPr lvl="1">
-              <a:lnSpc>
-                <a:spcPct val="90000"/>
-              </a:lnSpc>
-              <a:spcAft>
-                <a:spcPts val="300"/>
-              </a:spcAft>
-              <a:defRPr sz="1800"/>
-            </a:pPr>
-            <a:r>
-              <a:rPr sz="1300"/>
-              <a:t>    • İhtiyaç: Yaratıcı bir oyun</a:t>
-            </a:r>
-          </a:p>
-          <a:p>
-            <a:pPr lvl="1">
-              <a:lnSpc>
-                <a:spcPct val="90000"/>
-              </a:lnSpc>
-              <a:spcAft>
-                <a:spcPts val="300"/>
-              </a:spcAft>
-              <a:defRPr sz="1800"/>
-            </a:pPr>
-            <a:r>
-              <a:rPr sz="1300"/>
-              <a:t>    • Dünyanın en çok satan oyunu oldu</a:t>
-            </a:r>
-          </a:p>
-          <a:p>
-            <a:pPr>
-              <a:lnSpc>
-                <a:spcPct val="90000"/>
-              </a:lnSpc>
-              <a:spcAft>
-                <a:spcPts val="300"/>
-              </a:spcAft>
-              <a:defRPr sz="2000"/>
-            </a:pPr>
-          </a:p>
-          <a:p>
-            <a:pPr>
-              <a:lnSpc>
-                <a:spcPct val="90000"/>
-              </a:lnSpc>
-              <a:spcAft>
-                <a:spcPts val="300"/>
-              </a:spcAft>
-              <a:defRPr sz="2000"/>
-            </a:pPr>
-            <a:r>
-              <a:rPr sz="1300"/>
-              <a:t>📚 Duolingo:</a:t>
-            </a:r>
-          </a:p>
-          <a:p>
-            <a:pPr lvl="1">
-              <a:lnSpc>
-                <a:spcPct val="90000"/>
-              </a:lnSpc>
-              <a:spcAft>
-                <a:spcPts val="300"/>
-              </a:spcAft>
-              <a:defRPr sz="1800"/>
-            </a:pPr>
-            <a:r>
-              <a:rPr sz="1300"/>
-              <a:t>    • Başlangıç: Ücretsiz dil öğrenme</a:t>
-            </a:r>
-          </a:p>
-          <a:p>
-            <a:pPr lvl="1">
-              <a:lnSpc>
-                <a:spcPct val="90000"/>
-              </a:lnSpc>
-              <a:spcAft>
-                <a:spcPts val="300"/>
-              </a:spcAft>
-              <a:defRPr sz="1800"/>
-            </a:pPr>
-            <a:r>
-              <a:rPr sz="1300"/>
-              <a:t>    • İhtiyaç: Eğlenceli dil eğitimi</a:t>
-            </a:r>
-          </a:p>
-          <a:p>
-            <a:pPr lvl="1">
-              <a:lnSpc>
-                <a:spcPct val="90000"/>
-              </a:lnSpc>
-              <a:spcAft>
-                <a:spcPts val="300"/>
-              </a:spcAft>
-              <a:defRPr sz="1800"/>
-            </a:pPr>
-            <a:r>
-              <a:rPr sz="1300"/>
-              <a:t>    • 500 milyondan fazla kullanıcı</a:t>
-            </a:r>
-          </a:p>
-          <a:p>
-            <a:pPr>
-              <a:lnSpc>
-                <a:spcPct val="90000"/>
-              </a:lnSpc>
-              <a:spcAft>
-                <a:spcPts val="300"/>
-              </a:spcAft>
-              <a:defRPr sz="2000"/>
-            </a:pPr>
-          </a:p>
-          <a:p>
-            <a:pPr>
-              <a:lnSpc>
-                <a:spcPct val="90000"/>
-              </a:lnSpc>
-              <a:spcAft>
-                <a:spcPts val="300"/>
-              </a:spcAft>
-              <a:defRPr sz="2000"/>
-            </a:pPr>
-            <a:r>
-              <a:rPr sz="1300"/>
-              <a:t>🐦 Twitter (X):</a:t>
-            </a:r>
-          </a:p>
-          <a:p>
-            <a:pPr lvl="1">
-              <a:lnSpc>
-                <a:spcPct val="90000"/>
-              </a:lnSpc>
-              <a:spcAft>
-                <a:spcPts val="300"/>
-              </a:spcAft>
-              <a:defRPr sz="1800"/>
-            </a:pPr>
-            <a:r>
-              <a:rPr sz="1300"/>
-              <a:t>    • Başlangıç: Kısa mesajlaşma platformu</a:t>
-            </a:r>
-          </a:p>
-          <a:p>
-            <a:pPr lvl="1">
-              <a:lnSpc>
-                <a:spcPct val="90000"/>
-              </a:lnSpc>
-              <a:spcAft>
-                <a:spcPts val="300"/>
-              </a:spcAft>
-              <a:defRPr sz="1800"/>
-            </a:pPr>
-            <a:r>
-              <a:rPr sz="1300"/>
-              <a:t>    • İhtiyaç: Hızlı fikir paylaşımı</a:t>
-            </a:r>
-          </a:p>
-          <a:p>
-            <a:pPr>
-              <a:lnSpc>
-                <a:spcPct val="90000"/>
-              </a:lnSpc>
-              <a:spcAft>
-                <a:spcPts val="300"/>
-              </a:spcAft>
-              <a:defRPr sz="2000"/>
-            </a:pPr>
-          </a:p>
-          <a:p>
-            <a:pPr>
-              <a:lnSpc>
-                <a:spcPct val="90000"/>
-              </a:lnSpc>
-              <a:spcAft>
-                <a:spcPts val="300"/>
+              <a:defRPr sz="2000"/>
+            </a:pPr>
+          </a:p>
+          <a:p>
+            <a:pPr>
+              <a:lnSpc>
+                <a:spcPct val="85000"/>
+              </a:lnSpc>
+              <a:spcBef>
+                <a:spcPts val="200"/>
+              </a:spcBef>
+              <a:spcAft>
+                <a:spcPts val="200"/>
               </a:spcAft>
               <a:defRPr sz="2000" b="1"/>
             </a:pPr>
@@ -9488,10 +10011,19 @@
         </p:nvSpPr>
         <p:spPr/>
         <p:txBody>
-          <a:bodyPr wrap="square"/>
+          <a:bodyPr wrap="square" tIns="25400" bIns="25400" lIns="63500" rIns="63500"/>
           <a:lstStyle/>
           <a:p>
             <a:pPr>
+              <a:lnSpc>
+                <a:spcPct val="85000"/>
+              </a:lnSpc>
+              <a:spcBef>
+                <a:spcPts val="200"/>
+              </a:spcBef>
+              <a:spcAft>
+                <a:spcPts val="200"/>
+              </a:spcAft>
               <a:defRPr sz="4000" b="1">
                 <a:solidFill>
                   <a:srgbClr val="667EEA"/>
@@ -9499,6 +10031,7 @@
               </a:defRPr>
             </a:pPr>
             <a:r>
+              <a:rPr/>
               <a:t>🚀 Kendi Dijital Ürününüzü Tasarlayın!</a:t>
             </a:r>
           </a:p>
@@ -9538,7 +10071,7 @@
           <a:noFill/>
         </p:spPr>
         <p:txBody>
-          <a:bodyPr wrap="square">
+          <a:bodyPr wrap="square" tIns="25400" bIns="25400" lIns="63500" rIns="63500">
             <a:spAutoFit/>
           </a:bodyPr>
           <a:lstStyle/>
@@ -9555,10 +10088,13 @@
           <a:p>
             <a:pPr>
               <a:lnSpc>
-                <a:spcPct val="90000"/>
-              </a:lnSpc>
-              <a:spcAft>
-                <a:spcPts val="300"/>
+                <a:spcPct val="85000"/>
+              </a:lnSpc>
+              <a:spcBef>
+                <a:spcPts val="200"/>
+              </a:spcBef>
+              <a:spcAft>
+                <a:spcPts val="200"/>
               </a:spcAft>
               <a:defRPr sz="2000"/>
             </a:pPr>
@@ -9581,10 +10117,13 @@
           <a:p>
             <a:pPr>
               <a:lnSpc>
-                <a:spcPct val="90000"/>
-              </a:lnSpc>
-              <a:spcAft>
-                <a:spcPts val="300"/>
+                <a:spcPct val="85000"/>
+              </a:lnSpc>
+              <a:spcBef>
+                <a:spcPts val="200"/>
+              </a:spcBef>
+              <a:spcAft>
+                <a:spcPts val="200"/>
               </a:spcAft>
               <a:defRPr sz="2000" b="1"/>
             </a:pPr>
@@ -9596,10 +10135,13 @@
           <a:p>
             <a:pPr>
               <a:lnSpc>
-                <a:spcPct val="90000"/>
-              </a:lnSpc>
-              <a:spcAft>
-                <a:spcPts val="300"/>
+                <a:spcPct val="85000"/>
+              </a:lnSpc>
+              <a:spcBef>
+                <a:spcPts val="200"/>
+              </a:spcBef>
+              <a:spcAft>
+                <a:spcPts val="200"/>
               </a:spcAft>
               <a:defRPr sz="2000"/>
             </a:pPr>
@@ -9622,10 +10164,13 @@
           <a:p>
             <a:pPr>
               <a:lnSpc>
-                <a:spcPct val="90000"/>
-              </a:lnSpc>
-              <a:spcAft>
-                <a:spcPts val="300"/>
+                <a:spcPct val="85000"/>
+              </a:lnSpc>
+              <a:spcBef>
+                <a:spcPts val="200"/>
+              </a:spcBef>
+              <a:spcAft>
+                <a:spcPts val="200"/>
               </a:spcAft>
               <a:defRPr sz="2000" b="1"/>
             </a:pPr>
@@ -9637,10 +10182,13 @@
           <a:p>
             <a:pPr>
               <a:lnSpc>
-                <a:spcPct val="90000"/>
-              </a:lnSpc>
-              <a:spcAft>
-                <a:spcPts val="300"/>
+                <a:spcPct val="85000"/>
+              </a:lnSpc>
+              <a:spcBef>
+                <a:spcPts val="200"/>
+              </a:spcBef>
+              <a:spcAft>
+                <a:spcPts val="200"/>
               </a:spcAft>
               <a:defRPr sz="2000"/>
             </a:pPr>
@@ -9652,10 +10200,13 @@
           <a:p>
             <a:pPr>
               <a:lnSpc>
-                <a:spcPct val="90000"/>
-              </a:lnSpc>
-              <a:spcAft>
-                <a:spcPts val="300"/>
+                <a:spcPct val="85000"/>
+              </a:lnSpc>
+              <a:spcBef>
+                <a:spcPts val="200"/>
+              </a:spcBef>
+              <a:spcAft>
+                <a:spcPts val="200"/>
               </a:spcAft>
               <a:defRPr sz="2000"/>
             </a:pPr>
@@ -9667,10 +10218,13 @@
           <a:p>
             <a:pPr>
               <a:lnSpc>
-                <a:spcPct val="90000"/>
-              </a:lnSpc>
-              <a:spcAft>
-                <a:spcPts val="300"/>
+                <a:spcPct val="85000"/>
+              </a:lnSpc>
+              <a:spcBef>
+                <a:spcPts val="200"/>
+              </a:spcBef>
+              <a:spcAft>
+                <a:spcPts val="200"/>
               </a:spcAft>
               <a:defRPr sz="2000"/>
             </a:pPr>
@@ -9682,10 +10236,13 @@
           <a:p>
             <a:pPr>
               <a:lnSpc>
-                <a:spcPct val="90000"/>
-              </a:lnSpc>
-              <a:spcAft>
-                <a:spcPts val="300"/>
+                <a:spcPct val="85000"/>
+              </a:lnSpc>
+              <a:spcBef>
+                <a:spcPts val="200"/>
+              </a:spcBef>
+              <a:spcAft>
+                <a:spcPts val="200"/>
               </a:spcAft>
               <a:defRPr sz="2000"/>
             </a:pPr>
@@ -9697,10 +10254,13 @@
           <a:p>
             <a:pPr>
               <a:lnSpc>
-                <a:spcPct val="90000"/>
-              </a:lnSpc>
-              <a:spcAft>
-                <a:spcPts val="300"/>
+                <a:spcPct val="85000"/>
+              </a:lnSpc>
+              <a:spcBef>
+                <a:spcPts val="200"/>
+              </a:spcBef>
+              <a:spcAft>
+                <a:spcPts val="200"/>
               </a:spcAft>
               <a:defRPr sz="2000"/>
             </a:pPr>
@@ -9712,10 +10272,13 @@
           <a:p>
             <a:pPr>
               <a:lnSpc>
-                <a:spcPct val="90000"/>
-              </a:lnSpc>
-              <a:spcAft>
-                <a:spcPts val="300"/>
+                <a:spcPct val="85000"/>
+              </a:lnSpc>
+              <a:spcBef>
+                <a:spcPts val="200"/>
+              </a:spcBef>
+              <a:spcAft>
+                <a:spcPts val="200"/>
               </a:spcAft>
               <a:defRPr sz="2000"/>
             </a:pPr>
@@ -9727,10 +10290,13 @@
           <a:p>
             <a:pPr>
               <a:lnSpc>
-                <a:spcPct val="90000"/>
-              </a:lnSpc>
-              <a:spcAft>
-                <a:spcPts val="300"/>
+                <a:spcPct val="85000"/>
+              </a:lnSpc>
+              <a:spcBef>
+                <a:spcPts val="200"/>
+              </a:spcBef>
+              <a:spcAft>
+                <a:spcPts val="200"/>
               </a:spcAft>
               <a:defRPr sz="2000"/>
             </a:pPr>
@@ -9753,10 +10319,13 @@
           <a:p>
             <a:pPr>
               <a:lnSpc>
-                <a:spcPct val="90000"/>
-              </a:lnSpc>
-              <a:spcAft>
-                <a:spcPts val="300"/>
+                <a:spcPct val="85000"/>
+              </a:lnSpc>
+              <a:spcBef>
+                <a:spcPts val="200"/>
+              </a:spcBef>
+              <a:spcAft>
+                <a:spcPts val="200"/>
               </a:spcAft>
               <a:defRPr sz="2000" b="1"/>
             </a:pPr>
@@ -9768,10 +10337,13 @@
           <a:p>
             <a:pPr lvl="1">
               <a:lnSpc>
-                <a:spcPct val="90000"/>
-              </a:lnSpc>
-              <a:spcAft>
-                <a:spcPts val="300"/>
+                <a:spcPct val="85000"/>
+              </a:lnSpc>
+              <a:spcBef>
+                <a:spcPts val="200"/>
+              </a:spcBef>
+              <a:spcAft>
+                <a:spcPts val="200"/>
               </a:spcAft>
               <a:defRPr sz="1800"/>
             </a:pPr>
@@ -9783,10 +10355,13 @@
           <a:p>
             <a:pPr lvl="1">
               <a:lnSpc>
-                <a:spcPct val="90000"/>
-              </a:lnSpc>
-              <a:spcAft>
-                <a:spcPts val="300"/>
+                <a:spcPct val="85000"/>
+              </a:lnSpc>
+              <a:spcBef>
+                <a:spcPts val="200"/>
+              </a:spcBef>
+              <a:spcAft>
+                <a:spcPts val="200"/>
               </a:spcAft>
               <a:defRPr sz="1800"/>
             </a:pPr>
@@ -9798,10 +10373,13 @@
           <a:p>
             <a:pPr lvl="1">
               <a:lnSpc>
-                <a:spcPct val="90000"/>
-              </a:lnSpc>
-              <a:spcAft>
-                <a:spcPts val="300"/>
+                <a:spcPct val="85000"/>
+              </a:lnSpc>
+              <a:spcBef>
+                <a:spcPts val="200"/>
+              </a:spcBef>
+              <a:spcAft>
+                <a:spcPts val="200"/>
               </a:spcAft>
               <a:defRPr sz="1800"/>
             </a:pPr>
@@ -9813,10 +10391,13 @@
           <a:p>
             <a:pPr lvl="1">
               <a:lnSpc>
-                <a:spcPct val="90000"/>
-              </a:lnSpc>
-              <a:spcAft>
-                <a:spcPts val="300"/>
+                <a:spcPct val="85000"/>
+              </a:lnSpc>
+              <a:spcBef>
+                <a:spcPts val="200"/>
+              </a:spcBef>
+              <a:spcAft>
+                <a:spcPts val="200"/>
               </a:spcAft>
               <a:defRPr sz="1800"/>
             </a:pPr>
@@ -9839,10 +10420,13 @@
           <a:p>
             <a:pPr>
               <a:lnSpc>
-                <a:spcPct val="90000"/>
-              </a:lnSpc>
-              <a:spcAft>
-                <a:spcPts val="300"/>
+                <a:spcPct val="85000"/>
+              </a:lnSpc>
+              <a:spcBef>
+                <a:spcPts val="200"/>
+              </a:spcBef>
+              <a:spcAft>
+                <a:spcPts val="200"/>
               </a:spcAft>
               <a:defRPr sz="2000"/>
             </a:pPr>
@@ -9883,10 +10467,19 @@
         </p:nvSpPr>
         <p:spPr/>
         <p:txBody>
-          <a:bodyPr wrap="square"/>
+          <a:bodyPr wrap="square" tIns="25400" bIns="25400" lIns="63500" rIns="63500"/>
           <a:lstStyle/>
           <a:p>
             <a:pPr>
+              <a:lnSpc>
+                <a:spcPct val="85000"/>
+              </a:lnSpc>
+              <a:spcBef>
+                <a:spcPts val="200"/>
+              </a:spcBef>
+              <a:spcAft>
+                <a:spcPts val="200"/>
+              </a:spcAft>
               <a:defRPr sz="4000" b="1">
                 <a:solidFill>
                   <a:srgbClr val="667EEA"/>
@@ -9894,6 +10487,7 @@
               </a:defRPr>
             </a:pPr>
             <a:r>
+              <a:rPr/>
               <a:t>📝 Ünite Özeti</a:t>
             </a:r>
           </a:p>
@@ -9933,7 +10527,7 @@
           <a:noFill/>
         </p:spPr>
         <p:txBody>
-          <a:bodyPr wrap="square">
+          <a:bodyPr wrap="square" tIns="25400" bIns="25400" lIns="63500" rIns="63500">
             <a:spAutoFit/>
           </a:bodyPr>
           <a:lstStyle/>
@@ -9950,10 +10544,13 @@
           <a:p>
             <a:pPr>
               <a:lnSpc>
-                <a:spcPct val="90000"/>
-              </a:lnSpc>
-              <a:spcAft>
-                <a:spcPts val="300"/>
+                <a:spcPct val="85000"/>
+              </a:lnSpc>
+              <a:spcBef>
+                <a:spcPts val="200"/>
+              </a:spcBef>
+              <a:spcAft>
+                <a:spcPts val="200"/>
               </a:spcAft>
               <a:defRPr sz="2000"/>
             </a:pPr>
@@ -9976,10 +10573,13 @@
           <a:p>
             <a:pPr>
               <a:lnSpc>
-                <a:spcPct val="90000"/>
-              </a:lnSpc>
-              <a:spcAft>
-                <a:spcPts val="300"/>
+                <a:spcPct val="85000"/>
+              </a:lnSpc>
+              <a:spcBef>
+                <a:spcPts val="200"/>
+              </a:spcBef>
+              <a:spcAft>
+                <a:spcPts val="200"/>
               </a:spcAft>
               <a:defRPr sz="2000" b="1"/>
             </a:pPr>
@@ -9991,10 +10591,13 @@
           <a:p>
             <a:pPr>
               <a:lnSpc>
-                <a:spcPct val="90000"/>
-              </a:lnSpc>
-              <a:spcAft>
-                <a:spcPts val="300"/>
+                <a:spcPct val="85000"/>
+              </a:lnSpc>
+              <a:spcBef>
+                <a:spcPts val="200"/>
+              </a:spcBef>
+              <a:spcAft>
+                <a:spcPts val="200"/>
               </a:spcAft>
               <a:defRPr sz="2000" b="1"/>
             </a:pPr>
@@ -10006,10 +10609,13 @@
           <a:p>
             <a:pPr>
               <a:lnSpc>
-                <a:spcPct val="90000"/>
-              </a:lnSpc>
-              <a:spcAft>
-                <a:spcPts val="300"/>
+                <a:spcPct val="85000"/>
+              </a:lnSpc>
+              <a:spcBef>
+                <a:spcPts val="200"/>
+              </a:spcBef>
+              <a:spcAft>
+                <a:spcPts val="200"/>
               </a:spcAft>
               <a:defRPr sz="2000" b="1"/>
             </a:pPr>
@@ -10021,10 +10627,13 @@
           <a:p>
             <a:pPr lvl="1">
               <a:lnSpc>
-                <a:spcPct val="90000"/>
-              </a:lnSpc>
-              <a:spcAft>
-                <a:spcPts val="300"/>
+                <a:spcPct val="85000"/>
+              </a:lnSpc>
+              <a:spcBef>
+                <a:spcPts val="200"/>
+              </a:spcBef>
+              <a:spcAft>
+                <a:spcPts val="200"/>
               </a:spcAft>
               <a:defRPr sz="1800"/>
             </a:pPr>
@@ -10036,10 +10645,13 @@
           <a:p>
             <a:pPr lvl="1">
               <a:lnSpc>
-                <a:spcPct val="90000"/>
-              </a:lnSpc>
-              <a:spcAft>
-                <a:spcPts val="300"/>
+                <a:spcPct val="85000"/>
+              </a:lnSpc>
+              <a:spcBef>
+                <a:spcPts val="200"/>
+              </a:spcBef>
+              <a:spcAft>
+                <a:spcPts val="200"/>
               </a:spcAft>
               <a:defRPr sz="1800"/>
             </a:pPr>
@@ -10051,10 +10663,13 @@
           <a:p>
             <a:pPr lvl="1">
               <a:lnSpc>
-                <a:spcPct val="90000"/>
-              </a:lnSpc>
-              <a:spcAft>
-                <a:spcPts val="300"/>
+                <a:spcPct val="85000"/>
+              </a:lnSpc>
+              <a:spcBef>
+                <a:spcPts val="200"/>
+              </a:spcBef>
+              <a:spcAft>
+                <a:spcPts val="200"/>
               </a:spcAft>
               <a:defRPr sz="1800"/>
             </a:pPr>
@@ -10066,10 +10681,13 @@
           <a:p>
             <a:pPr lvl="1">
               <a:lnSpc>
-                <a:spcPct val="90000"/>
-              </a:lnSpc>
-              <a:spcAft>
-                <a:spcPts val="300"/>
+                <a:spcPct val="85000"/>
+              </a:lnSpc>
+              <a:spcBef>
+                <a:spcPts val="200"/>
+              </a:spcBef>
+              <a:spcAft>
+                <a:spcPts val="200"/>
               </a:spcAft>
               <a:defRPr sz="1800"/>
             </a:pPr>
@@ -10081,10 +10699,13 @@
           <a:p>
             <a:pPr lvl="1">
               <a:lnSpc>
-                <a:spcPct val="90000"/>
-              </a:lnSpc>
-              <a:spcAft>
-                <a:spcPts val="300"/>
+                <a:spcPct val="85000"/>
+              </a:lnSpc>
+              <a:spcBef>
+                <a:spcPts val="200"/>
+              </a:spcBef>
+              <a:spcAft>
+                <a:spcPts val="200"/>
               </a:spcAft>
               <a:defRPr sz="1800"/>
             </a:pPr>
@@ -10096,10 +10717,13 @@
           <a:p>
             <a:pPr lvl="1">
               <a:lnSpc>
-                <a:spcPct val="90000"/>
-              </a:lnSpc>
-              <a:spcAft>
-                <a:spcPts val="300"/>
+                <a:spcPct val="85000"/>
+              </a:lnSpc>
+              <a:spcBef>
+                <a:spcPts val="200"/>
+              </a:spcBef>
+              <a:spcAft>
+                <a:spcPts val="200"/>
               </a:spcAft>
               <a:defRPr sz="1800"/>
             </a:pPr>
@@ -10111,10 +10735,13 @@
           <a:p>
             <a:pPr lvl="1">
               <a:lnSpc>
-                <a:spcPct val="90000"/>
-              </a:lnSpc>
-              <a:spcAft>
-                <a:spcPts val="300"/>
+                <a:spcPct val="85000"/>
+              </a:lnSpc>
+              <a:spcBef>
+                <a:spcPts val="200"/>
+              </a:spcBef>
+              <a:spcAft>
+                <a:spcPts val="200"/>
               </a:spcAft>
               <a:defRPr sz="1800"/>
             </a:pPr>
@@ -10126,10 +10753,13 @@
           <a:p>
             <a:pPr>
               <a:lnSpc>
-                <a:spcPct val="90000"/>
-              </a:lnSpc>
-              <a:spcAft>
-                <a:spcPts val="300"/>
+                <a:spcPct val="85000"/>
+              </a:lnSpc>
+              <a:spcBef>
+                <a:spcPts val="200"/>
+              </a:spcBef>
+              <a:spcAft>
+                <a:spcPts val="200"/>
               </a:spcAft>
               <a:defRPr sz="2000" b="1"/>
             </a:pPr>
@@ -10141,10 +10771,13 @@
           <a:p>
             <a:pPr>
               <a:lnSpc>
-                <a:spcPct val="90000"/>
-              </a:lnSpc>
-              <a:spcAft>
-                <a:spcPts val="300"/>
+                <a:spcPct val="85000"/>
+              </a:lnSpc>
+              <a:spcBef>
+                <a:spcPts val="200"/>
+              </a:spcBef>
+              <a:spcAft>
+                <a:spcPts val="200"/>
               </a:spcAft>
               <a:defRPr sz="2000" b="1"/>
             </a:pPr>
@@ -10156,10 +10789,13 @@
           <a:p>
             <a:pPr>
               <a:lnSpc>
-                <a:spcPct val="90000"/>
-              </a:lnSpc>
-              <a:spcAft>
-                <a:spcPts val="300"/>
+                <a:spcPct val="85000"/>
+              </a:lnSpc>
+              <a:spcBef>
+                <a:spcPts val="200"/>
+              </a:spcBef>
+              <a:spcAft>
+                <a:spcPts val="200"/>
               </a:spcAft>
               <a:defRPr sz="2000" b="1"/>
             </a:pPr>
@@ -10182,10 +10818,13 @@
           <a:p>
             <a:pPr>
               <a:lnSpc>
-                <a:spcPct val="90000"/>
-              </a:lnSpc>
-              <a:spcAft>
-                <a:spcPts val="300"/>
+                <a:spcPct val="85000"/>
+              </a:lnSpc>
+              <a:spcBef>
+                <a:spcPts val="200"/>
+              </a:spcBef>
+              <a:spcAft>
+                <a:spcPts val="200"/>
               </a:spcAft>
               <a:defRPr sz="2000" b="1"/>
             </a:pPr>
@@ -10197,10 +10836,13 @@
           <a:p>
             <a:pPr>
               <a:lnSpc>
-                <a:spcPct val="90000"/>
-              </a:lnSpc>
-              <a:spcAft>
-                <a:spcPts val="300"/>
+                <a:spcPct val="85000"/>
+              </a:lnSpc>
+              <a:spcBef>
+                <a:spcPts val="200"/>
+              </a:spcBef>
+              <a:spcAft>
+                <a:spcPts val="200"/>
               </a:spcAft>
               <a:defRPr sz="2000"/>
             </a:pPr>
@@ -10212,10 +10854,13 @@
           <a:p>
             <a:pPr>
               <a:lnSpc>
-                <a:spcPct val="90000"/>
-              </a:lnSpc>
-              <a:spcAft>
-                <a:spcPts val="300"/>
+                <a:spcPct val="85000"/>
+              </a:lnSpc>
+              <a:spcBef>
+                <a:spcPts val="200"/>
+              </a:spcBef>
+              <a:spcAft>
+                <a:spcPts val="200"/>
               </a:spcAft>
               <a:defRPr sz="2000"/>
             </a:pPr>
@@ -10238,10 +10883,13 @@
           <a:p>
             <a:pPr>
               <a:lnSpc>
-                <a:spcPct val="90000"/>
-              </a:lnSpc>
-              <a:spcAft>
-                <a:spcPts val="300"/>
+                <a:spcPct val="85000"/>
+              </a:lnSpc>
+              <a:spcBef>
+                <a:spcPts val="200"/>
+              </a:spcBef>
+              <a:spcAft>
+                <a:spcPts val="200"/>
               </a:spcAft>
               <a:defRPr sz="2000" b="1"/>
             </a:pPr>
@@ -10282,10 +10930,19 @@
         </p:nvSpPr>
         <p:spPr/>
         <p:txBody>
-          <a:bodyPr wrap="square"/>
+          <a:bodyPr wrap="square" tIns="25400" bIns="25400" lIns="63500" rIns="63500"/>
           <a:lstStyle/>
           <a:p>
             <a:pPr>
+              <a:lnSpc>
+                <a:spcPct val="85000"/>
+              </a:lnSpc>
+              <a:spcBef>
+                <a:spcPts val="200"/>
+              </a:spcBef>
+              <a:spcAft>
+                <a:spcPts val="200"/>
+              </a:spcAft>
               <a:defRPr sz="4000" b="1">
                 <a:solidFill>
                   <a:srgbClr val="667EEA"/>
@@ -10293,6 +10950,7 @@
               </a:defRPr>
             </a:pPr>
             <a:r>
+              <a:rPr/>
               <a:t>📚 Ünitenin Konuları</a:t>
             </a:r>
           </a:p>
@@ -10332,7 +10990,7 @@
           <a:noFill/>
         </p:spPr>
         <p:txBody>
-          <a:bodyPr wrap="square">
+          <a:bodyPr wrap="square" tIns="25400" bIns="25400" lIns="63500" rIns="63500">
             <a:spAutoFit/>
           </a:bodyPr>
           <a:lstStyle/>
@@ -10349,10 +11007,13 @@
           <a:p>
             <a:pPr>
               <a:lnSpc>
-                <a:spcPct val="90000"/>
-              </a:lnSpc>
-              <a:spcAft>
-                <a:spcPts val="300"/>
+                <a:spcPct val="85000"/>
+              </a:lnSpc>
+              <a:spcBef>
+                <a:spcPts val="200"/>
+              </a:spcBef>
+              <a:spcAft>
+                <a:spcPts val="200"/>
               </a:spcAft>
               <a:defRPr sz="2000"/>
             </a:pPr>
@@ -10375,10 +11036,13 @@
           <a:p>
             <a:pPr>
               <a:lnSpc>
-                <a:spcPct val="90000"/>
-              </a:lnSpc>
-              <a:spcAft>
-                <a:spcPts val="300"/>
+                <a:spcPct val="85000"/>
+              </a:lnSpc>
+              <a:spcBef>
+                <a:spcPts val="200"/>
+              </a:spcBef>
+              <a:spcAft>
+                <a:spcPts val="200"/>
               </a:spcAft>
               <a:defRPr sz="2000" b="1"/>
             </a:pPr>
@@ -10390,10 +11054,13 @@
           <a:p>
             <a:pPr>
               <a:lnSpc>
-                <a:spcPct val="90000"/>
-              </a:lnSpc>
-              <a:spcAft>
-                <a:spcPts val="300"/>
+                <a:spcPct val="85000"/>
+              </a:lnSpc>
+              <a:spcBef>
+                <a:spcPts val="200"/>
+              </a:spcBef>
+              <a:spcAft>
+                <a:spcPts val="200"/>
               </a:spcAft>
               <a:defRPr sz="2000" b="1"/>
             </a:pPr>
@@ -10405,10 +11072,13 @@
           <a:p>
             <a:pPr>
               <a:lnSpc>
-                <a:spcPct val="90000"/>
-              </a:lnSpc>
-              <a:spcAft>
-                <a:spcPts val="300"/>
+                <a:spcPct val="85000"/>
+              </a:lnSpc>
+              <a:spcBef>
+                <a:spcPts val="200"/>
+              </a:spcBef>
+              <a:spcAft>
+                <a:spcPts val="200"/>
               </a:spcAft>
               <a:defRPr sz="2000" b="1"/>
             </a:pPr>
@@ -10420,10 +11090,13 @@
           <a:p>
             <a:pPr>
               <a:lnSpc>
-                <a:spcPct val="90000"/>
-              </a:lnSpc>
-              <a:spcAft>
-                <a:spcPts val="300"/>
+                <a:spcPct val="85000"/>
+              </a:lnSpc>
+              <a:spcBef>
+                <a:spcPts val="200"/>
+              </a:spcBef>
+              <a:spcAft>
+                <a:spcPts val="200"/>
               </a:spcAft>
               <a:defRPr sz="2000" b="1"/>
             </a:pPr>
@@ -10435,10 +11108,13 @@
           <a:p>
             <a:pPr>
               <a:lnSpc>
-                <a:spcPct val="90000"/>
-              </a:lnSpc>
-              <a:spcAft>
-                <a:spcPts val="300"/>
+                <a:spcPct val="85000"/>
+              </a:lnSpc>
+              <a:spcBef>
+                <a:spcPts val="200"/>
+              </a:spcBef>
+              <a:spcAft>
+                <a:spcPts val="200"/>
               </a:spcAft>
               <a:defRPr sz="2000" b="1"/>
             </a:pPr>
@@ -10450,10 +11126,13 @@
           <a:p>
             <a:pPr>
               <a:lnSpc>
-                <a:spcPct val="90000"/>
-              </a:lnSpc>
-              <a:spcAft>
-                <a:spcPts val="300"/>
+                <a:spcPct val="85000"/>
+              </a:lnSpc>
+              <a:spcBef>
+                <a:spcPts val="200"/>
+              </a:spcBef>
+              <a:spcAft>
+                <a:spcPts val="200"/>
               </a:spcAft>
               <a:defRPr sz="2000" b="1"/>
             </a:pPr>
@@ -10465,10 +11144,13 @@
           <a:p>
             <a:pPr>
               <a:lnSpc>
-                <a:spcPct val="90000"/>
-              </a:lnSpc>
-              <a:spcAft>
-                <a:spcPts val="300"/>
+                <a:spcPct val="85000"/>
+              </a:lnSpc>
+              <a:spcBef>
+                <a:spcPts val="200"/>
+              </a:spcBef>
+              <a:spcAft>
+                <a:spcPts val="200"/>
               </a:spcAft>
               <a:defRPr sz="2000" b="1"/>
             </a:pPr>
@@ -10480,10 +11162,13 @@
           <a:p>
             <a:pPr>
               <a:lnSpc>
-                <a:spcPct val="90000"/>
-              </a:lnSpc>
-              <a:spcAft>
-                <a:spcPts val="300"/>
+                <a:spcPct val="85000"/>
+              </a:lnSpc>
+              <a:spcBef>
+                <a:spcPts val="200"/>
+              </a:spcBef>
+              <a:spcAft>
+                <a:spcPts val="200"/>
               </a:spcAft>
               <a:defRPr sz="2000" b="1"/>
             </a:pPr>
@@ -10506,10 +11191,13 @@
           <a:p>
             <a:pPr>
               <a:lnSpc>
-                <a:spcPct val="90000"/>
-              </a:lnSpc>
-              <a:spcAft>
-                <a:spcPts val="300"/>
+                <a:spcPct val="85000"/>
+              </a:lnSpc>
+              <a:spcBef>
+                <a:spcPts val="200"/>
+              </a:spcBef>
+              <a:spcAft>
+                <a:spcPts val="200"/>
               </a:spcAft>
               <a:defRPr sz="2000"/>
             </a:pPr>
@@ -10521,10 +11209,13 @@
           <a:p>
             <a:pPr>
               <a:lnSpc>
-                <a:spcPct val="90000"/>
-              </a:lnSpc>
-              <a:spcAft>
-                <a:spcPts val="300"/>
+                <a:spcPct val="85000"/>
+              </a:lnSpc>
+              <a:spcBef>
+                <a:spcPts val="200"/>
+              </a:spcBef>
+              <a:spcAft>
+                <a:spcPts val="200"/>
               </a:spcAft>
               <a:defRPr sz="2000" b="1"/>
             </a:pPr>
@@ -10565,10 +11256,19 @@
         </p:nvSpPr>
         <p:spPr/>
         <p:txBody>
-          <a:bodyPr wrap="square"/>
+          <a:bodyPr wrap="square" tIns="25400" bIns="25400" lIns="63500" rIns="63500"/>
           <a:lstStyle/>
           <a:p>
             <a:pPr>
+              <a:lnSpc>
+                <a:spcPct val="85000"/>
+              </a:lnSpc>
+              <a:spcBef>
+                <a:spcPts val="200"/>
+              </a:spcBef>
+              <a:spcAft>
+                <a:spcPts val="200"/>
+              </a:spcAft>
               <a:defRPr sz="4000" b="1">
                 <a:solidFill>
                   <a:srgbClr val="667EEA"/>
@@ -10576,6 +11276,7 @@
               </a:defRPr>
             </a:pPr>
             <a:r>
+              <a:rPr/>
               <a:t>📚 Kaynaklar ve Videolar</a:t>
             </a:r>
           </a:p>
@@ -10615,7 +11316,7 @@
           <a:noFill/>
         </p:spPr>
         <p:txBody>
-          <a:bodyPr wrap="square">
+          <a:bodyPr wrap="square" tIns="25400" bIns="25400" lIns="63500" rIns="63500">
             <a:spAutoFit/>
           </a:bodyPr>
           <a:lstStyle/>
@@ -10632,6 +11333,24 @@
           <a:p>
             <a:pPr>
               <a:lnSpc>
+                <a:spcPct val="85000"/>
+              </a:lnSpc>
+              <a:spcBef>
+                <a:spcPts val="200"/>
+              </a:spcBef>
+              <a:spcAft>
+                <a:spcPts val="200"/>
+              </a:spcAft>
+              <a:defRPr sz="2000"/>
+            </a:pPr>
+            <a:r>
+              <a:rPr sz="1300"/>
+              <a:t>Daha fazla öğrenmek için:</a:t>
+            </a:r>
+          </a:p>
+          <a:p>
+            <a:pPr>
+              <a:lnSpc>
                 <a:spcPct val="90000"/>
               </a:lnSpc>
               <a:spcAft>
@@ -10639,9 +11358,95 @@
               </a:spcAft>
               <a:defRPr sz="2000"/>
             </a:pPr>
-            <a:r>
-              <a:rPr sz="1300"/>
-              <a:t>Daha fazla öğrenmek için:</a:t>
+          </a:p>
+          <a:p>
+            <a:pPr>
+              <a:lnSpc>
+                <a:spcPct val="85000"/>
+              </a:lnSpc>
+              <a:spcBef>
+                <a:spcPts val="200"/>
+              </a:spcBef>
+              <a:spcAft>
+                <a:spcPts val="200"/>
+              </a:spcAft>
+              <a:defRPr sz="2000"/>
+            </a:pPr>
+            <a:r>
+              <a:rPr sz="1300"/>
+              <a:t>🎥 İzlenecek Videolar:</a:t>
+            </a:r>
+          </a:p>
+          <a:p>
+            <a:pPr lvl="1">
+              <a:lnSpc>
+                <a:spcPct val="85000"/>
+              </a:lnSpc>
+              <a:spcBef>
+                <a:spcPts val="200"/>
+              </a:spcBef>
+              <a:spcAft>
+                <a:spcPts val="200"/>
+              </a:spcAft>
+              <a:defRPr sz="1800"/>
+            </a:pPr>
+            <a:r>
+              <a:rPr sz="1300"/>
+              <a:t>    • 'Proje Yönetimi Nedir?' - TRT Okul</a:t>
+            </a:r>
+          </a:p>
+          <a:p>
+            <a:pPr lvl="1">
+              <a:lnSpc>
+                <a:spcPct val="85000"/>
+              </a:lnSpc>
+              <a:spcBef>
+                <a:spcPts val="200"/>
+              </a:spcBef>
+              <a:spcAft>
+                <a:spcPts val="200"/>
+              </a:spcAft>
+              <a:defRPr sz="1800"/>
+            </a:pPr>
+            <a:r>
+              <a:rPr sz="1300"/>
+              <a:t>    • 'Bir Mobil Uygulama Nasıl Yapılır?' - Scratch Türkiye</a:t>
+            </a:r>
+          </a:p>
+          <a:p>
+            <a:pPr lvl="1">
+              <a:lnSpc>
+                <a:spcPct val="85000"/>
+              </a:lnSpc>
+              <a:spcBef>
+                <a:spcPts val="200"/>
+              </a:spcBef>
+              <a:spcAft>
+                <a:spcPts val="200"/>
+              </a:spcAft>
+              <a:defRPr sz="1800"/>
+            </a:pPr>
+            <a:r>
+              <a:rPr sz="1300"/>
+              <a:t>    • 'Kullanıcı Deneyimi (UX) Nedir?' - YouTube</a:t>
+            </a:r>
+          </a:p>
+          <a:p>
+            <a:pPr lvl="1">
+              <a:lnSpc>
+                <a:spcPct val="85000"/>
+              </a:lnSpc>
+              <a:spcBef>
+                <a:spcPts val="200"/>
+              </a:spcBef>
+              <a:spcAft>
+                <a:spcPts val="200"/>
+              </a:spcAft>
+              <a:defRPr sz="1800"/>
+            </a:pPr>
+            <a:r>
+              <a:rPr sz="1300"/>
+              <a:t>    • 'Instagram'ın Hikayesi' - Belgesel</a:t>
             </a:r>
           </a:p>
           <a:p>
@@ -10658,6 +11463,78 @@
           <a:p>
             <a:pPr>
               <a:lnSpc>
+                <a:spcPct val="85000"/>
+              </a:lnSpc>
+              <a:spcBef>
+                <a:spcPts val="200"/>
+              </a:spcBef>
+              <a:spcAft>
+                <a:spcPts val="200"/>
+              </a:spcAft>
+              <a:defRPr sz="2000"/>
+            </a:pPr>
+            <a:r>
+              <a:rPr sz="1300"/>
+              <a:t>🌐 Keşfedilecek Siteler:</a:t>
+            </a:r>
+          </a:p>
+          <a:p>
+            <a:pPr lvl="1">
+              <a:lnSpc>
+                <a:spcPct val="85000"/>
+              </a:lnSpc>
+              <a:spcBef>
+                <a:spcPts val="200"/>
+              </a:spcBef>
+              <a:spcAft>
+                <a:spcPts val="200"/>
+              </a:spcAft>
+              <a:defRPr sz="1800"/>
+            </a:pPr>
+            <a:r>
+              <a:rPr sz="1300"/>
+              <a:t>    • Scratch.mit.edu - Basit oyunlar tasarlayın</a:t>
+            </a:r>
+          </a:p>
+          <a:p>
+            <a:pPr lvl="1">
+              <a:lnSpc>
+                <a:spcPct val="85000"/>
+              </a:lnSpc>
+              <a:spcBef>
+                <a:spcPts val="200"/>
+              </a:spcBef>
+              <a:spcAft>
+                <a:spcPts val="200"/>
+              </a:spcAft>
+              <a:defRPr sz="1800"/>
+            </a:pPr>
+            <a:r>
+              <a:rPr sz="1300"/>
+              <a:t>    • Canva.com - Tasarım yapın</a:t>
+            </a:r>
+          </a:p>
+          <a:p>
+            <a:pPr lvl="1">
+              <a:lnSpc>
+                <a:spcPct val="85000"/>
+              </a:lnSpc>
+              <a:spcBef>
+                <a:spcPts val="200"/>
+              </a:spcBef>
+              <a:spcAft>
+                <a:spcPts val="200"/>
+              </a:spcAft>
+              <a:defRPr sz="1800"/>
+            </a:pPr>
+            <a:r>
+              <a:rPr sz="1300"/>
+              <a:t>    • Trello.com - Proje yönetimi</a:t>
+            </a:r>
+          </a:p>
+          <a:p>
+            <a:pPr>
+              <a:lnSpc>
                 <a:spcPct val="90000"/>
               </a:lnSpc>
               <a:spcAft>
@@ -10665,231 +11542,100 @@
               </a:spcAft>
               <a:defRPr sz="2000"/>
             </a:pPr>
-            <a:r>
-              <a:rPr sz="1300"/>
-              <a:t>🎥 İzlenecek Videolar:</a:t>
-            </a:r>
-          </a:p>
-          <a:p>
-            <a:pPr lvl="1">
+          </a:p>
+          <a:p>
+            <a:pPr>
+              <a:lnSpc>
+                <a:spcPct val="85000"/>
+              </a:lnSpc>
+              <a:spcBef>
+                <a:spcPts val="200"/>
+              </a:spcBef>
+              <a:spcAft>
+                <a:spcPts val="200"/>
+              </a:spcAft>
+              <a:defRPr sz="2000"/>
+            </a:pPr>
+            <a:r>
+              <a:rPr sz="1300"/>
+              <a:t>📖 Deneyebileceğiniz Aktiviteler:</a:t>
+            </a:r>
+          </a:p>
+          <a:p>
+            <a:pPr lvl="1">
+              <a:lnSpc>
+                <a:spcPct val="85000"/>
+              </a:lnSpc>
+              <a:spcBef>
+                <a:spcPts val="200"/>
+              </a:spcBef>
+              <a:spcAft>
+                <a:spcPts val="200"/>
+              </a:spcAft>
+              <a:defRPr sz="1800"/>
+            </a:pPr>
+            <a:r>
+              <a:rPr sz="1300"/>
+              <a:t>    • Kağıt prototip çizme yarışması</a:t>
+            </a:r>
+          </a:p>
+          <a:p>
+            <a:pPr lvl="1">
+              <a:lnSpc>
+                <a:spcPct val="85000"/>
+              </a:lnSpc>
+              <a:spcBef>
+                <a:spcPts val="200"/>
+              </a:spcBef>
+              <a:spcAft>
+                <a:spcPts val="200"/>
+              </a:spcAft>
+              <a:defRPr sz="1800"/>
+            </a:pPr>
+            <a:r>
+              <a:rPr sz="1300"/>
+              <a:t>    • Sevdiğiniz uygulamaları analiz edin</a:t>
+            </a:r>
+          </a:p>
+          <a:p>
+            <a:pPr lvl="1">
+              <a:lnSpc>
+                <a:spcPct val="85000"/>
+              </a:lnSpc>
+              <a:spcBef>
+                <a:spcPts val="200"/>
+              </a:spcBef>
+              <a:spcAft>
+                <a:spcPts val="200"/>
+              </a:spcAft>
+              <a:defRPr sz="1800"/>
+            </a:pPr>
+            <a:r>
+              <a:rPr sz="1300"/>
+              <a:t>    • Mini bir Scratch projesi yapın</a:t>
+            </a:r>
+          </a:p>
+          <a:p>
+            <a:pPr>
               <a:lnSpc>
                 <a:spcPct val="90000"/>
               </a:lnSpc>
               <a:spcAft>
                 <a:spcPts val="300"/>
               </a:spcAft>
-              <a:defRPr sz="1800"/>
-            </a:pPr>
-            <a:r>
-              <a:rPr sz="1300"/>
-              <a:t>    • 'Proje Yönetimi Nedir?' - TRT Okul</a:t>
-            </a:r>
-          </a:p>
-          <a:p>
-            <a:pPr lvl="1">
-              <a:lnSpc>
-                <a:spcPct val="90000"/>
-              </a:lnSpc>
-              <a:spcAft>
-                <a:spcPts val="300"/>
-              </a:spcAft>
-              <a:defRPr sz="1800"/>
-            </a:pPr>
-            <a:r>
-              <a:rPr sz="1300"/>
-              <a:t>    • 'Bir Mobil Uygulama Nasıl Yapılır?' - Scratch Türkiye</a:t>
-            </a:r>
-          </a:p>
-          <a:p>
-            <a:pPr lvl="1">
-              <a:lnSpc>
-                <a:spcPct val="90000"/>
-              </a:lnSpc>
-              <a:spcAft>
-                <a:spcPts val="300"/>
-              </a:spcAft>
-              <a:defRPr sz="1800"/>
-            </a:pPr>
-            <a:r>
-              <a:rPr sz="1300"/>
-              <a:t>    • 'Kullanıcı Deneyimi (UX) Nedir?' - YouTube</a:t>
-            </a:r>
-          </a:p>
-          <a:p>
-            <a:pPr lvl="1">
-              <a:lnSpc>
-                <a:spcPct val="90000"/>
-              </a:lnSpc>
-              <a:spcAft>
-                <a:spcPts val="300"/>
-              </a:spcAft>
-              <a:defRPr sz="1800"/>
-            </a:pPr>
-            <a:r>
-              <a:rPr sz="1300"/>
-              <a:t>    • 'Instagram'ın Hikayesi' - Belgesel</a:t>
-            </a:r>
-          </a:p>
-          <a:p>
-            <a:pPr>
-              <a:lnSpc>
-                <a:spcPct val="90000"/>
-              </a:lnSpc>
-              <a:spcAft>
-                <a:spcPts val="300"/>
-              </a:spcAft>
-              <a:defRPr sz="2000"/>
-            </a:pPr>
-          </a:p>
-          <a:p>
-            <a:pPr>
-              <a:lnSpc>
-                <a:spcPct val="90000"/>
-              </a:lnSpc>
-              <a:spcAft>
-                <a:spcPts val="300"/>
-              </a:spcAft>
-              <a:defRPr sz="2000"/>
-            </a:pPr>
-            <a:r>
-              <a:rPr sz="1300"/>
-              <a:t>🌐 Keşfedilecek Siteler:</a:t>
-            </a:r>
-          </a:p>
-          <a:p>
-            <a:pPr lvl="1">
-              <a:lnSpc>
-                <a:spcPct val="90000"/>
-              </a:lnSpc>
-              <a:spcAft>
-                <a:spcPts val="300"/>
-              </a:spcAft>
-              <a:defRPr sz="1800"/>
-            </a:pPr>
-            <a:r>
-              <a:rPr sz="1300"/>
-              <a:t>    • Scratch.mit.edu - Basit oyunlar tasarlayın</a:t>
-            </a:r>
-          </a:p>
-          <a:p>
-            <a:pPr lvl="1">
-              <a:lnSpc>
-                <a:spcPct val="90000"/>
-              </a:lnSpc>
-              <a:spcAft>
-                <a:spcPts val="300"/>
-              </a:spcAft>
-              <a:defRPr sz="1800"/>
-            </a:pPr>
-            <a:r>
-              <a:rPr sz="1300"/>
-              <a:t>    • Canva.com - Tasarım yapın</a:t>
-            </a:r>
-          </a:p>
-          <a:p>
-            <a:pPr lvl="1">
-              <a:lnSpc>
-                <a:spcPct val="90000"/>
-              </a:lnSpc>
-              <a:spcAft>
-                <a:spcPts val="300"/>
-              </a:spcAft>
-              <a:defRPr sz="1800"/>
-            </a:pPr>
-            <a:r>
-              <a:rPr sz="1300"/>
-              <a:t>    • Trello.com - Proje yönetimi</a:t>
-            </a:r>
-          </a:p>
-          <a:p>
-            <a:pPr>
-              <a:lnSpc>
-                <a:spcPct val="90000"/>
-              </a:lnSpc>
-              <a:spcAft>
-                <a:spcPts val="300"/>
-              </a:spcAft>
-              <a:defRPr sz="2000"/>
-            </a:pPr>
-          </a:p>
-          <a:p>
-            <a:pPr>
-              <a:lnSpc>
-                <a:spcPct val="90000"/>
-              </a:lnSpc>
-              <a:spcAft>
-                <a:spcPts val="300"/>
-              </a:spcAft>
-              <a:defRPr sz="2000"/>
-            </a:pPr>
-            <a:r>
-              <a:rPr sz="1300"/>
-              <a:t>📖 Deneyebileceğiniz Aktiviteler:</a:t>
-            </a:r>
-          </a:p>
-          <a:p>
-            <a:pPr lvl="1">
-              <a:lnSpc>
-                <a:spcPct val="90000"/>
-              </a:lnSpc>
-              <a:spcAft>
-                <a:spcPts val="300"/>
-              </a:spcAft>
-              <a:defRPr sz="1800"/>
-            </a:pPr>
-            <a:r>
-              <a:rPr sz="1300"/>
-              <a:t>    • Kağıt prototip çizme yarışması</a:t>
-            </a:r>
-          </a:p>
-          <a:p>
-            <a:pPr lvl="1">
-              <a:lnSpc>
-                <a:spcPct val="90000"/>
-              </a:lnSpc>
-              <a:spcAft>
-                <a:spcPts val="300"/>
-              </a:spcAft>
-              <a:defRPr sz="1800"/>
-            </a:pPr>
-            <a:r>
-              <a:rPr sz="1300"/>
-              <a:t>    • Sevdiğiniz uygulamaları analiz edin</a:t>
-            </a:r>
-          </a:p>
-          <a:p>
-            <a:pPr lvl="1">
-              <a:lnSpc>
-                <a:spcPct val="90000"/>
-              </a:lnSpc>
-              <a:spcAft>
-                <a:spcPts val="300"/>
-              </a:spcAft>
-              <a:defRPr sz="1800"/>
-            </a:pPr>
-            <a:r>
-              <a:rPr sz="1300"/>
-              <a:t>    • Mini bir Scratch projesi yapın</a:t>
-            </a:r>
-          </a:p>
-          <a:p>
-            <a:pPr>
-              <a:lnSpc>
-                <a:spcPct val="90000"/>
-              </a:lnSpc>
-              <a:spcAft>
-                <a:spcPts val="300"/>
-              </a:spcAft>
-              <a:defRPr sz="2000"/>
-            </a:pPr>
-          </a:p>
-          <a:p>
-            <a:pPr>
-              <a:lnSpc>
-                <a:spcPct val="90000"/>
-              </a:lnSpc>
-              <a:spcAft>
-                <a:spcPts val="300"/>
+              <a:defRPr sz="2000"/>
+            </a:pPr>
+          </a:p>
+          <a:p>
+            <a:pPr>
+              <a:lnSpc>
+                <a:spcPct val="85000"/>
+              </a:lnSpc>
+              <a:spcBef>
+                <a:spcPts val="200"/>
+              </a:spcBef>
+              <a:spcAft>
+                <a:spcPts val="200"/>
               </a:spcAft>
               <a:defRPr sz="2000" b="1"/>
             </a:pPr>
@@ -10901,10 +11647,13 @@
           <a:p>
             <a:pPr>
               <a:lnSpc>
-                <a:spcPct val="90000"/>
-              </a:lnSpc>
-              <a:spcAft>
-                <a:spcPts val="300"/>
+                <a:spcPct val="85000"/>
+              </a:lnSpc>
+              <a:spcBef>
+                <a:spcPts val="200"/>
+              </a:spcBef>
+              <a:spcAft>
+                <a:spcPts val="200"/>
               </a:spcAft>
               <a:defRPr sz="2000"/>
             </a:pPr>
@@ -10958,12 +11707,21 @@
           <a:noFill/>
         </p:spPr>
         <p:txBody>
-          <a:bodyPr wrap="square">
+          <a:bodyPr wrap="square" tIns="25400" bIns="25400" lIns="63500" rIns="63500">
             <a:spAutoFit/>
           </a:bodyPr>
           <a:lstStyle/>
           <a:p>
             <a:pPr algn="ctr">
+              <a:lnSpc>
+                <a:spcPct val="85000"/>
+              </a:lnSpc>
+              <a:spcBef>
+                <a:spcPts val="200"/>
+              </a:spcBef>
+              <a:spcAft>
+                <a:spcPts val="200"/>
+              </a:spcAft>
               <a:defRPr sz="5400" b="1">
                 <a:solidFill>
                   <a:srgbClr val="FFFFFF"/>
@@ -10971,6 +11729,7 @@
               </a:defRPr>
             </a:pPr>
             <a:r>
+              <a:rPr/>
               <a:t>Tebrikler! 🎉</a:t>
             </a:r>
           </a:p>
@@ -10993,12 +11752,21 @@
           <a:noFill/>
         </p:spPr>
         <p:txBody>
-          <a:bodyPr wrap="square">
+          <a:bodyPr wrap="square" tIns="25400" bIns="25400" lIns="63500" rIns="63500">
             <a:spAutoFit/>
           </a:bodyPr>
           <a:lstStyle/>
           <a:p>
             <a:pPr algn="ctr">
+              <a:lnSpc>
+                <a:spcPct val="85000"/>
+              </a:lnSpc>
+              <a:spcBef>
+                <a:spcPts val="200"/>
+              </a:spcBef>
+              <a:spcAft>
+                <a:spcPts val="200"/>
+              </a:spcAft>
               <a:defRPr sz="2800">
                 <a:solidFill>
                   <a:srgbClr val="FFFFFF"/>
@@ -11006,6 +11774,7 @@
               </a:defRPr>
             </a:pPr>
             <a:r>
+              <a:rPr/>
               <a:t>Ünite 2'yi Tamamladınız - Dijital Ürün Tasarımcısı Oldunuz!</a:t>
             </a:r>
           </a:p>
@@ -11041,10 +11810,19 @@
         </p:nvSpPr>
         <p:spPr/>
         <p:txBody>
-          <a:bodyPr wrap="square"/>
+          <a:bodyPr wrap="square" tIns="25400" bIns="25400" lIns="63500" rIns="63500"/>
           <a:lstStyle/>
           <a:p>
             <a:pPr>
+              <a:lnSpc>
+                <a:spcPct val="85000"/>
+              </a:lnSpc>
+              <a:spcBef>
+                <a:spcPts val="200"/>
+              </a:spcBef>
+              <a:spcAft>
+                <a:spcPts val="200"/>
+              </a:spcAft>
               <a:defRPr sz="4000" b="1">
                 <a:solidFill>
                   <a:srgbClr val="667EEA"/>
@@ -11052,6 +11830,7 @@
               </a:defRPr>
             </a:pPr>
             <a:r>
+              <a:rPr/>
               <a:t>📋 Proje Nedir?</a:t>
             </a:r>
           </a:p>
@@ -11091,7 +11870,7 @@
           <a:noFill/>
         </p:spPr>
         <p:txBody>
-          <a:bodyPr wrap="square">
+          <a:bodyPr wrap="square" tIns="25400" bIns="25400" lIns="63500" rIns="63500">
             <a:spAutoFit/>
           </a:bodyPr>
           <a:lstStyle/>
@@ -11108,10 +11887,13 @@
           <a:p>
             <a:pPr>
               <a:lnSpc>
-                <a:spcPct val="90000"/>
-              </a:lnSpc>
-              <a:spcAft>
-                <a:spcPts val="300"/>
+                <a:spcPct val="85000"/>
+              </a:lnSpc>
+              <a:spcBef>
+                <a:spcPts val="200"/>
+              </a:spcBef>
+              <a:spcAft>
+                <a:spcPts val="200"/>
               </a:spcAft>
               <a:defRPr sz="2000" b="1"/>
             </a:pPr>
@@ -11123,10 +11905,13 @@
           <a:p>
             <a:pPr>
               <a:lnSpc>
-                <a:spcPct val="90000"/>
-              </a:lnSpc>
-              <a:spcAft>
-                <a:spcPts val="300"/>
+                <a:spcPct val="85000"/>
+              </a:lnSpc>
+              <a:spcBef>
+                <a:spcPts val="200"/>
+              </a:spcBef>
+              <a:spcAft>
+                <a:spcPts val="200"/>
               </a:spcAft>
               <a:defRPr sz="2000"/>
             </a:pPr>
@@ -11149,10 +11934,13 @@
           <a:p>
             <a:pPr>
               <a:lnSpc>
-                <a:spcPct val="90000"/>
-              </a:lnSpc>
-              <a:spcAft>
-                <a:spcPts val="300"/>
+                <a:spcPct val="85000"/>
+              </a:lnSpc>
+              <a:spcBef>
+                <a:spcPts val="200"/>
+              </a:spcBef>
+              <a:spcAft>
+                <a:spcPts val="200"/>
               </a:spcAft>
               <a:defRPr sz="2000" b="1"/>
             </a:pPr>
@@ -11164,10 +11952,13 @@
           <a:p>
             <a:pPr lvl="1">
               <a:lnSpc>
-                <a:spcPct val="90000"/>
-              </a:lnSpc>
-              <a:spcAft>
-                <a:spcPts val="300"/>
+                <a:spcPct val="85000"/>
+              </a:lnSpc>
+              <a:spcBef>
+                <a:spcPts val="200"/>
+              </a:spcBef>
+              <a:spcAft>
+                <a:spcPts val="200"/>
               </a:spcAft>
               <a:defRPr sz="1800"/>
             </a:pPr>
@@ -11179,10 +11970,13 @@
           <a:p>
             <a:pPr lvl="1">
               <a:lnSpc>
-                <a:spcPct val="90000"/>
-              </a:lnSpc>
-              <a:spcAft>
-                <a:spcPts val="300"/>
+                <a:spcPct val="85000"/>
+              </a:lnSpc>
+              <a:spcBef>
+                <a:spcPts val="200"/>
+              </a:spcBef>
+              <a:spcAft>
+                <a:spcPts val="200"/>
               </a:spcAft>
               <a:defRPr sz="1800"/>
             </a:pPr>
@@ -11194,10 +11988,13 @@
           <a:p>
             <a:pPr lvl="1">
               <a:lnSpc>
-                <a:spcPct val="90000"/>
-              </a:lnSpc>
-              <a:spcAft>
-                <a:spcPts val="300"/>
+                <a:spcPct val="85000"/>
+              </a:lnSpc>
+              <a:spcBef>
+                <a:spcPts val="200"/>
+              </a:spcBef>
+              <a:spcAft>
+                <a:spcPts val="200"/>
               </a:spcAft>
               <a:defRPr sz="1800"/>
             </a:pPr>
@@ -11209,10 +12006,13 @@
           <a:p>
             <a:pPr lvl="1">
               <a:lnSpc>
-                <a:spcPct val="90000"/>
-              </a:lnSpc>
-              <a:spcAft>
-                <a:spcPts val="300"/>
+                <a:spcPct val="85000"/>
+              </a:lnSpc>
+              <a:spcBef>
+                <a:spcPts val="200"/>
+              </a:spcBef>
+              <a:spcAft>
+                <a:spcPts val="200"/>
               </a:spcAft>
               <a:defRPr sz="1800"/>
             </a:pPr>
@@ -11235,10 +12035,13 @@
           <a:p>
             <a:pPr>
               <a:lnSpc>
-                <a:spcPct val="90000"/>
-              </a:lnSpc>
-              <a:spcAft>
-                <a:spcPts val="300"/>
+                <a:spcPct val="85000"/>
+              </a:lnSpc>
+              <a:spcBef>
+                <a:spcPts val="200"/>
+              </a:spcBef>
+              <a:spcAft>
+                <a:spcPts val="200"/>
               </a:spcAft>
               <a:defRPr sz="2000" b="1"/>
             </a:pPr>
@@ -11250,10 +12053,13 @@
           <a:p>
             <a:pPr lvl="1">
               <a:lnSpc>
-                <a:spcPct val="90000"/>
-              </a:lnSpc>
-              <a:spcAft>
-                <a:spcPts val="300"/>
+                <a:spcPct val="85000"/>
+              </a:lnSpc>
+              <a:spcBef>
+                <a:spcPts val="200"/>
+              </a:spcBef>
+              <a:spcAft>
+                <a:spcPts val="200"/>
               </a:spcAft>
               <a:defRPr sz="1800"/>
             </a:pPr>
@@ -11265,10 +12071,13 @@
           <a:p>
             <a:pPr lvl="1">
               <a:lnSpc>
-                <a:spcPct val="90000"/>
-              </a:lnSpc>
-              <a:spcAft>
-                <a:spcPts val="300"/>
+                <a:spcPct val="85000"/>
+              </a:lnSpc>
+              <a:spcBef>
+                <a:spcPts val="200"/>
+              </a:spcBef>
+              <a:spcAft>
+                <a:spcPts val="200"/>
               </a:spcAft>
               <a:defRPr sz="1800"/>
             </a:pPr>
@@ -11280,10 +12089,13 @@
           <a:p>
             <a:pPr lvl="1">
               <a:lnSpc>
-                <a:spcPct val="90000"/>
-              </a:lnSpc>
-              <a:spcAft>
-                <a:spcPts val="300"/>
+                <a:spcPct val="85000"/>
+              </a:lnSpc>
+              <a:spcBef>
+                <a:spcPts val="200"/>
+              </a:spcBef>
+              <a:spcAft>
+                <a:spcPts val="200"/>
               </a:spcAft>
               <a:defRPr sz="1800"/>
             </a:pPr>
@@ -11295,10 +12107,13 @@
           <a:p>
             <a:pPr lvl="1">
               <a:lnSpc>
-                <a:spcPct val="90000"/>
-              </a:lnSpc>
-              <a:spcAft>
-                <a:spcPts val="300"/>
+                <a:spcPct val="85000"/>
+              </a:lnSpc>
+              <a:spcBef>
+                <a:spcPts val="200"/>
+              </a:spcBef>
+              <a:spcAft>
+                <a:spcPts val="200"/>
               </a:spcAft>
               <a:defRPr sz="1800"/>
             </a:pPr>
@@ -11321,10 +12136,13 @@
           <a:p>
             <a:pPr>
               <a:lnSpc>
-                <a:spcPct val="90000"/>
-              </a:lnSpc>
-              <a:spcAft>
-                <a:spcPts val="300"/>
+                <a:spcPct val="85000"/>
+              </a:lnSpc>
+              <a:spcBef>
+                <a:spcPts val="200"/>
+              </a:spcBef>
+              <a:spcAft>
+                <a:spcPts val="200"/>
               </a:spcAft>
               <a:defRPr sz="2000" b="1"/>
             </a:pPr>
@@ -11365,10 +12183,19 @@
         </p:nvSpPr>
         <p:spPr/>
         <p:txBody>
-          <a:bodyPr wrap="square"/>
+          <a:bodyPr wrap="square" tIns="25400" bIns="25400" lIns="63500" rIns="63500"/>
           <a:lstStyle/>
           <a:p>
             <a:pPr>
+              <a:lnSpc>
+                <a:spcPct val="85000"/>
+              </a:lnSpc>
+              <a:spcBef>
+                <a:spcPts val="200"/>
+              </a:spcBef>
+              <a:spcAft>
+                <a:spcPts val="200"/>
+              </a:spcAft>
               <a:defRPr sz="4000" b="1">
                 <a:solidFill>
                   <a:srgbClr val="667EEA"/>
@@ -11376,6 +12203,7 @@
               </a:defRPr>
             </a:pPr>
             <a:r>
+              <a:rPr/>
               <a:t>🗂️ Proje Yönetimi Nedir?</a:t>
             </a:r>
           </a:p>
@@ -11415,7 +12243,7 @@
           <a:noFill/>
         </p:spPr>
         <p:txBody>
-          <a:bodyPr wrap="square">
+          <a:bodyPr wrap="square" tIns="25400" bIns="25400" lIns="63500" rIns="63500">
             <a:spAutoFit/>
           </a:bodyPr>
           <a:lstStyle/>
@@ -11432,10 +12260,13 @@
           <a:p>
             <a:pPr>
               <a:lnSpc>
-                <a:spcPct val="90000"/>
-              </a:lnSpc>
-              <a:spcAft>
-                <a:spcPts val="300"/>
+                <a:spcPct val="85000"/>
+              </a:lnSpc>
+              <a:spcBef>
+                <a:spcPts val="200"/>
+              </a:spcBef>
+              <a:spcAft>
+                <a:spcPts val="200"/>
               </a:spcAft>
               <a:defRPr sz="2000"/>
             </a:pPr>
@@ -11458,10 +12289,13 @@
           <a:p>
             <a:pPr>
               <a:lnSpc>
-                <a:spcPct val="90000"/>
-              </a:lnSpc>
-              <a:spcAft>
-                <a:spcPts val="300"/>
+                <a:spcPct val="85000"/>
+              </a:lnSpc>
+              <a:spcBef>
+                <a:spcPts val="200"/>
+              </a:spcBef>
+              <a:spcAft>
+                <a:spcPts val="200"/>
               </a:spcAft>
               <a:defRPr sz="2000" b="1"/>
             </a:pPr>
@@ -11484,10 +12318,13 @@
           <a:p>
             <a:pPr>
               <a:lnSpc>
-                <a:spcPct val="90000"/>
-              </a:lnSpc>
-              <a:spcAft>
-                <a:spcPts val="300"/>
+                <a:spcPct val="85000"/>
+              </a:lnSpc>
+              <a:spcBef>
+                <a:spcPts val="200"/>
+              </a:spcBef>
+              <a:spcAft>
+                <a:spcPts val="200"/>
               </a:spcAft>
               <a:defRPr sz="2000"/>
             </a:pPr>
@@ -11499,10 +12336,13 @@
           <a:p>
             <a:pPr lvl="1">
               <a:lnSpc>
-                <a:spcPct val="90000"/>
-              </a:lnSpc>
-              <a:spcAft>
-                <a:spcPts val="300"/>
+                <a:spcPct val="85000"/>
+              </a:lnSpc>
+              <a:spcBef>
+                <a:spcPts val="200"/>
+              </a:spcBef>
+              <a:spcAft>
+                <a:spcPts val="200"/>
               </a:spcAft>
               <a:defRPr sz="1800"/>
             </a:pPr>
@@ -11514,10 +12354,13 @@
           <a:p>
             <a:pPr lvl="1">
               <a:lnSpc>
-                <a:spcPct val="90000"/>
-              </a:lnSpc>
-              <a:spcAft>
-                <a:spcPts val="300"/>
+                <a:spcPct val="85000"/>
+              </a:lnSpc>
+              <a:spcBef>
+                <a:spcPts val="200"/>
+              </a:spcBef>
+              <a:spcAft>
+                <a:spcPts val="200"/>
               </a:spcAft>
               <a:defRPr sz="1800"/>
             </a:pPr>
@@ -11529,10 +12372,13 @@
           <a:p>
             <a:pPr lvl="1">
               <a:lnSpc>
-                <a:spcPct val="90000"/>
-              </a:lnSpc>
-              <a:spcAft>
-                <a:spcPts val="300"/>
+                <a:spcPct val="85000"/>
+              </a:lnSpc>
+              <a:spcBef>
+                <a:spcPts val="200"/>
+              </a:spcBef>
+              <a:spcAft>
+                <a:spcPts val="200"/>
               </a:spcAft>
               <a:defRPr sz="1800"/>
             </a:pPr>
@@ -11555,10 +12401,13 @@
           <a:p>
             <a:pPr>
               <a:lnSpc>
-                <a:spcPct val="90000"/>
-              </a:lnSpc>
-              <a:spcAft>
-                <a:spcPts val="300"/>
+                <a:spcPct val="85000"/>
+              </a:lnSpc>
+              <a:spcBef>
+                <a:spcPts val="200"/>
+              </a:spcBef>
+              <a:spcAft>
+                <a:spcPts val="200"/>
               </a:spcAft>
               <a:defRPr sz="2000"/>
             </a:pPr>
@@ -11570,10 +12419,13 @@
           <a:p>
             <a:pPr lvl="1">
               <a:lnSpc>
-                <a:spcPct val="90000"/>
-              </a:lnSpc>
-              <a:spcAft>
-                <a:spcPts val="300"/>
+                <a:spcPct val="85000"/>
+              </a:lnSpc>
+              <a:spcBef>
+                <a:spcPts val="200"/>
+              </a:spcBef>
+              <a:spcAft>
+                <a:spcPts val="200"/>
               </a:spcAft>
               <a:defRPr sz="1800"/>
             </a:pPr>
@@ -11585,10 +12437,13 @@
           <a:p>
             <a:pPr lvl="1">
               <a:lnSpc>
-                <a:spcPct val="90000"/>
-              </a:lnSpc>
-              <a:spcAft>
-                <a:spcPts val="300"/>
+                <a:spcPct val="85000"/>
+              </a:lnSpc>
+              <a:spcBef>
+                <a:spcPts val="200"/>
+              </a:spcBef>
+              <a:spcAft>
+                <a:spcPts val="200"/>
               </a:spcAft>
               <a:defRPr sz="1800"/>
             </a:pPr>
@@ -11611,10 +12466,13 @@
           <a:p>
             <a:pPr>
               <a:lnSpc>
-                <a:spcPct val="90000"/>
-              </a:lnSpc>
-              <a:spcAft>
-                <a:spcPts val="300"/>
+                <a:spcPct val="85000"/>
+              </a:lnSpc>
+              <a:spcBef>
+                <a:spcPts val="200"/>
+              </a:spcBef>
+              <a:spcAft>
+                <a:spcPts val="200"/>
               </a:spcAft>
               <a:defRPr sz="2000"/>
             </a:pPr>
@@ -11626,10 +12484,13 @@
           <a:p>
             <a:pPr lvl="1">
               <a:lnSpc>
-                <a:spcPct val="90000"/>
-              </a:lnSpc>
-              <a:spcAft>
-                <a:spcPts val="300"/>
+                <a:spcPct val="85000"/>
+              </a:lnSpc>
+              <a:spcBef>
+                <a:spcPts val="200"/>
+              </a:spcBef>
+              <a:spcAft>
+                <a:spcPts val="200"/>
               </a:spcAft>
               <a:defRPr sz="1800"/>
             </a:pPr>
@@ -11641,10 +12502,13 @@
           <a:p>
             <a:pPr lvl="1">
               <a:lnSpc>
-                <a:spcPct val="90000"/>
-              </a:lnSpc>
-              <a:spcAft>
-                <a:spcPts val="300"/>
+                <a:spcPct val="85000"/>
+              </a:lnSpc>
+              <a:spcBef>
+                <a:spcPts val="200"/>
+              </a:spcBef>
+              <a:spcAft>
+                <a:spcPts val="200"/>
               </a:spcAft>
               <a:defRPr sz="1800"/>
             </a:pPr>
@@ -11667,10 +12531,13 @@
           <a:p>
             <a:pPr>
               <a:lnSpc>
-                <a:spcPct val="90000"/>
-              </a:lnSpc>
-              <a:spcAft>
-                <a:spcPts val="300"/>
+                <a:spcPct val="85000"/>
+              </a:lnSpc>
+              <a:spcBef>
+                <a:spcPts val="200"/>
+              </a:spcBef>
+              <a:spcAft>
+                <a:spcPts val="200"/>
               </a:spcAft>
               <a:defRPr sz="2000"/>
             </a:pPr>
@@ -11682,10 +12549,13 @@
           <a:p>
             <a:pPr lvl="1">
               <a:lnSpc>
-                <a:spcPct val="90000"/>
-              </a:lnSpc>
-              <a:spcAft>
-                <a:spcPts val="300"/>
+                <a:spcPct val="85000"/>
+              </a:lnSpc>
+              <a:spcBef>
+                <a:spcPts val="200"/>
+              </a:spcBef>
+              <a:spcAft>
+                <a:spcPts val="200"/>
               </a:spcAft>
               <a:defRPr sz="1800"/>
             </a:pPr>
@@ -11697,10 +12567,13 @@
           <a:p>
             <a:pPr lvl="1">
               <a:lnSpc>
-                <a:spcPct val="90000"/>
-              </a:lnSpc>
-              <a:spcAft>
-                <a:spcPts val="300"/>
+                <a:spcPct val="85000"/>
+              </a:lnSpc>
+              <a:spcBef>
+                <a:spcPts val="200"/>
+              </a:spcBef>
+              <a:spcAft>
+                <a:spcPts val="200"/>
               </a:spcAft>
               <a:defRPr sz="1800"/>
             </a:pPr>
@@ -11741,10 +12614,19 @@
         </p:nvSpPr>
         <p:spPr/>
         <p:txBody>
-          <a:bodyPr wrap="square"/>
+          <a:bodyPr wrap="square" tIns="25400" bIns="25400" lIns="63500" rIns="63500"/>
           <a:lstStyle/>
           <a:p>
             <a:pPr>
+              <a:lnSpc>
+                <a:spcPct val="85000"/>
+              </a:lnSpc>
+              <a:spcBef>
+                <a:spcPts val="200"/>
+              </a:spcBef>
+              <a:spcAft>
+                <a:spcPts val="200"/>
+              </a:spcAft>
               <a:defRPr sz="4000" b="1">
                 <a:solidFill>
                   <a:srgbClr val="667EEA"/>
@@ -11752,6 +12634,7 @@
               </a:defRPr>
             </a:pPr>
             <a:r>
+              <a:rPr/>
               <a:t>💻 Dijital Ürün Nedir?</a:t>
             </a:r>
           </a:p>
@@ -11791,7 +12674,7 @@
           <a:noFill/>
         </p:spPr>
         <p:txBody>
-          <a:bodyPr wrap="square">
+          <a:bodyPr wrap="square" tIns="25400" bIns="25400" lIns="63500" rIns="63500">
             <a:spAutoFit/>
           </a:bodyPr>
           <a:lstStyle/>
@@ -11808,10 +12691,13 @@
           <a:p>
             <a:pPr>
               <a:lnSpc>
-                <a:spcPct val="90000"/>
-              </a:lnSpc>
-              <a:spcAft>
-                <a:spcPts val="300"/>
+                <a:spcPct val="85000"/>
+              </a:lnSpc>
+              <a:spcBef>
+                <a:spcPts val="200"/>
+              </a:spcBef>
+              <a:spcAft>
+                <a:spcPts val="200"/>
               </a:spcAft>
               <a:defRPr sz="2000" b="1"/>
             </a:pPr>
@@ -11823,10 +12709,13 @@
           <a:p>
             <a:pPr>
               <a:lnSpc>
-                <a:spcPct val="90000"/>
-              </a:lnSpc>
-              <a:spcAft>
-                <a:spcPts val="300"/>
+                <a:spcPct val="85000"/>
+              </a:lnSpc>
+              <a:spcBef>
+                <a:spcPts val="200"/>
+              </a:spcBef>
+              <a:spcAft>
+                <a:spcPts val="200"/>
               </a:spcAft>
               <a:defRPr sz="2000"/>
             </a:pPr>
@@ -11849,10 +12738,13 @@
           <a:p>
             <a:pPr>
               <a:lnSpc>
-                <a:spcPct val="90000"/>
-              </a:lnSpc>
-              <a:spcAft>
-                <a:spcPts val="300"/>
+                <a:spcPct val="85000"/>
+              </a:lnSpc>
+              <a:spcBef>
+                <a:spcPts val="200"/>
+              </a:spcBef>
+              <a:spcAft>
+                <a:spcPts val="200"/>
               </a:spcAft>
               <a:defRPr sz="2000" b="1"/>
             </a:pPr>
@@ -11875,10 +12767,13 @@
           <a:p>
             <a:pPr>
               <a:lnSpc>
-                <a:spcPct val="90000"/>
-              </a:lnSpc>
-              <a:spcAft>
-                <a:spcPts val="300"/>
+                <a:spcPct val="85000"/>
+              </a:lnSpc>
+              <a:spcBef>
+                <a:spcPts val="200"/>
+              </a:spcBef>
+              <a:spcAft>
+                <a:spcPts val="200"/>
               </a:spcAft>
               <a:defRPr sz="2000"/>
             </a:pPr>
@@ -11890,10 +12785,13 @@
           <a:p>
             <a:pPr lvl="1">
               <a:lnSpc>
-                <a:spcPct val="90000"/>
-              </a:lnSpc>
-              <a:spcAft>
-                <a:spcPts val="300"/>
+                <a:spcPct val="85000"/>
+              </a:lnSpc>
+              <a:spcBef>
+                <a:spcPts val="200"/>
+              </a:spcBef>
+              <a:spcAft>
+                <a:spcPts val="200"/>
               </a:spcAft>
               <a:defRPr sz="1800"/>
             </a:pPr>
@@ -11905,10 +12803,13 @@
           <a:p>
             <a:pPr lvl="1">
               <a:lnSpc>
-                <a:spcPct val="90000"/>
-              </a:lnSpc>
-              <a:spcAft>
-                <a:spcPts val="300"/>
+                <a:spcPct val="85000"/>
+              </a:lnSpc>
+              <a:spcBef>
+                <a:spcPts val="200"/>
+              </a:spcBef>
+              <a:spcAft>
+                <a:spcPts val="200"/>
               </a:spcAft>
               <a:defRPr sz="1800"/>
             </a:pPr>
@@ -11920,10 +12821,13 @@
           <a:p>
             <a:pPr lvl="1">
               <a:lnSpc>
-                <a:spcPct val="90000"/>
-              </a:lnSpc>
-              <a:spcAft>
-                <a:spcPts val="300"/>
+                <a:spcPct val="85000"/>
+              </a:lnSpc>
+              <a:spcBef>
+                <a:spcPts val="200"/>
+              </a:spcBef>
+              <a:spcAft>
+                <a:spcPts val="200"/>
               </a:spcAft>
               <a:defRPr sz="1800"/>
             </a:pPr>
@@ -11946,10 +12850,13 @@
           <a:p>
             <a:pPr>
               <a:lnSpc>
-                <a:spcPct val="90000"/>
-              </a:lnSpc>
-              <a:spcAft>
-                <a:spcPts val="300"/>
+                <a:spcPct val="85000"/>
+              </a:lnSpc>
+              <a:spcBef>
+                <a:spcPts val="200"/>
+              </a:spcBef>
+              <a:spcAft>
+                <a:spcPts val="200"/>
               </a:spcAft>
               <a:defRPr sz="2000"/>
             </a:pPr>
@@ -11961,10 +12868,13 @@
           <a:p>
             <a:pPr lvl="1">
               <a:lnSpc>
-                <a:spcPct val="90000"/>
-              </a:lnSpc>
-              <a:spcAft>
-                <a:spcPts val="300"/>
+                <a:spcPct val="85000"/>
+              </a:lnSpc>
+              <a:spcBef>
+                <a:spcPts val="200"/>
+              </a:spcBef>
+              <a:spcAft>
+                <a:spcPts val="200"/>
               </a:spcAft>
               <a:defRPr sz="1800"/>
             </a:pPr>
@@ -11976,10 +12886,13 @@
           <a:p>
             <a:pPr lvl="1">
               <a:lnSpc>
-                <a:spcPct val="90000"/>
-              </a:lnSpc>
-              <a:spcAft>
-                <a:spcPts val="300"/>
+                <a:spcPct val="85000"/>
+              </a:lnSpc>
+              <a:spcBef>
+                <a:spcPts val="200"/>
+              </a:spcBef>
+              <a:spcAft>
+                <a:spcPts val="200"/>
               </a:spcAft>
               <a:defRPr sz="1800"/>
             </a:pPr>
@@ -12002,10 +12915,13 @@
           <a:p>
             <a:pPr>
               <a:lnSpc>
-                <a:spcPct val="90000"/>
-              </a:lnSpc>
-              <a:spcAft>
-                <a:spcPts val="300"/>
+                <a:spcPct val="85000"/>
+              </a:lnSpc>
+              <a:spcBef>
+                <a:spcPts val="200"/>
+              </a:spcBef>
+              <a:spcAft>
+                <a:spcPts val="200"/>
               </a:spcAft>
               <a:defRPr sz="2000"/>
             </a:pPr>
@@ -12017,10 +12933,13 @@
           <a:p>
             <a:pPr lvl="1">
               <a:lnSpc>
-                <a:spcPct val="90000"/>
-              </a:lnSpc>
-              <a:spcAft>
-                <a:spcPts val="300"/>
+                <a:spcPct val="85000"/>
+              </a:lnSpc>
+              <a:spcBef>
+                <a:spcPts val="200"/>
+              </a:spcBef>
+              <a:spcAft>
+                <a:spcPts val="200"/>
               </a:spcAft>
               <a:defRPr sz="1800"/>
             </a:pPr>
@@ -12043,10 +12962,13 @@
           <a:p>
             <a:pPr>
               <a:lnSpc>
-                <a:spcPct val="90000"/>
-              </a:lnSpc>
-              <a:spcAft>
-                <a:spcPts val="300"/>
+                <a:spcPct val="85000"/>
+              </a:lnSpc>
+              <a:spcBef>
+                <a:spcPts val="200"/>
+              </a:spcBef>
+              <a:spcAft>
+                <a:spcPts val="200"/>
               </a:spcAft>
               <a:defRPr sz="2000"/>
             </a:pPr>
@@ -12069,10 +12991,13 @@
           <a:p>
             <a:pPr>
               <a:lnSpc>
-                <a:spcPct val="90000"/>
-              </a:lnSpc>
-              <a:spcAft>
-                <a:spcPts val="300"/>
+                <a:spcPct val="85000"/>
+              </a:lnSpc>
+              <a:spcBef>
+                <a:spcPts val="200"/>
+              </a:spcBef>
+              <a:spcAft>
+                <a:spcPts val="200"/>
               </a:spcAft>
               <a:defRPr sz="2000" b="1"/>
             </a:pPr>
@@ -12113,10 +13038,19 @@
         </p:nvSpPr>
         <p:spPr/>
         <p:txBody>
-          <a:bodyPr wrap="square"/>
+          <a:bodyPr wrap="square" tIns="25400" bIns="25400" lIns="63500" rIns="63500"/>
           <a:lstStyle/>
           <a:p>
             <a:pPr>
+              <a:lnSpc>
+                <a:spcPct val="85000"/>
+              </a:lnSpc>
+              <a:spcBef>
+                <a:spcPts val="200"/>
+              </a:spcBef>
+              <a:spcAft>
+                <a:spcPts val="200"/>
+              </a:spcAft>
               <a:defRPr sz="4000" b="1">
                 <a:solidFill>
                   <a:srgbClr val="667EEA"/>
@@ -12124,6 +13058,7 @@
               </a:defRPr>
             </a:pPr>
             <a:r>
+              <a:rPr/>
               <a:t>🎨 Dijital Ürün Tasarım Süreci</a:t>
             </a:r>
           </a:p>
@@ -12163,7 +13098,7 @@
           <a:noFill/>
         </p:spPr>
         <p:txBody>
-          <a:bodyPr wrap="square">
+          <a:bodyPr wrap="square" tIns="25400" bIns="25400" lIns="63500" rIns="63500">
             <a:spAutoFit/>
           </a:bodyPr>
           <a:lstStyle/>
@@ -12180,10 +13115,13 @@
           <a:p>
             <a:pPr>
               <a:lnSpc>
-                <a:spcPct val="90000"/>
-              </a:lnSpc>
-              <a:spcAft>
-                <a:spcPts val="300"/>
+                <a:spcPct val="85000"/>
+              </a:lnSpc>
+              <a:spcBef>
+                <a:spcPts val="200"/>
+              </a:spcBef>
+              <a:spcAft>
+                <a:spcPts val="200"/>
               </a:spcAft>
               <a:defRPr sz="2000"/>
             </a:pPr>
@@ -12206,10 +13144,13 @@
           <a:p>
             <a:pPr>
               <a:lnSpc>
-                <a:spcPct val="90000"/>
-              </a:lnSpc>
-              <a:spcAft>
-                <a:spcPts val="300"/>
+                <a:spcPct val="85000"/>
+              </a:lnSpc>
+              <a:spcBef>
+                <a:spcPts val="200"/>
+              </a:spcBef>
+              <a:spcAft>
+                <a:spcPts val="200"/>
               </a:spcAft>
               <a:defRPr sz="2000" b="1"/>
             </a:pPr>
@@ -12232,10 +13173,13 @@
           <a:p>
             <a:pPr>
               <a:lnSpc>
-                <a:spcPct val="90000"/>
-              </a:lnSpc>
-              <a:spcAft>
-                <a:spcPts val="300"/>
+                <a:spcPct val="85000"/>
+              </a:lnSpc>
+              <a:spcBef>
+                <a:spcPts val="200"/>
+              </a:spcBef>
+              <a:spcAft>
+                <a:spcPts val="200"/>
               </a:spcAft>
               <a:defRPr sz="2000"/>
             </a:pPr>
@@ -12247,10 +13191,13 @@
           <a:p>
             <a:pPr lvl="1">
               <a:lnSpc>
-                <a:spcPct val="90000"/>
-              </a:lnSpc>
-              <a:spcAft>
-                <a:spcPts val="300"/>
+                <a:spcPct val="85000"/>
+              </a:lnSpc>
+              <a:spcBef>
+                <a:spcPts val="200"/>
+              </a:spcBef>
+              <a:spcAft>
+                <a:spcPts val="200"/>
               </a:spcAft>
               <a:defRPr sz="1800"/>
             </a:pPr>
@@ -12273,10 +13220,13 @@
           <a:p>
             <a:pPr>
               <a:lnSpc>
-                <a:spcPct val="90000"/>
-              </a:lnSpc>
-              <a:spcAft>
-                <a:spcPts val="300"/>
+                <a:spcPct val="85000"/>
+              </a:lnSpc>
+              <a:spcBef>
+                <a:spcPts val="200"/>
+              </a:spcBef>
+              <a:spcAft>
+                <a:spcPts val="200"/>
               </a:spcAft>
               <a:defRPr sz="2000"/>
             </a:pPr>
@@ -12288,10 +13238,13 @@
           <a:p>
             <a:pPr lvl="1">
               <a:lnSpc>
-                <a:spcPct val="90000"/>
-              </a:lnSpc>
-              <a:spcAft>
-                <a:spcPts val="300"/>
+                <a:spcPct val="85000"/>
+              </a:lnSpc>
+              <a:spcBef>
+                <a:spcPts val="200"/>
+              </a:spcBef>
+              <a:spcAft>
+                <a:spcPts val="200"/>
               </a:spcAft>
               <a:defRPr sz="1800"/>
             </a:pPr>
@@ -12314,10 +13267,13 @@
           <a:p>
             <a:pPr>
               <a:lnSpc>
-                <a:spcPct val="90000"/>
-              </a:lnSpc>
-              <a:spcAft>
-                <a:spcPts val="300"/>
+                <a:spcPct val="85000"/>
+              </a:lnSpc>
+              <a:spcBef>
+                <a:spcPts val="200"/>
+              </a:spcBef>
+              <a:spcAft>
+                <a:spcPts val="200"/>
               </a:spcAft>
               <a:defRPr sz="2000"/>
             </a:pPr>
@@ -12329,10 +13285,13 @@
           <a:p>
             <a:pPr lvl="1">
               <a:lnSpc>
-                <a:spcPct val="90000"/>
-              </a:lnSpc>
-              <a:spcAft>
-                <a:spcPts val="300"/>
+                <a:spcPct val="85000"/>
+              </a:lnSpc>
+              <a:spcBef>
+                <a:spcPts val="200"/>
+              </a:spcBef>
+              <a:spcAft>
+                <a:spcPts val="200"/>
               </a:spcAft>
               <a:defRPr sz="1800"/>
             </a:pPr>
@@ -12355,10 +13314,13 @@
           <a:p>
             <a:pPr>
               <a:lnSpc>
-                <a:spcPct val="90000"/>
-              </a:lnSpc>
-              <a:spcAft>
-                <a:spcPts val="300"/>
+                <a:spcPct val="85000"/>
+              </a:lnSpc>
+              <a:spcBef>
+                <a:spcPts val="200"/>
+              </a:spcBef>
+              <a:spcAft>
+                <a:spcPts val="200"/>
               </a:spcAft>
               <a:defRPr sz="2000"/>
             </a:pPr>
@@ -12370,10 +13332,13 @@
           <a:p>
             <a:pPr lvl="1">
               <a:lnSpc>
-                <a:spcPct val="90000"/>
-              </a:lnSpc>
-              <a:spcAft>
-                <a:spcPts val="300"/>
+                <a:spcPct val="85000"/>
+              </a:lnSpc>
+              <a:spcBef>
+                <a:spcPts val="200"/>
+              </a:spcBef>
+              <a:spcAft>
+                <a:spcPts val="200"/>
               </a:spcAft>
               <a:defRPr sz="1800"/>
             </a:pPr>
@@ -12396,10 +13361,13 @@
           <a:p>
             <a:pPr>
               <a:lnSpc>
-                <a:spcPct val="90000"/>
-              </a:lnSpc>
-              <a:spcAft>
-                <a:spcPts val="300"/>
+                <a:spcPct val="85000"/>
+              </a:lnSpc>
+              <a:spcBef>
+                <a:spcPts val="200"/>
+              </a:spcBef>
+              <a:spcAft>
+                <a:spcPts val="200"/>
               </a:spcAft>
               <a:defRPr sz="2000"/>
             </a:pPr>
@@ -12411,10 +13379,13 @@
           <a:p>
             <a:pPr lvl="1">
               <a:lnSpc>
-                <a:spcPct val="90000"/>
-              </a:lnSpc>
-              <a:spcAft>
-                <a:spcPts val="300"/>
+                <a:spcPct val="85000"/>
+              </a:lnSpc>
+              <a:spcBef>
+                <a:spcPts val="200"/>
+              </a:spcBef>
+              <a:spcAft>
+                <a:spcPts val="200"/>
               </a:spcAft>
               <a:defRPr sz="1800"/>
             </a:pPr>
@@ -12437,10 +13408,13 @@
           <a:p>
             <a:pPr>
               <a:lnSpc>
-                <a:spcPct val="90000"/>
-              </a:lnSpc>
-              <a:spcAft>
-                <a:spcPts val="300"/>
+                <a:spcPct val="85000"/>
+              </a:lnSpc>
+              <a:spcBef>
+                <a:spcPts val="200"/>
+              </a:spcBef>
+              <a:spcAft>
+                <a:spcPts val="200"/>
               </a:spcAft>
               <a:defRPr sz="2000"/>
             </a:pPr>
@@ -12452,10 +13426,13 @@
           <a:p>
             <a:pPr lvl="1">
               <a:lnSpc>
-                <a:spcPct val="90000"/>
-              </a:lnSpc>
-              <a:spcAft>
-                <a:spcPts val="300"/>
+                <a:spcPct val="85000"/>
+              </a:lnSpc>
+              <a:spcBef>
+                <a:spcPts val="200"/>
+              </a:spcBef>
+              <a:spcAft>
+                <a:spcPts val="200"/>
               </a:spcAft>
               <a:defRPr sz="1800"/>
             </a:pPr>
@@ -12478,10 +13455,13 @@
           <a:p>
             <a:pPr>
               <a:lnSpc>
-                <a:spcPct val="90000"/>
-              </a:lnSpc>
-              <a:spcAft>
-                <a:spcPts val="300"/>
+                <a:spcPct val="85000"/>
+              </a:lnSpc>
+              <a:spcBef>
+                <a:spcPts val="200"/>
+              </a:spcBef>
+              <a:spcAft>
+                <a:spcPts val="200"/>
               </a:spcAft>
               <a:defRPr sz="2000"/>
             </a:pPr>
@@ -12493,10 +13473,13 @@
           <a:p>
             <a:pPr lvl="1">
               <a:lnSpc>
-                <a:spcPct val="90000"/>
-              </a:lnSpc>
-              <a:spcAft>
-                <a:spcPts val="300"/>
+                <a:spcPct val="85000"/>
+              </a:lnSpc>
+              <a:spcBef>
+                <a:spcPts val="200"/>
+              </a:spcBef>
+              <a:spcAft>
+                <a:spcPts val="200"/>
               </a:spcAft>
               <a:defRPr sz="1800"/>
             </a:pPr>
@@ -12537,10 +13520,19 @@
         </p:nvSpPr>
         <p:spPr/>
         <p:txBody>
-          <a:bodyPr wrap="square"/>
+          <a:bodyPr wrap="square" tIns="25400" bIns="25400" lIns="63500" rIns="63500"/>
           <a:lstStyle/>
           <a:p>
             <a:pPr>
+              <a:lnSpc>
+                <a:spcPct val="85000"/>
+              </a:lnSpc>
+              <a:spcBef>
+                <a:spcPts val="200"/>
+              </a:spcBef>
+              <a:spcAft>
+                <a:spcPts val="200"/>
+              </a:spcAft>
               <a:defRPr sz="4000" b="1">
                 <a:solidFill>
                   <a:srgbClr val="667EEA"/>
@@ -12548,6 +13540,7 @@
               </a:defRPr>
             </a:pPr>
             <a:r>
+              <a:rPr/>
               <a:t>🔍 Adım 1: İhtiyaç Analizi</a:t>
             </a:r>
           </a:p>
@@ -12587,7 +13580,7 @@
           <a:noFill/>
         </p:spPr>
         <p:txBody>
-          <a:bodyPr wrap="square">
+          <a:bodyPr wrap="square" tIns="25400" bIns="25400" lIns="63500" rIns="63500">
             <a:spAutoFit/>
           </a:bodyPr>
           <a:lstStyle/>
@@ -12604,6 +13597,24 @@
           <a:p>
             <a:pPr>
               <a:lnSpc>
+                <a:spcPct val="85000"/>
+              </a:lnSpc>
+              <a:spcBef>
+                <a:spcPts val="200"/>
+              </a:spcBef>
+              <a:spcAft>
+                <a:spcPts val="200"/>
+              </a:spcAft>
+              <a:defRPr sz="2000"/>
+            </a:pPr>
+            <a:r>
+              <a:rPr sz="1300"/>
+              <a:t>En önemli adım: Hangi problemi çözeceğiz?</a:t>
+            </a:r>
+          </a:p>
+          <a:p>
+            <a:pPr>
+              <a:lnSpc>
                 <a:spcPct val="90000"/>
               </a:lnSpc>
               <a:spcAft>
@@ -12611,9 +13622,95 @@
               </a:spcAft>
               <a:defRPr sz="2000"/>
             </a:pPr>
-            <a:r>
-              <a:rPr sz="1300"/>
-              <a:t>En önemli adım: Hangi problemi çözeceğiz?</a:t>
+          </a:p>
+          <a:p>
+            <a:pPr>
+              <a:lnSpc>
+                <a:spcPct val="85000"/>
+              </a:lnSpc>
+              <a:spcBef>
+                <a:spcPts val="200"/>
+              </a:spcBef>
+              <a:spcAft>
+                <a:spcPts val="200"/>
+              </a:spcAft>
+              <a:defRPr sz="2000" b="1"/>
+            </a:pPr>
+            <a:r>
+              <a:rPr sz="1300"/>
+              <a:t>✅ İhtiyaç Analizi Soruları:</a:t>
+            </a:r>
+          </a:p>
+          <a:p>
+            <a:pPr lvl="1">
+              <a:lnSpc>
+                <a:spcPct val="85000"/>
+              </a:lnSpc>
+              <a:spcBef>
+                <a:spcPts val="200"/>
+              </a:spcBef>
+              <a:spcAft>
+                <a:spcPts val="200"/>
+              </a:spcAft>
+              <a:defRPr sz="1800"/>
+            </a:pPr>
+            <a:r>
+              <a:rPr sz="1300"/>
+              <a:t>    • İnsanların hangi sorunu var?</a:t>
+            </a:r>
+          </a:p>
+          <a:p>
+            <a:pPr lvl="1">
+              <a:lnSpc>
+                <a:spcPct val="85000"/>
+              </a:lnSpc>
+              <a:spcBef>
+                <a:spcPts val="200"/>
+              </a:spcBef>
+              <a:spcAft>
+                <a:spcPts val="200"/>
+              </a:spcAft>
+              <a:defRPr sz="1800"/>
+            </a:pPr>
+            <a:r>
+              <a:rPr sz="1300"/>
+              <a:t>    • Bu sorunu kim yaşıyor?</a:t>
+            </a:r>
+          </a:p>
+          <a:p>
+            <a:pPr lvl="1">
+              <a:lnSpc>
+                <a:spcPct val="85000"/>
+              </a:lnSpc>
+              <a:spcBef>
+                <a:spcPts val="200"/>
+              </a:spcBef>
+              <a:spcAft>
+                <a:spcPts val="200"/>
+              </a:spcAft>
+              <a:defRPr sz="1800"/>
+            </a:pPr>
+            <a:r>
+              <a:rPr sz="1300"/>
+              <a:t>    • Sorun ne kadar önemli?</a:t>
+            </a:r>
+          </a:p>
+          <a:p>
+            <a:pPr lvl="1">
+              <a:lnSpc>
+                <a:spcPct val="85000"/>
+              </a:lnSpc>
+              <a:spcBef>
+                <a:spcPts val="200"/>
+              </a:spcBef>
+              <a:spcAft>
+                <a:spcPts val="200"/>
+              </a:spcAft>
+              <a:defRPr sz="1800"/>
+            </a:pPr>
+            <a:r>
+              <a:rPr sz="1300"/>
+              <a:t>    • Mevcut çözümler var mı? Yeterli mi?</a:t>
             </a:r>
           </a:p>
           <a:p>
@@ -12630,208 +13727,143 @@
           <a:p>
             <a:pPr>
               <a:lnSpc>
+                <a:spcPct val="85000"/>
+              </a:lnSpc>
+              <a:spcBef>
+                <a:spcPts val="200"/>
+              </a:spcBef>
+              <a:spcAft>
+                <a:spcPts val="200"/>
+              </a:spcAft>
+              <a:defRPr sz="2000" b="1"/>
+            </a:pPr>
+            <a:r>
+              <a:rPr sz="1300"/>
+              <a:t>📌 Örnek Problemler:</a:t>
+            </a:r>
+          </a:p>
+          <a:p>
+            <a:pPr lvl="1">
+              <a:lnSpc>
+                <a:spcPct val="85000"/>
+              </a:lnSpc>
+              <a:spcBef>
+                <a:spcPts val="200"/>
+              </a:spcBef>
+              <a:spcAft>
+                <a:spcPts val="200"/>
+              </a:spcAft>
+              <a:defRPr sz="1800"/>
+            </a:pPr>
+            <a:r>
+              <a:rPr sz="1300"/>
+              <a:t>    • Öğrenciler matematik çalışırken zorlanıyor</a:t>
+            </a:r>
+          </a:p>
+          <a:p>
+            <a:pPr lvl="1">
+              <a:lnSpc>
+                <a:spcPct val="85000"/>
+              </a:lnSpc>
+              <a:spcBef>
+                <a:spcPts val="200"/>
+              </a:spcBef>
+              <a:spcAft>
+                <a:spcPts val="200"/>
+              </a:spcAft>
+              <a:defRPr sz="1800"/>
+            </a:pPr>
+            <a:r>
+              <a:rPr sz="1300"/>
+              <a:t>    • Çocuklar İngilizce kelime ezberlemekte sıkılıyor</a:t>
+            </a:r>
+          </a:p>
+          <a:p>
+            <a:pPr lvl="1">
+              <a:lnSpc>
+                <a:spcPct val="85000"/>
+              </a:lnSpc>
+              <a:spcBef>
+                <a:spcPts val="200"/>
+              </a:spcBef>
+              <a:spcAft>
+                <a:spcPts val="200"/>
+              </a:spcAft>
+              <a:defRPr sz="1800"/>
+            </a:pPr>
+            <a:r>
+              <a:rPr sz="1300"/>
+              <a:t>    • Küçük kardeşim zamanını planlamayı bilmiyor</a:t>
+            </a:r>
+          </a:p>
+          <a:p>
+            <a:pPr lvl="1">
+              <a:lnSpc>
+                <a:spcPct val="85000"/>
+              </a:lnSpc>
+              <a:spcBef>
+                <a:spcPts val="200"/>
+              </a:spcBef>
+              <a:spcAft>
+                <a:spcPts val="200"/>
+              </a:spcAft>
+              <a:defRPr sz="1800"/>
+            </a:pPr>
+            <a:r>
+              <a:rPr sz="1300"/>
+              <a:t>    • Arkadaşlar hangi oyunu oynayacağına karar veremiyor</a:t>
+            </a:r>
+          </a:p>
+          <a:p>
+            <a:pPr>
+              <a:lnSpc>
                 <a:spcPct val="90000"/>
               </a:lnSpc>
               <a:spcAft>
                 <a:spcPts val="300"/>
               </a:spcAft>
+              <a:defRPr sz="2000"/>
+            </a:pPr>
+          </a:p>
+          <a:p>
+            <a:pPr>
+              <a:lnSpc>
+                <a:spcPct val="85000"/>
+              </a:lnSpc>
+              <a:spcBef>
+                <a:spcPts val="200"/>
+              </a:spcBef>
+              <a:spcAft>
+                <a:spcPts val="200"/>
+              </a:spcAft>
               <a:defRPr sz="2000" b="1"/>
             </a:pPr>
             <a:r>
               <a:rPr sz="1300"/>
-              <a:t>✅ İhtiyaç Analizi Soruları:</a:t>
-            </a:r>
-          </a:p>
-          <a:p>
-            <a:pPr lvl="1">
+              <a:t>💡 İyi bir problem tanımı = Başarılı ürünün yarısı!</a:t>
+            </a:r>
+          </a:p>
+          <a:p>
+            <a:pPr>
               <a:lnSpc>
                 <a:spcPct val="90000"/>
               </a:lnSpc>
               <a:spcAft>
                 <a:spcPts val="300"/>
               </a:spcAft>
-              <a:defRPr sz="1800"/>
-            </a:pPr>
-            <a:r>
-              <a:rPr sz="1300"/>
-              <a:t>    • İnsanların hangi sorunu var?</a:t>
-            </a:r>
-          </a:p>
-          <a:p>
-            <a:pPr lvl="1">
-              <a:lnSpc>
-                <a:spcPct val="90000"/>
-              </a:lnSpc>
-              <a:spcAft>
-                <a:spcPts val="300"/>
-              </a:spcAft>
-              <a:defRPr sz="1800"/>
-            </a:pPr>
-            <a:r>
-              <a:rPr sz="1300"/>
-              <a:t>    • Bu sorunu kim yaşıyor?</a:t>
-            </a:r>
-          </a:p>
-          <a:p>
-            <a:pPr lvl="1">
-              <a:lnSpc>
-                <a:spcPct val="90000"/>
-              </a:lnSpc>
-              <a:spcAft>
-                <a:spcPts val="300"/>
-              </a:spcAft>
-              <a:defRPr sz="1800"/>
-            </a:pPr>
-            <a:r>
-              <a:rPr sz="1300"/>
-              <a:t>    • Sorun ne kadar önemli?</a:t>
-            </a:r>
-          </a:p>
-          <a:p>
-            <a:pPr lvl="1">
-              <a:lnSpc>
-                <a:spcPct val="90000"/>
-              </a:lnSpc>
-              <a:spcAft>
-                <a:spcPts val="300"/>
-              </a:spcAft>
-              <a:defRPr sz="1800"/>
-            </a:pPr>
-            <a:r>
-              <a:rPr sz="1300"/>
-              <a:t>    • Mevcut çözümler var mı? Yeterli mi?</a:t>
-            </a:r>
-          </a:p>
-          <a:p>
-            <a:pPr>
-              <a:lnSpc>
-                <a:spcPct val="90000"/>
-              </a:lnSpc>
-              <a:spcAft>
-                <a:spcPts val="300"/>
-              </a:spcAft>
-              <a:defRPr sz="2000"/>
-            </a:pPr>
-          </a:p>
-          <a:p>
-            <a:pPr>
-              <a:lnSpc>
-                <a:spcPct val="90000"/>
-              </a:lnSpc>
-              <a:spcAft>
-                <a:spcPts val="300"/>
-              </a:spcAft>
-              <a:defRPr sz="2000" b="1"/>
-            </a:pPr>
-            <a:r>
-              <a:rPr sz="1300"/>
-              <a:t>📌 Örnek Problemler:</a:t>
-            </a:r>
-          </a:p>
-          <a:p>
-            <a:pPr lvl="1">
-              <a:lnSpc>
-                <a:spcPct val="90000"/>
-              </a:lnSpc>
-              <a:spcAft>
-                <a:spcPts val="300"/>
-              </a:spcAft>
-              <a:defRPr sz="1800"/>
-            </a:pPr>
-            <a:r>
-              <a:rPr sz="1300"/>
-              <a:t>    • Öğrenciler matematik çalışırken zorlanıyor</a:t>
-            </a:r>
-          </a:p>
-          <a:p>
-            <a:pPr lvl="1">
-              <a:lnSpc>
-                <a:spcPct val="90000"/>
-              </a:lnSpc>
-              <a:spcAft>
-                <a:spcPts val="300"/>
-              </a:spcAft>
-              <a:defRPr sz="1800"/>
-            </a:pPr>
-            <a:r>
-              <a:rPr sz="1300"/>
-              <a:t>    • Çocuklar İngilizce kelime ezberlemekte sıkılıyor</a:t>
-            </a:r>
-          </a:p>
-          <a:p>
-            <a:pPr lvl="1">
-              <a:lnSpc>
-                <a:spcPct val="90000"/>
-              </a:lnSpc>
-              <a:spcAft>
-                <a:spcPts val="300"/>
-              </a:spcAft>
-              <a:defRPr sz="1800"/>
-            </a:pPr>
-            <a:r>
-              <a:rPr sz="1300"/>
-              <a:t>    • Küçük kardeşim zamanını planlamayı bilmiyor</a:t>
-            </a:r>
-          </a:p>
-          <a:p>
-            <a:pPr lvl="1">
-              <a:lnSpc>
-                <a:spcPct val="90000"/>
-              </a:lnSpc>
-              <a:spcAft>
-                <a:spcPts val="300"/>
-              </a:spcAft>
-              <a:defRPr sz="1800"/>
-            </a:pPr>
-            <a:r>
-              <a:rPr sz="1300"/>
-              <a:t>    • Arkadaşlar hangi oyunu oynayacağına karar veremiyor</a:t>
-            </a:r>
-          </a:p>
-          <a:p>
-            <a:pPr>
-              <a:lnSpc>
-                <a:spcPct val="90000"/>
-              </a:lnSpc>
-              <a:spcAft>
-                <a:spcPts val="300"/>
-              </a:spcAft>
-              <a:defRPr sz="2000"/>
-            </a:pPr>
-          </a:p>
-          <a:p>
-            <a:pPr>
-              <a:lnSpc>
-                <a:spcPct val="90000"/>
-              </a:lnSpc>
-              <a:spcAft>
-                <a:spcPts val="300"/>
-              </a:spcAft>
-              <a:defRPr sz="2000" b="1"/>
-            </a:pPr>
-            <a:r>
-              <a:rPr sz="1300"/>
-              <a:t>💡 İyi bir problem tanımı = Başarılı ürünün yarısı!</a:t>
-            </a:r>
-          </a:p>
-          <a:p>
-            <a:pPr>
-              <a:lnSpc>
-                <a:spcPct val="90000"/>
-              </a:lnSpc>
-              <a:spcAft>
-                <a:spcPts val="300"/>
-              </a:spcAft>
-              <a:defRPr sz="2000"/>
-            </a:pPr>
-          </a:p>
-          <a:p>
-            <a:pPr>
-              <a:lnSpc>
-                <a:spcPct val="90000"/>
-              </a:lnSpc>
-              <a:spcAft>
-                <a:spcPts val="300"/>
+              <a:defRPr sz="2000"/>
+            </a:pPr>
+          </a:p>
+          <a:p>
+            <a:pPr>
+              <a:lnSpc>
+                <a:spcPct val="85000"/>
+              </a:lnSpc>
+              <a:spcBef>
+                <a:spcPts val="200"/>
+              </a:spcBef>
+              <a:spcAft>
+                <a:spcPts val="200"/>
               </a:spcAft>
               <a:defRPr sz="2000" b="1"/>
             </a:pPr>
@@ -12872,10 +13904,19 @@
         </p:nvSpPr>
         <p:spPr/>
         <p:txBody>
-          <a:bodyPr wrap="square"/>
+          <a:bodyPr wrap="square" tIns="25400" bIns="25400" lIns="63500" rIns="63500"/>
           <a:lstStyle/>
           <a:p>
             <a:pPr>
+              <a:lnSpc>
+                <a:spcPct val="85000"/>
+              </a:lnSpc>
+              <a:spcBef>
+                <a:spcPts val="200"/>
+              </a:spcBef>
+              <a:spcAft>
+                <a:spcPts val="200"/>
+              </a:spcAft>
               <a:defRPr sz="4000" b="1">
                 <a:solidFill>
                   <a:srgbClr val="667EEA"/>
@@ -12883,6 +13924,7 @@
               </a:defRPr>
             </a:pPr>
             <a:r>
+              <a:rPr/>
               <a:t>💡 Adım 2: Çözüm Fikirleri Geliştirme</a:t>
             </a:r>
           </a:p>
@@ -12922,7 +13964,7 @@
           <a:noFill/>
         </p:spPr>
         <p:txBody>
-          <a:bodyPr wrap="square">
+          <a:bodyPr wrap="square" tIns="25400" bIns="25400" lIns="63500" rIns="63500">
             <a:spAutoFit/>
           </a:bodyPr>
           <a:lstStyle/>
@@ -12939,6 +13981,24 @@
           <a:p>
             <a:pPr>
               <a:lnSpc>
+                <a:spcPct val="85000"/>
+              </a:lnSpc>
+              <a:spcBef>
+                <a:spcPts val="200"/>
+              </a:spcBef>
+              <a:spcAft>
+                <a:spcPts val="200"/>
+              </a:spcAft>
+              <a:defRPr sz="2000"/>
+            </a:pPr>
+            <a:r>
+              <a:rPr sz="1300"/>
+              <a:t>Problem belirlendi, şimdi çözüm zamanı!</a:t>
+            </a:r>
+          </a:p>
+          <a:p>
+            <a:pPr>
+              <a:lnSpc>
                 <a:spcPct val="90000"/>
               </a:lnSpc>
               <a:spcAft>
@@ -12946,9 +14006,23 @@
               </a:spcAft>
               <a:defRPr sz="2000"/>
             </a:pPr>
-            <a:r>
-              <a:rPr sz="1300"/>
-              <a:t>Problem belirlendi, şimdi çözüm zamanı!</a:t>
+          </a:p>
+          <a:p>
+            <a:pPr>
+              <a:lnSpc>
+                <a:spcPct val="85000"/>
+              </a:lnSpc>
+              <a:spcBef>
+                <a:spcPts val="200"/>
+              </a:spcBef>
+              <a:spcAft>
+                <a:spcPts val="200"/>
+              </a:spcAft>
+              <a:defRPr sz="2000" b="1"/>
+            </a:pPr>
+            <a:r>
+              <a:rPr sz="1300"/>
+              <a:t>✅ Fikir Geliştirme Yöntemleri:</a:t>
             </a:r>
           </a:p>
           <a:p>
@@ -12965,249 +14039,262 @@
           <a:p>
             <a:pPr>
               <a:lnSpc>
+                <a:spcPct val="85000"/>
+              </a:lnSpc>
+              <a:spcBef>
+                <a:spcPts val="200"/>
+              </a:spcBef>
+              <a:spcAft>
+                <a:spcPts val="200"/>
+              </a:spcAft>
+              <a:defRPr sz="2000"/>
+            </a:pPr>
+            <a:r>
+              <a:rPr sz="1300"/>
+              <a:t>🧠 Beyin Fırtınası (Brainstorming):</a:t>
+            </a:r>
+          </a:p>
+          <a:p>
+            <a:pPr lvl="1">
+              <a:lnSpc>
+                <a:spcPct val="85000"/>
+              </a:lnSpc>
+              <a:spcBef>
+                <a:spcPts val="200"/>
+              </a:spcBef>
+              <a:spcAft>
+                <a:spcPts val="200"/>
+              </a:spcAft>
+              <a:defRPr sz="1800"/>
+            </a:pPr>
+            <a:r>
+              <a:rPr sz="1300"/>
+              <a:t>    • Tüm fikirleri söyleyin</a:t>
+            </a:r>
+          </a:p>
+          <a:p>
+            <a:pPr lvl="1">
+              <a:lnSpc>
+                <a:spcPct val="85000"/>
+              </a:lnSpc>
+              <a:spcBef>
+                <a:spcPts val="200"/>
+              </a:spcBef>
+              <a:spcAft>
+                <a:spcPts val="200"/>
+              </a:spcAft>
+              <a:defRPr sz="1800"/>
+            </a:pPr>
+            <a:r>
+              <a:rPr sz="1300"/>
+              <a:t>    • Eleştirmeyin, not alın</a:t>
+            </a:r>
+          </a:p>
+          <a:p>
+            <a:pPr lvl="1">
+              <a:lnSpc>
+                <a:spcPct val="85000"/>
+              </a:lnSpc>
+              <a:spcBef>
+                <a:spcPts val="200"/>
+              </a:spcBef>
+              <a:spcAft>
+                <a:spcPts val="200"/>
+              </a:spcAft>
+              <a:defRPr sz="1800"/>
+            </a:pPr>
+            <a:r>
+              <a:rPr sz="1300"/>
+              <a:t>    • Çılgın fikirler de olabilir!</a:t>
+            </a:r>
+          </a:p>
+          <a:p>
+            <a:pPr>
+              <a:lnSpc>
                 <a:spcPct val="90000"/>
               </a:lnSpc>
               <a:spcAft>
                 <a:spcPts val="300"/>
               </a:spcAft>
+              <a:defRPr sz="2000"/>
+            </a:pPr>
+          </a:p>
+          <a:p>
+            <a:pPr>
+              <a:lnSpc>
+                <a:spcPct val="85000"/>
+              </a:lnSpc>
+              <a:spcBef>
+                <a:spcPts val="200"/>
+              </a:spcBef>
+              <a:spcAft>
+                <a:spcPts val="200"/>
+              </a:spcAft>
+              <a:defRPr sz="2000"/>
+            </a:pPr>
+            <a:r>
+              <a:rPr sz="1300"/>
+              <a:t>🗣️ Kullanıcı Görüşleri:</a:t>
+            </a:r>
+          </a:p>
+          <a:p>
+            <a:pPr lvl="1">
+              <a:lnSpc>
+                <a:spcPct val="85000"/>
+              </a:lnSpc>
+              <a:spcBef>
+                <a:spcPts val="200"/>
+              </a:spcBef>
+              <a:spcAft>
+                <a:spcPts val="200"/>
+              </a:spcAft>
+              <a:defRPr sz="1800"/>
+            </a:pPr>
+            <a:r>
+              <a:rPr sz="1300"/>
+              <a:t>    • Problemi yaşayan kişilerle konuşun</a:t>
+            </a:r>
+          </a:p>
+          <a:p>
+            <a:pPr lvl="1">
+              <a:lnSpc>
+                <a:spcPct val="85000"/>
+              </a:lnSpc>
+              <a:spcBef>
+                <a:spcPts val="200"/>
+              </a:spcBef>
+              <a:spcAft>
+                <a:spcPts val="200"/>
+              </a:spcAft>
+              <a:defRPr sz="1800"/>
+            </a:pPr>
+            <a:r>
+              <a:rPr sz="1300"/>
+              <a:t>    • Ne isterler? Ne işe yarar?</a:t>
+            </a:r>
+          </a:p>
+          <a:p>
+            <a:pPr>
+              <a:lnSpc>
+                <a:spcPct val="90000"/>
+              </a:lnSpc>
+              <a:spcAft>
+                <a:spcPts val="300"/>
+              </a:spcAft>
+              <a:defRPr sz="2000"/>
+            </a:pPr>
+          </a:p>
+          <a:p>
+            <a:pPr>
+              <a:lnSpc>
+                <a:spcPct val="85000"/>
+              </a:lnSpc>
+              <a:spcBef>
+                <a:spcPts val="200"/>
+              </a:spcBef>
+              <a:spcAft>
+                <a:spcPts val="200"/>
+              </a:spcAft>
+              <a:defRPr sz="2000"/>
+            </a:pPr>
+            <a:r>
+              <a:rPr sz="1300"/>
+              <a:t>🔍 Mevcut Ürünleri İnceleme:</a:t>
+            </a:r>
+          </a:p>
+          <a:p>
+            <a:pPr lvl="1">
+              <a:lnSpc>
+                <a:spcPct val="85000"/>
+              </a:lnSpc>
+              <a:spcBef>
+                <a:spcPts val="200"/>
+              </a:spcBef>
+              <a:spcAft>
+                <a:spcPts val="200"/>
+              </a:spcAft>
+              <a:defRPr sz="1800"/>
+            </a:pPr>
+            <a:r>
+              <a:rPr sz="1300"/>
+              <a:t>    • Benzer ürünler var mı?</a:t>
+            </a:r>
+          </a:p>
+          <a:p>
+            <a:pPr lvl="1">
+              <a:lnSpc>
+                <a:spcPct val="85000"/>
+              </a:lnSpc>
+              <a:spcBef>
+                <a:spcPts val="200"/>
+              </a:spcBef>
+              <a:spcAft>
+                <a:spcPts val="200"/>
+              </a:spcAft>
+              <a:defRPr sz="1800"/>
+            </a:pPr>
+            <a:r>
+              <a:rPr sz="1300"/>
+              <a:t>    • Onların eksiği ne?</a:t>
+            </a:r>
+          </a:p>
+          <a:p>
+            <a:pPr lvl="1">
+              <a:lnSpc>
+                <a:spcPct val="85000"/>
+              </a:lnSpc>
+              <a:spcBef>
+                <a:spcPts val="200"/>
+              </a:spcBef>
+              <a:spcAft>
+                <a:spcPts val="200"/>
+              </a:spcAft>
+              <a:defRPr sz="1800"/>
+            </a:pPr>
+            <a:r>
+              <a:rPr sz="1300"/>
+              <a:t>    • Nasıl daha iyi yapabiliriz?</a:t>
+            </a:r>
+          </a:p>
+          <a:p>
+            <a:pPr>
+              <a:lnSpc>
+                <a:spcPct val="90000"/>
+              </a:lnSpc>
+              <a:spcAft>
+                <a:spcPts val="300"/>
+              </a:spcAft>
+              <a:defRPr sz="2000"/>
+            </a:pPr>
+          </a:p>
+          <a:p>
+            <a:pPr>
+              <a:lnSpc>
+                <a:spcPct val="85000"/>
+              </a:lnSpc>
+              <a:spcBef>
+                <a:spcPts val="200"/>
+              </a:spcBef>
+              <a:spcAft>
+                <a:spcPts val="200"/>
+              </a:spcAft>
               <a:defRPr sz="2000" b="1"/>
             </a:pPr>
             <a:r>
               <a:rPr sz="1300"/>
-              <a:t>✅ Fikir Geliştirme Yöntemleri:</a:t>
-            </a:r>
-          </a:p>
-          <a:p>
-            <a:pPr>
-              <a:lnSpc>
-                <a:spcPct val="90000"/>
-              </a:lnSpc>
-              <a:spcAft>
-                <a:spcPts val="300"/>
-              </a:spcAft>
-              <a:defRPr sz="2000"/>
-            </a:pPr>
-          </a:p>
-          <a:p>
-            <a:pPr>
-              <a:lnSpc>
-                <a:spcPct val="90000"/>
-              </a:lnSpc>
-              <a:spcAft>
-                <a:spcPts val="300"/>
-              </a:spcAft>
-              <a:defRPr sz="2000"/>
-            </a:pPr>
-            <a:r>
-              <a:rPr sz="1300"/>
-              <a:t>🧠 Beyin Fırtınası (Brainstorming):</a:t>
-            </a:r>
-          </a:p>
-          <a:p>
-            <a:pPr lvl="1">
-              <a:lnSpc>
-                <a:spcPct val="90000"/>
-              </a:lnSpc>
-              <a:spcAft>
-                <a:spcPts val="300"/>
-              </a:spcAft>
-              <a:defRPr sz="1800"/>
-            </a:pPr>
-            <a:r>
-              <a:rPr sz="1300"/>
-              <a:t>    • Tüm fikirleri söyleyin</a:t>
-            </a:r>
-          </a:p>
-          <a:p>
-            <a:pPr lvl="1">
-              <a:lnSpc>
-                <a:spcPct val="90000"/>
-              </a:lnSpc>
-              <a:spcAft>
-                <a:spcPts val="300"/>
-              </a:spcAft>
-              <a:defRPr sz="1800"/>
-            </a:pPr>
-            <a:r>
-              <a:rPr sz="1300"/>
-              <a:t>    • Eleştirmeyin, not alın</a:t>
-            </a:r>
-          </a:p>
-          <a:p>
-            <a:pPr lvl="1">
-              <a:lnSpc>
-                <a:spcPct val="90000"/>
-              </a:lnSpc>
-              <a:spcAft>
-                <a:spcPts val="300"/>
-              </a:spcAft>
-              <a:defRPr sz="1800"/>
-            </a:pPr>
-            <a:r>
-              <a:rPr sz="1300"/>
-              <a:t>    • Çılgın fikirler de olabilir!</a:t>
-            </a:r>
-          </a:p>
-          <a:p>
-            <a:pPr>
-              <a:lnSpc>
-                <a:spcPct val="90000"/>
-              </a:lnSpc>
-              <a:spcAft>
-                <a:spcPts val="300"/>
-              </a:spcAft>
-              <a:defRPr sz="2000"/>
-            </a:pPr>
-          </a:p>
-          <a:p>
-            <a:pPr>
-              <a:lnSpc>
-                <a:spcPct val="90000"/>
-              </a:lnSpc>
-              <a:spcAft>
-                <a:spcPts val="300"/>
-              </a:spcAft>
-              <a:defRPr sz="2000"/>
-            </a:pPr>
-            <a:r>
-              <a:rPr sz="1300"/>
-              <a:t>🗣️ Kullanıcı Görüşleri:</a:t>
-            </a:r>
-          </a:p>
-          <a:p>
-            <a:pPr lvl="1">
-              <a:lnSpc>
-                <a:spcPct val="90000"/>
-              </a:lnSpc>
-              <a:spcAft>
-                <a:spcPts val="300"/>
-              </a:spcAft>
-              <a:defRPr sz="1800"/>
-            </a:pPr>
-            <a:r>
-              <a:rPr sz="1300"/>
-              <a:t>    • Problemi yaşayan kişilerle konuşun</a:t>
-            </a:r>
-          </a:p>
-          <a:p>
-            <a:pPr lvl="1">
-              <a:lnSpc>
-                <a:spcPct val="90000"/>
-              </a:lnSpc>
-              <a:spcAft>
-                <a:spcPts val="300"/>
-              </a:spcAft>
-              <a:defRPr sz="1800"/>
-            </a:pPr>
-            <a:r>
-              <a:rPr sz="1300"/>
-              <a:t>    • Ne isterler? Ne işe yarar?</a:t>
-            </a:r>
-          </a:p>
-          <a:p>
-            <a:pPr>
-              <a:lnSpc>
-                <a:spcPct val="90000"/>
-              </a:lnSpc>
-              <a:spcAft>
-                <a:spcPts val="300"/>
-              </a:spcAft>
-              <a:defRPr sz="2000"/>
-            </a:pPr>
-          </a:p>
-          <a:p>
-            <a:pPr>
-              <a:lnSpc>
-                <a:spcPct val="90000"/>
-              </a:lnSpc>
-              <a:spcAft>
-                <a:spcPts val="300"/>
-              </a:spcAft>
-              <a:defRPr sz="2000"/>
-            </a:pPr>
-            <a:r>
-              <a:rPr sz="1300"/>
-              <a:t>🔍 Mevcut Ürünleri İnceleme:</a:t>
-            </a:r>
-          </a:p>
-          <a:p>
-            <a:pPr lvl="1">
-              <a:lnSpc>
-                <a:spcPct val="90000"/>
-              </a:lnSpc>
-              <a:spcAft>
-                <a:spcPts val="300"/>
-              </a:spcAft>
-              <a:defRPr sz="1800"/>
-            </a:pPr>
-            <a:r>
-              <a:rPr sz="1300"/>
-              <a:t>    • Benzer ürünler var mı?</a:t>
-            </a:r>
-          </a:p>
-          <a:p>
-            <a:pPr lvl="1">
-              <a:lnSpc>
-                <a:spcPct val="90000"/>
-              </a:lnSpc>
-              <a:spcAft>
-                <a:spcPts val="300"/>
-              </a:spcAft>
-              <a:defRPr sz="1800"/>
-            </a:pPr>
-            <a:r>
-              <a:rPr sz="1300"/>
-              <a:t>    • Onların eksiği ne?</a:t>
-            </a:r>
-          </a:p>
-          <a:p>
-            <a:pPr lvl="1">
-              <a:lnSpc>
-                <a:spcPct val="90000"/>
-              </a:lnSpc>
-              <a:spcAft>
-                <a:spcPts val="300"/>
-              </a:spcAft>
-              <a:defRPr sz="1800"/>
-            </a:pPr>
-            <a:r>
-              <a:rPr sz="1300"/>
-              <a:t>    • Nasıl daha iyi yapabiliriz?</a:t>
-            </a:r>
-          </a:p>
-          <a:p>
-            <a:pPr>
-              <a:lnSpc>
-                <a:spcPct val="90000"/>
-              </a:lnSpc>
-              <a:spcAft>
-                <a:spcPts val="300"/>
-              </a:spcAft>
-              <a:defRPr sz="2000"/>
-            </a:pPr>
-          </a:p>
-          <a:p>
-            <a:pPr>
-              <a:lnSpc>
-                <a:spcPct val="90000"/>
-              </a:lnSpc>
-              <a:spcAft>
-                <a:spcPts val="300"/>
-              </a:spcAft>
-              <a:defRPr sz="2000" b="1"/>
-            </a:pPr>
-            <a:r>
-              <a:rPr sz="1300"/>
               <a:t>📌 Örnek:</a:t>
             </a:r>
           </a:p>
           <a:p>
             <a:pPr>
               <a:lnSpc>
-                <a:spcPct val="90000"/>
-              </a:lnSpc>
-              <a:spcAft>
-                <a:spcPts val="300"/>
+                <a:spcPct val="85000"/>
+              </a:lnSpc>
+              <a:spcBef>
+                <a:spcPts val="200"/>
+              </a:spcBef>
+              <a:spcAft>
+                <a:spcPts val="200"/>
               </a:spcAft>
               <a:defRPr sz="2000"/>
             </a:pPr>
@@ -13219,10 +14306,13 @@
           <a:p>
             <a:pPr>
               <a:lnSpc>
-                <a:spcPct val="90000"/>
-              </a:lnSpc>
-              <a:spcAft>
-                <a:spcPts val="300"/>
+                <a:spcPct val="85000"/>
+              </a:lnSpc>
+              <a:spcBef>
+                <a:spcPts val="200"/>
+              </a:spcBef>
+              <a:spcAft>
+                <a:spcPts val="200"/>
               </a:spcAft>
               <a:defRPr sz="2000"/>
             </a:pPr>
@@ -13234,10 +14324,13 @@
           <a:p>
             <a:pPr lvl="1">
               <a:lnSpc>
-                <a:spcPct val="90000"/>
-              </a:lnSpc>
-              <a:spcAft>
-                <a:spcPts val="300"/>
+                <a:spcPct val="85000"/>
+              </a:lnSpc>
+              <a:spcBef>
+                <a:spcPts val="200"/>
+              </a:spcBef>
+              <a:spcAft>
+                <a:spcPts val="200"/>
               </a:spcAft>
               <a:defRPr sz="1800"/>
             </a:pPr>
@@ -13249,10 +14342,13 @@
           <a:p>
             <a:pPr lvl="1">
               <a:lnSpc>
-                <a:spcPct val="90000"/>
-              </a:lnSpc>
-              <a:spcAft>
-                <a:spcPts val="300"/>
+                <a:spcPct val="85000"/>
+              </a:lnSpc>
+              <a:spcBef>
+                <a:spcPts val="200"/>
+              </a:spcBef>
+              <a:spcAft>
+                <a:spcPts val="200"/>
               </a:spcAft>
               <a:defRPr sz="1800"/>
             </a:pPr>
@@ -13264,10 +14360,13 @@
           <a:p>
             <a:pPr lvl="1">
               <a:lnSpc>
-                <a:spcPct val="90000"/>
-              </a:lnSpc>
-              <a:spcAft>
-                <a:spcPts val="300"/>
+                <a:spcPct val="85000"/>
+              </a:lnSpc>
+              <a:spcBef>
+                <a:spcPts val="200"/>
+              </a:spcBef>
+              <a:spcAft>
+                <a:spcPts val="200"/>
               </a:spcAft>
               <a:defRPr sz="1800"/>
             </a:pPr>
@@ -13308,10 +14407,19 @@
         </p:nvSpPr>
         <p:spPr/>
         <p:txBody>
-          <a:bodyPr wrap="square"/>
+          <a:bodyPr wrap="square" tIns="25400" bIns="25400" lIns="63500" rIns="63500"/>
           <a:lstStyle/>
           <a:p>
             <a:pPr>
+              <a:lnSpc>
+                <a:spcPct val="85000"/>
+              </a:lnSpc>
+              <a:spcBef>
+                <a:spcPts val="200"/>
+              </a:spcBef>
+              <a:spcAft>
+                <a:spcPts val="200"/>
+              </a:spcAft>
               <a:defRPr sz="4000" b="1">
                 <a:solidFill>
                   <a:srgbClr val="667EEA"/>
@@ -13319,6 +14427,7 @@
               </a:defRPr>
             </a:pPr>
             <a:r>
+              <a:rPr/>
               <a:t>🎨 Adım 3: Tasarım ve Kullanıcı Deneyimi</a:t>
             </a:r>
           </a:p>
@@ -13358,7 +14467,7 @@
           <a:noFill/>
         </p:spPr>
         <p:txBody>
-          <a:bodyPr wrap="square">
+          <a:bodyPr wrap="square" tIns="25400" bIns="25400" lIns="63500" rIns="63500">
             <a:spAutoFit/>
           </a:bodyPr>
           <a:lstStyle/>
@@ -13375,6 +14484,24 @@
           <a:p>
             <a:pPr>
               <a:lnSpc>
+                <a:spcPct val="85000"/>
+              </a:lnSpc>
+              <a:spcBef>
+                <a:spcPts val="200"/>
+              </a:spcBef>
+              <a:spcAft>
+                <a:spcPts val="200"/>
+              </a:spcAft>
+              <a:defRPr sz="2000"/>
+            </a:pPr>
+            <a:r>
+              <a:rPr sz="1300"/>
+              <a:t>Ürünümüz nasıl görünmeli? Nasıl kullanılmalı?</a:t>
+            </a:r>
+          </a:p>
+          <a:p>
+            <a:pPr>
+              <a:lnSpc>
                 <a:spcPct val="90000"/>
               </a:lnSpc>
               <a:spcAft>
@@ -13382,9 +14509,23 @@
               </a:spcAft>
               <a:defRPr sz="2000"/>
             </a:pPr>
-            <a:r>
-              <a:rPr sz="1300"/>
-              <a:t>Ürünümüz nasıl görünmeli? Nasıl kullanılmalı?</a:t>
+          </a:p>
+          <a:p>
+            <a:pPr>
+              <a:lnSpc>
+                <a:spcPct val="85000"/>
+              </a:lnSpc>
+              <a:spcBef>
+                <a:spcPts val="200"/>
+              </a:spcBef>
+              <a:spcAft>
+                <a:spcPts val="200"/>
+              </a:spcAft>
+              <a:defRPr sz="2000" b="1"/>
+            </a:pPr>
+            <a:r>
+              <a:rPr sz="1300"/>
+              <a:t>✅ İyi Tasarımın Özellikleri:</a:t>
             </a:r>
           </a:p>
           <a:p>
@@ -13401,16 +14542,304 @@
           <a:p>
             <a:pPr>
               <a:lnSpc>
+                <a:spcPct val="85000"/>
+              </a:lnSpc>
+              <a:spcBef>
+                <a:spcPts val="200"/>
+              </a:spcBef>
+              <a:spcAft>
+                <a:spcPts val="200"/>
+              </a:spcAft>
+              <a:defRPr sz="2000"/>
+            </a:pPr>
+            <a:r>
+              <a:rPr sz="1300"/>
+              <a:t>👁️ Görsel Tasarım:</a:t>
+            </a:r>
+          </a:p>
+          <a:p>
+            <a:pPr lvl="1">
+              <a:lnSpc>
+                <a:spcPct val="85000"/>
+              </a:lnSpc>
+              <a:spcBef>
+                <a:spcPts val="200"/>
+              </a:spcBef>
+              <a:spcAft>
+                <a:spcPts val="200"/>
+              </a:spcAft>
+              <a:defRPr sz="1800"/>
+            </a:pPr>
+            <a:r>
+              <a:rPr sz="1300"/>
+              <a:t>    • Renkler uyumlu olmalı</a:t>
+            </a:r>
+          </a:p>
+          <a:p>
+            <a:pPr lvl="1">
+              <a:lnSpc>
+                <a:spcPct val="85000"/>
+              </a:lnSpc>
+              <a:spcBef>
+                <a:spcPts val="200"/>
+              </a:spcBef>
+              <a:spcAft>
+                <a:spcPts val="200"/>
+              </a:spcAft>
+              <a:defRPr sz="1800"/>
+            </a:pPr>
+            <a:r>
+              <a:rPr sz="1300"/>
+              <a:t>    • Yazılar okunabilir olmalı</a:t>
+            </a:r>
+          </a:p>
+          <a:p>
+            <a:pPr lvl="1">
+              <a:lnSpc>
+                <a:spcPct val="85000"/>
+              </a:lnSpc>
+              <a:spcBef>
+                <a:spcPts val="200"/>
+              </a:spcBef>
+              <a:spcAft>
+                <a:spcPts val="200"/>
+              </a:spcAft>
+              <a:defRPr sz="1800"/>
+            </a:pPr>
+            <a:r>
+              <a:rPr sz="1300"/>
+              <a:t>    • Görseller çekici olmalı</a:t>
+            </a:r>
+          </a:p>
+          <a:p>
+            <a:pPr>
+              <a:lnSpc>
                 <a:spcPct val="90000"/>
               </a:lnSpc>
               <a:spcAft>
                 <a:spcPts val="300"/>
               </a:spcAft>
+              <a:defRPr sz="2000"/>
+            </a:pPr>
+          </a:p>
+          <a:p>
+            <a:pPr>
+              <a:lnSpc>
+                <a:spcPct val="85000"/>
+              </a:lnSpc>
+              <a:spcBef>
+                <a:spcPts val="200"/>
+              </a:spcBef>
+              <a:spcAft>
+                <a:spcPts val="200"/>
+              </a:spcAft>
+              <a:defRPr sz="2000"/>
+            </a:pPr>
+            <a:r>
+              <a:rPr sz="1300"/>
+              <a:t>🖱️ Kullanılabilirlik:</a:t>
+            </a:r>
+          </a:p>
+          <a:p>
+            <a:pPr lvl="1">
+              <a:lnSpc>
+                <a:spcPct val="85000"/>
+              </a:lnSpc>
+              <a:spcBef>
+                <a:spcPts val="200"/>
+              </a:spcBef>
+              <a:spcAft>
+                <a:spcPts val="200"/>
+              </a:spcAft>
+              <a:defRPr sz="1800"/>
+            </a:pPr>
+            <a:r>
+              <a:rPr sz="1300"/>
+              <a:t>    • Kolay anlaşılır olmalı</a:t>
+            </a:r>
+          </a:p>
+          <a:p>
+            <a:pPr lvl="1">
+              <a:lnSpc>
+                <a:spcPct val="85000"/>
+              </a:lnSpc>
+              <a:spcBef>
+                <a:spcPts val="200"/>
+              </a:spcBef>
+              <a:spcAft>
+                <a:spcPts val="200"/>
+              </a:spcAft>
+              <a:defRPr sz="1800"/>
+            </a:pPr>
+            <a:r>
+              <a:rPr sz="1300"/>
+              <a:t>    • Hızlı öğrenilmeli</a:t>
+            </a:r>
+          </a:p>
+          <a:p>
+            <a:pPr lvl="1">
+              <a:lnSpc>
+                <a:spcPct val="85000"/>
+              </a:lnSpc>
+              <a:spcBef>
+                <a:spcPts val="200"/>
+              </a:spcBef>
+              <a:spcAft>
+                <a:spcPts val="200"/>
+              </a:spcAft>
+              <a:defRPr sz="1800"/>
+            </a:pPr>
+            <a:r>
+              <a:rPr sz="1300"/>
+              <a:t>    • Az tıklama ile işlem yapılmalı</a:t>
+            </a:r>
+          </a:p>
+          <a:p>
+            <a:pPr>
+              <a:lnSpc>
+                <a:spcPct val="90000"/>
+              </a:lnSpc>
+              <a:spcAft>
+                <a:spcPts val="300"/>
+              </a:spcAft>
+              <a:defRPr sz="2000"/>
+            </a:pPr>
+          </a:p>
+          <a:p>
+            <a:pPr>
+              <a:lnSpc>
+                <a:spcPct val="85000"/>
+              </a:lnSpc>
+              <a:spcBef>
+                <a:spcPts val="200"/>
+              </a:spcBef>
+              <a:spcAft>
+                <a:spcPts val="200"/>
+              </a:spcAft>
+              <a:defRPr sz="2000"/>
+            </a:pPr>
+            <a:r>
+              <a:rPr sz="1300"/>
+              <a:t>♿ Erişilebilirlik:</a:t>
+            </a:r>
+          </a:p>
+          <a:p>
+            <a:pPr lvl="1">
+              <a:lnSpc>
+                <a:spcPct val="85000"/>
+              </a:lnSpc>
+              <a:spcBef>
+                <a:spcPts val="200"/>
+              </a:spcBef>
+              <a:spcAft>
+                <a:spcPts val="200"/>
+              </a:spcAft>
+              <a:defRPr sz="1800"/>
+            </a:pPr>
+            <a:r>
+              <a:rPr sz="1300"/>
+              <a:t>    • Herkes kullanabilmeli (engelliler dahil)</a:t>
+            </a:r>
+          </a:p>
+          <a:p>
+            <a:pPr lvl="1">
+              <a:lnSpc>
+                <a:spcPct val="85000"/>
+              </a:lnSpc>
+              <a:spcBef>
+                <a:spcPts val="200"/>
+              </a:spcBef>
+              <a:spcAft>
+                <a:spcPts val="200"/>
+              </a:spcAft>
+              <a:defRPr sz="1800"/>
+            </a:pPr>
+            <a:r>
+              <a:rPr sz="1300"/>
+              <a:t>    • Farklı cihazlarda çalışmalı</a:t>
+            </a:r>
+          </a:p>
+          <a:p>
+            <a:pPr>
+              <a:lnSpc>
+                <a:spcPct val="90000"/>
+              </a:lnSpc>
+              <a:spcAft>
+                <a:spcPts val="300"/>
+              </a:spcAft>
+              <a:defRPr sz="2000"/>
+            </a:pPr>
+          </a:p>
+          <a:p>
+            <a:pPr>
+              <a:lnSpc>
+                <a:spcPct val="85000"/>
+              </a:lnSpc>
+              <a:spcBef>
+                <a:spcPts val="200"/>
+              </a:spcBef>
+              <a:spcAft>
+                <a:spcPts val="200"/>
+              </a:spcAft>
               <a:defRPr sz="2000" b="1"/>
             </a:pPr>
             <a:r>
               <a:rPr sz="1300"/>
-              <a:t>✅ İyi Tasarımın Özellikleri:</a:t>
+              <a:t>📌 Tasarım Araçları:</a:t>
+            </a:r>
+          </a:p>
+          <a:p>
+            <a:pPr lvl="1">
+              <a:lnSpc>
+                <a:spcPct val="85000"/>
+              </a:lnSpc>
+              <a:spcBef>
+                <a:spcPts val="200"/>
+              </a:spcBef>
+              <a:spcAft>
+                <a:spcPts val="200"/>
+              </a:spcAft>
+              <a:defRPr sz="1800"/>
+            </a:pPr>
+            <a:r>
+              <a:rPr sz="1300"/>
+              <a:t>    • Kağıt-kalem (eskiz)</a:t>
+            </a:r>
+          </a:p>
+          <a:p>
+            <a:pPr lvl="1">
+              <a:lnSpc>
+                <a:spcPct val="85000"/>
+              </a:lnSpc>
+              <a:spcBef>
+                <a:spcPts val="200"/>
+              </a:spcBef>
+              <a:spcAft>
+                <a:spcPts val="200"/>
+              </a:spcAft>
+              <a:defRPr sz="1800"/>
+            </a:pPr>
+            <a:r>
+              <a:rPr sz="1300"/>
+              <a:t>    • Canva, Figma (dijital tasarım)</a:t>
+            </a:r>
+          </a:p>
+          <a:p>
+            <a:pPr lvl="1">
+              <a:lnSpc>
+                <a:spcPct val="85000"/>
+              </a:lnSpc>
+              <a:spcBef>
+                <a:spcPts val="200"/>
+              </a:spcBef>
+              <a:spcAft>
+                <a:spcPts val="200"/>
+              </a:spcAft>
+              <a:defRPr sz="1800"/>
+            </a:pPr>
+            <a:r>
+              <a:rPr sz="1300"/>
+              <a:t>    • PowerPoint (prototip)</a:t>
             </a:r>
           </a:p>
           <a:p>
@@ -13427,279 +14856,13 @@
           <a:p>
             <a:pPr>
               <a:lnSpc>
-                <a:spcPct val="90000"/>
-              </a:lnSpc>
-              <a:spcAft>
-                <a:spcPts val="300"/>
-              </a:spcAft>
-              <a:defRPr sz="2000"/>
-            </a:pPr>
-            <a:r>
-              <a:rPr sz="1300"/>
-              <a:t>👁️ Görsel Tasarım:</a:t>
-            </a:r>
-          </a:p>
-          <a:p>
-            <a:pPr lvl="1">
-              <a:lnSpc>
-                <a:spcPct val="90000"/>
-              </a:lnSpc>
-              <a:spcAft>
-                <a:spcPts val="300"/>
-              </a:spcAft>
-              <a:defRPr sz="1800"/>
-            </a:pPr>
-            <a:r>
-              <a:rPr sz="1300"/>
-              <a:t>    • Renkler uyumlu olmalı</a:t>
-            </a:r>
-          </a:p>
-          <a:p>
-            <a:pPr lvl="1">
-              <a:lnSpc>
-                <a:spcPct val="90000"/>
-              </a:lnSpc>
-              <a:spcAft>
-                <a:spcPts val="300"/>
-              </a:spcAft>
-              <a:defRPr sz="1800"/>
-            </a:pPr>
-            <a:r>
-              <a:rPr sz="1300"/>
-              <a:t>    • Yazılar okunabilir olmalı</a:t>
-            </a:r>
-          </a:p>
-          <a:p>
-            <a:pPr lvl="1">
-              <a:lnSpc>
-                <a:spcPct val="90000"/>
-              </a:lnSpc>
-              <a:spcAft>
-                <a:spcPts val="300"/>
-              </a:spcAft>
-              <a:defRPr sz="1800"/>
-            </a:pPr>
-            <a:r>
-              <a:rPr sz="1300"/>
-              <a:t>    • Görseller çekici olmalı</a:t>
-            </a:r>
-          </a:p>
-          <a:p>
-            <a:pPr>
-              <a:lnSpc>
-                <a:spcPct val="90000"/>
-              </a:lnSpc>
-              <a:spcAft>
-                <a:spcPts val="300"/>
-              </a:spcAft>
-              <a:defRPr sz="2000"/>
-            </a:pPr>
-          </a:p>
-          <a:p>
-            <a:pPr>
-              <a:lnSpc>
-                <a:spcPct val="90000"/>
-              </a:lnSpc>
-              <a:spcAft>
-                <a:spcPts val="300"/>
-              </a:spcAft>
-              <a:defRPr sz="2000"/>
-            </a:pPr>
-            <a:r>
-              <a:rPr sz="1300"/>
-              <a:t>🖱️ Kullanılabilirlik:</a:t>
-            </a:r>
-          </a:p>
-          <a:p>
-            <a:pPr lvl="1">
-              <a:lnSpc>
-                <a:spcPct val="90000"/>
-              </a:lnSpc>
-              <a:spcAft>
-                <a:spcPts val="300"/>
-              </a:spcAft>
-              <a:defRPr sz="1800"/>
-            </a:pPr>
-            <a:r>
-              <a:rPr sz="1300"/>
-              <a:t>    • Kolay anlaşılır olmalı</a:t>
-            </a:r>
-          </a:p>
-          <a:p>
-            <a:pPr lvl="1">
-              <a:lnSpc>
-                <a:spcPct val="90000"/>
-              </a:lnSpc>
-              <a:spcAft>
-                <a:spcPts val="300"/>
-              </a:spcAft>
-              <a:defRPr sz="1800"/>
-            </a:pPr>
-            <a:r>
-              <a:rPr sz="1300"/>
-              <a:t>    • Hızlı öğrenilmeli</a:t>
-            </a:r>
-          </a:p>
-          <a:p>
-            <a:pPr lvl="1">
-              <a:lnSpc>
-                <a:spcPct val="90000"/>
-              </a:lnSpc>
-              <a:spcAft>
-                <a:spcPts val="300"/>
-              </a:spcAft>
-              <a:defRPr sz="1800"/>
-            </a:pPr>
-            <a:r>
-              <a:rPr sz="1300"/>
-              <a:t>    • Az tıklama ile işlem yapılmalı</a:t>
-            </a:r>
-          </a:p>
-          <a:p>
-            <a:pPr>
-              <a:lnSpc>
-                <a:spcPct val="90000"/>
-              </a:lnSpc>
-              <a:spcAft>
-                <a:spcPts val="300"/>
-              </a:spcAft>
-              <a:defRPr sz="2000"/>
-            </a:pPr>
-          </a:p>
-          <a:p>
-            <a:pPr>
-              <a:lnSpc>
-                <a:spcPct val="90000"/>
-              </a:lnSpc>
-              <a:spcAft>
-                <a:spcPts val="300"/>
-              </a:spcAft>
-              <a:defRPr sz="2000"/>
-            </a:pPr>
-            <a:r>
-              <a:rPr sz="1300"/>
-              <a:t>♿ Erişilebilirlik:</a:t>
-            </a:r>
-          </a:p>
-          <a:p>
-            <a:pPr lvl="1">
-              <a:lnSpc>
-                <a:spcPct val="90000"/>
-              </a:lnSpc>
-              <a:spcAft>
-                <a:spcPts val="300"/>
-              </a:spcAft>
-              <a:defRPr sz="1800"/>
-            </a:pPr>
-            <a:r>
-              <a:rPr sz="1300"/>
-              <a:t>    • Herkes kullanabilmeli (engelliler dahil)</a:t>
-            </a:r>
-          </a:p>
-          <a:p>
-            <a:pPr lvl="1">
-              <a:lnSpc>
-                <a:spcPct val="90000"/>
-              </a:lnSpc>
-              <a:spcAft>
-                <a:spcPts val="300"/>
-              </a:spcAft>
-              <a:defRPr sz="1800"/>
-            </a:pPr>
-            <a:r>
-              <a:rPr sz="1300"/>
-              <a:t>    • Farklı cihazlarda çalışmalı</a:t>
-            </a:r>
-          </a:p>
-          <a:p>
-            <a:pPr>
-              <a:lnSpc>
-                <a:spcPct val="90000"/>
-              </a:lnSpc>
-              <a:spcAft>
-                <a:spcPts val="300"/>
-              </a:spcAft>
-              <a:defRPr sz="2000"/>
-            </a:pPr>
-          </a:p>
-          <a:p>
-            <a:pPr>
-              <a:lnSpc>
-                <a:spcPct val="90000"/>
-              </a:lnSpc>
-              <a:spcAft>
-                <a:spcPts val="300"/>
-              </a:spcAft>
-              <a:defRPr sz="2000" b="1"/>
-            </a:pPr>
-            <a:r>
-              <a:rPr sz="1300"/>
-              <a:t>📌 Tasarım Araçları:</a:t>
-            </a:r>
-          </a:p>
-          <a:p>
-            <a:pPr lvl="1">
-              <a:lnSpc>
-                <a:spcPct val="90000"/>
-              </a:lnSpc>
-              <a:spcAft>
-                <a:spcPts val="300"/>
-              </a:spcAft>
-              <a:defRPr sz="1800"/>
-            </a:pPr>
-            <a:r>
-              <a:rPr sz="1300"/>
-              <a:t>    • Kağıt-kalem (eskiz)</a:t>
-            </a:r>
-          </a:p>
-          <a:p>
-            <a:pPr lvl="1">
-              <a:lnSpc>
-                <a:spcPct val="90000"/>
-              </a:lnSpc>
-              <a:spcAft>
-                <a:spcPts val="300"/>
-              </a:spcAft>
-              <a:defRPr sz="1800"/>
-            </a:pPr>
-            <a:r>
-              <a:rPr sz="1300"/>
-              <a:t>    • Canva, Figma (dijital tasarım)</a:t>
-            </a:r>
-          </a:p>
-          <a:p>
-            <a:pPr lvl="1">
-              <a:lnSpc>
-                <a:spcPct val="90000"/>
-              </a:lnSpc>
-              <a:spcAft>
-                <a:spcPts val="300"/>
-              </a:spcAft>
-              <a:defRPr sz="1800"/>
-            </a:pPr>
-            <a:r>
-              <a:rPr sz="1300"/>
-              <a:t>    • PowerPoint (prototip)</a:t>
-            </a:r>
-          </a:p>
-          <a:p>
-            <a:pPr>
-              <a:lnSpc>
-                <a:spcPct val="90000"/>
-              </a:lnSpc>
-              <a:spcAft>
-                <a:spcPts val="300"/>
-              </a:spcAft>
-              <a:defRPr sz="2000"/>
-            </a:pPr>
-          </a:p>
-          <a:p>
-            <a:pPr>
-              <a:lnSpc>
-                <a:spcPct val="90000"/>
-              </a:lnSpc>
-              <a:spcAft>
-                <a:spcPts val="300"/>
+                <a:spcPct val="85000"/>
+              </a:lnSpc>
+              <a:spcBef>
+                <a:spcPts val="200"/>
+              </a:spcBef>
+              <a:spcAft>
+                <a:spcPts val="200"/>
               </a:spcAft>
               <a:defRPr sz="2000" b="1"/>
             </a:pPr>
